--- a/Simon_Cheng_OKR_2026.pptx
+++ b/Simon_Cheng_OKR_2026.pptx
@@ -3142,7 +3142,7 @@
         <p:spPr>
           <a:xfrm>
             <a:off x="0" y="0"/>
-            <a:ext cx="12188952" cy="256032"/>
+            <a:ext cx="12188952" cy="292608"/>
           </a:xfrm>
           <a:prstGeom prst="rect">
             <a:avLst/>
@@ -3184,7 +3184,7 @@
         </p:nvSpPr>
         <p:spPr>
           <a:xfrm>
-            <a:off x="0" y="256032"/>
+            <a:off x="0" y="292608"/>
             <a:ext cx="12188952" cy="25400"/>
           </a:xfrm>
           <a:prstGeom prst="rect">
@@ -3227,23 +3227,23 @@
         </p:nvSpPr>
         <p:spPr>
           <a:xfrm>
-            <a:off x="256032" y="45720"/>
-            <a:ext cx="7315200" cy="256032"/>
-          </a:xfrm>
-          <a:prstGeom prst="rect">
-            <a:avLst/>
-          </a:prstGeom>
-          <a:noFill/>
-        </p:spPr>
-        <p:txBody>
-          <a:bodyPr wrap="square">
-            <a:spAutoFit/>
-          </a:bodyPr>
-          <a:lstStyle/>
-          <a:p>
-            <a:pPr algn="l"/>
-            <a:r>
-              <a:rPr sz="800" b="0" i="0">
+            <a:off x="292608" y="64008"/>
+            <a:ext cx="7315200" cy="292608"/>
+          </a:xfrm>
+          <a:prstGeom prst="rect">
+            <a:avLst/>
+          </a:prstGeom>
+          <a:noFill/>
+        </p:spPr>
+        <p:txBody>
+          <a:bodyPr wrap="square">
+            <a:spAutoFit/>
+          </a:bodyPr>
+          <a:lstStyle/>
+          <a:p>
+            <a:pPr algn="l"/>
+            <a:r>
+              <a:rPr sz="900" b="0" i="0">
                 <a:solidFill>
                   <a:srgbClr val="FFFFFF"/>
                 </a:solidFill>
@@ -3262,8 +3262,8 @@
         </p:nvSpPr>
         <p:spPr>
           <a:xfrm>
-            <a:off x="11548872" y="45720"/>
-            <a:ext cx="457200" cy="256032"/>
+            <a:off x="11548872" y="64008"/>
+            <a:ext cx="457200" cy="292608"/>
           </a:xfrm>
           <a:prstGeom prst="rect">
             <a:avLst/>
@@ -3297,8 +3297,8 @@
         </p:nvSpPr>
         <p:spPr>
           <a:xfrm>
-            <a:off x="0" y="294132"/>
-            <a:ext cx="12188952" cy="201168"/>
+            <a:off x="0" y="330708"/>
+            <a:ext cx="12188952" cy="237744"/>
           </a:xfrm>
           <a:prstGeom prst="rect">
             <a:avLst/>
@@ -3340,23 +3340,23 @@
         </p:nvSpPr>
         <p:spPr>
           <a:xfrm>
-            <a:off x="256032" y="321564"/>
-            <a:ext cx="4818888" cy="201168"/>
-          </a:xfrm>
-          <a:prstGeom prst="rect">
-            <a:avLst/>
-          </a:prstGeom>
-          <a:noFill/>
-        </p:spPr>
-        <p:txBody>
-          <a:bodyPr wrap="square">
-            <a:spAutoFit/>
-          </a:bodyPr>
-          <a:lstStyle/>
-          <a:p>
-            <a:pPr algn="l"/>
-            <a:r>
-              <a:rPr sz="800" b="1" i="0">
+            <a:off x="292608" y="367284"/>
+            <a:ext cx="4608576" cy="201168"/>
+          </a:xfrm>
+          <a:prstGeom prst="rect">
+            <a:avLst/>
+          </a:prstGeom>
+          <a:noFill/>
+        </p:spPr>
+        <p:txBody>
+          <a:bodyPr wrap="square">
+            <a:spAutoFit/>
+          </a:bodyPr>
+          <a:lstStyle/>
+          <a:p>
+            <a:pPr algn="l"/>
+            <a:r>
+              <a:rPr sz="900" b="1" i="0">
                 <a:solidFill>
                   <a:srgbClr val="FFFFFF"/>
                 </a:solidFill>
@@ -3375,8 +3375,8 @@
         </p:nvSpPr>
         <p:spPr>
           <a:xfrm>
-            <a:off x="0" y="495300"/>
-            <a:ext cx="12188952" cy="640080"/>
+            <a:off x="0" y="568452"/>
+            <a:ext cx="12188952" cy="627718"/>
           </a:xfrm>
           <a:prstGeom prst="rect">
             <a:avLst/>
@@ -3418,8 +3418,8 @@
         </p:nvSpPr>
         <p:spPr>
           <a:xfrm>
-            <a:off x="256032" y="531876"/>
-            <a:ext cx="4773168" cy="146304"/>
+            <a:off x="292608" y="623316"/>
+            <a:ext cx="4562856" cy="164592"/>
           </a:xfrm>
           <a:prstGeom prst="rect">
             <a:avLst/>
@@ -3453,8 +3453,8 @@
         </p:nvSpPr>
         <p:spPr>
           <a:xfrm>
-            <a:off x="256032" y="696468"/>
-            <a:ext cx="4773168" cy="420624"/>
+            <a:off x="292608" y="824484"/>
+            <a:ext cx="4562856" cy="316822"/>
           </a:xfrm>
           <a:prstGeom prst="rect">
             <a:avLst/>
@@ -3488,8 +3488,8 @@
         </p:nvSpPr>
         <p:spPr>
           <a:xfrm>
-            <a:off x="5120640" y="541020"/>
-            <a:ext cx="2194560" cy="548640"/>
+            <a:off x="4956048" y="623316"/>
+            <a:ext cx="2221992" cy="517990"/>
           </a:xfrm>
           <a:prstGeom prst="rect">
             <a:avLst/>
@@ -3531,8 +3531,8 @@
         </p:nvSpPr>
         <p:spPr>
           <a:xfrm>
-            <a:off x="5184648" y="568452"/>
-            <a:ext cx="2194560" cy="128016"/>
+            <a:off x="5029200" y="659892"/>
+            <a:ext cx="2221992" cy="137160"/>
           </a:xfrm>
           <a:prstGeom prst="rect">
             <a:avLst/>
@@ -3566,8 +3566,8 @@
         </p:nvSpPr>
         <p:spPr>
           <a:xfrm>
-            <a:off x="5184648" y="705612"/>
-            <a:ext cx="2121408" cy="365760"/>
+            <a:off x="5029200" y="824484"/>
+            <a:ext cx="2148840" cy="289390"/>
           </a:xfrm>
           <a:prstGeom prst="rect">
             <a:avLst/>
@@ -3601,8 +3601,8 @@
         </p:nvSpPr>
         <p:spPr>
           <a:xfrm>
-            <a:off x="7406640" y="541020"/>
-            <a:ext cx="2194560" cy="548640"/>
+            <a:off x="7287768" y="623316"/>
+            <a:ext cx="2221992" cy="517990"/>
           </a:xfrm>
           <a:prstGeom prst="rect">
             <a:avLst/>
@@ -3644,8 +3644,8 @@
         </p:nvSpPr>
         <p:spPr>
           <a:xfrm>
-            <a:off x="7470648" y="568452"/>
-            <a:ext cx="2194560" cy="128016"/>
+            <a:off x="7360920" y="659892"/>
+            <a:ext cx="2221992" cy="137160"/>
           </a:xfrm>
           <a:prstGeom prst="rect">
             <a:avLst/>
@@ -3679,8 +3679,8 @@
         </p:nvSpPr>
         <p:spPr>
           <a:xfrm>
-            <a:off x="7470648" y="705612"/>
-            <a:ext cx="2121408" cy="365760"/>
+            <a:off x="7360920" y="824484"/>
+            <a:ext cx="2148840" cy="289390"/>
           </a:xfrm>
           <a:prstGeom prst="rect">
             <a:avLst/>
@@ -3714,8 +3714,8 @@
         </p:nvSpPr>
         <p:spPr>
           <a:xfrm>
-            <a:off x="9692640" y="541020"/>
-            <a:ext cx="2194560" cy="548640"/>
+            <a:off x="9619488" y="623316"/>
+            <a:ext cx="2221992" cy="517990"/>
           </a:xfrm>
           <a:prstGeom prst="rect">
             <a:avLst/>
@@ -3757,8 +3757,8 @@
         </p:nvSpPr>
         <p:spPr>
           <a:xfrm>
-            <a:off x="9756648" y="568452"/>
-            <a:ext cx="2194560" cy="128016"/>
+            <a:off x="9692640" y="659892"/>
+            <a:ext cx="2221992" cy="137160"/>
           </a:xfrm>
           <a:prstGeom prst="rect">
             <a:avLst/>
@@ -3792,8 +3792,8 @@
         </p:nvSpPr>
         <p:spPr>
           <a:xfrm>
-            <a:off x="9756648" y="705612"/>
-            <a:ext cx="2121408" cy="365760"/>
+            <a:off x="9692640" y="824484"/>
+            <a:ext cx="2148840" cy="289390"/>
           </a:xfrm>
           <a:prstGeom prst="rect">
             <a:avLst/>
@@ -3827,7 +3827,7 @@
         </p:nvSpPr>
         <p:spPr>
           <a:xfrm>
-            <a:off x="0" y="1129030"/>
+            <a:off x="0" y="1189820"/>
             <a:ext cx="12188952" cy="6350"/>
           </a:xfrm>
           <a:prstGeom prst="rect">
@@ -3870,8 +3870,8 @@
         </p:nvSpPr>
         <p:spPr>
           <a:xfrm>
-            <a:off x="0" y="1135380"/>
-            <a:ext cx="12188952" cy="640080"/>
+            <a:off x="0" y="1196170"/>
+            <a:ext cx="12188952" cy="627718"/>
           </a:xfrm>
           <a:prstGeom prst="rect">
             <a:avLst/>
@@ -3913,8 +3913,8 @@
         </p:nvSpPr>
         <p:spPr>
           <a:xfrm>
-            <a:off x="256032" y="1171956"/>
-            <a:ext cx="4773168" cy="146304"/>
+            <a:off x="292608" y="1251034"/>
+            <a:ext cx="4562856" cy="164592"/>
           </a:xfrm>
           <a:prstGeom prst="rect">
             <a:avLst/>
@@ -3948,8 +3948,8 @@
         </p:nvSpPr>
         <p:spPr>
           <a:xfrm>
-            <a:off x="256032" y="1336548"/>
-            <a:ext cx="4773168" cy="420624"/>
+            <a:off x="292608" y="1452202"/>
+            <a:ext cx="4562856" cy="316822"/>
           </a:xfrm>
           <a:prstGeom prst="rect">
             <a:avLst/>
@@ -3983,8 +3983,8 @@
         </p:nvSpPr>
         <p:spPr>
           <a:xfrm>
-            <a:off x="5120640" y="1181100"/>
-            <a:ext cx="2194560" cy="548640"/>
+            <a:off x="4956048" y="1251034"/>
+            <a:ext cx="2221992" cy="517990"/>
           </a:xfrm>
           <a:prstGeom prst="rect">
             <a:avLst/>
@@ -4026,8 +4026,8 @@
         </p:nvSpPr>
         <p:spPr>
           <a:xfrm>
-            <a:off x="5184648" y="1208532"/>
-            <a:ext cx="2194560" cy="128016"/>
+            <a:off x="5029200" y="1287610"/>
+            <a:ext cx="2221992" cy="137160"/>
           </a:xfrm>
           <a:prstGeom prst="rect">
             <a:avLst/>
@@ -4061,8 +4061,8 @@
         </p:nvSpPr>
         <p:spPr>
           <a:xfrm>
-            <a:off x="5184648" y="1345692"/>
-            <a:ext cx="2121408" cy="365760"/>
+            <a:off x="5029200" y="1452202"/>
+            <a:ext cx="2148840" cy="289390"/>
           </a:xfrm>
           <a:prstGeom prst="rect">
             <a:avLst/>
@@ -4096,8 +4096,8 @@
         </p:nvSpPr>
         <p:spPr>
           <a:xfrm>
-            <a:off x="7406640" y="1181100"/>
-            <a:ext cx="2194560" cy="548640"/>
+            <a:off x="7287768" y="1251034"/>
+            <a:ext cx="2221992" cy="517990"/>
           </a:xfrm>
           <a:prstGeom prst="rect">
             <a:avLst/>
@@ -4139,8 +4139,8 @@
         </p:nvSpPr>
         <p:spPr>
           <a:xfrm>
-            <a:off x="7470648" y="1208532"/>
-            <a:ext cx="2194560" cy="128016"/>
+            <a:off x="7360920" y="1287610"/>
+            <a:ext cx="2221992" cy="137160"/>
           </a:xfrm>
           <a:prstGeom prst="rect">
             <a:avLst/>
@@ -4174,8 +4174,8 @@
         </p:nvSpPr>
         <p:spPr>
           <a:xfrm>
-            <a:off x="7470648" y="1345692"/>
-            <a:ext cx="2121408" cy="365760"/>
+            <a:off x="7360920" y="1452202"/>
+            <a:ext cx="2148840" cy="289390"/>
           </a:xfrm>
           <a:prstGeom prst="rect">
             <a:avLst/>
@@ -4209,8 +4209,8 @@
         </p:nvSpPr>
         <p:spPr>
           <a:xfrm>
-            <a:off x="9692640" y="1181100"/>
-            <a:ext cx="2194560" cy="548640"/>
+            <a:off x="9619488" y="1251034"/>
+            <a:ext cx="2221992" cy="517990"/>
           </a:xfrm>
           <a:prstGeom prst="rect">
             <a:avLst/>
@@ -4252,8 +4252,8 @@
         </p:nvSpPr>
         <p:spPr>
           <a:xfrm>
-            <a:off x="9756648" y="1208532"/>
-            <a:ext cx="2194560" cy="128016"/>
+            <a:off x="9692640" y="1287610"/>
+            <a:ext cx="2221992" cy="137160"/>
           </a:xfrm>
           <a:prstGeom prst="rect">
             <a:avLst/>
@@ -4287,8 +4287,8 @@
         </p:nvSpPr>
         <p:spPr>
           <a:xfrm>
-            <a:off x="9756648" y="1345692"/>
-            <a:ext cx="2121408" cy="365760"/>
+            <a:off x="9692640" y="1452202"/>
+            <a:ext cx="2148840" cy="289390"/>
           </a:xfrm>
           <a:prstGeom prst="rect">
             <a:avLst/>
@@ -4322,7 +4322,7 @@
         </p:nvSpPr>
         <p:spPr>
           <a:xfrm>
-            <a:off x="0" y="1769110"/>
+            <a:off x="0" y="1817539"/>
             <a:ext cx="12188952" cy="6350"/>
           </a:xfrm>
           <a:prstGeom prst="rect">
@@ -4365,8 +4365,8 @@
         </p:nvSpPr>
         <p:spPr>
           <a:xfrm>
-            <a:off x="0" y="1775460"/>
-            <a:ext cx="12188952" cy="640080"/>
+            <a:off x="0" y="1823889"/>
+            <a:ext cx="12188952" cy="627718"/>
           </a:xfrm>
           <a:prstGeom prst="rect">
             <a:avLst/>
@@ -4408,8 +4408,8 @@
         </p:nvSpPr>
         <p:spPr>
           <a:xfrm>
-            <a:off x="256032" y="1812036"/>
-            <a:ext cx="4773168" cy="146304"/>
+            <a:off x="292608" y="1878753"/>
+            <a:ext cx="4562856" cy="164592"/>
           </a:xfrm>
           <a:prstGeom prst="rect">
             <a:avLst/>
@@ -4443,8 +4443,8 @@
         </p:nvSpPr>
         <p:spPr>
           <a:xfrm>
-            <a:off x="256032" y="1976628"/>
-            <a:ext cx="4773168" cy="420624"/>
+            <a:off x="292608" y="2079921"/>
+            <a:ext cx="4562856" cy="316822"/>
           </a:xfrm>
           <a:prstGeom prst="rect">
             <a:avLst/>
@@ -4478,8 +4478,8 @@
         </p:nvSpPr>
         <p:spPr>
           <a:xfrm>
-            <a:off x="5120640" y="1821180"/>
-            <a:ext cx="2194560" cy="548640"/>
+            <a:off x="4956048" y="1878753"/>
+            <a:ext cx="2221992" cy="517990"/>
           </a:xfrm>
           <a:prstGeom prst="rect">
             <a:avLst/>
@@ -4521,8 +4521,8 @@
         </p:nvSpPr>
         <p:spPr>
           <a:xfrm>
-            <a:off x="5184648" y="1848612"/>
-            <a:ext cx="2194560" cy="128016"/>
+            <a:off x="5029200" y="1915329"/>
+            <a:ext cx="2221992" cy="137160"/>
           </a:xfrm>
           <a:prstGeom prst="rect">
             <a:avLst/>
@@ -4556,8 +4556,8 @@
         </p:nvSpPr>
         <p:spPr>
           <a:xfrm>
-            <a:off x="5184648" y="1985772"/>
-            <a:ext cx="2121408" cy="365760"/>
+            <a:off x="5029200" y="2079921"/>
+            <a:ext cx="2148840" cy="289390"/>
           </a:xfrm>
           <a:prstGeom prst="rect">
             <a:avLst/>
@@ -4591,8 +4591,8 @@
         </p:nvSpPr>
         <p:spPr>
           <a:xfrm>
-            <a:off x="7406640" y="1821180"/>
-            <a:ext cx="2194560" cy="548640"/>
+            <a:off x="7287768" y="1878753"/>
+            <a:ext cx="2221992" cy="517990"/>
           </a:xfrm>
           <a:prstGeom prst="rect">
             <a:avLst/>
@@ -4634,8 +4634,8 @@
         </p:nvSpPr>
         <p:spPr>
           <a:xfrm>
-            <a:off x="7470648" y="1848612"/>
-            <a:ext cx="2194560" cy="128016"/>
+            <a:off x="7360920" y="1915329"/>
+            <a:ext cx="2221992" cy="137160"/>
           </a:xfrm>
           <a:prstGeom prst="rect">
             <a:avLst/>
@@ -4669,8 +4669,8 @@
         </p:nvSpPr>
         <p:spPr>
           <a:xfrm>
-            <a:off x="7470648" y="1985772"/>
-            <a:ext cx="2121408" cy="365760"/>
+            <a:off x="7360920" y="2079921"/>
+            <a:ext cx="2148840" cy="289390"/>
           </a:xfrm>
           <a:prstGeom prst="rect">
             <a:avLst/>
@@ -4704,8 +4704,8 @@
         </p:nvSpPr>
         <p:spPr>
           <a:xfrm>
-            <a:off x="9692640" y="1821180"/>
-            <a:ext cx="2194560" cy="548640"/>
+            <a:off x="9619488" y="1878753"/>
+            <a:ext cx="2221992" cy="517990"/>
           </a:xfrm>
           <a:prstGeom prst="rect">
             <a:avLst/>
@@ -4747,8 +4747,8 @@
         </p:nvSpPr>
         <p:spPr>
           <a:xfrm>
-            <a:off x="9756648" y="1848612"/>
-            <a:ext cx="2194560" cy="128016"/>
+            <a:off x="9692640" y="1915329"/>
+            <a:ext cx="2221992" cy="137160"/>
           </a:xfrm>
           <a:prstGeom prst="rect">
             <a:avLst/>
@@ -4782,8 +4782,8 @@
         </p:nvSpPr>
         <p:spPr>
           <a:xfrm>
-            <a:off x="9756648" y="1985772"/>
-            <a:ext cx="2121408" cy="365760"/>
+            <a:off x="9692640" y="2079921"/>
+            <a:ext cx="2148840" cy="289390"/>
           </a:xfrm>
           <a:prstGeom prst="rect">
             <a:avLst/>
@@ -4817,7 +4817,7 @@
         </p:nvSpPr>
         <p:spPr>
           <a:xfrm>
-            <a:off x="0" y="2409190"/>
+            <a:off x="0" y="2445257"/>
             <a:ext cx="12188952" cy="6350"/>
           </a:xfrm>
           <a:prstGeom prst="rect">
@@ -4860,8 +4860,8 @@
         </p:nvSpPr>
         <p:spPr>
           <a:xfrm>
-            <a:off x="0" y="2461260"/>
-            <a:ext cx="12188952" cy="201168"/>
+            <a:off x="0" y="2506471"/>
+            <a:ext cx="12188952" cy="237744"/>
           </a:xfrm>
           <a:prstGeom prst="rect">
             <a:avLst/>
@@ -4903,23 +4903,23 @@
         </p:nvSpPr>
         <p:spPr>
           <a:xfrm>
-            <a:off x="256032" y="2488692"/>
-            <a:ext cx="4818888" cy="201168"/>
-          </a:xfrm>
-          <a:prstGeom prst="rect">
-            <a:avLst/>
-          </a:prstGeom>
-          <a:noFill/>
-        </p:spPr>
-        <p:txBody>
-          <a:bodyPr wrap="square">
-            <a:spAutoFit/>
-          </a:bodyPr>
-          <a:lstStyle/>
-          <a:p>
-            <a:pPr algn="l"/>
-            <a:r>
-              <a:rPr sz="800" b="1" i="0">
+            <a:off x="292608" y="2543047"/>
+            <a:ext cx="4608576" cy="201168"/>
+          </a:xfrm>
+          <a:prstGeom prst="rect">
+            <a:avLst/>
+          </a:prstGeom>
+          <a:noFill/>
+        </p:spPr>
+        <p:txBody>
+          <a:bodyPr wrap="square">
+            <a:spAutoFit/>
+          </a:bodyPr>
+          <a:lstStyle/>
+          <a:p>
+            <a:pPr algn="l"/>
+            <a:r>
+              <a:rPr sz="900" b="1" i="0">
                 <a:solidFill>
                   <a:srgbClr val="FFFFFF"/>
                 </a:solidFill>
@@ -4938,8 +4938,8 @@
         </p:nvSpPr>
         <p:spPr>
           <a:xfrm>
-            <a:off x="0" y="2662428"/>
-            <a:ext cx="12188952" cy="640080"/>
+            <a:off x="0" y="2744215"/>
+            <a:ext cx="12188952" cy="627718"/>
           </a:xfrm>
           <a:prstGeom prst="rect">
             <a:avLst/>
@@ -4981,8 +4981,8 @@
         </p:nvSpPr>
         <p:spPr>
           <a:xfrm>
-            <a:off x="256032" y="2699004"/>
-            <a:ext cx="4773168" cy="146304"/>
+            <a:off x="292608" y="2799079"/>
+            <a:ext cx="4562856" cy="164592"/>
           </a:xfrm>
           <a:prstGeom prst="rect">
             <a:avLst/>
@@ -5016,8 +5016,8 @@
         </p:nvSpPr>
         <p:spPr>
           <a:xfrm>
-            <a:off x="256032" y="2863596"/>
-            <a:ext cx="4773168" cy="420624"/>
+            <a:off x="292608" y="3000247"/>
+            <a:ext cx="4562856" cy="316822"/>
           </a:xfrm>
           <a:prstGeom prst="rect">
             <a:avLst/>
@@ -5051,8 +5051,8 @@
         </p:nvSpPr>
         <p:spPr>
           <a:xfrm>
-            <a:off x="5120640" y="2708148"/>
-            <a:ext cx="2194560" cy="548640"/>
+            <a:off x="4956048" y="2799079"/>
+            <a:ext cx="2221992" cy="517990"/>
           </a:xfrm>
           <a:prstGeom prst="rect">
             <a:avLst/>
@@ -5094,8 +5094,8 @@
         </p:nvSpPr>
         <p:spPr>
           <a:xfrm>
-            <a:off x="5184648" y="2735580"/>
-            <a:ext cx="2194560" cy="128016"/>
+            <a:off x="5029200" y="2835655"/>
+            <a:ext cx="2221992" cy="137160"/>
           </a:xfrm>
           <a:prstGeom prst="rect">
             <a:avLst/>
@@ -5129,8 +5129,8 @@
         </p:nvSpPr>
         <p:spPr>
           <a:xfrm>
-            <a:off x="5184648" y="2872740"/>
-            <a:ext cx="2121408" cy="365760"/>
+            <a:off x="5029200" y="3000247"/>
+            <a:ext cx="2148840" cy="289390"/>
           </a:xfrm>
           <a:prstGeom prst="rect">
             <a:avLst/>
@@ -5164,8 +5164,8 @@
         </p:nvSpPr>
         <p:spPr>
           <a:xfrm>
-            <a:off x="7406640" y="2708148"/>
-            <a:ext cx="2194560" cy="548640"/>
+            <a:off x="7287768" y="2799079"/>
+            <a:ext cx="2221992" cy="517990"/>
           </a:xfrm>
           <a:prstGeom prst="rect">
             <a:avLst/>
@@ -5207,8 +5207,8 @@
         </p:nvSpPr>
         <p:spPr>
           <a:xfrm>
-            <a:off x="7470648" y="2735580"/>
-            <a:ext cx="2194560" cy="128016"/>
+            <a:off x="7360920" y="2835655"/>
+            <a:ext cx="2221992" cy="137160"/>
           </a:xfrm>
           <a:prstGeom prst="rect">
             <a:avLst/>
@@ -5242,8 +5242,8 @@
         </p:nvSpPr>
         <p:spPr>
           <a:xfrm>
-            <a:off x="7470648" y="2872740"/>
-            <a:ext cx="2121408" cy="365760"/>
+            <a:off x="7360920" y="3000247"/>
+            <a:ext cx="2148840" cy="289390"/>
           </a:xfrm>
           <a:prstGeom prst="rect">
             <a:avLst/>
@@ -5277,8 +5277,8 @@
         </p:nvSpPr>
         <p:spPr>
           <a:xfrm>
-            <a:off x="9692640" y="2708148"/>
-            <a:ext cx="2194560" cy="548640"/>
+            <a:off x="9619488" y="2799079"/>
+            <a:ext cx="2221992" cy="517990"/>
           </a:xfrm>
           <a:prstGeom prst="rect">
             <a:avLst/>
@@ -5320,8 +5320,8 @@
         </p:nvSpPr>
         <p:spPr>
           <a:xfrm>
-            <a:off x="9756648" y="2735580"/>
-            <a:ext cx="2194560" cy="128016"/>
+            <a:off x="9692640" y="2835655"/>
+            <a:ext cx="2221992" cy="137160"/>
           </a:xfrm>
           <a:prstGeom prst="rect">
             <a:avLst/>
@@ -5355,8 +5355,8 @@
         </p:nvSpPr>
         <p:spPr>
           <a:xfrm>
-            <a:off x="9756648" y="2872740"/>
-            <a:ext cx="2121408" cy="365760"/>
+            <a:off x="9692640" y="3000247"/>
+            <a:ext cx="2148840" cy="289390"/>
           </a:xfrm>
           <a:prstGeom prst="rect">
             <a:avLst/>
@@ -5390,7 +5390,7 @@
         </p:nvSpPr>
         <p:spPr>
           <a:xfrm>
-            <a:off x="0" y="3296158"/>
+            <a:off x="0" y="3365584"/>
             <a:ext cx="12188952" cy="6350"/>
           </a:xfrm>
           <a:prstGeom prst="rect">
@@ -5433,8 +5433,8 @@
         </p:nvSpPr>
         <p:spPr>
           <a:xfrm>
-            <a:off x="0" y="3302508"/>
-            <a:ext cx="12188952" cy="640080"/>
+            <a:off x="0" y="3371934"/>
+            <a:ext cx="12188952" cy="627718"/>
           </a:xfrm>
           <a:prstGeom prst="rect">
             <a:avLst/>
@@ -5476,8 +5476,8 @@
         </p:nvSpPr>
         <p:spPr>
           <a:xfrm>
-            <a:off x="256032" y="3339084"/>
-            <a:ext cx="4773168" cy="146304"/>
+            <a:off x="292608" y="3426798"/>
+            <a:ext cx="4562856" cy="164592"/>
           </a:xfrm>
           <a:prstGeom prst="rect">
             <a:avLst/>
@@ -5511,8 +5511,8 @@
         </p:nvSpPr>
         <p:spPr>
           <a:xfrm>
-            <a:off x="256032" y="3503676"/>
-            <a:ext cx="4773168" cy="420624"/>
+            <a:off x="292608" y="3627966"/>
+            <a:ext cx="4562856" cy="316822"/>
           </a:xfrm>
           <a:prstGeom prst="rect">
             <a:avLst/>
@@ -5546,8 +5546,8 @@
         </p:nvSpPr>
         <p:spPr>
           <a:xfrm>
-            <a:off x="5120640" y="3348228"/>
-            <a:ext cx="2194560" cy="548640"/>
+            <a:off x="4956048" y="3426798"/>
+            <a:ext cx="2221992" cy="517990"/>
           </a:xfrm>
           <a:prstGeom prst="rect">
             <a:avLst/>
@@ -5589,8 +5589,8 @@
         </p:nvSpPr>
         <p:spPr>
           <a:xfrm>
-            <a:off x="5184648" y="3375660"/>
-            <a:ext cx="2194560" cy="128016"/>
+            <a:off x="5029200" y="3463374"/>
+            <a:ext cx="2221992" cy="137160"/>
           </a:xfrm>
           <a:prstGeom prst="rect">
             <a:avLst/>
@@ -5624,8 +5624,8 @@
         </p:nvSpPr>
         <p:spPr>
           <a:xfrm>
-            <a:off x="5184648" y="3512820"/>
-            <a:ext cx="2121408" cy="365760"/>
+            <a:off x="5029200" y="3627966"/>
+            <a:ext cx="2148840" cy="289390"/>
           </a:xfrm>
           <a:prstGeom prst="rect">
             <a:avLst/>
@@ -5659,8 +5659,8 @@
         </p:nvSpPr>
         <p:spPr>
           <a:xfrm>
-            <a:off x="7406640" y="3348228"/>
-            <a:ext cx="2194560" cy="548640"/>
+            <a:off x="7287768" y="3426798"/>
+            <a:ext cx="2221992" cy="517990"/>
           </a:xfrm>
           <a:prstGeom prst="rect">
             <a:avLst/>
@@ -5702,8 +5702,8 @@
         </p:nvSpPr>
         <p:spPr>
           <a:xfrm>
-            <a:off x="7470648" y="3375660"/>
-            <a:ext cx="2194560" cy="128016"/>
+            <a:off x="7360920" y="3463374"/>
+            <a:ext cx="2221992" cy="137160"/>
           </a:xfrm>
           <a:prstGeom prst="rect">
             <a:avLst/>
@@ -5737,8 +5737,8 @@
         </p:nvSpPr>
         <p:spPr>
           <a:xfrm>
-            <a:off x="7470648" y="3512820"/>
-            <a:ext cx="2121408" cy="365760"/>
+            <a:off x="7360920" y="3627966"/>
+            <a:ext cx="2148840" cy="289390"/>
           </a:xfrm>
           <a:prstGeom prst="rect">
             <a:avLst/>
@@ -5772,8 +5772,8 @@
         </p:nvSpPr>
         <p:spPr>
           <a:xfrm>
-            <a:off x="9692640" y="3348228"/>
-            <a:ext cx="2194560" cy="548640"/>
+            <a:off x="9619488" y="3426798"/>
+            <a:ext cx="2221992" cy="517990"/>
           </a:xfrm>
           <a:prstGeom prst="rect">
             <a:avLst/>
@@ -5815,8 +5815,8 @@
         </p:nvSpPr>
         <p:spPr>
           <a:xfrm>
-            <a:off x="9756648" y="3375660"/>
-            <a:ext cx="2194560" cy="128016"/>
+            <a:off x="9692640" y="3463374"/>
+            <a:ext cx="2221992" cy="137160"/>
           </a:xfrm>
           <a:prstGeom prst="rect">
             <a:avLst/>
@@ -5850,8 +5850,8 @@
         </p:nvSpPr>
         <p:spPr>
           <a:xfrm>
-            <a:off x="9756648" y="3512820"/>
-            <a:ext cx="2121408" cy="365760"/>
+            <a:off x="9692640" y="3627966"/>
+            <a:ext cx="2148840" cy="289390"/>
           </a:xfrm>
           <a:prstGeom prst="rect">
             <a:avLst/>
@@ -5885,7 +5885,7 @@
         </p:nvSpPr>
         <p:spPr>
           <a:xfrm>
-            <a:off x="0" y="3936238"/>
+            <a:off x="0" y="3993303"/>
             <a:ext cx="12188952" cy="6350"/>
           </a:xfrm>
           <a:prstGeom prst="rect">
@@ -5928,8 +5928,8 @@
         </p:nvSpPr>
         <p:spPr>
           <a:xfrm>
-            <a:off x="0" y="3988308"/>
-            <a:ext cx="12188952" cy="201168"/>
+            <a:off x="0" y="4054517"/>
+            <a:ext cx="12188952" cy="237744"/>
           </a:xfrm>
           <a:prstGeom prst="rect">
             <a:avLst/>
@@ -5971,23 +5971,23 @@
         </p:nvSpPr>
         <p:spPr>
           <a:xfrm>
-            <a:off x="256032" y="4015740"/>
-            <a:ext cx="4818888" cy="201168"/>
-          </a:xfrm>
-          <a:prstGeom prst="rect">
-            <a:avLst/>
-          </a:prstGeom>
-          <a:noFill/>
-        </p:spPr>
-        <p:txBody>
-          <a:bodyPr wrap="square">
-            <a:spAutoFit/>
-          </a:bodyPr>
-          <a:lstStyle/>
-          <a:p>
-            <a:pPr algn="l"/>
-            <a:r>
-              <a:rPr sz="800" b="1" i="0">
+            <a:off x="292608" y="4091093"/>
+            <a:ext cx="4608576" cy="201168"/>
+          </a:xfrm>
+          <a:prstGeom prst="rect">
+            <a:avLst/>
+          </a:prstGeom>
+          <a:noFill/>
+        </p:spPr>
+        <p:txBody>
+          <a:bodyPr wrap="square">
+            <a:spAutoFit/>
+          </a:bodyPr>
+          <a:lstStyle/>
+          <a:p>
+            <a:pPr algn="l"/>
+            <a:r>
+              <a:rPr sz="900" b="1" i="0">
                 <a:solidFill>
                   <a:srgbClr val="FFFFFF"/>
                 </a:solidFill>
@@ -6006,8 +6006,8 @@
         </p:nvSpPr>
         <p:spPr>
           <a:xfrm>
-            <a:off x="0" y="4189476"/>
-            <a:ext cx="12188952" cy="640080"/>
+            <a:off x="0" y="4292261"/>
+            <a:ext cx="12188952" cy="627718"/>
           </a:xfrm>
           <a:prstGeom prst="rect">
             <a:avLst/>
@@ -6049,8 +6049,8 @@
         </p:nvSpPr>
         <p:spPr>
           <a:xfrm>
-            <a:off x="256032" y="4226052"/>
-            <a:ext cx="4773168" cy="146304"/>
+            <a:off x="292608" y="4347125"/>
+            <a:ext cx="4562856" cy="164592"/>
           </a:xfrm>
           <a:prstGeom prst="rect">
             <a:avLst/>
@@ -6084,8 +6084,8 @@
         </p:nvSpPr>
         <p:spPr>
           <a:xfrm>
-            <a:off x="256032" y="4390644"/>
-            <a:ext cx="4773168" cy="420624"/>
+            <a:off x="292608" y="4548293"/>
+            <a:ext cx="4562856" cy="316822"/>
           </a:xfrm>
           <a:prstGeom prst="rect">
             <a:avLst/>
@@ -6119,8 +6119,8 @@
         </p:nvSpPr>
         <p:spPr>
           <a:xfrm>
-            <a:off x="5120640" y="4235196"/>
-            <a:ext cx="2194560" cy="548640"/>
+            <a:off x="4956048" y="4347125"/>
+            <a:ext cx="2221992" cy="517990"/>
           </a:xfrm>
           <a:prstGeom prst="rect">
             <a:avLst/>
@@ -6162,8 +6162,8 @@
         </p:nvSpPr>
         <p:spPr>
           <a:xfrm>
-            <a:off x="5184648" y="4262628"/>
-            <a:ext cx="2194560" cy="128016"/>
+            <a:off x="5029200" y="4383701"/>
+            <a:ext cx="2221992" cy="137160"/>
           </a:xfrm>
           <a:prstGeom prst="rect">
             <a:avLst/>
@@ -6197,8 +6197,8 @@
         </p:nvSpPr>
         <p:spPr>
           <a:xfrm>
-            <a:off x="5184648" y="4399788"/>
-            <a:ext cx="2121408" cy="365760"/>
+            <a:off x="5029200" y="4548293"/>
+            <a:ext cx="2148840" cy="289390"/>
           </a:xfrm>
           <a:prstGeom prst="rect">
             <a:avLst/>
@@ -6232,8 +6232,8 @@
         </p:nvSpPr>
         <p:spPr>
           <a:xfrm>
-            <a:off x="7406640" y="4235196"/>
-            <a:ext cx="2194560" cy="548640"/>
+            <a:off x="7287768" y="4347125"/>
+            <a:ext cx="2221992" cy="517990"/>
           </a:xfrm>
           <a:prstGeom prst="rect">
             <a:avLst/>
@@ -6275,8 +6275,8 @@
         </p:nvSpPr>
         <p:spPr>
           <a:xfrm>
-            <a:off x="7470648" y="4262628"/>
-            <a:ext cx="2194560" cy="128016"/>
+            <a:off x="7360920" y="4383701"/>
+            <a:ext cx="2221992" cy="137160"/>
           </a:xfrm>
           <a:prstGeom prst="rect">
             <a:avLst/>
@@ -6310,8 +6310,8 @@
         </p:nvSpPr>
         <p:spPr>
           <a:xfrm>
-            <a:off x="7470648" y="4399788"/>
-            <a:ext cx="2121408" cy="365760"/>
+            <a:off x="7360920" y="4548293"/>
+            <a:ext cx="2148840" cy="289390"/>
           </a:xfrm>
           <a:prstGeom prst="rect">
             <a:avLst/>
@@ -6345,8 +6345,8 @@
         </p:nvSpPr>
         <p:spPr>
           <a:xfrm>
-            <a:off x="9692640" y="4235196"/>
-            <a:ext cx="2194560" cy="548640"/>
+            <a:off x="9619488" y="4347125"/>
+            <a:ext cx="2221992" cy="517990"/>
           </a:xfrm>
           <a:prstGeom prst="rect">
             <a:avLst/>
@@ -6388,8 +6388,8 @@
         </p:nvSpPr>
         <p:spPr>
           <a:xfrm>
-            <a:off x="9756648" y="4262628"/>
-            <a:ext cx="2194560" cy="128016"/>
+            <a:off x="9692640" y="4383701"/>
+            <a:ext cx="2221992" cy="137160"/>
           </a:xfrm>
           <a:prstGeom prst="rect">
             <a:avLst/>
@@ -6423,8 +6423,8 @@
         </p:nvSpPr>
         <p:spPr>
           <a:xfrm>
-            <a:off x="9756648" y="4399788"/>
-            <a:ext cx="2121408" cy="365760"/>
+            <a:off x="9692640" y="4548293"/>
+            <a:ext cx="2148840" cy="289390"/>
           </a:xfrm>
           <a:prstGeom prst="rect">
             <a:avLst/>
@@ -6458,7 +6458,7 @@
         </p:nvSpPr>
         <p:spPr>
           <a:xfrm>
-            <a:off x="0" y="4823206"/>
+            <a:off x="0" y="4913629"/>
             <a:ext cx="12188952" cy="6350"/>
           </a:xfrm>
           <a:prstGeom prst="rect">
@@ -6501,8 +6501,8 @@
         </p:nvSpPr>
         <p:spPr>
           <a:xfrm>
-            <a:off x="0" y="4829556"/>
-            <a:ext cx="12188952" cy="640080"/>
+            <a:off x="0" y="4919979"/>
+            <a:ext cx="12188952" cy="627718"/>
           </a:xfrm>
           <a:prstGeom prst="rect">
             <a:avLst/>
@@ -6544,8 +6544,8 @@
         </p:nvSpPr>
         <p:spPr>
           <a:xfrm>
-            <a:off x="256032" y="4866132"/>
-            <a:ext cx="4773168" cy="146304"/>
+            <a:off x="292608" y="4974843"/>
+            <a:ext cx="4562856" cy="164592"/>
           </a:xfrm>
           <a:prstGeom prst="rect">
             <a:avLst/>
@@ -6579,8 +6579,8 @@
         </p:nvSpPr>
         <p:spPr>
           <a:xfrm>
-            <a:off x="256032" y="5030724"/>
-            <a:ext cx="4773168" cy="420624"/>
+            <a:off x="292608" y="5176011"/>
+            <a:ext cx="4562856" cy="316822"/>
           </a:xfrm>
           <a:prstGeom prst="rect">
             <a:avLst/>
@@ -6614,8 +6614,8 @@
         </p:nvSpPr>
         <p:spPr>
           <a:xfrm>
-            <a:off x="5120640" y="4875276"/>
-            <a:ext cx="2194560" cy="548640"/>
+            <a:off x="4956048" y="4974843"/>
+            <a:ext cx="2221992" cy="517990"/>
           </a:xfrm>
           <a:prstGeom prst="rect">
             <a:avLst/>
@@ -6657,8 +6657,8 @@
         </p:nvSpPr>
         <p:spPr>
           <a:xfrm>
-            <a:off x="5184648" y="4902708"/>
-            <a:ext cx="2194560" cy="128016"/>
+            <a:off x="5029200" y="5011419"/>
+            <a:ext cx="2221992" cy="137160"/>
           </a:xfrm>
           <a:prstGeom prst="rect">
             <a:avLst/>
@@ -6692,8 +6692,8 @@
         </p:nvSpPr>
         <p:spPr>
           <a:xfrm>
-            <a:off x="5184648" y="5039868"/>
-            <a:ext cx="2121408" cy="365760"/>
+            <a:off x="5029200" y="5176011"/>
+            <a:ext cx="2148840" cy="289390"/>
           </a:xfrm>
           <a:prstGeom prst="rect">
             <a:avLst/>
@@ -6727,8 +6727,8 @@
         </p:nvSpPr>
         <p:spPr>
           <a:xfrm>
-            <a:off x="7406640" y="4875276"/>
-            <a:ext cx="2194560" cy="548640"/>
+            <a:off x="7287768" y="4974843"/>
+            <a:ext cx="2221992" cy="517990"/>
           </a:xfrm>
           <a:prstGeom prst="rect">
             <a:avLst/>
@@ -6770,8 +6770,8 @@
         </p:nvSpPr>
         <p:spPr>
           <a:xfrm>
-            <a:off x="7470648" y="4902708"/>
-            <a:ext cx="2194560" cy="128016"/>
+            <a:off x="7360920" y="5011419"/>
+            <a:ext cx="2221992" cy="137160"/>
           </a:xfrm>
           <a:prstGeom prst="rect">
             <a:avLst/>
@@ -6805,8 +6805,8 @@
         </p:nvSpPr>
         <p:spPr>
           <a:xfrm>
-            <a:off x="7470648" y="5039868"/>
-            <a:ext cx="2121408" cy="365760"/>
+            <a:off x="7360920" y="5176011"/>
+            <a:ext cx="2148840" cy="289390"/>
           </a:xfrm>
           <a:prstGeom prst="rect">
             <a:avLst/>
@@ -6840,8 +6840,8 @@
         </p:nvSpPr>
         <p:spPr>
           <a:xfrm>
-            <a:off x="9692640" y="4875276"/>
-            <a:ext cx="2194560" cy="548640"/>
+            <a:off x="9619488" y="4974843"/>
+            <a:ext cx="2221992" cy="517990"/>
           </a:xfrm>
           <a:prstGeom prst="rect">
             <a:avLst/>
@@ -6883,8 +6883,8 @@
         </p:nvSpPr>
         <p:spPr>
           <a:xfrm>
-            <a:off x="9756648" y="4902708"/>
-            <a:ext cx="2194560" cy="128016"/>
+            <a:off x="9692640" y="5011419"/>
+            <a:ext cx="2221992" cy="137160"/>
           </a:xfrm>
           <a:prstGeom prst="rect">
             <a:avLst/>
@@ -6918,8 +6918,8 @@
         </p:nvSpPr>
         <p:spPr>
           <a:xfrm>
-            <a:off x="9756648" y="5039868"/>
-            <a:ext cx="2121408" cy="365760"/>
+            <a:off x="9692640" y="5176011"/>
+            <a:ext cx="2148840" cy="289390"/>
           </a:xfrm>
           <a:prstGeom prst="rect">
             <a:avLst/>
@@ -6953,7 +6953,7 @@
         </p:nvSpPr>
         <p:spPr>
           <a:xfrm>
-            <a:off x="0" y="5463286"/>
+            <a:off x="0" y="5541348"/>
             <a:ext cx="12188952" cy="6350"/>
           </a:xfrm>
           <a:prstGeom prst="rect">
@@ -6996,8 +6996,8 @@
         </p:nvSpPr>
         <p:spPr>
           <a:xfrm>
-            <a:off x="0" y="5469636"/>
-            <a:ext cx="12188952" cy="640080"/>
+            <a:off x="0" y="5547698"/>
+            <a:ext cx="12188952" cy="627718"/>
           </a:xfrm>
           <a:prstGeom prst="rect">
             <a:avLst/>
@@ -7039,8 +7039,8 @@
         </p:nvSpPr>
         <p:spPr>
           <a:xfrm>
-            <a:off x="256032" y="5506212"/>
-            <a:ext cx="4773168" cy="146304"/>
+            <a:off x="292608" y="5602562"/>
+            <a:ext cx="4562856" cy="164592"/>
           </a:xfrm>
           <a:prstGeom prst="rect">
             <a:avLst/>
@@ -7074,8 +7074,8 @@
         </p:nvSpPr>
         <p:spPr>
           <a:xfrm>
-            <a:off x="256032" y="5670804"/>
-            <a:ext cx="4773168" cy="420624"/>
+            <a:off x="292608" y="5803730"/>
+            <a:ext cx="4562856" cy="316822"/>
           </a:xfrm>
           <a:prstGeom prst="rect">
             <a:avLst/>
@@ -7109,8 +7109,8 @@
         </p:nvSpPr>
         <p:spPr>
           <a:xfrm>
-            <a:off x="5120640" y="5515356"/>
-            <a:ext cx="2194560" cy="548640"/>
+            <a:off x="4956048" y="5602562"/>
+            <a:ext cx="2221992" cy="517990"/>
           </a:xfrm>
           <a:prstGeom prst="rect">
             <a:avLst/>
@@ -7152,8 +7152,8 @@
         </p:nvSpPr>
         <p:spPr>
           <a:xfrm>
-            <a:off x="5184648" y="5542788"/>
-            <a:ext cx="2194560" cy="128016"/>
+            <a:off x="5029200" y="5639138"/>
+            <a:ext cx="2221992" cy="137160"/>
           </a:xfrm>
           <a:prstGeom prst="rect">
             <a:avLst/>
@@ -7187,8 +7187,8 @@
         </p:nvSpPr>
         <p:spPr>
           <a:xfrm>
-            <a:off x="5184648" y="5679948"/>
-            <a:ext cx="2121408" cy="365760"/>
+            <a:off x="5029200" y="5803730"/>
+            <a:ext cx="2148840" cy="289390"/>
           </a:xfrm>
           <a:prstGeom prst="rect">
             <a:avLst/>
@@ -7222,8 +7222,8 @@
         </p:nvSpPr>
         <p:spPr>
           <a:xfrm>
-            <a:off x="7406640" y="5515356"/>
-            <a:ext cx="2194560" cy="548640"/>
+            <a:off x="7287768" y="5602562"/>
+            <a:ext cx="2221992" cy="517990"/>
           </a:xfrm>
           <a:prstGeom prst="rect">
             <a:avLst/>
@@ -7265,8 +7265,8 @@
         </p:nvSpPr>
         <p:spPr>
           <a:xfrm>
-            <a:off x="7470648" y="5542788"/>
-            <a:ext cx="2194560" cy="128016"/>
+            <a:off x="7360920" y="5639138"/>
+            <a:ext cx="2221992" cy="137160"/>
           </a:xfrm>
           <a:prstGeom prst="rect">
             <a:avLst/>
@@ -7300,8 +7300,8 @@
         </p:nvSpPr>
         <p:spPr>
           <a:xfrm>
-            <a:off x="7470648" y="5679948"/>
-            <a:ext cx="2121408" cy="365760"/>
+            <a:off x="7360920" y="5803730"/>
+            <a:ext cx="2148840" cy="289390"/>
           </a:xfrm>
           <a:prstGeom prst="rect">
             <a:avLst/>
@@ -7335,8 +7335,8 @@
         </p:nvSpPr>
         <p:spPr>
           <a:xfrm>
-            <a:off x="9692640" y="5515356"/>
-            <a:ext cx="2194560" cy="548640"/>
+            <a:off x="9619488" y="5602562"/>
+            <a:ext cx="2221992" cy="517990"/>
           </a:xfrm>
           <a:prstGeom prst="rect">
             <a:avLst/>
@@ -7378,8 +7378,8 @@
         </p:nvSpPr>
         <p:spPr>
           <a:xfrm>
-            <a:off x="9756648" y="5542788"/>
-            <a:ext cx="2194560" cy="128016"/>
+            <a:off x="9692640" y="5639138"/>
+            <a:ext cx="2221992" cy="137160"/>
           </a:xfrm>
           <a:prstGeom prst="rect">
             <a:avLst/>
@@ -7413,8 +7413,8 @@
         </p:nvSpPr>
         <p:spPr>
           <a:xfrm>
-            <a:off x="9756648" y="5679948"/>
-            <a:ext cx="2121408" cy="365760"/>
+            <a:off x="9692640" y="5803730"/>
+            <a:ext cx="2148840" cy="289390"/>
           </a:xfrm>
           <a:prstGeom prst="rect">
             <a:avLst/>
@@ -7448,7 +7448,7 @@
         </p:nvSpPr>
         <p:spPr>
           <a:xfrm>
-            <a:off x="0" y="6103366"/>
+            <a:off x="0" y="6169067"/>
             <a:ext cx="12188952" cy="6350"/>
           </a:xfrm>
           <a:prstGeom prst="rect">
@@ -7491,8 +7491,8 @@
         </p:nvSpPr>
         <p:spPr>
           <a:xfrm>
-            <a:off x="0" y="6109716"/>
-            <a:ext cx="12188952" cy="640080"/>
+            <a:off x="0" y="6175417"/>
+            <a:ext cx="12188952" cy="627718"/>
           </a:xfrm>
           <a:prstGeom prst="rect">
             <a:avLst/>
@@ -7534,8 +7534,8 @@
         </p:nvSpPr>
         <p:spPr>
           <a:xfrm>
-            <a:off x="256032" y="6146292"/>
-            <a:ext cx="4773168" cy="146304"/>
+            <a:off x="292608" y="6230281"/>
+            <a:ext cx="4562856" cy="164592"/>
           </a:xfrm>
           <a:prstGeom prst="rect">
             <a:avLst/>
@@ -7569,8 +7569,8 @@
         </p:nvSpPr>
         <p:spPr>
           <a:xfrm>
-            <a:off x="256032" y="6310884"/>
-            <a:ext cx="4773168" cy="420624"/>
+            <a:off x="292608" y="6431449"/>
+            <a:ext cx="4562856" cy="316822"/>
           </a:xfrm>
           <a:prstGeom prst="rect">
             <a:avLst/>
@@ -7604,8 +7604,8 @@
         </p:nvSpPr>
         <p:spPr>
           <a:xfrm>
-            <a:off x="5120640" y="6155436"/>
-            <a:ext cx="2194560" cy="548640"/>
+            <a:off x="4956048" y="6230281"/>
+            <a:ext cx="2221992" cy="517990"/>
           </a:xfrm>
           <a:prstGeom prst="rect">
             <a:avLst/>
@@ -7647,8 +7647,8 @@
         </p:nvSpPr>
         <p:spPr>
           <a:xfrm>
-            <a:off x="5184648" y="6182868"/>
-            <a:ext cx="2194560" cy="128016"/>
+            <a:off x="5029200" y="6266857"/>
+            <a:ext cx="2221992" cy="137160"/>
           </a:xfrm>
           <a:prstGeom prst="rect">
             <a:avLst/>
@@ -7682,8 +7682,8 @@
         </p:nvSpPr>
         <p:spPr>
           <a:xfrm>
-            <a:off x="5184648" y="6320028"/>
-            <a:ext cx="2121408" cy="365760"/>
+            <a:off x="5029200" y="6431449"/>
+            <a:ext cx="2148840" cy="289390"/>
           </a:xfrm>
           <a:prstGeom prst="rect">
             <a:avLst/>
@@ -7717,8 +7717,8 @@
         </p:nvSpPr>
         <p:spPr>
           <a:xfrm>
-            <a:off x="7406640" y="6155436"/>
-            <a:ext cx="2194560" cy="548640"/>
+            <a:off x="7287768" y="6230281"/>
+            <a:ext cx="2221992" cy="517990"/>
           </a:xfrm>
           <a:prstGeom prst="rect">
             <a:avLst/>
@@ -7760,8 +7760,8 @@
         </p:nvSpPr>
         <p:spPr>
           <a:xfrm>
-            <a:off x="7470648" y="6182868"/>
-            <a:ext cx="2194560" cy="128016"/>
+            <a:off x="7360920" y="6266857"/>
+            <a:ext cx="2221992" cy="137160"/>
           </a:xfrm>
           <a:prstGeom prst="rect">
             <a:avLst/>
@@ -7795,8 +7795,8 @@
         </p:nvSpPr>
         <p:spPr>
           <a:xfrm>
-            <a:off x="7470648" y="6320028"/>
-            <a:ext cx="2121408" cy="365760"/>
+            <a:off x="7360920" y="6431449"/>
+            <a:ext cx="2148840" cy="289390"/>
           </a:xfrm>
           <a:prstGeom prst="rect">
             <a:avLst/>
@@ -7830,8 +7830,8 @@
         </p:nvSpPr>
         <p:spPr>
           <a:xfrm>
-            <a:off x="9692640" y="6155436"/>
-            <a:ext cx="2194560" cy="548640"/>
+            <a:off x="9619488" y="6230281"/>
+            <a:ext cx="2221992" cy="517990"/>
           </a:xfrm>
           <a:prstGeom prst="rect">
             <a:avLst/>
@@ -7873,8 +7873,8 @@
         </p:nvSpPr>
         <p:spPr>
           <a:xfrm>
-            <a:off x="9756648" y="6182868"/>
-            <a:ext cx="2194560" cy="128016"/>
+            <a:off x="9692640" y="6266857"/>
+            <a:ext cx="2221992" cy="137160"/>
           </a:xfrm>
           <a:prstGeom prst="rect">
             <a:avLst/>
@@ -7908,8 +7908,8 @@
         </p:nvSpPr>
         <p:spPr>
           <a:xfrm>
-            <a:off x="9756648" y="6320028"/>
-            <a:ext cx="2121408" cy="365760"/>
+            <a:off x="9692640" y="6431449"/>
+            <a:ext cx="2148840" cy="289390"/>
           </a:xfrm>
           <a:prstGeom prst="rect">
             <a:avLst/>
@@ -7943,7 +7943,7 @@
         </p:nvSpPr>
         <p:spPr>
           <a:xfrm>
-            <a:off x="0" y="6743446"/>
+            <a:off x="0" y="6796786"/>
             <a:ext cx="12188952" cy="6350"/>
           </a:xfrm>
           <a:prstGeom prst="rect">
@@ -8048,7 +8048,7 @@
         <p:spPr>
           <a:xfrm>
             <a:off x="0" y="0"/>
-            <a:ext cx="12188952" cy="256032"/>
+            <a:ext cx="12188952" cy="292608"/>
           </a:xfrm>
           <a:prstGeom prst="rect">
             <a:avLst/>
@@ -8090,7 +8090,7 @@
         </p:nvSpPr>
         <p:spPr>
           <a:xfrm>
-            <a:off x="0" y="256032"/>
+            <a:off x="0" y="292608"/>
             <a:ext cx="12188952" cy="25400"/>
           </a:xfrm>
           <a:prstGeom prst="rect">
@@ -8133,23 +8133,23 @@
         </p:nvSpPr>
         <p:spPr>
           <a:xfrm>
-            <a:off x="256032" y="45720"/>
-            <a:ext cx="7315200" cy="256032"/>
-          </a:xfrm>
-          <a:prstGeom prst="rect">
-            <a:avLst/>
-          </a:prstGeom>
-          <a:noFill/>
-        </p:spPr>
-        <p:txBody>
-          <a:bodyPr wrap="square">
-            <a:spAutoFit/>
-          </a:bodyPr>
-          <a:lstStyle/>
-          <a:p>
-            <a:pPr algn="l"/>
-            <a:r>
-              <a:rPr sz="800" b="0" i="0">
+            <a:off x="292608" y="64008"/>
+            <a:ext cx="7315200" cy="292608"/>
+          </a:xfrm>
+          <a:prstGeom prst="rect">
+            <a:avLst/>
+          </a:prstGeom>
+          <a:noFill/>
+        </p:spPr>
+        <p:txBody>
+          <a:bodyPr wrap="square">
+            <a:spAutoFit/>
+          </a:bodyPr>
+          <a:lstStyle/>
+          <a:p>
+            <a:pPr algn="l"/>
+            <a:r>
+              <a:rPr sz="900" b="0" i="0">
                 <a:solidFill>
                   <a:srgbClr val="FFFFFF"/>
                 </a:solidFill>
@@ -8168,8 +8168,8 @@
         </p:nvSpPr>
         <p:spPr>
           <a:xfrm>
-            <a:off x="11548872" y="45720"/>
-            <a:ext cx="457200" cy="256032"/>
+            <a:off x="11548872" y="64008"/>
+            <a:ext cx="457200" cy="292608"/>
           </a:xfrm>
           <a:prstGeom prst="rect">
             <a:avLst/>
@@ -8203,8 +8203,8 @@
         </p:nvSpPr>
         <p:spPr>
           <a:xfrm>
-            <a:off x="0" y="294132"/>
-            <a:ext cx="12188952" cy="201168"/>
+            <a:off x="0" y="330708"/>
+            <a:ext cx="12188952" cy="237744"/>
           </a:xfrm>
           <a:prstGeom prst="rect">
             <a:avLst/>
@@ -8246,23 +8246,23 @@
         </p:nvSpPr>
         <p:spPr>
           <a:xfrm>
-            <a:off x="256032" y="321564"/>
-            <a:ext cx="4818888" cy="201168"/>
-          </a:xfrm>
-          <a:prstGeom prst="rect">
-            <a:avLst/>
-          </a:prstGeom>
-          <a:noFill/>
-        </p:spPr>
-        <p:txBody>
-          <a:bodyPr wrap="square">
-            <a:spAutoFit/>
-          </a:bodyPr>
-          <a:lstStyle/>
-          <a:p>
-            <a:pPr algn="l"/>
-            <a:r>
-              <a:rPr sz="800" b="1" i="0">
+            <a:off x="292608" y="367284"/>
+            <a:ext cx="4608576" cy="201168"/>
+          </a:xfrm>
+          <a:prstGeom prst="rect">
+            <a:avLst/>
+          </a:prstGeom>
+          <a:noFill/>
+        </p:spPr>
+        <p:txBody>
+          <a:bodyPr wrap="square">
+            <a:spAutoFit/>
+          </a:bodyPr>
+          <a:lstStyle/>
+          <a:p>
+            <a:pPr algn="l"/>
+            <a:r>
+              <a:rPr sz="900" b="1" i="0">
                 <a:solidFill>
                   <a:srgbClr val="FFFFFF"/>
                 </a:solidFill>
@@ -8281,8 +8281,8 @@
         </p:nvSpPr>
         <p:spPr>
           <a:xfrm>
-            <a:off x="0" y="495300"/>
-            <a:ext cx="12188952" cy="640080"/>
+            <a:off x="0" y="568452"/>
+            <a:ext cx="12188952" cy="848868"/>
           </a:xfrm>
           <a:prstGeom prst="rect">
             <a:avLst/>
@@ -8324,8 +8324,8 @@
         </p:nvSpPr>
         <p:spPr>
           <a:xfrm>
-            <a:off x="256032" y="531876"/>
-            <a:ext cx="4773168" cy="146304"/>
+            <a:off x="292608" y="623316"/>
+            <a:ext cx="4562856" cy="164592"/>
           </a:xfrm>
           <a:prstGeom prst="rect">
             <a:avLst/>
@@ -8359,23 +8359,23 @@
         </p:nvSpPr>
         <p:spPr>
           <a:xfrm>
-            <a:off x="256032" y="696468"/>
-            <a:ext cx="4773168" cy="420624"/>
-          </a:xfrm>
-          <a:prstGeom prst="rect">
-            <a:avLst/>
-          </a:prstGeom>
-          <a:noFill/>
-        </p:spPr>
-        <p:txBody>
-          <a:bodyPr wrap="square">
-            <a:spAutoFit/>
-          </a:bodyPr>
-          <a:lstStyle/>
-          <a:p>
-            <a:pPr algn="l"/>
-            <a:r>
-              <a:rPr sz="800" b="0" i="0">
+            <a:off x="292608" y="824484"/>
+            <a:ext cx="4562856" cy="537972"/>
+          </a:xfrm>
+          <a:prstGeom prst="rect">
+            <a:avLst/>
+          </a:prstGeom>
+          <a:noFill/>
+        </p:spPr>
+        <p:txBody>
+          <a:bodyPr wrap="square">
+            <a:spAutoFit/>
+          </a:bodyPr>
+          <a:lstStyle/>
+          <a:p>
+            <a:pPr algn="l"/>
+            <a:r>
+              <a:rPr sz="900" b="0" i="0">
                 <a:solidFill>
                   <a:srgbClr val="595959"/>
                 </a:solidFill>
@@ -8394,8 +8394,8 @@
         </p:nvSpPr>
         <p:spPr>
           <a:xfrm>
-            <a:off x="5120640" y="541020"/>
-            <a:ext cx="2194560" cy="548640"/>
+            <a:off x="4956048" y="623316"/>
+            <a:ext cx="2221992" cy="739140"/>
           </a:xfrm>
           <a:prstGeom prst="rect">
             <a:avLst/>
@@ -8437,8 +8437,8 @@
         </p:nvSpPr>
         <p:spPr>
           <a:xfrm>
-            <a:off x="5184648" y="568452"/>
-            <a:ext cx="2194560" cy="128016"/>
+            <a:off x="5029200" y="659892"/>
+            <a:ext cx="2221992" cy="137160"/>
           </a:xfrm>
           <a:prstGeom prst="rect">
             <a:avLst/>
@@ -8472,23 +8472,23 @@
         </p:nvSpPr>
         <p:spPr>
           <a:xfrm>
-            <a:off x="5184648" y="705612"/>
-            <a:ext cx="2121408" cy="365760"/>
-          </a:xfrm>
-          <a:prstGeom prst="rect">
-            <a:avLst/>
-          </a:prstGeom>
-          <a:noFill/>
-        </p:spPr>
-        <p:txBody>
-          <a:bodyPr wrap="square">
-            <a:spAutoFit/>
-          </a:bodyPr>
-          <a:lstStyle/>
-          <a:p>
-            <a:pPr algn="l"/>
-            <a:r>
-              <a:rPr sz="800" b="0" i="0">
+            <a:off x="5029200" y="824484"/>
+            <a:ext cx="2148840" cy="510540"/>
+          </a:xfrm>
+          <a:prstGeom prst="rect">
+            <a:avLst/>
+          </a:prstGeom>
+          <a:noFill/>
+        </p:spPr>
+        <p:txBody>
+          <a:bodyPr wrap="square">
+            <a:spAutoFit/>
+          </a:bodyPr>
+          <a:lstStyle/>
+          <a:p>
+            <a:pPr algn="l"/>
+            <a:r>
+              <a:rPr sz="900" b="0" i="0">
                 <a:solidFill>
                   <a:srgbClr val="000000"/>
                 </a:solidFill>
@@ -8507,8 +8507,8 @@
         </p:nvSpPr>
         <p:spPr>
           <a:xfrm>
-            <a:off x="7406640" y="541020"/>
-            <a:ext cx="2194560" cy="548640"/>
+            <a:off x="7287768" y="623316"/>
+            <a:ext cx="2221992" cy="739140"/>
           </a:xfrm>
           <a:prstGeom prst="rect">
             <a:avLst/>
@@ -8550,8 +8550,8 @@
         </p:nvSpPr>
         <p:spPr>
           <a:xfrm>
-            <a:off x="7470648" y="568452"/>
-            <a:ext cx="2194560" cy="128016"/>
+            <a:off x="7360920" y="659892"/>
+            <a:ext cx="2221992" cy="137160"/>
           </a:xfrm>
           <a:prstGeom prst="rect">
             <a:avLst/>
@@ -8585,23 +8585,23 @@
         </p:nvSpPr>
         <p:spPr>
           <a:xfrm>
-            <a:off x="7470648" y="705612"/>
-            <a:ext cx="2121408" cy="365760"/>
-          </a:xfrm>
-          <a:prstGeom prst="rect">
-            <a:avLst/>
-          </a:prstGeom>
-          <a:noFill/>
-        </p:spPr>
-        <p:txBody>
-          <a:bodyPr wrap="square">
-            <a:spAutoFit/>
-          </a:bodyPr>
-          <a:lstStyle/>
-          <a:p>
-            <a:pPr algn="l"/>
-            <a:r>
-              <a:rPr sz="800" b="0" i="0">
+            <a:off x="7360920" y="824484"/>
+            <a:ext cx="2148840" cy="510540"/>
+          </a:xfrm>
+          <a:prstGeom prst="rect">
+            <a:avLst/>
+          </a:prstGeom>
+          <a:noFill/>
+        </p:spPr>
+        <p:txBody>
+          <a:bodyPr wrap="square">
+            <a:spAutoFit/>
+          </a:bodyPr>
+          <a:lstStyle/>
+          <a:p>
+            <a:pPr algn="l"/>
+            <a:r>
+              <a:rPr sz="900" b="0" i="0">
                 <a:solidFill>
                   <a:srgbClr val="000000"/>
                 </a:solidFill>
@@ -8620,8 +8620,8 @@
         </p:nvSpPr>
         <p:spPr>
           <a:xfrm>
-            <a:off x="9692640" y="541020"/>
-            <a:ext cx="2194560" cy="548640"/>
+            <a:off x="9619488" y="623316"/>
+            <a:ext cx="2221992" cy="739140"/>
           </a:xfrm>
           <a:prstGeom prst="rect">
             <a:avLst/>
@@ -8663,8 +8663,8 @@
         </p:nvSpPr>
         <p:spPr>
           <a:xfrm>
-            <a:off x="9756648" y="568452"/>
-            <a:ext cx="2194560" cy="128016"/>
+            <a:off x="9692640" y="659892"/>
+            <a:ext cx="2221992" cy="137160"/>
           </a:xfrm>
           <a:prstGeom prst="rect">
             <a:avLst/>
@@ -8698,23 +8698,23 @@
         </p:nvSpPr>
         <p:spPr>
           <a:xfrm>
-            <a:off x="9756648" y="705612"/>
-            <a:ext cx="2121408" cy="365760"/>
-          </a:xfrm>
-          <a:prstGeom prst="rect">
-            <a:avLst/>
-          </a:prstGeom>
-          <a:noFill/>
-        </p:spPr>
-        <p:txBody>
-          <a:bodyPr wrap="square">
-            <a:spAutoFit/>
-          </a:bodyPr>
-          <a:lstStyle/>
-          <a:p>
-            <a:pPr algn="l"/>
-            <a:r>
-              <a:rPr sz="800" b="0" i="0">
+            <a:off x="9692640" y="824484"/>
+            <a:ext cx="2148840" cy="510540"/>
+          </a:xfrm>
+          <a:prstGeom prst="rect">
+            <a:avLst/>
+          </a:prstGeom>
+          <a:noFill/>
+        </p:spPr>
+        <p:txBody>
+          <a:bodyPr wrap="square">
+            <a:spAutoFit/>
+          </a:bodyPr>
+          <a:lstStyle/>
+          <a:p>
+            <a:pPr algn="l"/>
+            <a:r>
+              <a:rPr sz="900" b="0" i="0">
                 <a:solidFill>
                   <a:srgbClr val="000000"/>
                 </a:solidFill>
@@ -8733,7 +8733,7 @@
         </p:nvSpPr>
         <p:spPr>
           <a:xfrm>
-            <a:off x="0" y="1129030"/>
+            <a:off x="0" y="1410970"/>
             <a:ext cx="12188952" cy="6350"/>
           </a:xfrm>
           <a:prstGeom prst="rect">
@@ -8776,8 +8776,8 @@
         </p:nvSpPr>
         <p:spPr>
           <a:xfrm>
-            <a:off x="0" y="1135380"/>
-            <a:ext cx="12188952" cy="640080"/>
+            <a:off x="0" y="1417320"/>
+            <a:ext cx="12188952" cy="848868"/>
           </a:xfrm>
           <a:prstGeom prst="rect">
             <a:avLst/>
@@ -8819,8 +8819,8 @@
         </p:nvSpPr>
         <p:spPr>
           <a:xfrm>
-            <a:off x="256032" y="1171956"/>
-            <a:ext cx="4773168" cy="146304"/>
+            <a:off x="292608" y="1472184"/>
+            <a:ext cx="4562856" cy="164592"/>
           </a:xfrm>
           <a:prstGeom prst="rect">
             <a:avLst/>
@@ -8854,23 +8854,23 @@
         </p:nvSpPr>
         <p:spPr>
           <a:xfrm>
-            <a:off x="256032" y="1336548"/>
-            <a:ext cx="4773168" cy="420624"/>
-          </a:xfrm>
-          <a:prstGeom prst="rect">
-            <a:avLst/>
-          </a:prstGeom>
-          <a:noFill/>
-        </p:spPr>
-        <p:txBody>
-          <a:bodyPr wrap="square">
-            <a:spAutoFit/>
-          </a:bodyPr>
-          <a:lstStyle/>
-          <a:p>
-            <a:pPr algn="l"/>
-            <a:r>
-              <a:rPr sz="800" b="0" i="0">
+            <a:off x="292608" y="1673352"/>
+            <a:ext cx="4562856" cy="537972"/>
+          </a:xfrm>
+          <a:prstGeom prst="rect">
+            <a:avLst/>
+          </a:prstGeom>
+          <a:noFill/>
+        </p:spPr>
+        <p:txBody>
+          <a:bodyPr wrap="square">
+            <a:spAutoFit/>
+          </a:bodyPr>
+          <a:lstStyle/>
+          <a:p>
+            <a:pPr algn="l"/>
+            <a:r>
+              <a:rPr sz="900" b="0" i="0">
                 <a:solidFill>
                   <a:srgbClr val="595959"/>
                 </a:solidFill>
@@ -8889,8 +8889,8 @@
         </p:nvSpPr>
         <p:spPr>
           <a:xfrm>
-            <a:off x="5120640" y="1181100"/>
-            <a:ext cx="2194560" cy="548640"/>
+            <a:off x="4956048" y="1472184"/>
+            <a:ext cx="2221992" cy="739140"/>
           </a:xfrm>
           <a:prstGeom prst="rect">
             <a:avLst/>
@@ -8932,8 +8932,8 @@
         </p:nvSpPr>
         <p:spPr>
           <a:xfrm>
-            <a:off x="5184648" y="1208532"/>
-            <a:ext cx="2194560" cy="128016"/>
+            <a:off x="5029200" y="1508760"/>
+            <a:ext cx="2221992" cy="137160"/>
           </a:xfrm>
           <a:prstGeom prst="rect">
             <a:avLst/>
@@ -8967,23 +8967,23 @@
         </p:nvSpPr>
         <p:spPr>
           <a:xfrm>
-            <a:off x="5184648" y="1345692"/>
-            <a:ext cx="2121408" cy="365760"/>
-          </a:xfrm>
-          <a:prstGeom prst="rect">
-            <a:avLst/>
-          </a:prstGeom>
-          <a:noFill/>
-        </p:spPr>
-        <p:txBody>
-          <a:bodyPr wrap="square">
-            <a:spAutoFit/>
-          </a:bodyPr>
-          <a:lstStyle/>
-          <a:p>
-            <a:pPr algn="l"/>
-            <a:r>
-              <a:rPr sz="800" b="0" i="0">
+            <a:off x="5029200" y="1673352"/>
+            <a:ext cx="2148840" cy="510540"/>
+          </a:xfrm>
+          <a:prstGeom prst="rect">
+            <a:avLst/>
+          </a:prstGeom>
+          <a:noFill/>
+        </p:spPr>
+        <p:txBody>
+          <a:bodyPr wrap="square">
+            <a:spAutoFit/>
+          </a:bodyPr>
+          <a:lstStyle/>
+          <a:p>
+            <a:pPr algn="l"/>
+            <a:r>
+              <a:rPr sz="900" b="0" i="0">
                 <a:solidFill>
                   <a:srgbClr val="000000"/>
                 </a:solidFill>
@@ -9002,8 +9002,8 @@
         </p:nvSpPr>
         <p:spPr>
           <a:xfrm>
-            <a:off x="7406640" y="1181100"/>
-            <a:ext cx="2194560" cy="548640"/>
+            <a:off x="7287768" y="1472184"/>
+            <a:ext cx="2221992" cy="739140"/>
           </a:xfrm>
           <a:prstGeom prst="rect">
             <a:avLst/>
@@ -9045,8 +9045,8 @@
         </p:nvSpPr>
         <p:spPr>
           <a:xfrm>
-            <a:off x="7470648" y="1208532"/>
-            <a:ext cx="2194560" cy="128016"/>
+            <a:off x="7360920" y="1508760"/>
+            <a:ext cx="2221992" cy="137160"/>
           </a:xfrm>
           <a:prstGeom prst="rect">
             <a:avLst/>
@@ -9080,23 +9080,23 @@
         </p:nvSpPr>
         <p:spPr>
           <a:xfrm>
-            <a:off x="7470648" y="1345692"/>
-            <a:ext cx="2121408" cy="365760"/>
-          </a:xfrm>
-          <a:prstGeom prst="rect">
-            <a:avLst/>
-          </a:prstGeom>
-          <a:noFill/>
-        </p:spPr>
-        <p:txBody>
-          <a:bodyPr wrap="square">
-            <a:spAutoFit/>
-          </a:bodyPr>
-          <a:lstStyle/>
-          <a:p>
-            <a:pPr algn="l"/>
-            <a:r>
-              <a:rPr sz="800" b="0" i="0">
+            <a:off x="7360920" y="1673352"/>
+            <a:ext cx="2148840" cy="510540"/>
+          </a:xfrm>
+          <a:prstGeom prst="rect">
+            <a:avLst/>
+          </a:prstGeom>
+          <a:noFill/>
+        </p:spPr>
+        <p:txBody>
+          <a:bodyPr wrap="square">
+            <a:spAutoFit/>
+          </a:bodyPr>
+          <a:lstStyle/>
+          <a:p>
+            <a:pPr algn="l"/>
+            <a:r>
+              <a:rPr sz="900" b="0" i="0">
                 <a:solidFill>
                   <a:srgbClr val="000000"/>
                 </a:solidFill>
@@ -9115,8 +9115,8 @@
         </p:nvSpPr>
         <p:spPr>
           <a:xfrm>
-            <a:off x="9692640" y="1181100"/>
-            <a:ext cx="2194560" cy="548640"/>
+            <a:off x="9619488" y="1472184"/>
+            <a:ext cx="2221992" cy="739140"/>
           </a:xfrm>
           <a:prstGeom prst="rect">
             <a:avLst/>
@@ -9158,8 +9158,8 @@
         </p:nvSpPr>
         <p:spPr>
           <a:xfrm>
-            <a:off x="9756648" y="1208532"/>
-            <a:ext cx="2194560" cy="128016"/>
+            <a:off x="9692640" y="1508760"/>
+            <a:ext cx="2221992" cy="137160"/>
           </a:xfrm>
           <a:prstGeom prst="rect">
             <a:avLst/>
@@ -9193,23 +9193,23 @@
         </p:nvSpPr>
         <p:spPr>
           <a:xfrm>
-            <a:off x="9756648" y="1345692"/>
-            <a:ext cx="2121408" cy="365760"/>
-          </a:xfrm>
-          <a:prstGeom prst="rect">
-            <a:avLst/>
-          </a:prstGeom>
-          <a:noFill/>
-        </p:spPr>
-        <p:txBody>
-          <a:bodyPr wrap="square">
-            <a:spAutoFit/>
-          </a:bodyPr>
-          <a:lstStyle/>
-          <a:p>
-            <a:pPr algn="l"/>
-            <a:r>
-              <a:rPr sz="800" b="0" i="0">
+            <a:off x="9692640" y="1673352"/>
+            <a:ext cx="2148840" cy="510540"/>
+          </a:xfrm>
+          <a:prstGeom prst="rect">
+            <a:avLst/>
+          </a:prstGeom>
+          <a:noFill/>
+        </p:spPr>
+        <p:txBody>
+          <a:bodyPr wrap="square">
+            <a:spAutoFit/>
+          </a:bodyPr>
+          <a:lstStyle/>
+          <a:p>
+            <a:pPr algn="l"/>
+            <a:r>
+              <a:rPr sz="900" b="0" i="0">
                 <a:solidFill>
                   <a:srgbClr val="000000"/>
                 </a:solidFill>
@@ -9228,7 +9228,7 @@
         </p:nvSpPr>
         <p:spPr>
           <a:xfrm>
-            <a:off x="0" y="1769110"/>
+            <a:off x="0" y="2259838"/>
             <a:ext cx="12188952" cy="6350"/>
           </a:xfrm>
           <a:prstGeom prst="rect">
@@ -9271,8 +9271,8 @@
         </p:nvSpPr>
         <p:spPr>
           <a:xfrm>
-            <a:off x="0" y="1775460"/>
-            <a:ext cx="12188952" cy="640080"/>
+            <a:off x="0" y="2266188"/>
+            <a:ext cx="12188952" cy="848868"/>
           </a:xfrm>
           <a:prstGeom prst="rect">
             <a:avLst/>
@@ -9314,8 +9314,8 @@
         </p:nvSpPr>
         <p:spPr>
           <a:xfrm>
-            <a:off x="256032" y="1812036"/>
-            <a:ext cx="4773168" cy="146304"/>
+            <a:off x="292608" y="2321052"/>
+            <a:ext cx="4562856" cy="164592"/>
           </a:xfrm>
           <a:prstGeom prst="rect">
             <a:avLst/>
@@ -9349,23 +9349,23 @@
         </p:nvSpPr>
         <p:spPr>
           <a:xfrm>
-            <a:off x="256032" y="1976628"/>
-            <a:ext cx="4773168" cy="420624"/>
-          </a:xfrm>
-          <a:prstGeom prst="rect">
-            <a:avLst/>
-          </a:prstGeom>
-          <a:noFill/>
-        </p:spPr>
-        <p:txBody>
-          <a:bodyPr wrap="square">
-            <a:spAutoFit/>
-          </a:bodyPr>
-          <a:lstStyle/>
-          <a:p>
-            <a:pPr algn="l"/>
-            <a:r>
-              <a:rPr sz="800" b="0" i="0">
+            <a:off x="292608" y="2522220"/>
+            <a:ext cx="4562856" cy="537972"/>
+          </a:xfrm>
+          <a:prstGeom prst="rect">
+            <a:avLst/>
+          </a:prstGeom>
+          <a:noFill/>
+        </p:spPr>
+        <p:txBody>
+          <a:bodyPr wrap="square">
+            <a:spAutoFit/>
+          </a:bodyPr>
+          <a:lstStyle/>
+          <a:p>
+            <a:pPr algn="l"/>
+            <a:r>
+              <a:rPr sz="900" b="0" i="0">
                 <a:solidFill>
                   <a:srgbClr val="595959"/>
                 </a:solidFill>
@@ -9384,8 +9384,8 @@
         </p:nvSpPr>
         <p:spPr>
           <a:xfrm>
-            <a:off x="5120640" y="1821180"/>
-            <a:ext cx="2194560" cy="548640"/>
+            <a:off x="4956048" y="2321052"/>
+            <a:ext cx="2221992" cy="739140"/>
           </a:xfrm>
           <a:prstGeom prst="rect">
             <a:avLst/>
@@ -9427,8 +9427,8 @@
         </p:nvSpPr>
         <p:spPr>
           <a:xfrm>
-            <a:off x="5184648" y="1848612"/>
-            <a:ext cx="2194560" cy="128016"/>
+            <a:off x="5029200" y="2357628"/>
+            <a:ext cx="2221992" cy="137160"/>
           </a:xfrm>
           <a:prstGeom prst="rect">
             <a:avLst/>
@@ -9462,23 +9462,23 @@
         </p:nvSpPr>
         <p:spPr>
           <a:xfrm>
-            <a:off x="5184648" y="1985772"/>
-            <a:ext cx="2121408" cy="365760"/>
-          </a:xfrm>
-          <a:prstGeom prst="rect">
-            <a:avLst/>
-          </a:prstGeom>
-          <a:noFill/>
-        </p:spPr>
-        <p:txBody>
-          <a:bodyPr wrap="square">
-            <a:spAutoFit/>
-          </a:bodyPr>
-          <a:lstStyle/>
-          <a:p>
-            <a:pPr algn="l"/>
-            <a:r>
-              <a:rPr sz="800" b="0" i="0">
+            <a:off x="5029200" y="2522220"/>
+            <a:ext cx="2148840" cy="510540"/>
+          </a:xfrm>
+          <a:prstGeom prst="rect">
+            <a:avLst/>
+          </a:prstGeom>
+          <a:noFill/>
+        </p:spPr>
+        <p:txBody>
+          <a:bodyPr wrap="square">
+            <a:spAutoFit/>
+          </a:bodyPr>
+          <a:lstStyle/>
+          <a:p>
+            <a:pPr algn="l"/>
+            <a:r>
+              <a:rPr sz="900" b="0" i="0">
                 <a:solidFill>
                   <a:srgbClr val="000000"/>
                 </a:solidFill>
@@ -9497,8 +9497,8 @@
         </p:nvSpPr>
         <p:spPr>
           <a:xfrm>
-            <a:off x="7406640" y="1821180"/>
-            <a:ext cx="2194560" cy="548640"/>
+            <a:off x="7287768" y="2321052"/>
+            <a:ext cx="2221992" cy="739140"/>
           </a:xfrm>
           <a:prstGeom prst="rect">
             <a:avLst/>
@@ -9540,8 +9540,8 @@
         </p:nvSpPr>
         <p:spPr>
           <a:xfrm>
-            <a:off x="7470648" y="1848612"/>
-            <a:ext cx="2194560" cy="128016"/>
+            <a:off x="7360920" y="2357628"/>
+            <a:ext cx="2221992" cy="137160"/>
           </a:xfrm>
           <a:prstGeom prst="rect">
             <a:avLst/>
@@ -9575,23 +9575,23 @@
         </p:nvSpPr>
         <p:spPr>
           <a:xfrm>
-            <a:off x="7470648" y="1985772"/>
-            <a:ext cx="2121408" cy="365760"/>
-          </a:xfrm>
-          <a:prstGeom prst="rect">
-            <a:avLst/>
-          </a:prstGeom>
-          <a:noFill/>
-        </p:spPr>
-        <p:txBody>
-          <a:bodyPr wrap="square">
-            <a:spAutoFit/>
-          </a:bodyPr>
-          <a:lstStyle/>
-          <a:p>
-            <a:pPr algn="l"/>
-            <a:r>
-              <a:rPr sz="800" b="0" i="0">
+            <a:off x="7360920" y="2522220"/>
+            <a:ext cx="2148840" cy="510540"/>
+          </a:xfrm>
+          <a:prstGeom prst="rect">
+            <a:avLst/>
+          </a:prstGeom>
+          <a:noFill/>
+        </p:spPr>
+        <p:txBody>
+          <a:bodyPr wrap="square">
+            <a:spAutoFit/>
+          </a:bodyPr>
+          <a:lstStyle/>
+          <a:p>
+            <a:pPr algn="l"/>
+            <a:r>
+              <a:rPr sz="900" b="0" i="0">
                 <a:solidFill>
                   <a:srgbClr val="000000"/>
                 </a:solidFill>
@@ -9610,8 +9610,8 @@
         </p:nvSpPr>
         <p:spPr>
           <a:xfrm>
-            <a:off x="9692640" y="1821180"/>
-            <a:ext cx="2194560" cy="548640"/>
+            <a:off x="9619488" y="2321052"/>
+            <a:ext cx="2221992" cy="739140"/>
           </a:xfrm>
           <a:prstGeom prst="rect">
             <a:avLst/>
@@ -9653,8 +9653,8 @@
         </p:nvSpPr>
         <p:spPr>
           <a:xfrm>
-            <a:off x="9756648" y="1848612"/>
-            <a:ext cx="2194560" cy="128016"/>
+            <a:off x="9692640" y="2357628"/>
+            <a:ext cx="2221992" cy="137160"/>
           </a:xfrm>
           <a:prstGeom prst="rect">
             <a:avLst/>
@@ -9688,23 +9688,23 @@
         </p:nvSpPr>
         <p:spPr>
           <a:xfrm>
-            <a:off x="9756648" y="1985772"/>
-            <a:ext cx="2121408" cy="365760"/>
-          </a:xfrm>
-          <a:prstGeom prst="rect">
-            <a:avLst/>
-          </a:prstGeom>
-          <a:noFill/>
-        </p:spPr>
-        <p:txBody>
-          <a:bodyPr wrap="square">
-            <a:spAutoFit/>
-          </a:bodyPr>
-          <a:lstStyle/>
-          <a:p>
-            <a:pPr algn="l"/>
-            <a:r>
-              <a:rPr sz="800" b="0" i="0">
+            <a:off x="9692640" y="2522220"/>
+            <a:ext cx="2148840" cy="510540"/>
+          </a:xfrm>
+          <a:prstGeom prst="rect">
+            <a:avLst/>
+          </a:prstGeom>
+          <a:noFill/>
+        </p:spPr>
+        <p:txBody>
+          <a:bodyPr wrap="square">
+            <a:spAutoFit/>
+          </a:bodyPr>
+          <a:lstStyle/>
+          <a:p>
+            <a:pPr algn="l"/>
+            <a:r>
+              <a:rPr sz="900" b="0" i="0">
                 <a:solidFill>
                   <a:srgbClr val="000000"/>
                 </a:solidFill>
@@ -9723,7 +9723,7 @@
         </p:nvSpPr>
         <p:spPr>
           <a:xfrm>
-            <a:off x="0" y="2409190"/>
+            <a:off x="0" y="3108706"/>
             <a:ext cx="12188952" cy="6350"/>
           </a:xfrm>
           <a:prstGeom prst="rect">
@@ -9766,8 +9766,8 @@
         </p:nvSpPr>
         <p:spPr>
           <a:xfrm>
-            <a:off x="0" y="2415540"/>
-            <a:ext cx="12188952" cy="640080"/>
+            <a:off x="0" y="3115056"/>
+            <a:ext cx="12188952" cy="848868"/>
           </a:xfrm>
           <a:prstGeom prst="rect">
             <a:avLst/>
@@ -9809,8 +9809,8 @@
         </p:nvSpPr>
         <p:spPr>
           <a:xfrm>
-            <a:off x="256032" y="2452116"/>
-            <a:ext cx="4773168" cy="146304"/>
+            <a:off x="292608" y="3169920"/>
+            <a:ext cx="4562856" cy="164592"/>
           </a:xfrm>
           <a:prstGeom prst="rect">
             <a:avLst/>
@@ -9844,23 +9844,23 @@
         </p:nvSpPr>
         <p:spPr>
           <a:xfrm>
-            <a:off x="256032" y="2616708"/>
-            <a:ext cx="4773168" cy="420624"/>
-          </a:xfrm>
-          <a:prstGeom prst="rect">
-            <a:avLst/>
-          </a:prstGeom>
-          <a:noFill/>
-        </p:spPr>
-        <p:txBody>
-          <a:bodyPr wrap="square">
-            <a:spAutoFit/>
-          </a:bodyPr>
-          <a:lstStyle/>
-          <a:p>
-            <a:pPr algn="l"/>
-            <a:r>
-              <a:rPr sz="800" b="0" i="0">
+            <a:off x="292608" y="3371088"/>
+            <a:ext cx="4562856" cy="537972"/>
+          </a:xfrm>
+          <a:prstGeom prst="rect">
+            <a:avLst/>
+          </a:prstGeom>
+          <a:noFill/>
+        </p:spPr>
+        <p:txBody>
+          <a:bodyPr wrap="square">
+            <a:spAutoFit/>
+          </a:bodyPr>
+          <a:lstStyle/>
+          <a:p>
+            <a:pPr algn="l"/>
+            <a:r>
+              <a:rPr sz="900" b="0" i="0">
                 <a:solidFill>
                   <a:srgbClr val="595959"/>
                 </a:solidFill>
@@ -9879,8 +9879,8 @@
         </p:nvSpPr>
         <p:spPr>
           <a:xfrm>
-            <a:off x="5120640" y="2461260"/>
-            <a:ext cx="2194560" cy="548640"/>
+            <a:off x="4956048" y="3169920"/>
+            <a:ext cx="2221992" cy="739140"/>
           </a:xfrm>
           <a:prstGeom prst="rect">
             <a:avLst/>
@@ -9922,8 +9922,8 @@
         </p:nvSpPr>
         <p:spPr>
           <a:xfrm>
-            <a:off x="5184648" y="2488692"/>
-            <a:ext cx="2194560" cy="128016"/>
+            <a:off x="5029200" y="3206496"/>
+            <a:ext cx="2221992" cy="137160"/>
           </a:xfrm>
           <a:prstGeom prst="rect">
             <a:avLst/>
@@ -9957,23 +9957,23 @@
         </p:nvSpPr>
         <p:spPr>
           <a:xfrm>
-            <a:off x="5184648" y="2625852"/>
-            <a:ext cx="2121408" cy="365760"/>
-          </a:xfrm>
-          <a:prstGeom prst="rect">
-            <a:avLst/>
-          </a:prstGeom>
-          <a:noFill/>
-        </p:spPr>
-        <p:txBody>
-          <a:bodyPr wrap="square">
-            <a:spAutoFit/>
-          </a:bodyPr>
-          <a:lstStyle/>
-          <a:p>
-            <a:pPr algn="l"/>
-            <a:r>
-              <a:rPr sz="800" b="0" i="0">
+            <a:off x="5029200" y="3371088"/>
+            <a:ext cx="2148840" cy="510540"/>
+          </a:xfrm>
+          <a:prstGeom prst="rect">
+            <a:avLst/>
+          </a:prstGeom>
+          <a:noFill/>
+        </p:spPr>
+        <p:txBody>
+          <a:bodyPr wrap="square">
+            <a:spAutoFit/>
+          </a:bodyPr>
+          <a:lstStyle/>
+          <a:p>
+            <a:pPr algn="l"/>
+            <a:r>
+              <a:rPr sz="900" b="0" i="0">
                 <a:solidFill>
                   <a:srgbClr val="000000"/>
                 </a:solidFill>
@@ -9992,8 +9992,8 @@
         </p:nvSpPr>
         <p:spPr>
           <a:xfrm>
-            <a:off x="7406640" y="2461260"/>
-            <a:ext cx="2194560" cy="548640"/>
+            <a:off x="7287768" y="3169920"/>
+            <a:ext cx="2221992" cy="739140"/>
           </a:xfrm>
           <a:prstGeom prst="rect">
             <a:avLst/>
@@ -10035,8 +10035,8 @@
         </p:nvSpPr>
         <p:spPr>
           <a:xfrm>
-            <a:off x="7470648" y="2488692"/>
-            <a:ext cx="2194560" cy="128016"/>
+            <a:off x="7360920" y="3206496"/>
+            <a:ext cx="2221992" cy="137160"/>
           </a:xfrm>
           <a:prstGeom prst="rect">
             <a:avLst/>
@@ -10070,23 +10070,23 @@
         </p:nvSpPr>
         <p:spPr>
           <a:xfrm>
-            <a:off x="7470648" y="2625852"/>
-            <a:ext cx="2121408" cy="365760"/>
-          </a:xfrm>
-          <a:prstGeom prst="rect">
-            <a:avLst/>
-          </a:prstGeom>
-          <a:noFill/>
-        </p:spPr>
-        <p:txBody>
-          <a:bodyPr wrap="square">
-            <a:spAutoFit/>
-          </a:bodyPr>
-          <a:lstStyle/>
-          <a:p>
-            <a:pPr algn="l"/>
-            <a:r>
-              <a:rPr sz="800" b="0" i="0">
+            <a:off x="7360920" y="3371088"/>
+            <a:ext cx="2148840" cy="510540"/>
+          </a:xfrm>
+          <a:prstGeom prst="rect">
+            <a:avLst/>
+          </a:prstGeom>
+          <a:noFill/>
+        </p:spPr>
+        <p:txBody>
+          <a:bodyPr wrap="square">
+            <a:spAutoFit/>
+          </a:bodyPr>
+          <a:lstStyle/>
+          <a:p>
+            <a:pPr algn="l"/>
+            <a:r>
+              <a:rPr sz="900" b="0" i="0">
                 <a:solidFill>
                   <a:srgbClr val="000000"/>
                 </a:solidFill>
@@ -10105,8 +10105,8 @@
         </p:nvSpPr>
         <p:spPr>
           <a:xfrm>
-            <a:off x="9692640" y="2461260"/>
-            <a:ext cx="2194560" cy="548640"/>
+            <a:off x="9619488" y="3169920"/>
+            <a:ext cx="2221992" cy="739140"/>
           </a:xfrm>
           <a:prstGeom prst="rect">
             <a:avLst/>
@@ -10148,8 +10148,8 @@
         </p:nvSpPr>
         <p:spPr>
           <a:xfrm>
-            <a:off x="9756648" y="2488692"/>
-            <a:ext cx="2194560" cy="128016"/>
+            <a:off x="9692640" y="3206496"/>
+            <a:ext cx="2221992" cy="137160"/>
           </a:xfrm>
           <a:prstGeom prst="rect">
             <a:avLst/>
@@ -10183,23 +10183,23 @@
         </p:nvSpPr>
         <p:spPr>
           <a:xfrm>
-            <a:off x="9756648" y="2625852"/>
-            <a:ext cx="2121408" cy="365760"/>
-          </a:xfrm>
-          <a:prstGeom prst="rect">
-            <a:avLst/>
-          </a:prstGeom>
-          <a:noFill/>
-        </p:spPr>
-        <p:txBody>
-          <a:bodyPr wrap="square">
-            <a:spAutoFit/>
-          </a:bodyPr>
-          <a:lstStyle/>
-          <a:p>
-            <a:pPr algn="l"/>
-            <a:r>
-              <a:rPr sz="800" b="0" i="0">
+            <a:off x="9692640" y="3371088"/>
+            <a:ext cx="2148840" cy="510540"/>
+          </a:xfrm>
+          <a:prstGeom prst="rect">
+            <a:avLst/>
+          </a:prstGeom>
+          <a:noFill/>
+        </p:spPr>
+        <p:txBody>
+          <a:bodyPr wrap="square">
+            <a:spAutoFit/>
+          </a:bodyPr>
+          <a:lstStyle/>
+          <a:p>
+            <a:pPr algn="l"/>
+            <a:r>
+              <a:rPr sz="900" b="0" i="0">
                 <a:solidFill>
                   <a:srgbClr val="000000"/>
                 </a:solidFill>
@@ -10218,7 +10218,7 @@
         </p:nvSpPr>
         <p:spPr>
           <a:xfrm>
-            <a:off x="0" y="3049270"/>
+            <a:off x="0" y="3957574"/>
             <a:ext cx="12188952" cy="6350"/>
           </a:xfrm>
           <a:prstGeom prst="rect">
@@ -10261,8 +10261,8 @@
         </p:nvSpPr>
         <p:spPr>
           <a:xfrm>
-            <a:off x="0" y="3101340"/>
-            <a:ext cx="12188952" cy="201168"/>
+            <a:off x="0" y="4018788"/>
+            <a:ext cx="12188952" cy="237744"/>
           </a:xfrm>
           <a:prstGeom prst="rect">
             <a:avLst/>
@@ -10304,23 +10304,23 @@
         </p:nvSpPr>
         <p:spPr>
           <a:xfrm>
-            <a:off x="256032" y="3128772"/>
-            <a:ext cx="4818888" cy="201168"/>
-          </a:xfrm>
-          <a:prstGeom prst="rect">
-            <a:avLst/>
-          </a:prstGeom>
-          <a:noFill/>
-        </p:spPr>
-        <p:txBody>
-          <a:bodyPr wrap="square">
-            <a:spAutoFit/>
-          </a:bodyPr>
-          <a:lstStyle/>
-          <a:p>
-            <a:pPr algn="l"/>
-            <a:r>
-              <a:rPr sz="800" b="1" i="0">
+            <a:off x="292608" y="4055364"/>
+            <a:ext cx="4608576" cy="201168"/>
+          </a:xfrm>
+          <a:prstGeom prst="rect">
+            <a:avLst/>
+          </a:prstGeom>
+          <a:noFill/>
+        </p:spPr>
+        <p:txBody>
+          <a:bodyPr wrap="square">
+            <a:spAutoFit/>
+          </a:bodyPr>
+          <a:lstStyle/>
+          <a:p>
+            <a:pPr algn="l"/>
+            <a:r>
+              <a:rPr sz="900" b="1" i="0">
                 <a:solidFill>
                   <a:srgbClr val="FFFFFF"/>
                 </a:solidFill>
@@ -10339,8 +10339,8 @@
         </p:nvSpPr>
         <p:spPr>
           <a:xfrm>
-            <a:off x="0" y="3302508"/>
-            <a:ext cx="12188952" cy="640080"/>
+            <a:off x="0" y="4256532"/>
+            <a:ext cx="12188952" cy="848868"/>
           </a:xfrm>
           <a:prstGeom prst="rect">
             <a:avLst/>
@@ -10382,8 +10382,8 @@
         </p:nvSpPr>
         <p:spPr>
           <a:xfrm>
-            <a:off x="256032" y="3339084"/>
-            <a:ext cx="4773168" cy="146304"/>
+            <a:off x="292608" y="4311396"/>
+            <a:ext cx="4562856" cy="164592"/>
           </a:xfrm>
           <a:prstGeom prst="rect">
             <a:avLst/>
@@ -10417,23 +10417,23 @@
         </p:nvSpPr>
         <p:spPr>
           <a:xfrm>
-            <a:off x="256032" y="3503676"/>
-            <a:ext cx="4773168" cy="420624"/>
-          </a:xfrm>
-          <a:prstGeom prst="rect">
-            <a:avLst/>
-          </a:prstGeom>
-          <a:noFill/>
-        </p:spPr>
-        <p:txBody>
-          <a:bodyPr wrap="square">
-            <a:spAutoFit/>
-          </a:bodyPr>
-          <a:lstStyle/>
-          <a:p>
-            <a:pPr algn="l"/>
-            <a:r>
-              <a:rPr sz="800" b="0" i="0">
+            <a:off x="292608" y="4512564"/>
+            <a:ext cx="4562856" cy="537972"/>
+          </a:xfrm>
+          <a:prstGeom prst="rect">
+            <a:avLst/>
+          </a:prstGeom>
+          <a:noFill/>
+        </p:spPr>
+        <p:txBody>
+          <a:bodyPr wrap="square">
+            <a:spAutoFit/>
+          </a:bodyPr>
+          <a:lstStyle/>
+          <a:p>
+            <a:pPr algn="l"/>
+            <a:r>
+              <a:rPr sz="900" b="0" i="0">
                 <a:solidFill>
                   <a:srgbClr val="595959"/>
                 </a:solidFill>
@@ -10452,8 +10452,8 @@
         </p:nvSpPr>
         <p:spPr>
           <a:xfrm>
-            <a:off x="5120640" y="3348228"/>
-            <a:ext cx="2194560" cy="548640"/>
+            <a:off x="4956048" y="4311396"/>
+            <a:ext cx="2221992" cy="739140"/>
           </a:xfrm>
           <a:prstGeom prst="rect">
             <a:avLst/>
@@ -10495,8 +10495,8 @@
         </p:nvSpPr>
         <p:spPr>
           <a:xfrm>
-            <a:off x="5184648" y="3375660"/>
-            <a:ext cx="2194560" cy="128016"/>
+            <a:off x="5029200" y="4347972"/>
+            <a:ext cx="2221992" cy="137160"/>
           </a:xfrm>
           <a:prstGeom prst="rect">
             <a:avLst/>
@@ -10530,23 +10530,23 @@
         </p:nvSpPr>
         <p:spPr>
           <a:xfrm>
-            <a:off x="5184648" y="3512820"/>
-            <a:ext cx="2121408" cy="365760"/>
-          </a:xfrm>
-          <a:prstGeom prst="rect">
-            <a:avLst/>
-          </a:prstGeom>
-          <a:noFill/>
-        </p:spPr>
-        <p:txBody>
-          <a:bodyPr wrap="square">
-            <a:spAutoFit/>
-          </a:bodyPr>
-          <a:lstStyle/>
-          <a:p>
-            <a:pPr algn="l"/>
-            <a:r>
-              <a:rPr sz="800" b="0" i="0">
+            <a:off x="5029200" y="4512564"/>
+            <a:ext cx="2148840" cy="510540"/>
+          </a:xfrm>
+          <a:prstGeom prst="rect">
+            <a:avLst/>
+          </a:prstGeom>
+          <a:noFill/>
+        </p:spPr>
+        <p:txBody>
+          <a:bodyPr wrap="square">
+            <a:spAutoFit/>
+          </a:bodyPr>
+          <a:lstStyle/>
+          <a:p>
+            <a:pPr algn="l"/>
+            <a:r>
+              <a:rPr sz="900" b="0" i="0">
                 <a:solidFill>
                   <a:srgbClr val="000000"/>
                 </a:solidFill>
@@ -10565,8 +10565,8 @@
         </p:nvSpPr>
         <p:spPr>
           <a:xfrm>
-            <a:off x="7406640" y="3348228"/>
-            <a:ext cx="2194560" cy="548640"/>
+            <a:off x="7287768" y="4311396"/>
+            <a:ext cx="2221992" cy="739140"/>
           </a:xfrm>
           <a:prstGeom prst="rect">
             <a:avLst/>
@@ -10608,8 +10608,8 @@
         </p:nvSpPr>
         <p:spPr>
           <a:xfrm>
-            <a:off x="7470648" y="3375660"/>
-            <a:ext cx="2194560" cy="128016"/>
+            <a:off x="7360920" y="4347972"/>
+            <a:ext cx="2221992" cy="137160"/>
           </a:xfrm>
           <a:prstGeom prst="rect">
             <a:avLst/>
@@ -10643,23 +10643,23 @@
         </p:nvSpPr>
         <p:spPr>
           <a:xfrm>
-            <a:off x="7470648" y="3512820"/>
-            <a:ext cx="2121408" cy="365760"/>
-          </a:xfrm>
-          <a:prstGeom prst="rect">
-            <a:avLst/>
-          </a:prstGeom>
-          <a:noFill/>
-        </p:spPr>
-        <p:txBody>
-          <a:bodyPr wrap="square">
-            <a:spAutoFit/>
-          </a:bodyPr>
-          <a:lstStyle/>
-          <a:p>
-            <a:pPr algn="l"/>
-            <a:r>
-              <a:rPr sz="800" b="0" i="0">
+            <a:off x="7360920" y="4512564"/>
+            <a:ext cx="2148840" cy="510540"/>
+          </a:xfrm>
+          <a:prstGeom prst="rect">
+            <a:avLst/>
+          </a:prstGeom>
+          <a:noFill/>
+        </p:spPr>
+        <p:txBody>
+          <a:bodyPr wrap="square">
+            <a:spAutoFit/>
+          </a:bodyPr>
+          <a:lstStyle/>
+          <a:p>
+            <a:pPr algn="l"/>
+            <a:r>
+              <a:rPr sz="900" b="0" i="0">
                 <a:solidFill>
                   <a:srgbClr val="000000"/>
                 </a:solidFill>
@@ -10678,8 +10678,8 @@
         </p:nvSpPr>
         <p:spPr>
           <a:xfrm>
-            <a:off x="9692640" y="3348228"/>
-            <a:ext cx="2194560" cy="548640"/>
+            <a:off x="9619488" y="4311396"/>
+            <a:ext cx="2221992" cy="739140"/>
           </a:xfrm>
           <a:prstGeom prst="rect">
             <a:avLst/>
@@ -10721,8 +10721,8 @@
         </p:nvSpPr>
         <p:spPr>
           <a:xfrm>
-            <a:off x="9756648" y="3375660"/>
-            <a:ext cx="2194560" cy="128016"/>
+            <a:off x="9692640" y="4347972"/>
+            <a:ext cx="2221992" cy="137160"/>
           </a:xfrm>
           <a:prstGeom prst="rect">
             <a:avLst/>
@@ -10756,23 +10756,23 @@
         </p:nvSpPr>
         <p:spPr>
           <a:xfrm>
-            <a:off x="9756648" y="3512820"/>
-            <a:ext cx="2121408" cy="365760"/>
-          </a:xfrm>
-          <a:prstGeom prst="rect">
-            <a:avLst/>
-          </a:prstGeom>
-          <a:noFill/>
-        </p:spPr>
-        <p:txBody>
-          <a:bodyPr wrap="square">
-            <a:spAutoFit/>
-          </a:bodyPr>
-          <a:lstStyle/>
-          <a:p>
-            <a:pPr algn="l"/>
-            <a:r>
-              <a:rPr sz="800" b="0" i="0">
+            <a:off x="9692640" y="4512564"/>
+            <a:ext cx="2148840" cy="510540"/>
+          </a:xfrm>
+          <a:prstGeom prst="rect">
+            <a:avLst/>
+          </a:prstGeom>
+          <a:noFill/>
+        </p:spPr>
+        <p:txBody>
+          <a:bodyPr wrap="square">
+            <a:spAutoFit/>
+          </a:bodyPr>
+          <a:lstStyle/>
+          <a:p>
+            <a:pPr algn="l"/>
+            <a:r>
+              <a:rPr sz="900" b="0" i="0">
                 <a:solidFill>
                   <a:srgbClr val="000000"/>
                 </a:solidFill>
@@ -10791,7 +10791,7 @@
         </p:nvSpPr>
         <p:spPr>
           <a:xfrm>
-            <a:off x="0" y="3936238"/>
+            <a:off x="0" y="5099050"/>
             <a:ext cx="12188952" cy="6350"/>
           </a:xfrm>
           <a:prstGeom prst="rect">
@@ -10834,8 +10834,8 @@
         </p:nvSpPr>
         <p:spPr>
           <a:xfrm>
-            <a:off x="0" y="3942588"/>
-            <a:ext cx="12188952" cy="640080"/>
+            <a:off x="0" y="5105400"/>
+            <a:ext cx="12188952" cy="848868"/>
           </a:xfrm>
           <a:prstGeom prst="rect">
             <a:avLst/>
@@ -10877,8 +10877,8 @@
         </p:nvSpPr>
         <p:spPr>
           <a:xfrm>
-            <a:off x="256032" y="3979164"/>
-            <a:ext cx="4773168" cy="146304"/>
+            <a:off x="292608" y="5160264"/>
+            <a:ext cx="4562856" cy="164592"/>
           </a:xfrm>
           <a:prstGeom prst="rect">
             <a:avLst/>
@@ -10912,23 +10912,23 @@
         </p:nvSpPr>
         <p:spPr>
           <a:xfrm>
-            <a:off x="256032" y="4143756"/>
-            <a:ext cx="4773168" cy="420624"/>
-          </a:xfrm>
-          <a:prstGeom prst="rect">
-            <a:avLst/>
-          </a:prstGeom>
-          <a:noFill/>
-        </p:spPr>
-        <p:txBody>
-          <a:bodyPr wrap="square">
-            <a:spAutoFit/>
-          </a:bodyPr>
-          <a:lstStyle/>
-          <a:p>
-            <a:pPr algn="l"/>
-            <a:r>
-              <a:rPr sz="800" b="0" i="0">
+            <a:off x="292608" y="5361432"/>
+            <a:ext cx="4562856" cy="537972"/>
+          </a:xfrm>
+          <a:prstGeom prst="rect">
+            <a:avLst/>
+          </a:prstGeom>
+          <a:noFill/>
+        </p:spPr>
+        <p:txBody>
+          <a:bodyPr wrap="square">
+            <a:spAutoFit/>
+          </a:bodyPr>
+          <a:lstStyle/>
+          <a:p>
+            <a:pPr algn="l"/>
+            <a:r>
+              <a:rPr sz="900" b="0" i="0">
                 <a:solidFill>
                   <a:srgbClr val="595959"/>
                 </a:solidFill>
@@ -10947,8 +10947,8 @@
         </p:nvSpPr>
         <p:spPr>
           <a:xfrm>
-            <a:off x="5120640" y="3988308"/>
-            <a:ext cx="2194560" cy="548640"/>
+            <a:off x="4956048" y="5160264"/>
+            <a:ext cx="2221992" cy="739140"/>
           </a:xfrm>
           <a:prstGeom prst="rect">
             <a:avLst/>
@@ -10990,8 +10990,8 @@
         </p:nvSpPr>
         <p:spPr>
           <a:xfrm>
-            <a:off x="5184648" y="4015740"/>
-            <a:ext cx="2194560" cy="128016"/>
+            <a:off x="5029200" y="5196840"/>
+            <a:ext cx="2221992" cy="137160"/>
           </a:xfrm>
           <a:prstGeom prst="rect">
             <a:avLst/>
@@ -11025,23 +11025,23 @@
         </p:nvSpPr>
         <p:spPr>
           <a:xfrm>
-            <a:off x="5184648" y="4152900"/>
-            <a:ext cx="2121408" cy="365760"/>
-          </a:xfrm>
-          <a:prstGeom prst="rect">
-            <a:avLst/>
-          </a:prstGeom>
-          <a:noFill/>
-        </p:spPr>
-        <p:txBody>
-          <a:bodyPr wrap="square">
-            <a:spAutoFit/>
-          </a:bodyPr>
-          <a:lstStyle/>
-          <a:p>
-            <a:pPr algn="l"/>
-            <a:r>
-              <a:rPr sz="800" b="0" i="0">
+            <a:off x="5029200" y="5361432"/>
+            <a:ext cx="2148840" cy="510540"/>
+          </a:xfrm>
+          <a:prstGeom prst="rect">
+            <a:avLst/>
+          </a:prstGeom>
+          <a:noFill/>
+        </p:spPr>
+        <p:txBody>
+          <a:bodyPr wrap="square">
+            <a:spAutoFit/>
+          </a:bodyPr>
+          <a:lstStyle/>
+          <a:p>
+            <a:pPr algn="l"/>
+            <a:r>
+              <a:rPr sz="900" b="0" i="0">
                 <a:solidFill>
                   <a:srgbClr val="000000"/>
                 </a:solidFill>
@@ -11060,8 +11060,8 @@
         </p:nvSpPr>
         <p:spPr>
           <a:xfrm>
-            <a:off x="7406640" y="3988308"/>
-            <a:ext cx="2194560" cy="548640"/>
+            <a:off x="7287768" y="5160264"/>
+            <a:ext cx="2221992" cy="739140"/>
           </a:xfrm>
           <a:prstGeom prst="rect">
             <a:avLst/>
@@ -11103,8 +11103,8 @@
         </p:nvSpPr>
         <p:spPr>
           <a:xfrm>
-            <a:off x="7470648" y="4015740"/>
-            <a:ext cx="2194560" cy="128016"/>
+            <a:off x="7360920" y="5196840"/>
+            <a:ext cx="2221992" cy="137160"/>
           </a:xfrm>
           <a:prstGeom prst="rect">
             <a:avLst/>
@@ -11138,23 +11138,23 @@
         </p:nvSpPr>
         <p:spPr>
           <a:xfrm>
-            <a:off x="7470648" y="4152900"/>
-            <a:ext cx="2121408" cy="365760"/>
-          </a:xfrm>
-          <a:prstGeom prst="rect">
-            <a:avLst/>
-          </a:prstGeom>
-          <a:noFill/>
-        </p:spPr>
-        <p:txBody>
-          <a:bodyPr wrap="square">
-            <a:spAutoFit/>
-          </a:bodyPr>
-          <a:lstStyle/>
-          <a:p>
-            <a:pPr algn="l"/>
-            <a:r>
-              <a:rPr sz="800" b="0" i="0">
+            <a:off x="7360920" y="5361432"/>
+            <a:ext cx="2148840" cy="510540"/>
+          </a:xfrm>
+          <a:prstGeom prst="rect">
+            <a:avLst/>
+          </a:prstGeom>
+          <a:noFill/>
+        </p:spPr>
+        <p:txBody>
+          <a:bodyPr wrap="square">
+            <a:spAutoFit/>
+          </a:bodyPr>
+          <a:lstStyle/>
+          <a:p>
+            <a:pPr algn="l"/>
+            <a:r>
+              <a:rPr sz="900" b="0" i="0">
                 <a:solidFill>
                   <a:srgbClr val="000000"/>
                 </a:solidFill>
@@ -11173,8 +11173,8 @@
         </p:nvSpPr>
         <p:spPr>
           <a:xfrm>
-            <a:off x="9692640" y="3988308"/>
-            <a:ext cx="2194560" cy="548640"/>
+            <a:off x="9619488" y="5160264"/>
+            <a:ext cx="2221992" cy="739140"/>
           </a:xfrm>
           <a:prstGeom prst="rect">
             <a:avLst/>
@@ -11216,8 +11216,8 @@
         </p:nvSpPr>
         <p:spPr>
           <a:xfrm>
-            <a:off x="9756648" y="4015740"/>
-            <a:ext cx="2194560" cy="128016"/>
+            <a:off x="9692640" y="5196840"/>
+            <a:ext cx="2221992" cy="137160"/>
           </a:xfrm>
           <a:prstGeom prst="rect">
             <a:avLst/>
@@ -11251,23 +11251,23 @@
         </p:nvSpPr>
         <p:spPr>
           <a:xfrm>
-            <a:off x="9756648" y="4152900"/>
-            <a:ext cx="2121408" cy="365760"/>
-          </a:xfrm>
-          <a:prstGeom prst="rect">
-            <a:avLst/>
-          </a:prstGeom>
-          <a:noFill/>
-        </p:spPr>
-        <p:txBody>
-          <a:bodyPr wrap="square">
-            <a:spAutoFit/>
-          </a:bodyPr>
-          <a:lstStyle/>
-          <a:p>
-            <a:pPr algn="l"/>
-            <a:r>
-              <a:rPr sz="800" b="0" i="0">
+            <a:off x="9692640" y="5361432"/>
+            <a:ext cx="2148840" cy="510540"/>
+          </a:xfrm>
+          <a:prstGeom prst="rect">
+            <a:avLst/>
+          </a:prstGeom>
+          <a:noFill/>
+        </p:spPr>
+        <p:txBody>
+          <a:bodyPr wrap="square">
+            <a:spAutoFit/>
+          </a:bodyPr>
+          <a:lstStyle/>
+          <a:p>
+            <a:pPr algn="l"/>
+            <a:r>
+              <a:rPr sz="900" b="0" i="0">
                 <a:solidFill>
                   <a:srgbClr val="000000"/>
                 </a:solidFill>
@@ -11286,7 +11286,7 @@
         </p:nvSpPr>
         <p:spPr>
           <a:xfrm>
-            <a:off x="0" y="4576318"/>
+            <a:off x="0" y="5947918"/>
             <a:ext cx="12188952" cy="6350"/>
           </a:xfrm>
           <a:prstGeom prst="rect">
@@ -11329,8 +11329,8 @@
         </p:nvSpPr>
         <p:spPr>
           <a:xfrm>
-            <a:off x="0" y="4582668"/>
-            <a:ext cx="12188952" cy="640080"/>
+            <a:off x="0" y="5954268"/>
+            <a:ext cx="12188952" cy="848868"/>
           </a:xfrm>
           <a:prstGeom prst="rect">
             <a:avLst/>
@@ -11372,8 +11372,8 @@
         </p:nvSpPr>
         <p:spPr>
           <a:xfrm>
-            <a:off x="256032" y="4619244"/>
-            <a:ext cx="4773168" cy="146304"/>
+            <a:off x="292608" y="6009132"/>
+            <a:ext cx="4562856" cy="164592"/>
           </a:xfrm>
           <a:prstGeom prst="rect">
             <a:avLst/>
@@ -11407,23 +11407,23 @@
         </p:nvSpPr>
         <p:spPr>
           <a:xfrm>
-            <a:off x="256032" y="4783836"/>
-            <a:ext cx="4773168" cy="420624"/>
-          </a:xfrm>
-          <a:prstGeom prst="rect">
-            <a:avLst/>
-          </a:prstGeom>
-          <a:noFill/>
-        </p:spPr>
-        <p:txBody>
-          <a:bodyPr wrap="square">
-            <a:spAutoFit/>
-          </a:bodyPr>
-          <a:lstStyle/>
-          <a:p>
-            <a:pPr algn="l"/>
-            <a:r>
-              <a:rPr sz="800" b="0" i="0">
+            <a:off x="292608" y="6210300"/>
+            <a:ext cx="4562856" cy="537972"/>
+          </a:xfrm>
+          <a:prstGeom prst="rect">
+            <a:avLst/>
+          </a:prstGeom>
+          <a:noFill/>
+        </p:spPr>
+        <p:txBody>
+          <a:bodyPr wrap="square">
+            <a:spAutoFit/>
+          </a:bodyPr>
+          <a:lstStyle/>
+          <a:p>
+            <a:pPr algn="l"/>
+            <a:r>
+              <a:rPr sz="900" b="0" i="0">
                 <a:solidFill>
                   <a:srgbClr val="595959"/>
                 </a:solidFill>
@@ -11442,8 +11442,8 @@
         </p:nvSpPr>
         <p:spPr>
           <a:xfrm>
-            <a:off x="5120640" y="4628388"/>
-            <a:ext cx="2194560" cy="548640"/>
+            <a:off x="4956048" y="6009132"/>
+            <a:ext cx="2221992" cy="739140"/>
           </a:xfrm>
           <a:prstGeom prst="rect">
             <a:avLst/>
@@ -11485,8 +11485,8 @@
         </p:nvSpPr>
         <p:spPr>
           <a:xfrm>
-            <a:off x="5184648" y="4655820"/>
-            <a:ext cx="2194560" cy="128016"/>
+            <a:off x="5029200" y="6045708"/>
+            <a:ext cx="2221992" cy="137160"/>
           </a:xfrm>
           <a:prstGeom prst="rect">
             <a:avLst/>
@@ -11520,23 +11520,23 @@
         </p:nvSpPr>
         <p:spPr>
           <a:xfrm>
-            <a:off x="5184648" y="4792980"/>
-            <a:ext cx="2121408" cy="365760"/>
-          </a:xfrm>
-          <a:prstGeom prst="rect">
-            <a:avLst/>
-          </a:prstGeom>
-          <a:noFill/>
-        </p:spPr>
-        <p:txBody>
-          <a:bodyPr wrap="square">
-            <a:spAutoFit/>
-          </a:bodyPr>
-          <a:lstStyle/>
-          <a:p>
-            <a:pPr algn="l"/>
-            <a:r>
-              <a:rPr sz="800" b="0" i="0">
+            <a:off x="5029200" y="6210300"/>
+            <a:ext cx="2148840" cy="510540"/>
+          </a:xfrm>
+          <a:prstGeom prst="rect">
+            <a:avLst/>
+          </a:prstGeom>
+          <a:noFill/>
+        </p:spPr>
+        <p:txBody>
+          <a:bodyPr wrap="square">
+            <a:spAutoFit/>
+          </a:bodyPr>
+          <a:lstStyle/>
+          <a:p>
+            <a:pPr algn="l"/>
+            <a:r>
+              <a:rPr sz="900" b="0" i="0">
                 <a:solidFill>
                   <a:srgbClr val="000000"/>
                 </a:solidFill>
@@ -11555,8 +11555,8 @@
         </p:nvSpPr>
         <p:spPr>
           <a:xfrm>
-            <a:off x="7406640" y="4628388"/>
-            <a:ext cx="2194560" cy="548640"/>
+            <a:off x="7287768" y="6009132"/>
+            <a:ext cx="2221992" cy="739140"/>
           </a:xfrm>
           <a:prstGeom prst="rect">
             <a:avLst/>
@@ -11598,8 +11598,8 @@
         </p:nvSpPr>
         <p:spPr>
           <a:xfrm>
-            <a:off x="7470648" y="4655820"/>
-            <a:ext cx="2194560" cy="128016"/>
+            <a:off x="7360920" y="6045708"/>
+            <a:ext cx="2221992" cy="137160"/>
           </a:xfrm>
           <a:prstGeom prst="rect">
             <a:avLst/>
@@ -11633,23 +11633,23 @@
         </p:nvSpPr>
         <p:spPr>
           <a:xfrm>
-            <a:off x="7470648" y="4792980"/>
-            <a:ext cx="2121408" cy="365760"/>
-          </a:xfrm>
-          <a:prstGeom prst="rect">
-            <a:avLst/>
-          </a:prstGeom>
-          <a:noFill/>
-        </p:spPr>
-        <p:txBody>
-          <a:bodyPr wrap="square">
-            <a:spAutoFit/>
-          </a:bodyPr>
-          <a:lstStyle/>
-          <a:p>
-            <a:pPr algn="l"/>
-            <a:r>
-              <a:rPr sz="800" b="0" i="0">
+            <a:off x="7360920" y="6210300"/>
+            <a:ext cx="2148840" cy="510540"/>
+          </a:xfrm>
+          <a:prstGeom prst="rect">
+            <a:avLst/>
+          </a:prstGeom>
+          <a:noFill/>
+        </p:spPr>
+        <p:txBody>
+          <a:bodyPr wrap="square">
+            <a:spAutoFit/>
+          </a:bodyPr>
+          <a:lstStyle/>
+          <a:p>
+            <a:pPr algn="l"/>
+            <a:r>
+              <a:rPr sz="900" b="0" i="0">
                 <a:solidFill>
                   <a:srgbClr val="000000"/>
                 </a:solidFill>
@@ -11668,8 +11668,8 @@
         </p:nvSpPr>
         <p:spPr>
           <a:xfrm>
-            <a:off x="9692640" y="4628388"/>
-            <a:ext cx="2194560" cy="548640"/>
+            <a:off x="9619488" y="6009132"/>
+            <a:ext cx="2221992" cy="739140"/>
           </a:xfrm>
           <a:prstGeom prst="rect">
             <a:avLst/>
@@ -11711,8 +11711,8 @@
         </p:nvSpPr>
         <p:spPr>
           <a:xfrm>
-            <a:off x="9756648" y="4655820"/>
-            <a:ext cx="2194560" cy="128016"/>
+            <a:off x="9692640" y="6045708"/>
+            <a:ext cx="2221992" cy="137160"/>
           </a:xfrm>
           <a:prstGeom prst="rect">
             <a:avLst/>
@@ -11746,23 +11746,23 @@
         </p:nvSpPr>
         <p:spPr>
           <a:xfrm>
-            <a:off x="9756648" y="4792980"/>
-            <a:ext cx="2121408" cy="365760"/>
-          </a:xfrm>
-          <a:prstGeom prst="rect">
-            <a:avLst/>
-          </a:prstGeom>
-          <a:noFill/>
-        </p:spPr>
-        <p:txBody>
-          <a:bodyPr wrap="square">
-            <a:spAutoFit/>
-          </a:bodyPr>
-          <a:lstStyle/>
-          <a:p>
-            <a:pPr algn="l"/>
-            <a:r>
-              <a:rPr sz="800" b="0" i="0">
+            <a:off x="9692640" y="6210300"/>
+            <a:ext cx="2148840" cy="510540"/>
+          </a:xfrm>
+          <a:prstGeom prst="rect">
+            <a:avLst/>
+          </a:prstGeom>
+          <a:noFill/>
+        </p:spPr>
+        <p:txBody>
+          <a:bodyPr wrap="square">
+            <a:spAutoFit/>
+          </a:bodyPr>
+          <a:lstStyle/>
+          <a:p>
+            <a:pPr algn="l"/>
+            <a:r>
+              <a:rPr sz="900" b="0" i="0">
                 <a:solidFill>
                   <a:srgbClr val="000000"/>
                 </a:solidFill>
@@ -11781,7 +11781,7 @@
         </p:nvSpPr>
         <p:spPr>
           <a:xfrm>
-            <a:off x="0" y="5216398"/>
+            <a:off x="0" y="6796786"/>
             <a:ext cx="12188952" cy="6350"/>
           </a:xfrm>
           <a:prstGeom prst="rect">
@@ -11886,7 +11886,7 @@
         <p:spPr>
           <a:xfrm>
             <a:off x="0" y="0"/>
-            <a:ext cx="12188952" cy="256032"/>
+            <a:ext cx="12188952" cy="292608"/>
           </a:xfrm>
           <a:prstGeom prst="rect">
             <a:avLst/>
@@ -11928,7 +11928,7 @@
         </p:nvSpPr>
         <p:spPr>
           <a:xfrm>
-            <a:off x="0" y="256032"/>
+            <a:off x="0" y="292608"/>
             <a:ext cx="12188952" cy="25400"/>
           </a:xfrm>
           <a:prstGeom prst="rect">
@@ -11971,23 +11971,23 @@
         </p:nvSpPr>
         <p:spPr>
           <a:xfrm>
-            <a:off x="256032" y="45720"/>
-            <a:ext cx="7315200" cy="256032"/>
-          </a:xfrm>
-          <a:prstGeom prst="rect">
-            <a:avLst/>
-          </a:prstGeom>
-          <a:noFill/>
-        </p:spPr>
-        <p:txBody>
-          <a:bodyPr wrap="square">
-            <a:spAutoFit/>
-          </a:bodyPr>
-          <a:lstStyle/>
-          <a:p>
-            <a:pPr algn="l"/>
-            <a:r>
-              <a:rPr sz="800" b="0" i="0">
+            <a:off x="292608" y="64008"/>
+            <a:ext cx="7315200" cy="292608"/>
+          </a:xfrm>
+          <a:prstGeom prst="rect">
+            <a:avLst/>
+          </a:prstGeom>
+          <a:noFill/>
+        </p:spPr>
+        <p:txBody>
+          <a:bodyPr wrap="square">
+            <a:spAutoFit/>
+          </a:bodyPr>
+          <a:lstStyle/>
+          <a:p>
+            <a:pPr algn="l"/>
+            <a:r>
+              <a:rPr sz="900" b="0" i="0">
                 <a:solidFill>
                   <a:srgbClr val="FFFFFF"/>
                 </a:solidFill>
@@ -12006,8 +12006,8 @@
         </p:nvSpPr>
         <p:spPr>
           <a:xfrm>
-            <a:off x="11548872" y="45720"/>
-            <a:ext cx="457200" cy="256032"/>
+            <a:off x="11548872" y="64008"/>
+            <a:ext cx="457200" cy="292608"/>
           </a:xfrm>
           <a:prstGeom prst="rect">
             <a:avLst/>
@@ -12041,8 +12041,8 @@
         </p:nvSpPr>
         <p:spPr>
           <a:xfrm>
-            <a:off x="0" y="294132"/>
-            <a:ext cx="12188952" cy="201168"/>
+            <a:off x="0" y="330708"/>
+            <a:ext cx="12188952" cy="237744"/>
           </a:xfrm>
           <a:prstGeom prst="rect">
             <a:avLst/>
@@ -12084,23 +12084,23 @@
         </p:nvSpPr>
         <p:spPr>
           <a:xfrm>
-            <a:off x="256032" y="321564"/>
-            <a:ext cx="4818888" cy="201168"/>
-          </a:xfrm>
-          <a:prstGeom prst="rect">
-            <a:avLst/>
-          </a:prstGeom>
-          <a:noFill/>
-        </p:spPr>
-        <p:txBody>
-          <a:bodyPr wrap="square">
-            <a:spAutoFit/>
-          </a:bodyPr>
-          <a:lstStyle/>
-          <a:p>
-            <a:pPr algn="l"/>
-            <a:r>
-              <a:rPr sz="800" b="1" i="0">
+            <a:off x="292608" y="367284"/>
+            <a:ext cx="4608576" cy="201168"/>
+          </a:xfrm>
+          <a:prstGeom prst="rect">
+            <a:avLst/>
+          </a:prstGeom>
+          <a:noFill/>
+        </p:spPr>
+        <p:txBody>
+          <a:bodyPr wrap="square">
+            <a:spAutoFit/>
+          </a:bodyPr>
+          <a:lstStyle/>
+          <a:p>
+            <a:pPr algn="l"/>
+            <a:r>
+              <a:rPr sz="900" b="1" i="0">
                 <a:solidFill>
                   <a:srgbClr val="FFFFFF"/>
                 </a:solidFill>
@@ -12119,8 +12119,8 @@
         </p:nvSpPr>
         <p:spPr>
           <a:xfrm>
-            <a:off x="0" y="495300"/>
-            <a:ext cx="12188952" cy="640080"/>
+            <a:off x="0" y="568452"/>
+            <a:ext cx="12188952" cy="1463040"/>
           </a:xfrm>
           <a:prstGeom prst="rect">
             <a:avLst/>
@@ -12162,8 +12162,8 @@
         </p:nvSpPr>
         <p:spPr>
           <a:xfrm>
-            <a:off x="256032" y="531876"/>
-            <a:ext cx="4773168" cy="146304"/>
+            <a:off x="292608" y="623316"/>
+            <a:ext cx="4562856" cy="164592"/>
           </a:xfrm>
           <a:prstGeom prst="rect">
             <a:avLst/>
@@ -12197,23 +12197,23 @@
         </p:nvSpPr>
         <p:spPr>
           <a:xfrm>
-            <a:off x="256032" y="696468"/>
-            <a:ext cx="4773168" cy="420624"/>
-          </a:xfrm>
-          <a:prstGeom prst="rect">
-            <a:avLst/>
-          </a:prstGeom>
-          <a:noFill/>
-        </p:spPr>
-        <p:txBody>
-          <a:bodyPr wrap="square">
-            <a:spAutoFit/>
-          </a:bodyPr>
-          <a:lstStyle/>
-          <a:p>
-            <a:pPr algn="l"/>
-            <a:r>
-              <a:rPr sz="800" b="0" i="0">
+            <a:off x="292608" y="824484"/>
+            <a:ext cx="4562856" cy="1152144"/>
+          </a:xfrm>
+          <a:prstGeom prst="rect">
+            <a:avLst/>
+          </a:prstGeom>
+          <a:noFill/>
+        </p:spPr>
+        <p:txBody>
+          <a:bodyPr wrap="square">
+            <a:spAutoFit/>
+          </a:bodyPr>
+          <a:lstStyle/>
+          <a:p>
+            <a:pPr algn="l"/>
+            <a:r>
+              <a:rPr sz="1000" b="0" i="0">
                 <a:solidFill>
                   <a:srgbClr val="595959"/>
                 </a:solidFill>
@@ -12232,8 +12232,8 @@
         </p:nvSpPr>
         <p:spPr>
           <a:xfrm>
-            <a:off x="5120640" y="541020"/>
-            <a:ext cx="2194560" cy="548640"/>
+            <a:off x="4956048" y="623316"/>
+            <a:ext cx="2221992" cy="1353312"/>
           </a:xfrm>
           <a:prstGeom prst="rect">
             <a:avLst/>
@@ -12275,8 +12275,8 @@
         </p:nvSpPr>
         <p:spPr>
           <a:xfrm>
-            <a:off x="5184648" y="568452"/>
-            <a:ext cx="2194560" cy="128016"/>
+            <a:off x="5029200" y="659892"/>
+            <a:ext cx="2221992" cy="137160"/>
           </a:xfrm>
           <a:prstGeom prst="rect">
             <a:avLst/>
@@ -12310,23 +12310,23 @@
         </p:nvSpPr>
         <p:spPr>
           <a:xfrm>
-            <a:off x="5184648" y="705612"/>
-            <a:ext cx="2121408" cy="365760"/>
-          </a:xfrm>
-          <a:prstGeom prst="rect">
-            <a:avLst/>
-          </a:prstGeom>
-          <a:noFill/>
-        </p:spPr>
-        <p:txBody>
-          <a:bodyPr wrap="square">
-            <a:spAutoFit/>
-          </a:bodyPr>
-          <a:lstStyle/>
-          <a:p>
-            <a:pPr algn="l"/>
-            <a:r>
-              <a:rPr sz="800" b="0" i="0">
+            <a:off x="5029200" y="824484"/>
+            <a:ext cx="2148840" cy="1124712"/>
+          </a:xfrm>
+          <a:prstGeom prst="rect">
+            <a:avLst/>
+          </a:prstGeom>
+          <a:noFill/>
+        </p:spPr>
+        <p:txBody>
+          <a:bodyPr wrap="square">
+            <a:spAutoFit/>
+          </a:bodyPr>
+          <a:lstStyle/>
+          <a:p>
+            <a:pPr algn="l"/>
+            <a:r>
+              <a:rPr sz="1000" b="0" i="0">
                 <a:solidFill>
                   <a:srgbClr val="000000"/>
                 </a:solidFill>
@@ -12345,8 +12345,8 @@
         </p:nvSpPr>
         <p:spPr>
           <a:xfrm>
-            <a:off x="7406640" y="541020"/>
-            <a:ext cx="2194560" cy="548640"/>
+            <a:off x="7287768" y="623316"/>
+            <a:ext cx="2221992" cy="1353312"/>
           </a:xfrm>
           <a:prstGeom prst="rect">
             <a:avLst/>
@@ -12388,8 +12388,8 @@
         </p:nvSpPr>
         <p:spPr>
           <a:xfrm>
-            <a:off x="7470648" y="568452"/>
-            <a:ext cx="2194560" cy="128016"/>
+            <a:off x="7360920" y="659892"/>
+            <a:ext cx="2221992" cy="137160"/>
           </a:xfrm>
           <a:prstGeom prst="rect">
             <a:avLst/>
@@ -12423,23 +12423,23 @@
         </p:nvSpPr>
         <p:spPr>
           <a:xfrm>
-            <a:off x="7470648" y="705612"/>
-            <a:ext cx="2121408" cy="365760"/>
-          </a:xfrm>
-          <a:prstGeom prst="rect">
-            <a:avLst/>
-          </a:prstGeom>
-          <a:noFill/>
-        </p:spPr>
-        <p:txBody>
-          <a:bodyPr wrap="square">
-            <a:spAutoFit/>
-          </a:bodyPr>
-          <a:lstStyle/>
-          <a:p>
-            <a:pPr algn="l"/>
-            <a:r>
-              <a:rPr sz="800" b="0" i="0">
+            <a:off x="7360920" y="824484"/>
+            <a:ext cx="2148840" cy="1124712"/>
+          </a:xfrm>
+          <a:prstGeom prst="rect">
+            <a:avLst/>
+          </a:prstGeom>
+          <a:noFill/>
+        </p:spPr>
+        <p:txBody>
+          <a:bodyPr wrap="square">
+            <a:spAutoFit/>
+          </a:bodyPr>
+          <a:lstStyle/>
+          <a:p>
+            <a:pPr algn="l"/>
+            <a:r>
+              <a:rPr sz="1000" b="0" i="0">
                 <a:solidFill>
                   <a:srgbClr val="000000"/>
                 </a:solidFill>
@@ -12458,8 +12458,8 @@
         </p:nvSpPr>
         <p:spPr>
           <a:xfrm>
-            <a:off x="9692640" y="541020"/>
-            <a:ext cx="2194560" cy="548640"/>
+            <a:off x="9619488" y="623316"/>
+            <a:ext cx="2221992" cy="1353312"/>
           </a:xfrm>
           <a:prstGeom prst="rect">
             <a:avLst/>
@@ -12501,8 +12501,8 @@
         </p:nvSpPr>
         <p:spPr>
           <a:xfrm>
-            <a:off x="9756648" y="568452"/>
-            <a:ext cx="2194560" cy="128016"/>
+            <a:off x="9692640" y="659892"/>
+            <a:ext cx="2221992" cy="137160"/>
           </a:xfrm>
           <a:prstGeom prst="rect">
             <a:avLst/>
@@ -12536,23 +12536,23 @@
         </p:nvSpPr>
         <p:spPr>
           <a:xfrm>
-            <a:off x="9756648" y="705612"/>
-            <a:ext cx="2121408" cy="365760"/>
-          </a:xfrm>
-          <a:prstGeom prst="rect">
-            <a:avLst/>
-          </a:prstGeom>
-          <a:noFill/>
-        </p:spPr>
-        <p:txBody>
-          <a:bodyPr wrap="square">
-            <a:spAutoFit/>
-          </a:bodyPr>
-          <a:lstStyle/>
-          <a:p>
-            <a:pPr algn="l"/>
-            <a:r>
-              <a:rPr sz="800" b="0" i="0">
+            <a:off x="9692640" y="824484"/>
+            <a:ext cx="2148840" cy="1124712"/>
+          </a:xfrm>
+          <a:prstGeom prst="rect">
+            <a:avLst/>
+          </a:prstGeom>
+          <a:noFill/>
+        </p:spPr>
+        <p:txBody>
+          <a:bodyPr wrap="square">
+            <a:spAutoFit/>
+          </a:bodyPr>
+          <a:lstStyle/>
+          <a:p>
+            <a:pPr algn="l"/>
+            <a:r>
+              <a:rPr sz="1000" b="0" i="0">
                 <a:solidFill>
                   <a:srgbClr val="000000"/>
                 </a:solidFill>
@@ -12571,7 +12571,7 @@
         </p:nvSpPr>
         <p:spPr>
           <a:xfrm>
-            <a:off x="0" y="1129030"/>
+            <a:off x="0" y="2025142"/>
             <a:ext cx="12188952" cy="6350"/>
           </a:xfrm>
           <a:prstGeom prst="rect">
@@ -12614,8 +12614,8 @@
         </p:nvSpPr>
         <p:spPr>
           <a:xfrm>
-            <a:off x="0" y="1135380"/>
-            <a:ext cx="12188952" cy="640080"/>
+            <a:off x="0" y="2031492"/>
+            <a:ext cx="12188952" cy="1463040"/>
           </a:xfrm>
           <a:prstGeom prst="rect">
             <a:avLst/>
@@ -12657,8 +12657,8 @@
         </p:nvSpPr>
         <p:spPr>
           <a:xfrm>
-            <a:off x="256032" y="1171956"/>
-            <a:ext cx="4773168" cy="146304"/>
+            <a:off x="292608" y="2086356"/>
+            <a:ext cx="4562856" cy="164592"/>
           </a:xfrm>
           <a:prstGeom prst="rect">
             <a:avLst/>
@@ -12692,23 +12692,23 @@
         </p:nvSpPr>
         <p:spPr>
           <a:xfrm>
-            <a:off x="256032" y="1336548"/>
-            <a:ext cx="4773168" cy="420624"/>
-          </a:xfrm>
-          <a:prstGeom prst="rect">
-            <a:avLst/>
-          </a:prstGeom>
-          <a:noFill/>
-        </p:spPr>
-        <p:txBody>
-          <a:bodyPr wrap="square">
-            <a:spAutoFit/>
-          </a:bodyPr>
-          <a:lstStyle/>
-          <a:p>
-            <a:pPr algn="l"/>
-            <a:r>
-              <a:rPr sz="800" b="0" i="0">
+            <a:off x="292608" y="2287524"/>
+            <a:ext cx="4562856" cy="1152144"/>
+          </a:xfrm>
+          <a:prstGeom prst="rect">
+            <a:avLst/>
+          </a:prstGeom>
+          <a:noFill/>
+        </p:spPr>
+        <p:txBody>
+          <a:bodyPr wrap="square">
+            <a:spAutoFit/>
+          </a:bodyPr>
+          <a:lstStyle/>
+          <a:p>
+            <a:pPr algn="l"/>
+            <a:r>
+              <a:rPr sz="1000" b="0" i="0">
                 <a:solidFill>
                   <a:srgbClr val="595959"/>
                 </a:solidFill>
@@ -12727,8 +12727,8 @@
         </p:nvSpPr>
         <p:spPr>
           <a:xfrm>
-            <a:off x="5120640" y="1181100"/>
-            <a:ext cx="2194560" cy="548640"/>
+            <a:off x="4956048" y="2086356"/>
+            <a:ext cx="2221992" cy="1353312"/>
           </a:xfrm>
           <a:prstGeom prst="rect">
             <a:avLst/>
@@ -12770,8 +12770,8 @@
         </p:nvSpPr>
         <p:spPr>
           <a:xfrm>
-            <a:off x="5184648" y="1208532"/>
-            <a:ext cx="2194560" cy="128016"/>
+            <a:off x="5029200" y="2122932"/>
+            <a:ext cx="2221992" cy="137160"/>
           </a:xfrm>
           <a:prstGeom prst="rect">
             <a:avLst/>
@@ -12805,23 +12805,23 @@
         </p:nvSpPr>
         <p:spPr>
           <a:xfrm>
-            <a:off x="5184648" y="1345692"/>
-            <a:ext cx="2121408" cy="365760"/>
-          </a:xfrm>
-          <a:prstGeom prst="rect">
-            <a:avLst/>
-          </a:prstGeom>
-          <a:noFill/>
-        </p:spPr>
-        <p:txBody>
-          <a:bodyPr wrap="square">
-            <a:spAutoFit/>
-          </a:bodyPr>
-          <a:lstStyle/>
-          <a:p>
-            <a:pPr algn="l"/>
-            <a:r>
-              <a:rPr sz="800" b="0" i="0">
+            <a:off x="5029200" y="2287524"/>
+            <a:ext cx="2148840" cy="1124712"/>
+          </a:xfrm>
+          <a:prstGeom prst="rect">
+            <a:avLst/>
+          </a:prstGeom>
+          <a:noFill/>
+        </p:spPr>
+        <p:txBody>
+          <a:bodyPr wrap="square">
+            <a:spAutoFit/>
+          </a:bodyPr>
+          <a:lstStyle/>
+          <a:p>
+            <a:pPr algn="l"/>
+            <a:r>
+              <a:rPr sz="1000" b="0" i="0">
                 <a:solidFill>
                   <a:srgbClr val="000000"/>
                 </a:solidFill>
@@ -12840,8 +12840,8 @@
         </p:nvSpPr>
         <p:spPr>
           <a:xfrm>
-            <a:off x="7406640" y="1181100"/>
-            <a:ext cx="2194560" cy="548640"/>
+            <a:off x="7287768" y="2086356"/>
+            <a:ext cx="2221992" cy="1353312"/>
           </a:xfrm>
           <a:prstGeom prst="rect">
             <a:avLst/>
@@ -12883,8 +12883,8 @@
         </p:nvSpPr>
         <p:spPr>
           <a:xfrm>
-            <a:off x="7470648" y="1208532"/>
-            <a:ext cx="2194560" cy="128016"/>
+            <a:off x="7360920" y="2122932"/>
+            <a:ext cx="2221992" cy="137160"/>
           </a:xfrm>
           <a:prstGeom prst="rect">
             <a:avLst/>
@@ -12918,23 +12918,23 @@
         </p:nvSpPr>
         <p:spPr>
           <a:xfrm>
-            <a:off x="7470648" y="1345692"/>
-            <a:ext cx="2121408" cy="365760"/>
-          </a:xfrm>
-          <a:prstGeom prst="rect">
-            <a:avLst/>
-          </a:prstGeom>
-          <a:noFill/>
-        </p:spPr>
-        <p:txBody>
-          <a:bodyPr wrap="square">
-            <a:spAutoFit/>
-          </a:bodyPr>
-          <a:lstStyle/>
-          <a:p>
-            <a:pPr algn="l"/>
-            <a:r>
-              <a:rPr sz="800" b="0" i="0">
+            <a:off x="7360920" y="2287524"/>
+            <a:ext cx="2148840" cy="1124712"/>
+          </a:xfrm>
+          <a:prstGeom prst="rect">
+            <a:avLst/>
+          </a:prstGeom>
+          <a:noFill/>
+        </p:spPr>
+        <p:txBody>
+          <a:bodyPr wrap="square">
+            <a:spAutoFit/>
+          </a:bodyPr>
+          <a:lstStyle/>
+          <a:p>
+            <a:pPr algn="l"/>
+            <a:r>
+              <a:rPr sz="1000" b="0" i="0">
                 <a:solidFill>
                   <a:srgbClr val="000000"/>
                 </a:solidFill>
@@ -12953,8 +12953,8 @@
         </p:nvSpPr>
         <p:spPr>
           <a:xfrm>
-            <a:off x="9692640" y="1181100"/>
-            <a:ext cx="2194560" cy="548640"/>
+            <a:off x="9619488" y="2086356"/>
+            <a:ext cx="2221992" cy="1353312"/>
           </a:xfrm>
           <a:prstGeom prst="rect">
             <a:avLst/>
@@ -12996,8 +12996,8 @@
         </p:nvSpPr>
         <p:spPr>
           <a:xfrm>
-            <a:off x="9756648" y="1208532"/>
-            <a:ext cx="2194560" cy="128016"/>
+            <a:off x="9692640" y="2122932"/>
+            <a:ext cx="2221992" cy="137160"/>
           </a:xfrm>
           <a:prstGeom prst="rect">
             <a:avLst/>
@@ -13031,23 +13031,23 @@
         </p:nvSpPr>
         <p:spPr>
           <a:xfrm>
-            <a:off x="9756648" y="1345692"/>
-            <a:ext cx="2121408" cy="365760"/>
-          </a:xfrm>
-          <a:prstGeom prst="rect">
-            <a:avLst/>
-          </a:prstGeom>
-          <a:noFill/>
-        </p:spPr>
-        <p:txBody>
-          <a:bodyPr wrap="square">
-            <a:spAutoFit/>
-          </a:bodyPr>
-          <a:lstStyle/>
-          <a:p>
-            <a:pPr algn="l"/>
-            <a:r>
-              <a:rPr sz="800" b="0" i="0">
+            <a:off x="9692640" y="2287524"/>
+            <a:ext cx="2148840" cy="1124712"/>
+          </a:xfrm>
+          <a:prstGeom prst="rect">
+            <a:avLst/>
+          </a:prstGeom>
+          <a:noFill/>
+        </p:spPr>
+        <p:txBody>
+          <a:bodyPr wrap="square">
+            <a:spAutoFit/>
+          </a:bodyPr>
+          <a:lstStyle/>
+          <a:p>
+            <a:pPr algn="l"/>
+            <a:r>
+              <a:rPr sz="1000" b="0" i="0">
                 <a:solidFill>
                   <a:srgbClr val="000000"/>
                 </a:solidFill>
@@ -13066,7 +13066,7 @@
         </p:nvSpPr>
         <p:spPr>
           <a:xfrm>
-            <a:off x="0" y="1769110"/>
+            <a:off x="0" y="3488182"/>
             <a:ext cx="12188952" cy="6350"/>
           </a:xfrm>
           <a:prstGeom prst="rect">

--- a/Simon_Cheng_OKR_2026.pptx
+++ b/Simon_Cheng_OKR_2026.pptx
@@ -3376,7 +3376,7 @@
         <p:spPr>
           <a:xfrm>
             <a:off x="0" y="568452"/>
-            <a:ext cx="12188952" cy="627718"/>
+            <a:ext cx="12188952" cy="1188415"/>
           </a:xfrm>
           <a:prstGeom prst="rect">
             <a:avLst/>
@@ -3454,22 +3454,22 @@
         <p:spPr>
           <a:xfrm>
             <a:off x="292608" y="824484"/>
-            <a:ext cx="4562856" cy="316822"/>
-          </a:xfrm>
-          <a:prstGeom prst="rect">
-            <a:avLst/>
-          </a:prstGeom>
-          <a:noFill/>
-        </p:spPr>
-        <p:txBody>
-          <a:bodyPr wrap="square">
-            <a:spAutoFit/>
-          </a:bodyPr>
-          <a:lstStyle/>
-          <a:p>
-            <a:pPr algn="l"/>
-            <a:r>
-              <a:rPr sz="800" b="0" i="0">
+            <a:ext cx="4562856" cy="877519"/>
+          </a:xfrm>
+          <a:prstGeom prst="rect">
+            <a:avLst/>
+          </a:prstGeom>
+          <a:noFill/>
+        </p:spPr>
+        <p:txBody>
+          <a:bodyPr wrap="square">
+            <a:spAutoFit/>
+          </a:bodyPr>
+          <a:lstStyle/>
+          <a:p>
+            <a:pPr algn="l"/>
+            <a:r>
+              <a:rPr sz="1000" b="0" i="0">
                 <a:solidFill>
                   <a:srgbClr val="595959"/>
                 </a:solidFill>
@@ -3489,7 +3489,7 @@
         <p:spPr>
           <a:xfrm>
             <a:off x="4956048" y="623316"/>
-            <a:ext cx="2221992" cy="517990"/>
+            <a:ext cx="2221992" cy="1078687"/>
           </a:xfrm>
           <a:prstGeom prst="rect">
             <a:avLst/>
@@ -3567,22 +3567,22 @@
         <p:spPr>
           <a:xfrm>
             <a:off x="5029200" y="824484"/>
-            <a:ext cx="2148840" cy="289390"/>
-          </a:xfrm>
-          <a:prstGeom prst="rect">
-            <a:avLst/>
-          </a:prstGeom>
-          <a:noFill/>
-        </p:spPr>
-        <p:txBody>
-          <a:bodyPr wrap="square">
-            <a:spAutoFit/>
-          </a:bodyPr>
-          <a:lstStyle/>
-          <a:p>
-            <a:pPr algn="l"/>
-            <a:r>
-              <a:rPr sz="800" b="0" i="0">
+            <a:ext cx="2148840" cy="850087"/>
+          </a:xfrm>
+          <a:prstGeom prst="rect">
+            <a:avLst/>
+          </a:prstGeom>
+          <a:noFill/>
+        </p:spPr>
+        <p:txBody>
+          <a:bodyPr wrap="square">
+            <a:spAutoFit/>
+          </a:bodyPr>
+          <a:lstStyle/>
+          <a:p>
+            <a:pPr algn="l"/>
+            <a:r>
+              <a:rPr sz="1000" b="0" i="0">
                 <a:solidFill>
                   <a:srgbClr val="000000"/>
                 </a:solidFill>
@@ -3602,7 +3602,7 @@
         <p:spPr>
           <a:xfrm>
             <a:off x="7287768" y="623316"/>
-            <a:ext cx="2221992" cy="517990"/>
+            <a:ext cx="2221992" cy="1078687"/>
           </a:xfrm>
           <a:prstGeom prst="rect">
             <a:avLst/>
@@ -3680,22 +3680,22 @@
         <p:spPr>
           <a:xfrm>
             <a:off x="7360920" y="824484"/>
-            <a:ext cx="2148840" cy="289390"/>
-          </a:xfrm>
-          <a:prstGeom prst="rect">
-            <a:avLst/>
-          </a:prstGeom>
-          <a:noFill/>
-        </p:spPr>
-        <p:txBody>
-          <a:bodyPr wrap="square">
-            <a:spAutoFit/>
-          </a:bodyPr>
-          <a:lstStyle/>
-          <a:p>
-            <a:pPr algn="l"/>
-            <a:r>
-              <a:rPr sz="800" b="0" i="0">
+            <a:ext cx="2148840" cy="850087"/>
+          </a:xfrm>
+          <a:prstGeom prst="rect">
+            <a:avLst/>
+          </a:prstGeom>
+          <a:noFill/>
+        </p:spPr>
+        <p:txBody>
+          <a:bodyPr wrap="square">
+            <a:spAutoFit/>
+          </a:bodyPr>
+          <a:lstStyle/>
+          <a:p>
+            <a:pPr algn="l"/>
+            <a:r>
+              <a:rPr sz="1000" b="0" i="0">
                 <a:solidFill>
                   <a:srgbClr val="000000"/>
                 </a:solidFill>
@@ -3715,7 +3715,7 @@
         <p:spPr>
           <a:xfrm>
             <a:off x="9619488" y="623316"/>
-            <a:ext cx="2221992" cy="517990"/>
+            <a:ext cx="2221992" cy="1078687"/>
           </a:xfrm>
           <a:prstGeom prst="rect">
             <a:avLst/>
@@ -3793,22 +3793,22 @@
         <p:spPr>
           <a:xfrm>
             <a:off x="9692640" y="824484"/>
-            <a:ext cx="2148840" cy="289390"/>
-          </a:xfrm>
-          <a:prstGeom prst="rect">
-            <a:avLst/>
-          </a:prstGeom>
-          <a:noFill/>
-        </p:spPr>
-        <p:txBody>
-          <a:bodyPr wrap="square">
-            <a:spAutoFit/>
-          </a:bodyPr>
-          <a:lstStyle/>
-          <a:p>
-            <a:pPr algn="l"/>
-            <a:r>
-              <a:rPr sz="800" b="0" i="0">
+            <a:ext cx="2148840" cy="850087"/>
+          </a:xfrm>
+          <a:prstGeom prst="rect">
+            <a:avLst/>
+          </a:prstGeom>
+          <a:noFill/>
+        </p:spPr>
+        <p:txBody>
+          <a:bodyPr wrap="square">
+            <a:spAutoFit/>
+          </a:bodyPr>
+          <a:lstStyle/>
+          <a:p>
+            <a:pPr algn="l"/>
+            <a:r>
+              <a:rPr sz="1000" b="0" i="0">
                 <a:solidFill>
                   <a:srgbClr val="000000"/>
                 </a:solidFill>
@@ -3827,7 +3827,7 @@
         </p:nvSpPr>
         <p:spPr>
           <a:xfrm>
-            <a:off x="0" y="1189820"/>
+            <a:off x="0" y="1750517"/>
             <a:ext cx="12188952" cy="6350"/>
           </a:xfrm>
           <a:prstGeom prst="rect">
@@ -3870,8 +3870,8 @@
         </p:nvSpPr>
         <p:spPr>
           <a:xfrm>
-            <a:off x="0" y="1196170"/>
-            <a:ext cx="12188952" cy="627718"/>
+            <a:off x="0" y="1756867"/>
+            <a:ext cx="12188952" cy="1188415"/>
           </a:xfrm>
           <a:prstGeom prst="rect">
             <a:avLst/>
@@ -3913,7 +3913,7 @@
         </p:nvSpPr>
         <p:spPr>
           <a:xfrm>
-            <a:off x="292608" y="1251034"/>
+            <a:off x="292608" y="1811731"/>
             <a:ext cx="4562856" cy="164592"/>
           </a:xfrm>
           <a:prstGeom prst="rect">
@@ -3948,23 +3948,23 @@
         </p:nvSpPr>
         <p:spPr>
           <a:xfrm>
-            <a:off x="292608" y="1452202"/>
-            <a:ext cx="4562856" cy="316822"/>
-          </a:xfrm>
-          <a:prstGeom prst="rect">
-            <a:avLst/>
-          </a:prstGeom>
-          <a:noFill/>
-        </p:spPr>
-        <p:txBody>
-          <a:bodyPr wrap="square">
-            <a:spAutoFit/>
-          </a:bodyPr>
-          <a:lstStyle/>
-          <a:p>
-            <a:pPr algn="l"/>
-            <a:r>
-              <a:rPr sz="800" b="0" i="0">
+            <a:off x="292608" y="2012899"/>
+            <a:ext cx="4562856" cy="877519"/>
+          </a:xfrm>
+          <a:prstGeom prst="rect">
+            <a:avLst/>
+          </a:prstGeom>
+          <a:noFill/>
+        </p:spPr>
+        <p:txBody>
+          <a:bodyPr wrap="square">
+            <a:spAutoFit/>
+          </a:bodyPr>
+          <a:lstStyle/>
+          <a:p>
+            <a:pPr algn="l"/>
+            <a:r>
+              <a:rPr sz="1000" b="0" i="0">
                 <a:solidFill>
                   <a:srgbClr val="595959"/>
                 </a:solidFill>
@@ -3983,8 +3983,8 @@
         </p:nvSpPr>
         <p:spPr>
           <a:xfrm>
-            <a:off x="4956048" y="1251034"/>
-            <a:ext cx="2221992" cy="517990"/>
+            <a:off x="4956048" y="1811731"/>
+            <a:ext cx="2221992" cy="1078687"/>
           </a:xfrm>
           <a:prstGeom prst="rect">
             <a:avLst/>
@@ -4026,7 +4026,7 @@
         </p:nvSpPr>
         <p:spPr>
           <a:xfrm>
-            <a:off x="5029200" y="1287610"/>
+            <a:off x="5029200" y="1848307"/>
             <a:ext cx="2221992" cy="137160"/>
           </a:xfrm>
           <a:prstGeom prst="rect">
@@ -4061,23 +4061,23 @@
         </p:nvSpPr>
         <p:spPr>
           <a:xfrm>
-            <a:off x="5029200" y="1452202"/>
-            <a:ext cx="2148840" cy="289390"/>
-          </a:xfrm>
-          <a:prstGeom prst="rect">
-            <a:avLst/>
-          </a:prstGeom>
-          <a:noFill/>
-        </p:spPr>
-        <p:txBody>
-          <a:bodyPr wrap="square">
-            <a:spAutoFit/>
-          </a:bodyPr>
-          <a:lstStyle/>
-          <a:p>
-            <a:pPr algn="l"/>
-            <a:r>
-              <a:rPr sz="800" b="0" i="0">
+            <a:off x="5029200" y="2012899"/>
+            <a:ext cx="2148840" cy="850087"/>
+          </a:xfrm>
+          <a:prstGeom prst="rect">
+            <a:avLst/>
+          </a:prstGeom>
+          <a:noFill/>
+        </p:spPr>
+        <p:txBody>
+          <a:bodyPr wrap="square">
+            <a:spAutoFit/>
+          </a:bodyPr>
+          <a:lstStyle/>
+          <a:p>
+            <a:pPr algn="l"/>
+            <a:r>
+              <a:rPr sz="1000" b="0" i="0">
                 <a:solidFill>
                   <a:srgbClr val="000000"/>
                 </a:solidFill>
@@ -4096,8 +4096,8 @@
         </p:nvSpPr>
         <p:spPr>
           <a:xfrm>
-            <a:off x="7287768" y="1251034"/>
-            <a:ext cx="2221992" cy="517990"/>
+            <a:off x="7287768" y="1811731"/>
+            <a:ext cx="2221992" cy="1078687"/>
           </a:xfrm>
           <a:prstGeom prst="rect">
             <a:avLst/>
@@ -4139,7 +4139,7 @@
         </p:nvSpPr>
         <p:spPr>
           <a:xfrm>
-            <a:off x="7360920" y="1287610"/>
+            <a:off x="7360920" y="1848307"/>
             <a:ext cx="2221992" cy="137160"/>
           </a:xfrm>
           <a:prstGeom prst="rect">
@@ -4174,23 +4174,23 @@
         </p:nvSpPr>
         <p:spPr>
           <a:xfrm>
-            <a:off x="7360920" y="1452202"/>
-            <a:ext cx="2148840" cy="289390"/>
-          </a:xfrm>
-          <a:prstGeom prst="rect">
-            <a:avLst/>
-          </a:prstGeom>
-          <a:noFill/>
-        </p:spPr>
-        <p:txBody>
-          <a:bodyPr wrap="square">
-            <a:spAutoFit/>
-          </a:bodyPr>
-          <a:lstStyle/>
-          <a:p>
-            <a:pPr algn="l"/>
-            <a:r>
-              <a:rPr sz="800" b="0" i="0">
+            <a:off x="7360920" y="2012899"/>
+            <a:ext cx="2148840" cy="850087"/>
+          </a:xfrm>
+          <a:prstGeom prst="rect">
+            <a:avLst/>
+          </a:prstGeom>
+          <a:noFill/>
+        </p:spPr>
+        <p:txBody>
+          <a:bodyPr wrap="square">
+            <a:spAutoFit/>
+          </a:bodyPr>
+          <a:lstStyle/>
+          <a:p>
+            <a:pPr algn="l"/>
+            <a:r>
+              <a:rPr sz="1000" b="0" i="0">
                 <a:solidFill>
                   <a:srgbClr val="000000"/>
                 </a:solidFill>
@@ -4209,8 +4209,8 @@
         </p:nvSpPr>
         <p:spPr>
           <a:xfrm>
-            <a:off x="9619488" y="1251034"/>
-            <a:ext cx="2221992" cy="517990"/>
+            <a:off x="9619488" y="1811731"/>
+            <a:ext cx="2221992" cy="1078687"/>
           </a:xfrm>
           <a:prstGeom prst="rect">
             <a:avLst/>
@@ -4252,7 +4252,7 @@
         </p:nvSpPr>
         <p:spPr>
           <a:xfrm>
-            <a:off x="9692640" y="1287610"/>
+            <a:off x="9692640" y="1848307"/>
             <a:ext cx="2221992" cy="137160"/>
           </a:xfrm>
           <a:prstGeom prst="rect">
@@ -4287,23 +4287,23 @@
         </p:nvSpPr>
         <p:spPr>
           <a:xfrm>
-            <a:off x="9692640" y="1452202"/>
-            <a:ext cx="2148840" cy="289390"/>
-          </a:xfrm>
-          <a:prstGeom prst="rect">
-            <a:avLst/>
-          </a:prstGeom>
-          <a:noFill/>
-        </p:spPr>
-        <p:txBody>
-          <a:bodyPr wrap="square">
-            <a:spAutoFit/>
-          </a:bodyPr>
-          <a:lstStyle/>
-          <a:p>
-            <a:pPr algn="l"/>
-            <a:r>
-              <a:rPr sz="800" b="0" i="0">
+            <a:off x="9692640" y="2012899"/>
+            <a:ext cx="2148840" cy="850087"/>
+          </a:xfrm>
+          <a:prstGeom prst="rect">
+            <a:avLst/>
+          </a:prstGeom>
+          <a:noFill/>
+        </p:spPr>
+        <p:txBody>
+          <a:bodyPr wrap="square">
+            <a:spAutoFit/>
+          </a:bodyPr>
+          <a:lstStyle/>
+          <a:p>
+            <a:pPr algn="l"/>
+            <a:r>
+              <a:rPr sz="1000" b="0" i="0">
                 <a:solidFill>
                   <a:srgbClr val="000000"/>
                 </a:solidFill>
@@ -4322,7 +4322,7 @@
         </p:nvSpPr>
         <p:spPr>
           <a:xfrm>
-            <a:off x="0" y="1817539"/>
+            <a:off x="0" y="2938932"/>
             <a:ext cx="12188952" cy="6350"/>
           </a:xfrm>
           <a:prstGeom prst="rect">
@@ -4365,8 +4365,8 @@
         </p:nvSpPr>
         <p:spPr>
           <a:xfrm>
-            <a:off x="0" y="1823889"/>
-            <a:ext cx="12188952" cy="627718"/>
+            <a:off x="0" y="2945282"/>
+            <a:ext cx="12188952" cy="1188415"/>
           </a:xfrm>
           <a:prstGeom prst="rect">
             <a:avLst/>
@@ -4408,7 +4408,7 @@
         </p:nvSpPr>
         <p:spPr>
           <a:xfrm>
-            <a:off x="292608" y="1878753"/>
+            <a:off x="292608" y="3000146"/>
             <a:ext cx="4562856" cy="164592"/>
           </a:xfrm>
           <a:prstGeom prst="rect">
@@ -4443,23 +4443,23 @@
         </p:nvSpPr>
         <p:spPr>
           <a:xfrm>
-            <a:off x="292608" y="2079921"/>
-            <a:ext cx="4562856" cy="316822"/>
-          </a:xfrm>
-          <a:prstGeom prst="rect">
-            <a:avLst/>
-          </a:prstGeom>
-          <a:noFill/>
-        </p:spPr>
-        <p:txBody>
-          <a:bodyPr wrap="square">
-            <a:spAutoFit/>
-          </a:bodyPr>
-          <a:lstStyle/>
-          <a:p>
-            <a:pPr algn="l"/>
-            <a:r>
-              <a:rPr sz="800" b="0" i="0">
+            <a:off x="292608" y="3201314"/>
+            <a:ext cx="4562856" cy="877519"/>
+          </a:xfrm>
+          <a:prstGeom prst="rect">
+            <a:avLst/>
+          </a:prstGeom>
+          <a:noFill/>
+        </p:spPr>
+        <p:txBody>
+          <a:bodyPr wrap="square">
+            <a:spAutoFit/>
+          </a:bodyPr>
+          <a:lstStyle/>
+          <a:p>
+            <a:pPr algn="l"/>
+            <a:r>
+              <a:rPr sz="1000" b="0" i="0">
                 <a:solidFill>
                   <a:srgbClr val="595959"/>
                 </a:solidFill>
@@ -4478,8 +4478,8 @@
         </p:nvSpPr>
         <p:spPr>
           <a:xfrm>
-            <a:off x="4956048" y="1878753"/>
-            <a:ext cx="2221992" cy="517990"/>
+            <a:off x="4956048" y="3000146"/>
+            <a:ext cx="2221992" cy="1078687"/>
           </a:xfrm>
           <a:prstGeom prst="rect">
             <a:avLst/>
@@ -4521,7 +4521,7 @@
         </p:nvSpPr>
         <p:spPr>
           <a:xfrm>
-            <a:off x="5029200" y="1915329"/>
+            <a:off x="5029200" y="3036722"/>
             <a:ext cx="2221992" cy="137160"/>
           </a:xfrm>
           <a:prstGeom prst="rect">
@@ -4556,23 +4556,23 @@
         </p:nvSpPr>
         <p:spPr>
           <a:xfrm>
-            <a:off x="5029200" y="2079921"/>
-            <a:ext cx="2148840" cy="289390"/>
-          </a:xfrm>
-          <a:prstGeom prst="rect">
-            <a:avLst/>
-          </a:prstGeom>
-          <a:noFill/>
-        </p:spPr>
-        <p:txBody>
-          <a:bodyPr wrap="square">
-            <a:spAutoFit/>
-          </a:bodyPr>
-          <a:lstStyle/>
-          <a:p>
-            <a:pPr algn="l"/>
-            <a:r>
-              <a:rPr sz="800" b="0" i="0">
+            <a:off x="5029200" y="3201314"/>
+            <a:ext cx="2148840" cy="850087"/>
+          </a:xfrm>
+          <a:prstGeom prst="rect">
+            <a:avLst/>
+          </a:prstGeom>
+          <a:noFill/>
+        </p:spPr>
+        <p:txBody>
+          <a:bodyPr wrap="square">
+            <a:spAutoFit/>
+          </a:bodyPr>
+          <a:lstStyle/>
+          <a:p>
+            <a:pPr algn="l"/>
+            <a:r>
+              <a:rPr sz="1000" b="0" i="0">
                 <a:solidFill>
                   <a:srgbClr val="000000"/>
                 </a:solidFill>
@@ -4591,8 +4591,8 @@
         </p:nvSpPr>
         <p:spPr>
           <a:xfrm>
-            <a:off x="7287768" y="1878753"/>
-            <a:ext cx="2221992" cy="517990"/>
+            <a:off x="7287768" y="3000146"/>
+            <a:ext cx="2221992" cy="1078687"/>
           </a:xfrm>
           <a:prstGeom prst="rect">
             <a:avLst/>
@@ -4634,7 +4634,7 @@
         </p:nvSpPr>
         <p:spPr>
           <a:xfrm>
-            <a:off x="7360920" y="1915329"/>
+            <a:off x="7360920" y="3036722"/>
             <a:ext cx="2221992" cy="137160"/>
           </a:xfrm>
           <a:prstGeom prst="rect">
@@ -4669,23 +4669,23 @@
         </p:nvSpPr>
         <p:spPr>
           <a:xfrm>
-            <a:off x="7360920" y="2079921"/>
-            <a:ext cx="2148840" cy="289390"/>
-          </a:xfrm>
-          <a:prstGeom prst="rect">
-            <a:avLst/>
-          </a:prstGeom>
-          <a:noFill/>
-        </p:spPr>
-        <p:txBody>
-          <a:bodyPr wrap="square">
-            <a:spAutoFit/>
-          </a:bodyPr>
-          <a:lstStyle/>
-          <a:p>
-            <a:pPr algn="l"/>
-            <a:r>
-              <a:rPr sz="800" b="0" i="0">
+            <a:off x="7360920" y="3201314"/>
+            <a:ext cx="2148840" cy="850087"/>
+          </a:xfrm>
+          <a:prstGeom prst="rect">
+            <a:avLst/>
+          </a:prstGeom>
+          <a:noFill/>
+        </p:spPr>
+        <p:txBody>
+          <a:bodyPr wrap="square">
+            <a:spAutoFit/>
+          </a:bodyPr>
+          <a:lstStyle/>
+          <a:p>
+            <a:pPr algn="l"/>
+            <a:r>
+              <a:rPr sz="1000" b="0" i="0">
                 <a:solidFill>
                   <a:srgbClr val="000000"/>
                 </a:solidFill>
@@ -4704,8 +4704,8 @@
         </p:nvSpPr>
         <p:spPr>
           <a:xfrm>
-            <a:off x="9619488" y="1878753"/>
-            <a:ext cx="2221992" cy="517990"/>
+            <a:off x="9619488" y="3000146"/>
+            <a:ext cx="2221992" cy="1078687"/>
           </a:xfrm>
           <a:prstGeom prst="rect">
             <a:avLst/>
@@ -4747,7 +4747,7 @@
         </p:nvSpPr>
         <p:spPr>
           <a:xfrm>
-            <a:off x="9692640" y="1915329"/>
+            <a:off x="9692640" y="3036722"/>
             <a:ext cx="2221992" cy="137160"/>
           </a:xfrm>
           <a:prstGeom prst="rect">
@@ -4782,23 +4782,23 @@
         </p:nvSpPr>
         <p:spPr>
           <a:xfrm>
-            <a:off x="9692640" y="2079921"/>
-            <a:ext cx="2148840" cy="289390"/>
-          </a:xfrm>
-          <a:prstGeom prst="rect">
-            <a:avLst/>
-          </a:prstGeom>
-          <a:noFill/>
-        </p:spPr>
-        <p:txBody>
-          <a:bodyPr wrap="square">
-            <a:spAutoFit/>
-          </a:bodyPr>
-          <a:lstStyle/>
-          <a:p>
-            <a:pPr algn="l"/>
-            <a:r>
-              <a:rPr sz="800" b="0" i="0">
+            <a:off x="9692640" y="3201314"/>
+            <a:ext cx="2148840" cy="850087"/>
+          </a:xfrm>
+          <a:prstGeom prst="rect">
+            <a:avLst/>
+          </a:prstGeom>
+          <a:noFill/>
+        </p:spPr>
+        <p:txBody>
+          <a:bodyPr wrap="square">
+            <a:spAutoFit/>
+          </a:bodyPr>
+          <a:lstStyle/>
+          <a:p>
+            <a:pPr algn="l"/>
+            <a:r>
+              <a:rPr sz="1000" b="0" i="0">
                 <a:solidFill>
                   <a:srgbClr val="000000"/>
                 </a:solidFill>
@@ -4817,7 +4817,7 @@
         </p:nvSpPr>
         <p:spPr>
           <a:xfrm>
-            <a:off x="0" y="2445257"/>
+            <a:off x="0" y="4127347"/>
             <a:ext cx="12188952" cy="6350"/>
           </a:xfrm>
           <a:prstGeom prst="rect">
@@ -4860,7 +4860,7 @@
         </p:nvSpPr>
         <p:spPr>
           <a:xfrm>
-            <a:off x="0" y="2506471"/>
+            <a:off x="0" y="4188561"/>
             <a:ext cx="12188952" cy="237744"/>
           </a:xfrm>
           <a:prstGeom prst="rect">
@@ -4903,7 +4903,7 @@
         </p:nvSpPr>
         <p:spPr>
           <a:xfrm>
-            <a:off x="292608" y="2543047"/>
+            <a:off x="292608" y="4225137"/>
             <a:ext cx="4608576" cy="201168"/>
           </a:xfrm>
           <a:prstGeom prst="rect">
@@ -4938,8 +4938,8 @@
         </p:nvSpPr>
         <p:spPr>
           <a:xfrm>
-            <a:off x="0" y="2744215"/>
-            <a:ext cx="12188952" cy="627718"/>
+            <a:off x="0" y="4426305"/>
+            <a:ext cx="12188952" cy="1188415"/>
           </a:xfrm>
           <a:prstGeom prst="rect">
             <a:avLst/>
@@ -4981,7 +4981,7 @@
         </p:nvSpPr>
         <p:spPr>
           <a:xfrm>
-            <a:off x="292608" y="2799079"/>
+            <a:off x="292608" y="4481169"/>
             <a:ext cx="4562856" cy="164592"/>
           </a:xfrm>
           <a:prstGeom prst="rect">
@@ -5016,23 +5016,23 @@
         </p:nvSpPr>
         <p:spPr>
           <a:xfrm>
-            <a:off x="292608" y="3000247"/>
-            <a:ext cx="4562856" cy="316822"/>
-          </a:xfrm>
-          <a:prstGeom prst="rect">
-            <a:avLst/>
-          </a:prstGeom>
-          <a:noFill/>
-        </p:spPr>
-        <p:txBody>
-          <a:bodyPr wrap="square">
-            <a:spAutoFit/>
-          </a:bodyPr>
-          <a:lstStyle/>
-          <a:p>
-            <a:pPr algn="l"/>
-            <a:r>
-              <a:rPr sz="800" b="0" i="0">
+            <a:off x="292608" y="4682337"/>
+            <a:ext cx="4562856" cy="877519"/>
+          </a:xfrm>
+          <a:prstGeom prst="rect">
+            <a:avLst/>
+          </a:prstGeom>
+          <a:noFill/>
+        </p:spPr>
+        <p:txBody>
+          <a:bodyPr wrap="square">
+            <a:spAutoFit/>
+          </a:bodyPr>
+          <a:lstStyle/>
+          <a:p>
+            <a:pPr algn="l"/>
+            <a:r>
+              <a:rPr sz="1000" b="0" i="0">
                 <a:solidFill>
                   <a:srgbClr val="595959"/>
                 </a:solidFill>
@@ -5051,8 +5051,8 @@
         </p:nvSpPr>
         <p:spPr>
           <a:xfrm>
-            <a:off x="4956048" y="2799079"/>
-            <a:ext cx="2221992" cy="517990"/>
+            <a:off x="4956048" y="4481169"/>
+            <a:ext cx="2221992" cy="1078687"/>
           </a:xfrm>
           <a:prstGeom prst="rect">
             <a:avLst/>
@@ -5094,7 +5094,7 @@
         </p:nvSpPr>
         <p:spPr>
           <a:xfrm>
-            <a:off x="5029200" y="2835655"/>
+            <a:off x="5029200" y="4517745"/>
             <a:ext cx="2221992" cy="137160"/>
           </a:xfrm>
           <a:prstGeom prst="rect">
@@ -5129,23 +5129,23 @@
         </p:nvSpPr>
         <p:spPr>
           <a:xfrm>
-            <a:off x="5029200" y="3000247"/>
-            <a:ext cx="2148840" cy="289390"/>
-          </a:xfrm>
-          <a:prstGeom prst="rect">
-            <a:avLst/>
-          </a:prstGeom>
-          <a:noFill/>
-        </p:spPr>
-        <p:txBody>
-          <a:bodyPr wrap="square">
-            <a:spAutoFit/>
-          </a:bodyPr>
-          <a:lstStyle/>
-          <a:p>
-            <a:pPr algn="l"/>
-            <a:r>
-              <a:rPr sz="800" b="0" i="0">
+            <a:off x="5029200" y="4682337"/>
+            <a:ext cx="2148840" cy="850087"/>
+          </a:xfrm>
+          <a:prstGeom prst="rect">
+            <a:avLst/>
+          </a:prstGeom>
+          <a:noFill/>
+        </p:spPr>
+        <p:txBody>
+          <a:bodyPr wrap="square">
+            <a:spAutoFit/>
+          </a:bodyPr>
+          <a:lstStyle/>
+          <a:p>
+            <a:pPr algn="l"/>
+            <a:r>
+              <a:rPr sz="1000" b="0" i="0">
                 <a:solidFill>
                   <a:srgbClr val="000000"/>
                 </a:solidFill>
@@ -5164,8 +5164,8 @@
         </p:nvSpPr>
         <p:spPr>
           <a:xfrm>
-            <a:off x="7287768" y="2799079"/>
-            <a:ext cx="2221992" cy="517990"/>
+            <a:off x="7287768" y="4481169"/>
+            <a:ext cx="2221992" cy="1078687"/>
           </a:xfrm>
           <a:prstGeom prst="rect">
             <a:avLst/>
@@ -5207,7 +5207,7 @@
         </p:nvSpPr>
         <p:spPr>
           <a:xfrm>
-            <a:off x="7360920" y="2835655"/>
+            <a:off x="7360920" y="4517745"/>
             <a:ext cx="2221992" cy="137160"/>
           </a:xfrm>
           <a:prstGeom prst="rect">
@@ -5242,23 +5242,23 @@
         </p:nvSpPr>
         <p:spPr>
           <a:xfrm>
-            <a:off x="7360920" y="3000247"/>
-            <a:ext cx="2148840" cy="289390"/>
-          </a:xfrm>
-          <a:prstGeom prst="rect">
-            <a:avLst/>
-          </a:prstGeom>
-          <a:noFill/>
-        </p:spPr>
-        <p:txBody>
-          <a:bodyPr wrap="square">
-            <a:spAutoFit/>
-          </a:bodyPr>
-          <a:lstStyle/>
-          <a:p>
-            <a:pPr algn="l"/>
-            <a:r>
-              <a:rPr sz="800" b="0" i="0">
+            <a:off x="7360920" y="4682337"/>
+            <a:ext cx="2148840" cy="850087"/>
+          </a:xfrm>
+          <a:prstGeom prst="rect">
+            <a:avLst/>
+          </a:prstGeom>
+          <a:noFill/>
+        </p:spPr>
+        <p:txBody>
+          <a:bodyPr wrap="square">
+            <a:spAutoFit/>
+          </a:bodyPr>
+          <a:lstStyle/>
+          <a:p>
+            <a:pPr algn="l"/>
+            <a:r>
+              <a:rPr sz="1000" b="0" i="0">
                 <a:solidFill>
                   <a:srgbClr val="000000"/>
                 </a:solidFill>
@@ -5277,8 +5277,8 @@
         </p:nvSpPr>
         <p:spPr>
           <a:xfrm>
-            <a:off x="9619488" y="2799079"/>
-            <a:ext cx="2221992" cy="517990"/>
+            <a:off x="9619488" y="4481169"/>
+            <a:ext cx="2221992" cy="1078687"/>
           </a:xfrm>
           <a:prstGeom prst="rect">
             <a:avLst/>
@@ -5320,7 +5320,7 @@
         </p:nvSpPr>
         <p:spPr>
           <a:xfrm>
-            <a:off x="9692640" y="2835655"/>
+            <a:off x="9692640" y="4517745"/>
             <a:ext cx="2221992" cy="137160"/>
           </a:xfrm>
           <a:prstGeom prst="rect">
@@ -5355,23 +5355,23 @@
         </p:nvSpPr>
         <p:spPr>
           <a:xfrm>
-            <a:off x="9692640" y="3000247"/>
-            <a:ext cx="2148840" cy="289390"/>
-          </a:xfrm>
-          <a:prstGeom prst="rect">
-            <a:avLst/>
-          </a:prstGeom>
-          <a:noFill/>
-        </p:spPr>
-        <p:txBody>
-          <a:bodyPr wrap="square">
-            <a:spAutoFit/>
-          </a:bodyPr>
-          <a:lstStyle/>
-          <a:p>
-            <a:pPr algn="l"/>
-            <a:r>
-              <a:rPr sz="800" b="0" i="0">
+            <a:off x="9692640" y="4682337"/>
+            <a:ext cx="2148840" cy="850087"/>
+          </a:xfrm>
+          <a:prstGeom prst="rect">
+            <a:avLst/>
+          </a:prstGeom>
+          <a:noFill/>
+        </p:spPr>
+        <p:txBody>
+          <a:bodyPr wrap="square">
+            <a:spAutoFit/>
+          </a:bodyPr>
+          <a:lstStyle/>
+          <a:p>
+            <a:pPr algn="l"/>
+            <a:r>
+              <a:rPr sz="1000" b="0" i="0">
                 <a:solidFill>
                   <a:srgbClr val="000000"/>
                 </a:solidFill>
@@ -5390,7 +5390,7 @@
         </p:nvSpPr>
         <p:spPr>
           <a:xfrm>
-            <a:off x="0" y="3365584"/>
+            <a:off x="0" y="5608370"/>
             <a:ext cx="12188952" cy="6350"/>
           </a:xfrm>
           <a:prstGeom prst="rect">
@@ -5433,8 +5433,8 @@
         </p:nvSpPr>
         <p:spPr>
           <a:xfrm>
-            <a:off x="0" y="3371934"/>
-            <a:ext cx="12188952" cy="627718"/>
+            <a:off x="0" y="5614720"/>
+            <a:ext cx="12188952" cy="1188415"/>
           </a:xfrm>
           <a:prstGeom prst="rect">
             <a:avLst/>
@@ -5476,7 +5476,7 @@
         </p:nvSpPr>
         <p:spPr>
           <a:xfrm>
-            <a:off x="292608" y="3426798"/>
+            <a:off x="292608" y="5669584"/>
             <a:ext cx="4562856" cy="164592"/>
           </a:xfrm>
           <a:prstGeom prst="rect">
@@ -5511,23 +5511,23 @@
         </p:nvSpPr>
         <p:spPr>
           <a:xfrm>
-            <a:off x="292608" y="3627966"/>
-            <a:ext cx="4562856" cy="316822"/>
-          </a:xfrm>
-          <a:prstGeom prst="rect">
-            <a:avLst/>
-          </a:prstGeom>
-          <a:noFill/>
-        </p:spPr>
-        <p:txBody>
-          <a:bodyPr wrap="square">
-            <a:spAutoFit/>
-          </a:bodyPr>
-          <a:lstStyle/>
-          <a:p>
-            <a:pPr algn="l"/>
-            <a:r>
-              <a:rPr sz="800" b="0" i="0">
+            <a:off x="292608" y="5870752"/>
+            <a:ext cx="4562856" cy="877519"/>
+          </a:xfrm>
+          <a:prstGeom prst="rect">
+            <a:avLst/>
+          </a:prstGeom>
+          <a:noFill/>
+        </p:spPr>
+        <p:txBody>
+          <a:bodyPr wrap="square">
+            <a:spAutoFit/>
+          </a:bodyPr>
+          <a:lstStyle/>
+          <a:p>
+            <a:pPr algn="l"/>
+            <a:r>
+              <a:rPr sz="1000" b="0" i="0">
                 <a:solidFill>
                   <a:srgbClr val="595959"/>
                 </a:solidFill>
@@ -5546,8 +5546,8 @@
         </p:nvSpPr>
         <p:spPr>
           <a:xfrm>
-            <a:off x="4956048" y="3426798"/>
-            <a:ext cx="2221992" cy="517990"/>
+            <a:off x="4956048" y="5669584"/>
+            <a:ext cx="2221992" cy="1078687"/>
           </a:xfrm>
           <a:prstGeom prst="rect">
             <a:avLst/>
@@ -5589,7 +5589,7 @@
         </p:nvSpPr>
         <p:spPr>
           <a:xfrm>
-            <a:off x="5029200" y="3463374"/>
+            <a:off x="5029200" y="5706160"/>
             <a:ext cx="2221992" cy="137160"/>
           </a:xfrm>
           <a:prstGeom prst="rect">
@@ -5624,23 +5624,23 @@
         </p:nvSpPr>
         <p:spPr>
           <a:xfrm>
-            <a:off x="5029200" y="3627966"/>
-            <a:ext cx="2148840" cy="289390"/>
-          </a:xfrm>
-          <a:prstGeom prst="rect">
-            <a:avLst/>
-          </a:prstGeom>
-          <a:noFill/>
-        </p:spPr>
-        <p:txBody>
-          <a:bodyPr wrap="square">
-            <a:spAutoFit/>
-          </a:bodyPr>
-          <a:lstStyle/>
-          <a:p>
-            <a:pPr algn="l"/>
-            <a:r>
-              <a:rPr sz="800" b="0" i="0">
+            <a:off x="5029200" y="5870752"/>
+            <a:ext cx="2148840" cy="850087"/>
+          </a:xfrm>
+          <a:prstGeom prst="rect">
+            <a:avLst/>
+          </a:prstGeom>
+          <a:noFill/>
+        </p:spPr>
+        <p:txBody>
+          <a:bodyPr wrap="square">
+            <a:spAutoFit/>
+          </a:bodyPr>
+          <a:lstStyle/>
+          <a:p>
+            <a:pPr algn="l"/>
+            <a:r>
+              <a:rPr sz="1000" b="0" i="0">
                 <a:solidFill>
                   <a:srgbClr val="000000"/>
                 </a:solidFill>
@@ -5659,8 +5659,8 @@
         </p:nvSpPr>
         <p:spPr>
           <a:xfrm>
-            <a:off x="7287768" y="3426798"/>
-            <a:ext cx="2221992" cy="517990"/>
+            <a:off x="7287768" y="5669584"/>
+            <a:ext cx="2221992" cy="1078687"/>
           </a:xfrm>
           <a:prstGeom prst="rect">
             <a:avLst/>
@@ -5702,7 +5702,7 @@
         </p:nvSpPr>
         <p:spPr>
           <a:xfrm>
-            <a:off x="7360920" y="3463374"/>
+            <a:off x="7360920" y="5706160"/>
             <a:ext cx="2221992" cy="137160"/>
           </a:xfrm>
           <a:prstGeom prst="rect">
@@ -5737,23 +5737,23 @@
         </p:nvSpPr>
         <p:spPr>
           <a:xfrm>
-            <a:off x="7360920" y="3627966"/>
-            <a:ext cx="2148840" cy="289390"/>
-          </a:xfrm>
-          <a:prstGeom prst="rect">
-            <a:avLst/>
-          </a:prstGeom>
-          <a:noFill/>
-        </p:spPr>
-        <p:txBody>
-          <a:bodyPr wrap="square">
-            <a:spAutoFit/>
-          </a:bodyPr>
-          <a:lstStyle/>
-          <a:p>
-            <a:pPr algn="l"/>
-            <a:r>
-              <a:rPr sz="800" b="0" i="0">
+            <a:off x="7360920" y="5870752"/>
+            <a:ext cx="2148840" cy="850087"/>
+          </a:xfrm>
+          <a:prstGeom prst="rect">
+            <a:avLst/>
+          </a:prstGeom>
+          <a:noFill/>
+        </p:spPr>
+        <p:txBody>
+          <a:bodyPr wrap="square">
+            <a:spAutoFit/>
+          </a:bodyPr>
+          <a:lstStyle/>
+          <a:p>
+            <a:pPr algn="l"/>
+            <a:r>
+              <a:rPr sz="1000" b="0" i="0">
                 <a:solidFill>
                   <a:srgbClr val="000000"/>
                 </a:solidFill>
@@ -5772,8 +5772,8 @@
         </p:nvSpPr>
         <p:spPr>
           <a:xfrm>
-            <a:off x="9619488" y="3426798"/>
-            <a:ext cx="2221992" cy="517990"/>
+            <a:off x="9619488" y="5669584"/>
+            <a:ext cx="2221992" cy="1078687"/>
           </a:xfrm>
           <a:prstGeom prst="rect">
             <a:avLst/>
@@ -5815,7 +5815,7 @@
         </p:nvSpPr>
         <p:spPr>
           <a:xfrm>
-            <a:off x="9692640" y="3463374"/>
+            <a:off x="9692640" y="5706160"/>
             <a:ext cx="2221992" cy="137160"/>
           </a:xfrm>
           <a:prstGeom prst="rect">
@@ -5850,23 +5850,23 @@
         </p:nvSpPr>
         <p:spPr>
           <a:xfrm>
-            <a:off x="9692640" y="3627966"/>
-            <a:ext cx="2148840" cy="289390"/>
-          </a:xfrm>
-          <a:prstGeom prst="rect">
-            <a:avLst/>
-          </a:prstGeom>
-          <a:noFill/>
-        </p:spPr>
-        <p:txBody>
-          <a:bodyPr wrap="square">
-            <a:spAutoFit/>
-          </a:bodyPr>
-          <a:lstStyle/>
-          <a:p>
-            <a:pPr algn="l"/>
-            <a:r>
-              <a:rPr sz="800" b="0" i="0">
+            <a:off x="9692640" y="5870752"/>
+            <a:ext cx="2148840" cy="850087"/>
+          </a:xfrm>
+          <a:prstGeom prst="rect">
+            <a:avLst/>
+          </a:prstGeom>
+          <a:noFill/>
+        </p:spPr>
+        <p:txBody>
+          <a:bodyPr wrap="square">
+            <a:spAutoFit/>
+          </a:bodyPr>
+          <a:lstStyle/>
+          <a:p>
+            <a:pPr algn="l"/>
+            <a:r>
+              <a:rPr sz="1000" b="0" i="0">
                 <a:solidFill>
                   <a:srgbClr val="000000"/>
                 </a:solidFill>
@@ -5880,2064 +5880,6 @@
       <p:sp>
         <p:nvSpPr>
           <p:cNvPr id="75" name="Rectangle 74"/>
-          <p:cNvSpPr/>
-          <p:nvPr/>
-        </p:nvSpPr>
-        <p:spPr>
-          <a:xfrm>
-            <a:off x="0" y="3993303"/>
-            <a:ext cx="12188952" cy="6350"/>
-          </a:xfrm>
-          <a:prstGeom prst="rect">
-            <a:avLst/>
-          </a:prstGeom>
-          <a:solidFill>
-            <a:srgbClr val="CCCCCC"/>
-          </a:solidFill>
-          <a:ln>
-            <a:noFill/>
-          </a:ln>
-        </p:spPr>
-        <p:style>
-          <a:lnRef idx="1">
-            <a:schemeClr val="accent1"/>
-          </a:lnRef>
-          <a:fillRef idx="3">
-            <a:schemeClr val="accent1"/>
-          </a:fillRef>
-          <a:effectRef idx="2">
-            <a:schemeClr val="accent1"/>
-          </a:effectRef>
-          <a:fontRef idx="minor">
-            <a:schemeClr val="lt1"/>
-          </a:fontRef>
-        </p:style>
-        <p:txBody>
-          <a:bodyPr rtlCol="0" anchor="ctr"/>
-          <a:lstStyle/>
-          <a:p>
-            <a:pPr algn="ctr"/>
-          </a:p>
-        </p:txBody>
-      </p:sp>
-      <p:sp>
-        <p:nvSpPr>
-          <p:cNvPr id="76" name="Rectangle 75"/>
-          <p:cNvSpPr/>
-          <p:nvPr/>
-        </p:nvSpPr>
-        <p:spPr>
-          <a:xfrm>
-            <a:off x="0" y="4054517"/>
-            <a:ext cx="12188952" cy="237744"/>
-          </a:xfrm>
-          <a:prstGeom prst="rect">
-            <a:avLst/>
-          </a:prstGeom>
-          <a:solidFill>
-            <a:srgbClr val="000000"/>
-          </a:solidFill>
-          <a:ln>
-            <a:noFill/>
-          </a:ln>
-        </p:spPr>
-        <p:style>
-          <a:lnRef idx="1">
-            <a:schemeClr val="accent1"/>
-          </a:lnRef>
-          <a:fillRef idx="3">
-            <a:schemeClr val="accent1"/>
-          </a:fillRef>
-          <a:effectRef idx="2">
-            <a:schemeClr val="accent1"/>
-          </a:effectRef>
-          <a:fontRef idx="minor">
-            <a:schemeClr val="lt1"/>
-          </a:fontRef>
-        </p:style>
-        <p:txBody>
-          <a:bodyPr rtlCol="0" anchor="ctr"/>
-          <a:lstStyle/>
-          <a:p>
-            <a:pPr algn="ctr"/>
-          </a:p>
-        </p:txBody>
-      </p:sp>
-      <p:sp>
-        <p:nvSpPr>
-          <p:cNvPr id="77" name="TextBox 76"/>
-          <p:cNvSpPr txBox="1"/>
-          <p:nvPr/>
-        </p:nvSpPr>
-        <p:spPr>
-          <a:xfrm>
-            <a:off x="292608" y="4091093"/>
-            <a:ext cx="4608576" cy="201168"/>
-          </a:xfrm>
-          <a:prstGeom prst="rect">
-            <a:avLst/>
-          </a:prstGeom>
-          <a:noFill/>
-        </p:spPr>
-        <p:txBody>
-          <a:bodyPr wrap="square">
-            <a:spAutoFit/>
-          </a:bodyPr>
-          <a:lstStyle/>
-          <a:p>
-            <a:pPr algn="l"/>
-            <a:r>
-              <a:rPr sz="900" b="1" i="0">
-                <a:solidFill>
-                  <a:srgbClr val="FFFFFF"/>
-                </a:solidFill>
-                <a:latin typeface="Helvetica Neue"/>
-              </a:rPr>
-              <a:t>TECHNOLOGY EXCELLENCE</a:t>
-            </a:r>
-          </a:p>
-        </p:txBody>
-      </p:sp>
-      <p:sp>
-        <p:nvSpPr>
-          <p:cNvPr id="78" name="Rectangle 77"/>
-          <p:cNvSpPr/>
-          <p:nvPr/>
-        </p:nvSpPr>
-        <p:spPr>
-          <a:xfrm>
-            <a:off x="0" y="4292261"/>
-            <a:ext cx="12188952" cy="627718"/>
-          </a:xfrm>
-          <a:prstGeom prst="rect">
-            <a:avLst/>
-          </a:prstGeom>
-          <a:solidFill>
-            <a:srgbClr val="FFFFFF"/>
-          </a:solidFill>
-          <a:ln>
-            <a:noFill/>
-          </a:ln>
-        </p:spPr>
-        <p:style>
-          <a:lnRef idx="1">
-            <a:schemeClr val="accent1"/>
-          </a:lnRef>
-          <a:fillRef idx="3">
-            <a:schemeClr val="accent1"/>
-          </a:fillRef>
-          <a:effectRef idx="2">
-            <a:schemeClr val="accent1"/>
-          </a:effectRef>
-          <a:fontRef idx="minor">
-            <a:schemeClr val="lt1"/>
-          </a:fontRef>
-        </p:style>
-        <p:txBody>
-          <a:bodyPr rtlCol="0" anchor="ctr"/>
-          <a:lstStyle/>
-          <a:p>
-            <a:pPr algn="ctr"/>
-          </a:p>
-        </p:txBody>
-      </p:sp>
-      <p:sp>
-        <p:nvSpPr>
-          <p:cNvPr id="79" name="TextBox 78"/>
-          <p:cNvSpPr txBox="1"/>
-          <p:nvPr/>
-        </p:nvSpPr>
-        <p:spPr>
-          <a:xfrm>
-            <a:off x="292608" y="4347125"/>
-            <a:ext cx="4562856" cy="164592"/>
-          </a:xfrm>
-          <a:prstGeom prst="rect">
-            <a:avLst/>
-          </a:prstGeom>
-          <a:noFill/>
-        </p:spPr>
-        <p:txBody>
-          <a:bodyPr wrap="square">
-            <a:spAutoFit/>
-          </a:bodyPr>
-          <a:lstStyle/>
-          <a:p>
-            <a:pPr algn="l"/>
-            <a:r>
-              <a:rPr sz="800" b="1" i="0">
-                <a:solidFill>
-                  <a:srgbClr val="000000"/>
-                </a:solidFill>
-                <a:latin typeface="Helvetica Neue"/>
-              </a:rPr>
-              <a:t>Financial &amp; Roadmap Rigor</a:t>
-            </a:r>
-          </a:p>
-        </p:txBody>
-      </p:sp>
-      <p:sp>
-        <p:nvSpPr>
-          <p:cNvPr id="80" name="TextBox 79"/>
-          <p:cNvSpPr txBox="1"/>
-          <p:nvPr/>
-        </p:nvSpPr>
-        <p:spPr>
-          <a:xfrm>
-            <a:off x="292608" y="4548293"/>
-            <a:ext cx="4562856" cy="316822"/>
-          </a:xfrm>
-          <a:prstGeom prst="rect">
-            <a:avLst/>
-          </a:prstGeom>
-          <a:noFill/>
-        </p:spPr>
-        <p:txBody>
-          <a:bodyPr wrap="square">
-            <a:spAutoFit/>
-          </a:bodyPr>
-          <a:lstStyle/>
-          <a:p>
-            <a:pPr algn="l"/>
-            <a:r>
-              <a:rPr sz="800" b="0" i="0">
-                <a:solidFill>
-                  <a:srgbClr val="595959"/>
-                </a:solidFill>
-                <a:latin typeface="Helvetica Neue"/>
-              </a:rPr>
-              <a:t>Deliver the Retail &amp; Wholesale tech roadmaps on budget and sustain platforms within baseline opex budget.</a:t>
-            </a:r>
-          </a:p>
-        </p:txBody>
-      </p:sp>
-      <p:sp>
-        <p:nvSpPr>
-          <p:cNvPr id="81" name="Rectangle 80"/>
-          <p:cNvSpPr/>
-          <p:nvPr/>
-        </p:nvSpPr>
-        <p:spPr>
-          <a:xfrm>
-            <a:off x="4956048" y="4347125"/>
-            <a:ext cx="2221992" cy="517990"/>
-          </a:xfrm>
-          <a:prstGeom prst="rect">
-            <a:avLst/>
-          </a:prstGeom>
-          <a:solidFill>
-            <a:srgbClr val="F9F9F6"/>
-          </a:solidFill>
-          <a:ln>
-            <a:noFill/>
-          </a:ln>
-        </p:spPr>
-        <p:style>
-          <a:lnRef idx="1">
-            <a:schemeClr val="accent1"/>
-          </a:lnRef>
-          <a:fillRef idx="3">
-            <a:schemeClr val="accent1"/>
-          </a:fillRef>
-          <a:effectRef idx="2">
-            <a:schemeClr val="accent1"/>
-          </a:effectRef>
-          <a:fontRef idx="minor">
-            <a:schemeClr val="lt1"/>
-          </a:fontRef>
-        </p:style>
-        <p:txBody>
-          <a:bodyPr rtlCol="0" anchor="ctr"/>
-          <a:lstStyle/>
-          <a:p>
-            <a:pPr algn="ctr"/>
-          </a:p>
-        </p:txBody>
-      </p:sp>
-      <p:sp>
-        <p:nvSpPr>
-          <p:cNvPr id="82" name="TextBox 81"/>
-          <p:cNvSpPr txBox="1"/>
-          <p:nvPr/>
-        </p:nvSpPr>
-        <p:spPr>
-          <a:xfrm>
-            <a:off x="5029200" y="4383701"/>
-            <a:ext cx="2221992" cy="137160"/>
-          </a:xfrm>
-          <a:prstGeom prst="rect">
-            <a:avLst/>
-          </a:prstGeom>
-          <a:noFill/>
-        </p:spPr>
-        <p:txBody>
-          <a:bodyPr wrap="square">
-            <a:spAutoFit/>
-          </a:bodyPr>
-          <a:lstStyle/>
-          <a:p>
-            <a:pPr algn="l"/>
-            <a:r>
-              <a:rPr sz="700" b="1" i="0">
-                <a:solidFill>
-                  <a:srgbClr val="595959"/>
-                </a:solidFill>
-                <a:latin typeface="Helvetica Neue"/>
-              </a:rPr>
-              <a:t>SOLID</a:t>
-            </a:r>
-          </a:p>
-        </p:txBody>
-      </p:sp>
-      <p:sp>
-        <p:nvSpPr>
-          <p:cNvPr id="83" name="TextBox 82"/>
-          <p:cNvSpPr txBox="1"/>
-          <p:nvPr/>
-        </p:nvSpPr>
-        <p:spPr>
-          <a:xfrm>
-            <a:off x="5029200" y="4548293"/>
-            <a:ext cx="2148840" cy="289390"/>
-          </a:xfrm>
-          <a:prstGeom prst="rect">
-            <a:avLst/>
-          </a:prstGeom>
-          <a:noFill/>
-        </p:spPr>
-        <p:txBody>
-          <a:bodyPr wrap="square">
-            <a:spAutoFit/>
-          </a:bodyPr>
-          <a:lstStyle/>
-          <a:p>
-            <a:pPr algn="l"/>
-            <a:r>
-              <a:rPr sz="800" b="0" i="0">
-                <a:solidFill>
-                  <a:srgbClr val="000000"/>
-                </a:solidFill>
-                <a:latin typeface="Helvetica Neue"/>
-              </a:rPr>
-              <a:t>Delivered with +/- 10% budget variance.</a:t>
-            </a:r>
-          </a:p>
-        </p:txBody>
-      </p:sp>
-      <p:sp>
-        <p:nvSpPr>
-          <p:cNvPr id="84" name="Rectangle 83"/>
-          <p:cNvSpPr/>
-          <p:nvPr/>
-        </p:nvSpPr>
-        <p:spPr>
-          <a:xfrm>
-            <a:off x="7287768" y="4347125"/>
-            <a:ext cx="2221992" cy="517990"/>
-          </a:xfrm>
-          <a:prstGeom prst="rect">
-            <a:avLst/>
-          </a:prstGeom>
-          <a:solidFill>
-            <a:srgbClr val="EBEBEB"/>
-          </a:solidFill>
-          <a:ln>
-            <a:noFill/>
-          </a:ln>
-        </p:spPr>
-        <p:style>
-          <a:lnRef idx="1">
-            <a:schemeClr val="accent1"/>
-          </a:lnRef>
-          <a:fillRef idx="3">
-            <a:schemeClr val="accent1"/>
-          </a:fillRef>
-          <a:effectRef idx="2">
-            <a:schemeClr val="accent1"/>
-          </a:effectRef>
-          <a:fontRef idx="minor">
-            <a:schemeClr val="lt1"/>
-          </a:fontRef>
-        </p:style>
-        <p:txBody>
-          <a:bodyPr rtlCol="0" anchor="ctr"/>
-          <a:lstStyle/>
-          <a:p>
-            <a:pPr algn="ctr"/>
-          </a:p>
-        </p:txBody>
-      </p:sp>
-      <p:sp>
-        <p:nvSpPr>
-          <p:cNvPr id="85" name="TextBox 84"/>
-          <p:cNvSpPr txBox="1"/>
-          <p:nvPr/>
-        </p:nvSpPr>
-        <p:spPr>
-          <a:xfrm>
-            <a:off x="7360920" y="4383701"/>
-            <a:ext cx="2221992" cy="137160"/>
-          </a:xfrm>
-          <a:prstGeom prst="rect">
-            <a:avLst/>
-          </a:prstGeom>
-          <a:noFill/>
-        </p:spPr>
-        <p:txBody>
-          <a:bodyPr wrap="square">
-            <a:spAutoFit/>
-          </a:bodyPr>
-          <a:lstStyle/>
-          <a:p>
-            <a:pPr algn="l"/>
-            <a:r>
-              <a:rPr sz="700" b="1" i="0">
-                <a:solidFill>
-                  <a:srgbClr val="595959"/>
-                </a:solidFill>
-                <a:latin typeface="Helvetica Neue"/>
-              </a:rPr>
-              <a:t>IMPRESSIVE</a:t>
-            </a:r>
-          </a:p>
-        </p:txBody>
-      </p:sp>
-      <p:sp>
-        <p:nvSpPr>
-          <p:cNvPr id="86" name="TextBox 85"/>
-          <p:cNvSpPr txBox="1"/>
-          <p:nvPr/>
-        </p:nvSpPr>
-        <p:spPr>
-          <a:xfrm>
-            <a:off x="7360920" y="4548293"/>
-            <a:ext cx="2148840" cy="289390"/>
-          </a:xfrm>
-          <a:prstGeom prst="rect">
-            <a:avLst/>
-          </a:prstGeom>
-          <a:noFill/>
-        </p:spPr>
-        <p:txBody>
-          <a:bodyPr wrap="square">
-            <a:spAutoFit/>
-          </a:bodyPr>
-          <a:lstStyle/>
-          <a:p>
-            <a:pPr algn="l"/>
-            <a:r>
-              <a:rPr sz="800" b="0" i="0">
-                <a:solidFill>
-                  <a:srgbClr val="000000"/>
-                </a:solidFill>
-                <a:latin typeface="Helvetica Neue"/>
-              </a:rPr>
-              <a:t>Delivered with +/- 5% budget variance.</a:t>
-            </a:r>
-          </a:p>
-        </p:txBody>
-      </p:sp>
-      <p:sp>
-        <p:nvSpPr>
-          <p:cNvPr id="87" name="Rectangle 86"/>
-          <p:cNvSpPr/>
-          <p:nvPr/>
-        </p:nvSpPr>
-        <p:spPr>
-          <a:xfrm>
-            <a:off x="9619488" y="4347125"/>
-            <a:ext cx="2221992" cy="517990"/>
-          </a:xfrm>
-          <a:prstGeom prst="rect">
-            <a:avLst/>
-          </a:prstGeom>
-          <a:solidFill>
-            <a:srgbClr val="EEF2EB"/>
-          </a:solidFill>
-          <a:ln>
-            <a:noFill/>
-          </a:ln>
-        </p:spPr>
-        <p:style>
-          <a:lnRef idx="1">
-            <a:schemeClr val="accent1"/>
-          </a:lnRef>
-          <a:fillRef idx="3">
-            <a:schemeClr val="accent1"/>
-          </a:fillRef>
-          <a:effectRef idx="2">
-            <a:schemeClr val="accent1"/>
-          </a:effectRef>
-          <a:fontRef idx="minor">
-            <a:schemeClr val="lt1"/>
-          </a:fontRef>
-        </p:style>
-        <p:txBody>
-          <a:bodyPr rtlCol="0" anchor="ctr"/>
-          <a:lstStyle/>
-          <a:p>
-            <a:pPr algn="ctr"/>
-          </a:p>
-        </p:txBody>
-      </p:sp>
-      <p:sp>
-        <p:nvSpPr>
-          <p:cNvPr id="88" name="TextBox 87"/>
-          <p:cNvSpPr txBox="1"/>
-          <p:nvPr/>
-        </p:nvSpPr>
-        <p:spPr>
-          <a:xfrm>
-            <a:off x="9692640" y="4383701"/>
-            <a:ext cx="2221992" cy="137160"/>
-          </a:xfrm>
-          <a:prstGeom prst="rect">
-            <a:avLst/>
-          </a:prstGeom>
-          <a:noFill/>
-        </p:spPr>
-        <p:txBody>
-          <a:bodyPr wrap="square">
-            <a:spAutoFit/>
-          </a:bodyPr>
-          <a:lstStyle/>
-          <a:p>
-            <a:pPr algn="l"/>
-            <a:r>
-              <a:rPr sz="700" b="1" i="0">
-                <a:solidFill>
-                  <a:srgbClr val="5E6B52"/>
-                </a:solidFill>
-                <a:latin typeface="Helvetica Neue"/>
-              </a:rPr>
-              <a:t>EXCELLENT</a:t>
-            </a:r>
-          </a:p>
-        </p:txBody>
-      </p:sp>
-      <p:sp>
-        <p:nvSpPr>
-          <p:cNvPr id="89" name="TextBox 88"/>
-          <p:cNvSpPr txBox="1"/>
-          <p:nvPr/>
-        </p:nvSpPr>
-        <p:spPr>
-          <a:xfrm>
-            <a:off x="9692640" y="4548293"/>
-            <a:ext cx="2148840" cy="289390"/>
-          </a:xfrm>
-          <a:prstGeom prst="rect">
-            <a:avLst/>
-          </a:prstGeom>
-          <a:noFill/>
-        </p:spPr>
-        <p:txBody>
-          <a:bodyPr wrap="square">
-            <a:spAutoFit/>
-          </a:bodyPr>
-          <a:lstStyle/>
-          <a:p>
-            <a:pPr algn="l"/>
-            <a:r>
-              <a:rPr sz="800" b="0" i="0">
-                <a:solidFill>
-                  <a:srgbClr val="000000"/>
-                </a:solidFill>
-                <a:latin typeface="Helvetica Neue"/>
-              </a:rPr>
-              <a:t>Delivered perfectly on budget (0% variance).</a:t>
-            </a:r>
-          </a:p>
-        </p:txBody>
-      </p:sp>
-      <p:sp>
-        <p:nvSpPr>
-          <p:cNvPr id="90" name="Rectangle 89"/>
-          <p:cNvSpPr/>
-          <p:nvPr/>
-        </p:nvSpPr>
-        <p:spPr>
-          <a:xfrm>
-            <a:off x="0" y="4913629"/>
-            <a:ext cx="12188952" cy="6350"/>
-          </a:xfrm>
-          <a:prstGeom prst="rect">
-            <a:avLst/>
-          </a:prstGeom>
-          <a:solidFill>
-            <a:srgbClr val="CCCCCC"/>
-          </a:solidFill>
-          <a:ln>
-            <a:noFill/>
-          </a:ln>
-        </p:spPr>
-        <p:style>
-          <a:lnRef idx="1">
-            <a:schemeClr val="accent1"/>
-          </a:lnRef>
-          <a:fillRef idx="3">
-            <a:schemeClr val="accent1"/>
-          </a:fillRef>
-          <a:effectRef idx="2">
-            <a:schemeClr val="accent1"/>
-          </a:effectRef>
-          <a:fontRef idx="minor">
-            <a:schemeClr val="lt1"/>
-          </a:fontRef>
-        </p:style>
-        <p:txBody>
-          <a:bodyPr rtlCol="0" anchor="ctr"/>
-          <a:lstStyle/>
-          <a:p>
-            <a:pPr algn="ctr"/>
-          </a:p>
-        </p:txBody>
-      </p:sp>
-      <p:sp>
-        <p:nvSpPr>
-          <p:cNvPr id="91" name="Rectangle 90"/>
-          <p:cNvSpPr/>
-          <p:nvPr/>
-        </p:nvSpPr>
-        <p:spPr>
-          <a:xfrm>
-            <a:off x="0" y="4919979"/>
-            <a:ext cx="12188952" cy="627718"/>
-          </a:xfrm>
-          <a:prstGeom prst="rect">
-            <a:avLst/>
-          </a:prstGeom>
-          <a:solidFill>
-            <a:srgbClr val="F9F9F6"/>
-          </a:solidFill>
-          <a:ln>
-            <a:noFill/>
-          </a:ln>
-        </p:spPr>
-        <p:style>
-          <a:lnRef idx="1">
-            <a:schemeClr val="accent1"/>
-          </a:lnRef>
-          <a:fillRef idx="3">
-            <a:schemeClr val="accent1"/>
-          </a:fillRef>
-          <a:effectRef idx="2">
-            <a:schemeClr val="accent1"/>
-          </a:effectRef>
-          <a:fontRef idx="minor">
-            <a:schemeClr val="lt1"/>
-          </a:fontRef>
-        </p:style>
-        <p:txBody>
-          <a:bodyPr rtlCol="0" anchor="ctr"/>
-          <a:lstStyle/>
-          <a:p>
-            <a:pPr algn="ctr"/>
-          </a:p>
-        </p:txBody>
-      </p:sp>
-      <p:sp>
-        <p:nvSpPr>
-          <p:cNvPr id="92" name="TextBox 91"/>
-          <p:cNvSpPr txBox="1"/>
-          <p:nvPr/>
-        </p:nvSpPr>
-        <p:spPr>
-          <a:xfrm>
-            <a:off x="292608" y="4974843"/>
-            <a:ext cx="4562856" cy="164592"/>
-          </a:xfrm>
-          <a:prstGeom prst="rect">
-            <a:avLst/>
-          </a:prstGeom>
-          <a:noFill/>
-        </p:spPr>
-        <p:txBody>
-          <a:bodyPr wrap="square">
-            <a:spAutoFit/>
-          </a:bodyPr>
-          <a:lstStyle/>
-          <a:p>
-            <a:pPr algn="l"/>
-            <a:r>
-              <a:rPr sz="800" b="1" i="0">
-                <a:solidFill>
-                  <a:srgbClr val="000000"/>
-                </a:solidFill>
-                <a:latin typeface="Helvetica Neue"/>
-              </a:rPr>
-              <a:t>Team Health, Retention &amp; Development</a:t>
-            </a:r>
-          </a:p>
-        </p:txBody>
-      </p:sp>
-      <p:sp>
-        <p:nvSpPr>
-          <p:cNvPr id="93" name="TextBox 92"/>
-          <p:cNvSpPr txBox="1"/>
-          <p:nvPr/>
-        </p:nvSpPr>
-        <p:spPr>
-          <a:xfrm>
-            <a:off x="292608" y="5176011"/>
-            <a:ext cx="4562856" cy="316822"/>
-          </a:xfrm>
-          <a:prstGeom prst="rect">
-            <a:avLst/>
-          </a:prstGeom>
-          <a:noFill/>
-        </p:spPr>
-        <p:txBody>
-          <a:bodyPr wrap="square">
-            <a:spAutoFit/>
-          </a:bodyPr>
-          <a:lstStyle/>
-          <a:p>
-            <a:pPr algn="l"/>
-            <a:r>
-              <a:rPr sz="800" b="0" i="0">
-                <a:solidFill>
-                  <a:srgbClr val="595959"/>
-                </a:solidFill>
-                <a:latin typeface="Helvetica Neue"/>
-              </a:rPr>
-              <a:t>Foster a high-performing organization by executing active development, and maintaining Peakon engagement scores from Q4 2025 benchmark.</a:t>
-            </a:r>
-          </a:p>
-        </p:txBody>
-      </p:sp>
-      <p:sp>
-        <p:nvSpPr>
-          <p:cNvPr id="94" name="Rectangle 93"/>
-          <p:cNvSpPr/>
-          <p:nvPr/>
-        </p:nvSpPr>
-        <p:spPr>
-          <a:xfrm>
-            <a:off x="4956048" y="4974843"/>
-            <a:ext cx="2221992" cy="517990"/>
-          </a:xfrm>
-          <a:prstGeom prst="rect">
-            <a:avLst/>
-          </a:prstGeom>
-          <a:solidFill>
-            <a:srgbClr val="F9F9F6"/>
-          </a:solidFill>
-          <a:ln>
-            <a:noFill/>
-          </a:ln>
-        </p:spPr>
-        <p:style>
-          <a:lnRef idx="1">
-            <a:schemeClr val="accent1"/>
-          </a:lnRef>
-          <a:fillRef idx="3">
-            <a:schemeClr val="accent1"/>
-          </a:fillRef>
-          <a:effectRef idx="2">
-            <a:schemeClr val="accent1"/>
-          </a:effectRef>
-          <a:fontRef idx="minor">
-            <a:schemeClr val="lt1"/>
-          </a:fontRef>
-        </p:style>
-        <p:txBody>
-          <a:bodyPr rtlCol="0" anchor="ctr"/>
-          <a:lstStyle/>
-          <a:p>
-            <a:pPr algn="ctr"/>
-          </a:p>
-        </p:txBody>
-      </p:sp>
-      <p:sp>
-        <p:nvSpPr>
-          <p:cNvPr id="95" name="TextBox 94"/>
-          <p:cNvSpPr txBox="1"/>
-          <p:nvPr/>
-        </p:nvSpPr>
-        <p:spPr>
-          <a:xfrm>
-            <a:off x="5029200" y="5011419"/>
-            <a:ext cx="2221992" cy="137160"/>
-          </a:xfrm>
-          <a:prstGeom prst="rect">
-            <a:avLst/>
-          </a:prstGeom>
-          <a:noFill/>
-        </p:spPr>
-        <p:txBody>
-          <a:bodyPr wrap="square">
-            <a:spAutoFit/>
-          </a:bodyPr>
-          <a:lstStyle/>
-          <a:p>
-            <a:pPr algn="l"/>
-            <a:r>
-              <a:rPr sz="700" b="1" i="0">
-                <a:solidFill>
-                  <a:srgbClr val="595959"/>
-                </a:solidFill>
-                <a:latin typeface="Helvetica Neue"/>
-              </a:rPr>
-              <a:t>SOLID</a:t>
-            </a:r>
-          </a:p>
-        </p:txBody>
-      </p:sp>
-      <p:sp>
-        <p:nvSpPr>
-          <p:cNvPr id="96" name="TextBox 95"/>
-          <p:cNvSpPr txBox="1"/>
-          <p:nvPr/>
-        </p:nvSpPr>
-        <p:spPr>
-          <a:xfrm>
-            <a:off x="5029200" y="5176011"/>
-            <a:ext cx="2148840" cy="289390"/>
-          </a:xfrm>
-          <a:prstGeom prst="rect">
-            <a:avLst/>
-          </a:prstGeom>
-          <a:noFill/>
-        </p:spPr>
-        <p:txBody>
-          <a:bodyPr wrap="square">
-            <a:spAutoFit/>
-          </a:bodyPr>
-          <a:lstStyle/>
-          <a:p>
-            <a:pPr algn="l"/>
-            <a:r>
-              <a:rPr sz="800" b="0" i="0">
-                <a:solidFill>
-                  <a:srgbClr val="000000"/>
-                </a:solidFill>
-                <a:latin typeface="Helvetica Neue"/>
-              </a:rPr>
-              <a:t>90% retention; 90% of team has active development plans, Peakon score maintained.</a:t>
-            </a:r>
-          </a:p>
-        </p:txBody>
-      </p:sp>
-      <p:sp>
-        <p:nvSpPr>
-          <p:cNvPr id="97" name="Rectangle 96"/>
-          <p:cNvSpPr/>
-          <p:nvPr/>
-        </p:nvSpPr>
-        <p:spPr>
-          <a:xfrm>
-            <a:off x="7287768" y="4974843"/>
-            <a:ext cx="2221992" cy="517990"/>
-          </a:xfrm>
-          <a:prstGeom prst="rect">
-            <a:avLst/>
-          </a:prstGeom>
-          <a:solidFill>
-            <a:srgbClr val="EBEBEB"/>
-          </a:solidFill>
-          <a:ln>
-            <a:noFill/>
-          </a:ln>
-        </p:spPr>
-        <p:style>
-          <a:lnRef idx="1">
-            <a:schemeClr val="accent1"/>
-          </a:lnRef>
-          <a:fillRef idx="3">
-            <a:schemeClr val="accent1"/>
-          </a:fillRef>
-          <a:effectRef idx="2">
-            <a:schemeClr val="accent1"/>
-          </a:effectRef>
-          <a:fontRef idx="minor">
-            <a:schemeClr val="lt1"/>
-          </a:fontRef>
-        </p:style>
-        <p:txBody>
-          <a:bodyPr rtlCol="0" anchor="ctr"/>
-          <a:lstStyle/>
-          <a:p>
-            <a:pPr algn="ctr"/>
-          </a:p>
-        </p:txBody>
-      </p:sp>
-      <p:sp>
-        <p:nvSpPr>
-          <p:cNvPr id="98" name="TextBox 97"/>
-          <p:cNvSpPr txBox="1"/>
-          <p:nvPr/>
-        </p:nvSpPr>
-        <p:spPr>
-          <a:xfrm>
-            <a:off x="7360920" y="5011419"/>
-            <a:ext cx="2221992" cy="137160"/>
-          </a:xfrm>
-          <a:prstGeom prst="rect">
-            <a:avLst/>
-          </a:prstGeom>
-          <a:noFill/>
-        </p:spPr>
-        <p:txBody>
-          <a:bodyPr wrap="square">
-            <a:spAutoFit/>
-          </a:bodyPr>
-          <a:lstStyle/>
-          <a:p>
-            <a:pPr algn="l"/>
-            <a:r>
-              <a:rPr sz="700" b="1" i="0">
-                <a:solidFill>
-                  <a:srgbClr val="595959"/>
-                </a:solidFill>
-                <a:latin typeface="Helvetica Neue"/>
-              </a:rPr>
-              <a:t>IMPRESSIVE</a:t>
-            </a:r>
-          </a:p>
-        </p:txBody>
-      </p:sp>
-      <p:sp>
-        <p:nvSpPr>
-          <p:cNvPr id="99" name="TextBox 98"/>
-          <p:cNvSpPr txBox="1"/>
-          <p:nvPr/>
-        </p:nvSpPr>
-        <p:spPr>
-          <a:xfrm>
-            <a:off x="7360920" y="5176011"/>
-            <a:ext cx="2148840" cy="289390"/>
-          </a:xfrm>
-          <a:prstGeom prst="rect">
-            <a:avLst/>
-          </a:prstGeom>
-          <a:noFill/>
-        </p:spPr>
-        <p:txBody>
-          <a:bodyPr wrap="square">
-            <a:spAutoFit/>
-          </a:bodyPr>
-          <a:lstStyle/>
-          <a:p>
-            <a:pPr algn="l"/>
-            <a:r>
-              <a:rPr sz="800" b="0" i="0">
-                <a:solidFill>
-                  <a:srgbClr val="000000"/>
-                </a:solidFill>
-                <a:latin typeface="Helvetica Neue"/>
-              </a:rPr>
-              <a:t>95% retention; 95% of team has active development plans, Peakon score improved by 0.1 for 1 quarter.</a:t>
-            </a:r>
-          </a:p>
-        </p:txBody>
-      </p:sp>
-      <p:sp>
-        <p:nvSpPr>
-          <p:cNvPr id="100" name="Rectangle 99"/>
-          <p:cNvSpPr/>
-          <p:nvPr/>
-        </p:nvSpPr>
-        <p:spPr>
-          <a:xfrm>
-            <a:off x="9619488" y="4974843"/>
-            <a:ext cx="2221992" cy="517990"/>
-          </a:xfrm>
-          <a:prstGeom prst="rect">
-            <a:avLst/>
-          </a:prstGeom>
-          <a:solidFill>
-            <a:srgbClr val="EEF2EB"/>
-          </a:solidFill>
-          <a:ln>
-            <a:noFill/>
-          </a:ln>
-        </p:spPr>
-        <p:style>
-          <a:lnRef idx="1">
-            <a:schemeClr val="accent1"/>
-          </a:lnRef>
-          <a:fillRef idx="3">
-            <a:schemeClr val="accent1"/>
-          </a:fillRef>
-          <a:effectRef idx="2">
-            <a:schemeClr val="accent1"/>
-          </a:effectRef>
-          <a:fontRef idx="minor">
-            <a:schemeClr val="lt1"/>
-          </a:fontRef>
-        </p:style>
-        <p:txBody>
-          <a:bodyPr rtlCol="0" anchor="ctr"/>
-          <a:lstStyle/>
-          <a:p>
-            <a:pPr algn="ctr"/>
-          </a:p>
-        </p:txBody>
-      </p:sp>
-      <p:sp>
-        <p:nvSpPr>
-          <p:cNvPr id="101" name="TextBox 100"/>
-          <p:cNvSpPr txBox="1"/>
-          <p:nvPr/>
-        </p:nvSpPr>
-        <p:spPr>
-          <a:xfrm>
-            <a:off x="9692640" y="5011419"/>
-            <a:ext cx="2221992" cy="137160"/>
-          </a:xfrm>
-          <a:prstGeom prst="rect">
-            <a:avLst/>
-          </a:prstGeom>
-          <a:noFill/>
-        </p:spPr>
-        <p:txBody>
-          <a:bodyPr wrap="square">
-            <a:spAutoFit/>
-          </a:bodyPr>
-          <a:lstStyle/>
-          <a:p>
-            <a:pPr algn="l"/>
-            <a:r>
-              <a:rPr sz="700" b="1" i="0">
-                <a:solidFill>
-                  <a:srgbClr val="5E6B52"/>
-                </a:solidFill>
-                <a:latin typeface="Helvetica Neue"/>
-              </a:rPr>
-              <a:t>EXCELLENT</a:t>
-            </a:r>
-          </a:p>
-        </p:txBody>
-      </p:sp>
-      <p:sp>
-        <p:nvSpPr>
-          <p:cNvPr id="102" name="TextBox 101"/>
-          <p:cNvSpPr txBox="1"/>
-          <p:nvPr/>
-        </p:nvSpPr>
-        <p:spPr>
-          <a:xfrm>
-            <a:off x="9692640" y="5176011"/>
-            <a:ext cx="2148840" cy="289390"/>
-          </a:xfrm>
-          <a:prstGeom prst="rect">
-            <a:avLst/>
-          </a:prstGeom>
-          <a:noFill/>
-        </p:spPr>
-        <p:txBody>
-          <a:bodyPr wrap="square">
-            <a:spAutoFit/>
-          </a:bodyPr>
-          <a:lstStyle/>
-          <a:p>
-            <a:pPr algn="l"/>
-            <a:r>
-              <a:rPr sz="800" b="0" i="0">
-                <a:solidFill>
-                  <a:srgbClr val="000000"/>
-                </a:solidFill>
-                <a:latin typeface="Helvetica Neue"/>
-              </a:rPr>
-              <a:t>&gt;95% retention; 100% development plans + &gt;0.1 increase in Peakon focus areas maintained from Q1 to Q4.</a:t>
-            </a:r>
-          </a:p>
-        </p:txBody>
-      </p:sp>
-      <p:sp>
-        <p:nvSpPr>
-          <p:cNvPr id="103" name="Rectangle 102"/>
-          <p:cNvSpPr/>
-          <p:nvPr/>
-        </p:nvSpPr>
-        <p:spPr>
-          <a:xfrm>
-            <a:off x="0" y="5541348"/>
-            <a:ext cx="12188952" cy="6350"/>
-          </a:xfrm>
-          <a:prstGeom prst="rect">
-            <a:avLst/>
-          </a:prstGeom>
-          <a:solidFill>
-            <a:srgbClr val="CCCCCC"/>
-          </a:solidFill>
-          <a:ln>
-            <a:noFill/>
-          </a:ln>
-        </p:spPr>
-        <p:style>
-          <a:lnRef idx="1">
-            <a:schemeClr val="accent1"/>
-          </a:lnRef>
-          <a:fillRef idx="3">
-            <a:schemeClr val="accent1"/>
-          </a:fillRef>
-          <a:effectRef idx="2">
-            <a:schemeClr val="accent1"/>
-          </a:effectRef>
-          <a:fontRef idx="minor">
-            <a:schemeClr val="lt1"/>
-          </a:fontRef>
-        </p:style>
-        <p:txBody>
-          <a:bodyPr rtlCol="0" anchor="ctr"/>
-          <a:lstStyle/>
-          <a:p>
-            <a:pPr algn="ctr"/>
-          </a:p>
-        </p:txBody>
-      </p:sp>
-      <p:sp>
-        <p:nvSpPr>
-          <p:cNvPr id="104" name="Rectangle 103"/>
-          <p:cNvSpPr/>
-          <p:nvPr/>
-        </p:nvSpPr>
-        <p:spPr>
-          <a:xfrm>
-            <a:off x="0" y="5547698"/>
-            <a:ext cx="12188952" cy="627718"/>
-          </a:xfrm>
-          <a:prstGeom prst="rect">
-            <a:avLst/>
-          </a:prstGeom>
-          <a:solidFill>
-            <a:srgbClr val="FFFFFF"/>
-          </a:solidFill>
-          <a:ln>
-            <a:noFill/>
-          </a:ln>
-        </p:spPr>
-        <p:style>
-          <a:lnRef idx="1">
-            <a:schemeClr val="accent1"/>
-          </a:lnRef>
-          <a:fillRef idx="3">
-            <a:schemeClr val="accent1"/>
-          </a:fillRef>
-          <a:effectRef idx="2">
-            <a:schemeClr val="accent1"/>
-          </a:effectRef>
-          <a:fontRef idx="minor">
-            <a:schemeClr val="lt1"/>
-          </a:fontRef>
-        </p:style>
-        <p:txBody>
-          <a:bodyPr rtlCol="0" anchor="ctr"/>
-          <a:lstStyle/>
-          <a:p>
-            <a:pPr algn="ctr"/>
-          </a:p>
-        </p:txBody>
-      </p:sp>
-      <p:sp>
-        <p:nvSpPr>
-          <p:cNvPr id="105" name="TextBox 104"/>
-          <p:cNvSpPr txBox="1"/>
-          <p:nvPr/>
-        </p:nvSpPr>
-        <p:spPr>
-          <a:xfrm>
-            <a:off x="292608" y="5602562"/>
-            <a:ext cx="4562856" cy="164592"/>
-          </a:xfrm>
-          <a:prstGeom prst="rect">
-            <a:avLst/>
-          </a:prstGeom>
-          <a:noFill/>
-        </p:spPr>
-        <p:txBody>
-          <a:bodyPr wrap="square">
-            <a:spAutoFit/>
-          </a:bodyPr>
-          <a:lstStyle/>
-          <a:p>
-            <a:pPr algn="l"/>
-            <a:r>
-              <a:rPr sz="800" b="1" i="0">
-                <a:solidFill>
-                  <a:srgbClr val="000000"/>
-                </a:solidFill>
-                <a:latin typeface="Helvetica Neue"/>
-              </a:rPr>
-              <a:t>Planning &amp; Delivery Framework Completion</a:t>
-            </a:r>
-          </a:p>
-        </p:txBody>
-      </p:sp>
-      <p:sp>
-        <p:nvSpPr>
-          <p:cNvPr id="106" name="TextBox 105"/>
-          <p:cNvSpPr txBox="1"/>
-          <p:nvPr/>
-        </p:nvSpPr>
-        <p:spPr>
-          <a:xfrm>
-            <a:off x="292608" y="5803730"/>
-            <a:ext cx="4562856" cy="316822"/>
-          </a:xfrm>
-          <a:prstGeom prst="rect">
-            <a:avLst/>
-          </a:prstGeom>
-          <a:noFill/>
-        </p:spPr>
-        <p:txBody>
-          <a:bodyPr wrap="square">
-            <a:spAutoFit/>
-          </a:bodyPr>
-          <a:lstStyle/>
-          <a:p>
-            <a:pPr algn="l"/>
-            <a:r>
-              <a:rPr sz="800" b="0" i="0">
-                <a:solidFill>
-                  <a:srgbClr val="595959"/>
-                </a:solidFill>
-                <a:latin typeface="Helvetica Neue"/>
-              </a:rPr>
-              <a:t>100% completion of Planning and Delivery Framework artifacts for prioritized projects greater than USD $250k.</a:t>
-            </a:r>
-          </a:p>
-        </p:txBody>
-      </p:sp>
-      <p:sp>
-        <p:nvSpPr>
-          <p:cNvPr id="107" name="Rectangle 106"/>
-          <p:cNvSpPr/>
-          <p:nvPr/>
-        </p:nvSpPr>
-        <p:spPr>
-          <a:xfrm>
-            <a:off x="4956048" y="5602562"/>
-            <a:ext cx="2221992" cy="517990"/>
-          </a:xfrm>
-          <a:prstGeom prst="rect">
-            <a:avLst/>
-          </a:prstGeom>
-          <a:solidFill>
-            <a:srgbClr val="F9F9F6"/>
-          </a:solidFill>
-          <a:ln>
-            <a:noFill/>
-          </a:ln>
-        </p:spPr>
-        <p:style>
-          <a:lnRef idx="1">
-            <a:schemeClr val="accent1"/>
-          </a:lnRef>
-          <a:fillRef idx="3">
-            <a:schemeClr val="accent1"/>
-          </a:fillRef>
-          <a:effectRef idx="2">
-            <a:schemeClr val="accent1"/>
-          </a:effectRef>
-          <a:fontRef idx="minor">
-            <a:schemeClr val="lt1"/>
-          </a:fontRef>
-        </p:style>
-        <p:txBody>
-          <a:bodyPr rtlCol="0" anchor="ctr"/>
-          <a:lstStyle/>
-          <a:p>
-            <a:pPr algn="ctr"/>
-          </a:p>
-        </p:txBody>
-      </p:sp>
-      <p:sp>
-        <p:nvSpPr>
-          <p:cNvPr id="108" name="TextBox 107"/>
-          <p:cNvSpPr txBox="1"/>
-          <p:nvPr/>
-        </p:nvSpPr>
-        <p:spPr>
-          <a:xfrm>
-            <a:off x="5029200" y="5639138"/>
-            <a:ext cx="2221992" cy="137160"/>
-          </a:xfrm>
-          <a:prstGeom prst="rect">
-            <a:avLst/>
-          </a:prstGeom>
-          <a:noFill/>
-        </p:spPr>
-        <p:txBody>
-          <a:bodyPr wrap="square">
-            <a:spAutoFit/>
-          </a:bodyPr>
-          <a:lstStyle/>
-          <a:p>
-            <a:pPr algn="l"/>
-            <a:r>
-              <a:rPr sz="700" b="1" i="0">
-                <a:solidFill>
-                  <a:srgbClr val="595959"/>
-                </a:solidFill>
-                <a:latin typeface="Helvetica Neue"/>
-              </a:rPr>
-              <a:t>SOLID</a:t>
-            </a:r>
-          </a:p>
-        </p:txBody>
-      </p:sp>
-      <p:sp>
-        <p:nvSpPr>
-          <p:cNvPr id="109" name="TextBox 108"/>
-          <p:cNvSpPr txBox="1"/>
-          <p:nvPr/>
-        </p:nvSpPr>
-        <p:spPr>
-          <a:xfrm>
-            <a:off x="5029200" y="5803730"/>
-            <a:ext cx="2148840" cy="289390"/>
-          </a:xfrm>
-          <a:prstGeom prst="rect">
-            <a:avLst/>
-          </a:prstGeom>
-          <a:noFill/>
-        </p:spPr>
-        <p:txBody>
-          <a:bodyPr wrap="square">
-            <a:spAutoFit/>
-          </a:bodyPr>
-          <a:lstStyle/>
-          <a:p>
-            <a:pPr algn="l"/>
-            <a:r>
-              <a:rPr sz="800" b="0" i="0">
-                <a:solidFill>
-                  <a:srgbClr val="000000"/>
-                </a:solidFill>
-                <a:latin typeface="Helvetica Neue"/>
-              </a:rPr>
-              <a:t>100% of prioritized projects (&gt;$250k) have Planning &amp; Delivery Framework artifacts completed on time.</a:t>
-            </a:r>
-          </a:p>
-        </p:txBody>
-      </p:sp>
-      <p:sp>
-        <p:nvSpPr>
-          <p:cNvPr id="110" name="Rectangle 109"/>
-          <p:cNvSpPr/>
-          <p:nvPr/>
-        </p:nvSpPr>
-        <p:spPr>
-          <a:xfrm>
-            <a:off x="7287768" y="5602562"/>
-            <a:ext cx="2221992" cy="517990"/>
-          </a:xfrm>
-          <a:prstGeom prst="rect">
-            <a:avLst/>
-          </a:prstGeom>
-          <a:solidFill>
-            <a:srgbClr val="EBEBEB"/>
-          </a:solidFill>
-          <a:ln>
-            <a:noFill/>
-          </a:ln>
-        </p:spPr>
-        <p:style>
-          <a:lnRef idx="1">
-            <a:schemeClr val="accent1"/>
-          </a:lnRef>
-          <a:fillRef idx="3">
-            <a:schemeClr val="accent1"/>
-          </a:fillRef>
-          <a:effectRef idx="2">
-            <a:schemeClr val="accent1"/>
-          </a:effectRef>
-          <a:fontRef idx="minor">
-            <a:schemeClr val="lt1"/>
-          </a:fontRef>
-        </p:style>
-        <p:txBody>
-          <a:bodyPr rtlCol="0" anchor="ctr"/>
-          <a:lstStyle/>
-          <a:p>
-            <a:pPr algn="ctr"/>
-          </a:p>
-        </p:txBody>
-      </p:sp>
-      <p:sp>
-        <p:nvSpPr>
-          <p:cNvPr id="111" name="TextBox 110"/>
-          <p:cNvSpPr txBox="1"/>
-          <p:nvPr/>
-        </p:nvSpPr>
-        <p:spPr>
-          <a:xfrm>
-            <a:off x="7360920" y="5639138"/>
-            <a:ext cx="2221992" cy="137160"/>
-          </a:xfrm>
-          <a:prstGeom prst="rect">
-            <a:avLst/>
-          </a:prstGeom>
-          <a:noFill/>
-        </p:spPr>
-        <p:txBody>
-          <a:bodyPr wrap="square">
-            <a:spAutoFit/>
-          </a:bodyPr>
-          <a:lstStyle/>
-          <a:p>
-            <a:pPr algn="l"/>
-            <a:r>
-              <a:rPr sz="700" b="1" i="0">
-                <a:solidFill>
-                  <a:srgbClr val="595959"/>
-                </a:solidFill>
-                <a:latin typeface="Helvetica Neue"/>
-              </a:rPr>
-              <a:t>IMPRESSIVE</a:t>
-            </a:r>
-          </a:p>
-        </p:txBody>
-      </p:sp>
-      <p:sp>
-        <p:nvSpPr>
-          <p:cNvPr id="112" name="TextBox 111"/>
-          <p:cNvSpPr txBox="1"/>
-          <p:nvPr/>
-        </p:nvSpPr>
-        <p:spPr>
-          <a:xfrm>
-            <a:off x="7360920" y="5803730"/>
-            <a:ext cx="2148840" cy="289390"/>
-          </a:xfrm>
-          <a:prstGeom prst="rect">
-            <a:avLst/>
-          </a:prstGeom>
-          <a:noFill/>
-        </p:spPr>
-        <p:txBody>
-          <a:bodyPr wrap="square">
-            <a:spAutoFit/>
-          </a:bodyPr>
-          <a:lstStyle/>
-          <a:p>
-            <a:pPr algn="l"/>
-            <a:r>
-              <a:rPr sz="800" b="0" i="0">
-                <a:solidFill>
-                  <a:srgbClr val="000000"/>
-                </a:solidFill>
-                <a:latin typeface="Helvetica Neue"/>
-              </a:rPr>
-              <a:t>Solid + artifacts completed ahead of schedule and signed off by stakeholders before project kick-off.</a:t>
-            </a:r>
-          </a:p>
-        </p:txBody>
-      </p:sp>
-      <p:sp>
-        <p:nvSpPr>
-          <p:cNvPr id="113" name="Rectangle 112"/>
-          <p:cNvSpPr/>
-          <p:nvPr/>
-        </p:nvSpPr>
-        <p:spPr>
-          <a:xfrm>
-            <a:off x="9619488" y="5602562"/>
-            <a:ext cx="2221992" cy="517990"/>
-          </a:xfrm>
-          <a:prstGeom prst="rect">
-            <a:avLst/>
-          </a:prstGeom>
-          <a:solidFill>
-            <a:srgbClr val="EEF2EB"/>
-          </a:solidFill>
-          <a:ln>
-            <a:noFill/>
-          </a:ln>
-        </p:spPr>
-        <p:style>
-          <a:lnRef idx="1">
-            <a:schemeClr val="accent1"/>
-          </a:lnRef>
-          <a:fillRef idx="3">
-            <a:schemeClr val="accent1"/>
-          </a:fillRef>
-          <a:effectRef idx="2">
-            <a:schemeClr val="accent1"/>
-          </a:effectRef>
-          <a:fontRef idx="minor">
-            <a:schemeClr val="lt1"/>
-          </a:fontRef>
-        </p:style>
-        <p:txBody>
-          <a:bodyPr rtlCol="0" anchor="ctr"/>
-          <a:lstStyle/>
-          <a:p>
-            <a:pPr algn="ctr"/>
-          </a:p>
-        </p:txBody>
-      </p:sp>
-      <p:sp>
-        <p:nvSpPr>
-          <p:cNvPr id="114" name="TextBox 113"/>
-          <p:cNvSpPr txBox="1"/>
-          <p:nvPr/>
-        </p:nvSpPr>
-        <p:spPr>
-          <a:xfrm>
-            <a:off x="9692640" y="5639138"/>
-            <a:ext cx="2221992" cy="137160"/>
-          </a:xfrm>
-          <a:prstGeom prst="rect">
-            <a:avLst/>
-          </a:prstGeom>
-          <a:noFill/>
-        </p:spPr>
-        <p:txBody>
-          <a:bodyPr wrap="square">
-            <a:spAutoFit/>
-          </a:bodyPr>
-          <a:lstStyle/>
-          <a:p>
-            <a:pPr algn="l"/>
-            <a:r>
-              <a:rPr sz="700" b="1" i="0">
-                <a:solidFill>
-                  <a:srgbClr val="5E6B52"/>
-                </a:solidFill>
-                <a:latin typeface="Helvetica Neue"/>
-              </a:rPr>
-              <a:t>EXCELLENT</a:t>
-            </a:r>
-          </a:p>
-        </p:txBody>
-      </p:sp>
-      <p:sp>
-        <p:nvSpPr>
-          <p:cNvPr id="115" name="TextBox 114"/>
-          <p:cNvSpPr txBox="1"/>
-          <p:nvPr/>
-        </p:nvSpPr>
-        <p:spPr>
-          <a:xfrm>
-            <a:off x="9692640" y="5803730"/>
-            <a:ext cx="2148840" cy="289390"/>
-          </a:xfrm>
-          <a:prstGeom prst="rect">
-            <a:avLst/>
-          </a:prstGeom>
-          <a:noFill/>
-        </p:spPr>
-        <p:txBody>
-          <a:bodyPr wrap="square">
-            <a:spAutoFit/>
-          </a:bodyPr>
-          <a:lstStyle/>
-          <a:p>
-            <a:pPr algn="l"/>
-            <a:r>
-              <a:rPr sz="800" b="0" i="0">
-                <a:solidFill>
-                  <a:srgbClr val="000000"/>
-                </a:solidFill>
-                <a:latin typeface="Helvetica Neue"/>
-              </a:rPr>
-              <a:t>Impressive + framework adoption extends beyond the $250k threshold, with smaller initiatives voluntarily adopting artifacts — indicating cultural embedding across the team.</a:t>
-            </a:r>
-          </a:p>
-        </p:txBody>
-      </p:sp>
-      <p:sp>
-        <p:nvSpPr>
-          <p:cNvPr id="116" name="Rectangle 115"/>
-          <p:cNvSpPr/>
-          <p:nvPr/>
-        </p:nvSpPr>
-        <p:spPr>
-          <a:xfrm>
-            <a:off x="0" y="6169067"/>
-            <a:ext cx="12188952" cy="6350"/>
-          </a:xfrm>
-          <a:prstGeom prst="rect">
-            <a:avLst/>
-          </a:prstGeom>
-          <a:solidFill>
-            <a:srgbClr val="CCCCCC"/>
-          </a:solidFill>
-          <a:ln>
-            <a:noFill/>
-          </a:ln>
-        </p:spPr>
-        <p:style>
-          <a:lnRef idx="1">
-            <a:schemeClr val="accent1"/>
-          </a:lnRef>
-          <a:fillRef idx="3">
-            <a:schemeClr val="accent1"/>
-          </a:fillRef>
-          <a:effectRef idx="2">
-            <a:schemeClr val="accent1"/>
-          </a:effectRef>
-          <a:fontRef idx="minor">
-            <a:schemeClr val="lt1"/>
-          </a:fontRef>
-        </p:style>
-        <p:txBody>
-          <a:bodyPr rtlCol="0" anchor="ctr"/>
-          <a:lstStyle/>
-          <a:p>
-            <a:pPr algn="ctr"/>
-          </a:p>
-        </p:txBody>
-      </p:sp>
-      <p:sp>
-        <p:nvSpPr>
-          <p:cNvPr id="117" name="Rectangle 116"/>
-          <p:cNvSpPr/>
-          <p:nvPr/>
-        </p:nvSpPr>
-        <p:spPr>
-          <a:xfrm>
-            <a:off x="0" y="6175417"/>
-            <a:ext cx="12188952" cy="627718"/>
-          </a:xfrm>
-          <a:prstGeom prst="rect">
-            <a:avLst/>
-          </a:prstGeom>
-          <a:solidFill>
-            <a:srgbClr val="F9F9F6"/>
-          </a:solidFill>
-          <a:ln>
-            <a:noFill/>
-          </a:ln>
-        </p:spPr>
-        <p:style>
-          <a:lnRef idx="1">
-            <a:schemeClr val="accent1"/>
-          </a:lnRef>
-          <a:fillRef idx="3">
-            <a:schemeClr val="accent1"/>
-          </a:fillRef>
-          <a:effectRef idx="2">
-            <a:schemeClr val="accent1"/>
-          </a:effectRef>
-          <a:fontRef idx="minor">
-            <a:schemeClr val="lt1"/>
-          </a:fontRef>
-        </p:style>
-        <p:txBody>
-          <a:bodyPr rtlCol="0" anchor="ctr"/>
-          <a:lstStyle/>
-          <a:p>
-            <a:pPr algn="ctr"/>
-          </a:p>
-        </p:txBody>
-      </p:sp>
-      <p:sp>
-        <p:nvSpPr>
-          <p:cNvPr id="118" name="TextBox 117"/>
-          <p:cNvSpPr txBox="1"/>
-          <p:nvPr/>
-        </p:nvSpPr>
-        <p:spPr>
-          <a:xfrm>
-            <a:off x="292608" y="6230281"/>
-            <a:ext cx="4562856" cy="164592"/>
-          </a:xfrm>
-          <a:prstGeom prst="rect">
-            <a:avLst/>
-          </a:prstGeom>
-          <a:noFill/>
-        </p:spPr>
-        <p:txBody>
-          <a:bodyPr wrap="square">
-            <a:spAutoFit/>
-          </a:bodyPr>
-          <a:lstStyle/>
-          <a:p>
-            <a:pPr algn="l"/>
-            <a:r>
-              <a:rPr sz="800" b="1" i="0">
-                <a:solidFill>
-                  <a:srgbClr val="000000"/>
-                </a:solidFill>
-                <a:latin typeface="Helvetica Neue"/>
-              </a:rPr>
-              <a:t>Succession Readiness</a:t>
-            </a:r>
-          </a:p>
-        </p:txBody>
-      </p:sp>
-      <p:sp>
-        <p:nvSpPr>
-          <p:cNvPr id="119" name="TextBox 118"/>
-          <p:cNvSpPr txBox="1"/>
-          <p:nvPr/>
-        </p:nvSpPr>
-        <p:spPr>
-          <a:xfrm>
-            <a:off x="292608" y="6431449"/>
-            <a:ext cx="4562856" cy="316822"/>
-          </a:xfrm>
-          <a:prstGeom prst="rect">
-            <a:avLst/>
-          </a:prstGeom>
-          <a:noFill/>
-        </p:spPr>
-        <p:txBody>
-          <a:bodyPr wrap="square">
-            <a:spAutoFit/>
-          </a:bodyPr>
-          <a:lstStyle/>
-          <a:p>
-            <a:pPr algn="l"/>
-            <a:r>
-              <a:rPr sz="800" b="0" i="0">
-                <a:solidFill>
-                  <a:srgbClr val="595959"/>
-                </a:solidFill>
-                <a:latin typeface="Helvetica Neue"/>
-              </a:rPr>
-              <a:t>Ensure every critical role within the Retail &amp; Wholesale Technology team has an identified and documented successor, with a development plan in place to close readiness gaps.</a:t>
-            </a:r>
-          </a:p>
-        </p:txBody>
-      </p:sp>
-      <p:sp>
-        <p:nvSpPr>
-          <p:cNvPr id="120" name="Rectangle 119"/>
-          <p:cNvSpPr/>
-          <p:nvPr/>
-        </p:nvSpPr>
-        <p:spPr>
-          <a:xfrm>
-            <a:off x="4956048" y="6230281"/>
-            <a:ext cx="2221992" cy="517990"/>
-          </a:xfrm>
-          <a:prstGeom prst="rect">
-            <a:avLst/>
-          </a:prstGeom>
-          <a:solidFill>
-            <a:srgbClr val="F9F9F6"/>
-          </a:solidFill>
-          <a:ln>
-            <a:noFill/>
-          </a:ln>
-        </p:spPr>
-        <p:style>
-          <a:lnRef idx="1">
-            <a:schemeClr val="accent1"/>
-          </a:lnRef>
-          <a:fillRef idx="3">
-            <a:schemeClr val="accent1"/>
-          </a:fillRef>
-          <a:effectRef idx="2">
-            <a:schemeClr val="accent1"/>
-          </a:effectRef>
-          <a:fontRef idx="minor">
-            <a:schemeClr val="lt1"/>
-          </a:fontRef>
-        </p:style>
-        <p:txBody>
-          <a:bodyPr rtlCol="0" anchor="ctr"/>
-          <a:lstStyle/>
-          <a:p>
-            <a:pPr algn="ctr"/>
-          </a:p>
-        </p:txBody>
-      </p:sp>
-      <p:sp>
-        <p:nvSpPr>
-          <p:cNvPr id="121" name="TextBox 120"/>
-          <p:cNvSpPr txBox="1"/>
-          <p:nvPr/>
-        </p:nvSpPr>
-        <p:spPr>
-          <a:xfrm>
-            <a:off x="5029200" y="6266857"/>
-            <a:ext cx="2221992" cy="137160"/>
-          </a:xfrm>
-          <a:prstGeom prst="rect">
-            <a:avLst/>
-          </a:prstGeom>
-          <a:noFill/>
-        </p:spPr>
-        <p:txBody>
-          <a:bodyPr wrap="square">
-            <a:spAutoFit/>
-          </a:bodyPr>
-          <a:lstStyle/>
-          <a:p>
-            <a:pPr algn="l"/>
-            <a:r>
-              <a:rPr sz="700" b="1" i="0">
-                <a:solidFill>
-                  <a:srgbClr val="595959"/>
-                </a:solidFill>
-                <a:latin typeface="Helvetica Neue"/>
-              </a:rPr>
-              <a:t>SOLID</a:t>
-            </a:r>
-          </a:p>
-        </p:txBody>
-      </p:sp>
-      <p:sp>
-        <p:nvSpPr>
-          <p:cNvPr id="122" name="TextBox 121"/>
-          <p:cNvSpPr txBox="1"/>
-          <p:nvPr/>
-        </p:nvSpPr>
-        <p:spPr>
-          <a:xfrm>
-            <a:off x="5029200" y="6431449"/>
-            <a:ext cx="2148840" cy="289390"/>
-          </a:xfrm>
-          <a:prstGeom prst="rect">
-            <a:avLst/>
-          </a:prstGeom>
-          <a:noFill/>
-        </p:spPr>
-        <p:txBody>
-          <a:bodyPr wrap="square">
-            <a:spAutoFit/>
-          </a:bodyPr>
-          <a:lstStyle/>
-          <a:p>
-            <a:pPr algn="l"/>
-            <a:r>
-              <a:rPr sz="800" b="0" i="0">
-                <a:solidFill>
-                  <a:srgbClr val="000000"/>
-                </a:solidFill>
-                <a:latin typeface="Helvetica Neue"/>
-              </a:rPr>
-              <a:t>100% of critical roles have a named successor documented with an initial readiness assessment completed.</a:t>
-            </a:r>
-          </a:p>
-        </p:txBody>
-      </p:sp>
-      <p:sp>
-        <p:nvSpPr>
-          <p:cNvPr id="123" name="Rectangle 122"/>
-          <p:cNvSpPr/>
-          <p:nvPr/>
-        </p:nvSpPr>
-        <p:spPr>
-          <a:xfrm>
-            <a:off x="7287768" y="6230281"/>
-            <a:ext cx="2221992" cy="517990"/>
-          </a:xfrm>
-          <a:prstGeom prst="rect">
-            <a:avLst/>
-          </a:prstGeom>
-          <a:solidFill>
-            <a:srgbClr val="EBEBEB"/>
-          </a:solidFill>
-          <a:ln>
-            <a:noFill/>
-          </a:ln>
-        </p:spPr>
-        <p:style>
-          <a:lnRef idx="1">
-            <a:schemeClr val="accent1"/>
-          </a:lnRef>
-          <a:fillRef idx="3">
-            <a:schemeClr val="accent1"/>
-          </a:fillRef>
-          <a:effectRef idx="2">
-            <a:schemeClr val="accent1"/>
-          </a:effectRef>
-          <a:fontRef idx="minor">
-            <a:schemeClr val="lt1"/>
-          </a:fontRef>
-        </p:style>
-        <p:txBody>
-          <a:bodyPr rtlCol="0" anchor="ctr"/>
-          <a:lstStyle/>
-          <a:p>
-            <a:pPr algn="ctr"/>
-          </a:p>
-        </p:txBody>
-      </p:sp>
-      <p:sp>
-        <p:nvSpPr>
-          <p:cNvPr id="124" name="TextBox 123"/>
-          <p:cNvSpPr txBox="1"/>
-          <p:nvPr/>
-        </p:nvSpPr>
-        <p:spPr>
-          <a:xfrm>
-            <a:off x="7360920" y="6266857"/>
-            <a:ext cx="2221992" cy="137160"/>
-          </a:xfrm>
-          <a:prstGeom prst="rect">
-            <a:avLst/>
-          </a:prstGeom>
-          <a:noFill/>
-        </p:spPr>
-        <p:txBody>
-          <a:bodyPr wrap="square">
-            <a:spAutoFit/>
-          </a:bodyPr>
-          <a:lstStyle/>
-          <a:p>
-            <a:pPr algn="l"/>
-            <a:r>
-              <a:rPr sz="700" b="1" i="0">
-                <a:solidFill>
-                  <a:srgbClr val="595959"/>
-                </a:solidFill>
-                <a:latin typeface="Helvetica Neue"/>
-              </a:rPr>
-              <a:t>IMPRESSIVE</a:t>
-            </a:r>
-          </a:p>
-        </p:txBody>
-      </p:sp>
-      <p:sp>
-        <p:nvSpPr>
-          <p:cNvPr id="125" name="TextBox 124"/>
-          <p:cNvSpPr txBox="1"/>
-          <p:nvPr/>
-        </p:nvSpPr>
-        <p:spPr>
-          <a:xfrm>
-            <a:off x="7360920" y="6431449"/>
-            <a:ext cx="2148840" cy="289390"/>
-          </a:xfrm>
-          <a:prstGeom prst="rect">
-            <a:avLst/>
-          </a:prstGeom>
-          <a:noFill/>
-        </p:spPr>
-        <p:txBody>
-          <a:bodyPr wrap="square">
-            <a:spAutoFit/>
-          </a:bodyPr>
-          <a:lstStyle/>
-          <a:p>
-            <a:pPr algn="l"/>
-            <a:r>
-              <a:rPr sz="800" b="0" i="0">
-                <a:solidFill>
-                  <a:srgbClr val="000000"/>
-                </a:solidFill>
-                <a:latin typeface="Helvetica Neue"/>
-              </a:rPr>
-              <a:t>Solid + each successor has an active development plan targeting their specific readiness gaps, reviewed with the individual.</a:t>
-            </a:r>
-          </a:p>
-        </p:txBody>
-      </p:sp>
-      <p:sp>
-        <p:nvSpPr>
-          <p:cNvPr id="126" name="Rectangle 125"/>
-          <p:cNvSpPr/>
-          <p:nvPr/>
-        </p:nvSpPr>
-        <p:spPr>
-          <a:xfrm>
-            <a:off x="9619488" y="6230281"/>
-            <a:ext cx="2221992" cy="517990"/>
-          </a:xfrm>
-          <a:prstGeom prst="rect">
-            <a:avLst/>
-          </a:prstGeom>
-          <a:solidFill>
-            <a:srgbClr val="EEF2EB"/>
-          </a:solidFill>
-          <a:ln>
-            <a:noFill/>
-          </a:ln>
-        </p:spPr>
-        <p:style>
-          <a:lnRef idx="1">
-            <a:schemeClr val="accent1"/>
-          </a:lnRef>
-          <a:fillRef idx="3">
-            <a:schemeClr val="accent1"/>
-          </a:fillRef>
-          <a:effectRef idx="2">
-            <a:schemeClr val="accent1"/>
-          </a:effectRef>
-          <a:fontRef idx="minor">
-            <a:schemeClr val="lt1"/>
-          </a:fontRef>
-        </p:style>
-        <p:txBody>
-          <a:bodyPr rtlCol="0" anchor="ctr"/>
-          <a:lstStyle/>
-          <a:p>
-            <a:pPr algn="ctr"/>
-          </a:p>
-        </p:txBody>
-      </p:sp>
-      <p:sp>
-        <p:nvSpPr>
-          <p:cNvPr id="127" name="TextBox 126"/>
-          <p:cNvSpPr txBox="1"/>
-          <p:nvPr/>
-        </p:nvSpPr>
-        <p:spPr>
-          <a:xfrm>
-            <a:off x="9692640" y="6266857"/>
-            <a:ext cx="2221992" cy="137160"/>
-          </a:xfrm>
-          <a:prstGeom prst="rect">
-            <a:avLst/>
-          </a:prstGeom>
-          <a:noFill/>
-        </p:spPr>
-        <p:txBody>
-          <a:bodyPr wrap="square">
-            <a:spAutoFit/>
-          </a:bodyPr>
-          <a:lstStyle/>
-          <a:p>
-            <a:pPr algn="l"/>
-            <a:r>
-              <a:rPr sz="700" b="1" i="0">
-                <a:solidFill>
-                  <a:srgbClr val="5E6B52"/>
-                </a:solidFill>
-                <a:latin typeface="Helvetica Neue"/>
-              </a:rPr>
-              <a:t>EXCELLENT</a:t>
-            </a:r>
-          </a:p>
-        </p:txBody>
-      </p:sp>
-      <p:sp>
-        <p:nvSpPr>
-          <p:cNvPr id="128" name="TextBox 127"/>
-          <p:cNvSpPr txBox="1"/>
-          <p:nvPr/>
-        </p:nvSpPr>
-        <p:spPr>
-          <a:xfrm>
-            <a:off x="9692640" y="6431449"/>
-            <a:ext cx="2148840" cy="289390"/>
-          </a:xfrm>
-          <a:prstGeom prst="rect">
-            <a:avLst/>
-          </a:prstGeom>
-          <a:noFill/>
-        </p:spPr>
-        <p:txBody>
-          <a:bodyPr wrap="square">
-            <a:spAutoFit/>
-          </a:bodyPr>
-          <a:lstStyle/>
-          <a:p>
-            <a:pPr algn="l"/>
-            <a:r>
-              <a:rPr sz="800" b="0" i="0">
-                <a:solidFill>
-                  <a:srgbClr val="000000"/>
-                </a:solidFill>
-                <a:latin typeface="Helvetica Neue"/>
-              </a:rPr>
-              <a:t>Impressive + at least one successor per critical role has been given a visible stretch assignment or acting opportunity to validate readiness in practice.</a:t>
-            </a:r>
-          </a:p>
-        </p:txBody>
-      </p:sp>
-      <p:sp>
-        <p:nvSpPr>
-          <p:cNvPr id="129" name="Rectangle 128"/>
           <p:cNvSpPr/>
           <p:nvPr/>
         </p:nvSpPr>
@@ -8268,7 +6210,7 @@
                 </a:solidFill>
                 <a:latin typeface="Helvetica Neue"/>
               </a:rPr>
-              <a:t>GSD</a:t>
+              <a:t>TECHNOLOGY EXCELLENCE</a:t>
             </a:r>
           </a:p>
         </p:txBody>
@@ -8282,7 +6224,7 @@
         <p:spPr>
           <a:xfrm>
             <a:off x="0" y="568452"/>
-            <a:ext cx="12188952" cy="848868"/>
+            <a:ext cx="12188952" cy="742759"/>
           </a:xfrm>
           <a:prstGeom prst="rect">
             <a:avLst/>
@@ -8346,7 +6288,7 @@
                 </a:solidFill>
                 <a:latin typeface="Helvetica Neue"/>
               </a:rPr>
-              <a:t>Scheduling &amp; Forecasting Capabilities</a:t>
+              <a:t>Financial &amp; Roadmap Rigor</a:t>
             </a:r>
           </a:p>
         </p:txBody>
@@ -8360,28 +6302,28 @@
         <p:spPr>
           <a:xfrm>
             <a:off x="292608" y="824484"/>
-            <a:ext cx="4562856" cy="537972"/>
-          </a:xfrm>
-          <a:prstGeom prst="rect">
-            <a:avLst/>
-          </a:prstGeom>
-          <a:noFill/>
-        </p:spPr>
-        <p:txBody>
-          <a:bodyPr wrap="square">
-            <a:spAutoFit/>
-          </a:bodyPr>
-          <a:lstStyle/>
-          <a:p>
-            <a:pPr algn="l"/>
-            <a:r>
-              <a:rPr sz="900" b="0" i="0">
+            <a:ext cx="4562856" cy="431863"/>
+          </a:xfrm>
+          <a:prstGeom prst="rect">
+            <a:avLst/>
+          </a:prstGeom>
+          <a:noFill/>
+        </p:spPr>
+        <p:txBody>
+          <a:bodyPr wrap="square">
+            <a:spAutoFit/>
+          </a:bodyPr>
+          <a:lstStyle/>
+          <a:p>
+            <a:pPr algn="l"/>
+            <a:r>
+              <a:rPr sz="800" b="0" i="0">
                 <a:solidFill>
                   <a:srgbClr val="595959"/>
                 </a:solidFill>
                 <a:latin typeface="Helvetica Neue"/>
               </a:rPr>
-              <a:t>Deliver scheduling and key forecasting capabilities that are fully deployed, adopted, and operational across target locations by October 2026.</a:t>
+              <a:t>Deliver the Retail &amp; Wholesale tech roadmaps on budget and sustain platforms within baseline opex budget.</a:t>
             </a:r>
           </a:p>
         </p:txBody>
@@ -8395,7 +6337,7 @@
         <p:spPr>
           <a:xfrm>
             <a:off x="4956048" y="623316"/>
-            <a:ext cx="2221992" cy="739140"/>
+            <a:ext cx="2221992" cy="633031"/>
           </a:xfrm>
           <a:prstGeom prst="rect">
             <a:avLst/>
@@ -8473,28 +6415,28 @@
         <p:spPr>
           <a:xfrm>
             <a:off x="5029200" y="824484"/>
-            <a:ext cx="2148840" cy="510540"/>
-          </a:xfrm>
-          <a:prstGeom prst="rect">
-            <a:avLst/>
-          </a:prstGeom>
-          <a:noFill/>
-        </p:spPr>
-        <p:txBody>
-          <a:bodyPr wrap="square">
-            <a:spAutoFit/>
-          </a:bodyPr>
-          <a:lstStyle/>
-          <a:p>
-            <a:pPr algn="l"/>
-            <a:r>
-              <a:rPr sz="900" b="0" i="0">
+            <a:ext cx="2148840" cy="404431"/>
+          </a:xfrm>
+          <a:prstGeom prst="rect">
+            <a:avLst/>
+          </a:prstGeom>
+          <a:noFill/>
+        </p:spPr>
+        <p:txBody>
+          <a:bodyPr wrap="square">
+            <a:spAutoFit/>
+          </a:bodyPr>
+          <a:lstStyle/>
+          <a:p>
+            <a:pPr algn="l"/>
+            <a:r>
+              <a:rPr sz="800" b="0" i="0">
                 <a:solidFill>
                   <a:srgbClr val="000000"/>
                 </a:solidFill>
                 <a:latin typeface="Helvetica Neue"/>
               </a:rPr>
-              <a:t>Capabilities are deployment-ready and validated in a staging environment by October 2026.</a:t>
+              <a:t>Delivered with +/- 10% budget variance.</a:t>
             </a:r>
           </a:p>
         </p:txBody>
@@ -8508,7 +6450,7 @@
         <p:spPr>
           <a:xfrm>
             <a:off x="7287768" y="623316"/>
-            <a:ext cx="2221992" cy="739140"/>
+            <a:ext cx="2221992" cy="633031"/>
           </a:xfrm>
           <a:prstGeom prst="rect">
             <a:avLst/>
@@ -8586,28 +6528,28 @@
         <p:spPr>
           <a:xfrm>
             <a:off x="7360920" y="824484"/>
-            <a:ext cx="2148840" cy="510540"/>
-          </a:xfrm>
-          <a:prstGeom prst="rect">
-            <a:avLst/>
-          </a:prstGeom>
-          <a:noFill/>
-        </p:spPr>
-        <p:txBody>
-          <a:bodyPr wrap="square">
-            <a:spAutoFit/>
-          </a:bodyPr>
-          <a:lstStyle/>
-          <a:p>
-            <a:pPr algn="l"/>
-            <a:r>
-              <a:rPr sz="900" b="0" i="0">
+            <a:ext cx="2148840" cy="404431"/>
+          </a:xfrm>
+          <a:prstGeom prst="rect">
+            <a:avLst/>
+          </a:prstGeom>
+          <a:noFill/>
+        </p:spPr>
+        <p:txBody>
+          <a:bodyPr wrap="square">
+            <a:spAutoFit/>
+          </a:bodyPr>
+          <a:lstStyle/>
+          <a:p>
+            <a:pPr algn="l"/>
+            <a:r>
+              <a:rPr sz="800" b="0" i="0">
                 <a:solidFill>
                   <a:srgbClr val="000000"/>
                 </a:solidFill>
                 <a:latin typeface="Helvetica Neue"/>
               </a:rPr>
-              <a:t>Solid + deployed and live in all target locations by October 2026, with initial user adoption confirmed.</a:t>
+              <a:t>Delivered with +/- 5% budget variance.</a:t>
             </a:r>
           </a:p>
         </p:txBody>
@@ -8621,7 +6563,7 @@
         <p:spPr>
           <a:xfrm>
             <a:off x="9619488" y="623316"/>
-            <a:ext cx="2221992" cy="739140"/>
+            <a:ext cx="2221992" cy="633031"/>
           </a:xfrm>
           <a:prstGeom prst="rect">
             <a:avLst/>
@@ -8699,28 +6641,28 @@
         <p:spPr>
           <a:xfrm>
             <a:off x="9692640" y="824484"/>
-            <a:ext cx="2148840" cy="510540"/>
-          </a:xfrm>
-          <a:prstGeom prst="rect">
-            <a:avLst/>
-          </a:prstGeom>
-          <a:noFill/>
-        </p:spPr>
-        <p:txBody>
-          <a:bodyPr wrap="square">
-            <a:spAutoFit/>
-          </a:bodyPr>
-          <a:lstStyle/>
-          <a:p>
-            <a:pPr algn="l"/>
-            <a:r>
-              <a:rPr sz="900" b="0" i="0">
+            <a:ext cx="2148840" cy="404431"/>
+          </a:xfrm>
+          <a:prstGeom prst="rect">
+            <a:avLst/>
+          </a:prstGeom>
+          <a:noFill/>
+        </p:spPr>
+        <p:txBody>
+          <a:bodyPr wrap="square">
+            <a:spAutoFit/>
+          </a:bodyPr>
+          <a:lstStyle/>
+          <a:p>
+            <a:pPr algn="l"/>
+            <a:r>
+              <a:rPr sz="800" b="0" i="0">
                 <a:solidFill>
                   <a:srgbClr val="000000"/>
                 </a:solidFill>
                 <a:latin typeface="Helvetica Neue"/>
               </a:rPr>
-              <a:t>Impressive + measurable operational impact demonstrated (e.g. reduction in manual scheduling effort or improvement in forecast accuracy) within the year.</a:t>
+              <a:t>Delivered perfectly on budget (0% variance).</a:t>
             </a:r>
           </a:p>
         </p:txBody>
@@ -8733,7 +6675,7 @@
         </p:nvSpPr>
         <p:spPr>
           <a:xfrm>
-            <a:off x="0" y="1410970"/>
+            <a:off x="0" y="1304861"/>
             <a:ext cx="12188952" cy="6350"/>
           </a:xfrm>
           <a:prstGeom prst="rect">
@@ -8776,8 +6718,8 @@
         </p:nvSpPr>
         <p:spPr>
           <a:xfrm>
-            <a:off x="0" y="1417320"/>
-            <a:ext cx="12188952" cy="848868"/>
+            <a:off x="0" y="1311211"/>
+            <a:ext cx="12188952" cy="742759"/>
           </a:xfrm>
           <a:prstGeom prst="rect">
             <a:avLst/>
@@ -8819,7 +6761,7 @@
         </p:nvSpPr>
         <p:spPr>
           <a:xfrm>
-            <a:off x="292608" y="1472184"/>
+            <a:off x="292608" y="1366075"/>
             <a:ext cx="4562856" cy="164592"/>
           </a:xfrm>
           <a:prstGeom prst="rect">
@@ -8841,7 +6783,7 @@
                 </a:solidFill>
                 <a:latin typeface="Helvetica Neue"/>
               </a:rPr>
-              <a:t>Quarterly Roadmap Delivery</a:t>
+              <a:t>Team Health, Retention &amp; Development</a:t>
             </a:r>
           </a:p>
         </p:txBody>
@@ -8854,29 +6796,29 @@
         </p:nvSpPr>
         <p:spPr>
           <a:xfrm>
-            <a:off x="292608" y="1673352"/>
-            <a:ext cx="4562856" cy="537972"/>
-          </a:xfrm>
-          <a:prstGeom prst="rect">
-            <a:avLst/>
-          </a:prstGeom>
-          <a:noFill/>
-        </p:spPr>
-        <p:txBody>
-          <a:bodyPr wrap="square">
-            <a:spAutoFit/>
-          </a:bodyPr>
-          <a:lstStyle/>
-          <a:p>
-            <a:pPr algn="l"/>
-            <a:r>
-              <a:rPr sz="900" b="0" i="0">
+            <a:off x="292608" y="1567243"/>
+            <a:ext cx="4562856" cy="431863"/>
+          </a:xfrm>
+          <a:prstGeom prst="rect">
+            <a:avLst/>
+          </a:prstGeom>
+          <a:noFill/>
+        </p:spPr>
+        <p:txBody>
+          <a:bodyPr wrap="square">
+            <a:spAutoFit/>
+          </a:bodyPr>
+          <a:lstStyle/>
+          <a:p>
+            <a:pPr algn="l"/>
+            <a:r>
+              <a:rPr sz="800" b="0" i="0">
                 <a:solidFill>
                   <a:srgbClr val="595959"/>
                 </a:solidFill>
                 <a:latin typeface="Helvetica Neue"/>
               </a:rPr>
-              <a:t>≥90% of committed quarterly roadmap initiatives delivered within approved scope and timeline.</a:t>
+              <a:t>Foster a high-performing organization by executing active development, and maintaining Peakon engagement scores from Q4 2025 benchmark.</a:t>
             </a:r>
           </a:p>
         </p:txBody>
@@ -8889,8 +6831,8 @@
         </p:nvSpPr>
         <p:spPr>
           <a:xfrm>
-            <a:off x="4956048" y="1472184"/>
-            <a:ext cx="2221992" cy="739140"/>
+            <a:off x="4956048" y="1366075"/>
+            <a:ext cx="2221992" cy="633031"/>
           </a:xfrm>
           <a:prstGeom prst="rect">
             <a:avLst/>
@@ -8932,7 +6874,7 @@
         </p:nvSpPr>
         <p:spPr>
           <a:xfrm>
-            <a:off x="5029200" y="1508760"/>
+            <a:off x="5029200" y="1402651"/>
             <a:ext cx="2221992" cy="137160"/>
           </a:xfrm>
           <a:prstGeom prst="rect">
@@ -8967,29 +6909,29 @@
         </p:nvSpPr>
         <p:spPr>
           <a:xfrm>
-            <a:off x="5029200" y="1673352"/>
-            <a:ext cx="2148840" cy="510540"/>
-          </a:xfrm>
-          <a:prstGeom prst="rect">
-            <a:avLst/>
-          </a:prstGeom>
-          <a:noFill/>
-        </p:spPr>
-        <p:txBody>
-          <a:bodyPr wrap="square">
-            <a:spAutoFit/>
-          </a:bodyPr>
-          <a:lstStyle/>
-          <a:p>
-            <a:pPr algn="l"/>
-            <a:r>
-              <a:rPr sz="900" b="0" i="0">
+            <a:off x="5029200" y="1567243"/>
+            <a:ext cx="2148840" cy="404431"/>
+          </a:xfrm>
+          <a:prstGeom prst="rect">
+            <a:avLst/>
+          </a:prstGeom>
+          <a:noFill/>
+        </p:spPr>
+        <p:txBody>
+          <a:bodyPr wrap="square">
+            <a:spAutoFit/>
+          </a:bodyPr>
+          <a:lstStyle/>
+          <a:p>
+            <a:pPr algn="l"/>
+            <a:r>
+              <a:rPr sz="800" b="0" i="0">
                 <a:solidFill>
                   <a:srgbClr val="000000"/>
                 </a:solidFill>
                 <a:latin typeface="Helvetica Neue"/>
               </a:rPr>
-              <a:t>≥90% of committed quarterly roadmap initiatives delivered within approved scope and timeline.</a:t>
+              <a:t>90% retention; 90% of team has active development plans, Peakon score maintained.</a:t>
             </a:r>
           </a:p>
         </p:txBody>
@@ -9002,8 +6944,8 @@
         </p:nvSpPr>
         <p:spPr>
           <a:xfrm>
-            <a:off x="7287768" y="1472184"/>
-            <a:ext cx="2221992" cy="739140"/>
+            <a:off x="7287768" y="1366075"/>
+            <a:ext cx="2221992" cy="633031"/>
           </a:xfrm>
           <a:prstGeom prst="rect">
             <a:avLst/>
@@ -9045,7 +6987,7 @@
         </p:nvSpPr>
         <p:spPr>
           <a:xfrm>
-            <a:off x="7360920" y="1508760"/>
+            <a:off x="7360920" y="1402651"/>
             <a:ext cx="2221992" cy="137160"/>
           </a:xfrm>
           <a:prstGeom prst="rect">
@@ -9080,29 +7022,29 @@
         </p:nvSpPr>
         <p:spPr>
           <a:xfrm>
-            <a:off x="7360920" y="1673352"/>
-            <a:ext cx="2148840" cy="510540"/>
-          </a:xfrm>
-          <a:prstGeom prst="rect">
-            <a:avLst/>
-          </a:prstGeom>
-          <a:noFill/>
-        </p:spPr>
-        <p:txBody>
-          <a:bodyPr wrap="square">
-            <a:spAutoFit/>
-          </a:bodyPr>
-          <a:lstStyle/>
-          <a:p>
-            <a:pPr algn="l"/>
-            <a:r>
-              <a:rPr sz="900" b="0" i="0">
+            <a:off x="7360920" y="1567243"/>
+            <a:ext cx="2148840" cy="404431"/>
+          </a:xfrm>
+          <a:prstGeom prst="rect">
+            <a:avLst/>
+          </a:prstGeom>
+          <a:noFill/>
+        </p:spPr>
+        <p:txBody>
+          <a:bodyPr wrap="square">
+            <a:spAutoFit/>
+          </a:bodyPr>
+          <a:lstStyle/>
+          <a:p>
+            <a:pPr algn="l"/>
+            <a:r>
+              <a:rPr sz="800" b="0" i="0">
                 <a:solidFill>
                   <a:srgbClr val="000000"/>
                 </a:solidFill>
                 <a:latin typeface="Helvetica Neue"/>
               </a:rPr>
-              <a:t>≥95% delivered on scope and timeline, with no scope reductions accepted post-commitment.</a:t>
+              <a:t>95% retention; 95% of team has active development plans, Peakon score improved by 0.1 for 1 quarter.</a:t>
             </a:r>
           </a:p>
         </p:txBody>
@@ -9115,8 +7057,8 @@
         </p:nvSpPr>
         <p:spPr>
           <a:xfrm>
-            <a:off x="9619488" y="1472184"/>
-            <a:ext cx="2221992" cy="739140"/>
+            <a:off x="9619488" y="1366075"/>
+            <a:ext cx="2221992" cy="633031"/>
           </a:xfrm>
           <a:prstGeom prst="rect">
             <a:avLst/>
@@ -9158,7 +7100,7 @@
         </p:nvSpPr>
         <p:spPr>
           <a:xfrm>
-            <a:off x="9692640" y="1508760"/>
+            <a:off x="9692640" y="1402651"/>
             <a:ext cx="2221992" cy="137160"/>
           </a:xfrm>
           <a:prstGeom prst="rect">
@@ -9193,29 +7135,29 @@
         </p:nvSpPr>
         <p:spPr>
           <a:xfrm>
-            <a:off x="9692640" y="1673352"/>
-            <a:ext cx="2148840" cy="510540"/>
-          </a:xfrm>
-          <a:prstGeom prst="rect">
-            <a:avLst/>
-          </a:prstGeom>
-          <a:noFill/>
-        </p:spPr>
-        <p:txBody>
-          <a:bodyPr wrap="square">
-            <a:spAutoFit/>
-          </a:bodyPr>
-          <a:lstStyle/>
-          <a:p>
-            <a:pPr algn="l"/>
-            <a:r>
-              <a:rPr sz="900" b="0" i="0">
+            <a:off x="9692640" y="1567243"/>
+            <a:ext cx="2148840" cy="404431"/>
+          </a:xfrm>
+          <a:prstGeom prst="rect">
+            <a:avLst/>
+          </a:prstGeom>
+          <a:noFill/>
+        </p:spPr>
+        <p:txBody>
+          <a:bodyPr wrap="square">
+            <a:spAutoFit/>
+          </a:bodyPr>
+          <a:lstStyle/>
+          <a:p>
+            <a:pPr algn="l"/>
+            <a:r>
+              <a:rPr sz="800" b="0" i="0">
                 <a:solidFill>
                   <a:srgbClr val="000000"/>
                 </a:solidFill>
                 <a:latin typeface="Helvetica Neue"/>
               </a:rPr>
-              <a:t>100% delivered on scope and timeline; retrospective evidence showing improved estimation accuracy quarter-over-quarter.</a:t>
+              <a:t>&gt;95% retention; 100% development plans + &gt;0.1 increase in Peakon focus areas maintained from Q1 to Q4.</a:t>
             </a:r>
           </a:p>
         </p:txBody>
@@ -9228,7 +7170,7 @@
         </p:nvSpPr>
         <p:spPr>
           <a:xfrm>
-            <a:off x="0" y="2259838"/>
+            <a:off x="0" y="2047621"/>
             <a:ext cx="12188952" cy="6350"/>
           </a:xfrm>
           <a:prstGeom prst="rect">
@@ -9271,8 +7213,8 @@
         </p:nvSpPr>
         <p:spPr>
           <a:xfrm>
-            <a:off x="0" y="2266188"/>
-            <a:ext cx="12188952" cy="848868"/>
+            <a:off x="0" y="2053971"/>
+            <a:ext cx="12188952" cy="742759"/>
           </a:xfrm>
           <a:prstGeom prst="rect">
             <a:avLst/>
@@ -9314,7 +7256,7 @@
         </p:nvSpPr>
         <p:spPr>
           <a:xfrm>
-            <a:off x="292608" y="2321052"/>
+            <a:off x="292608" y="2108835"/>
             <a:ext cx="4562856" cy="164592"/>
           </a:xfrm>
           <a:prstGeom prst="rect">
@@ -9336,7 +7278,7 @@
                 </a:solidFill>
                 <a:latin typeface="Helvetica Neue"/>
               </a:rPr>
-              <a:t>Location Deployments</a:t>
+              <a:t>Planning &amp; Delivery Framework Completion</a:t>
             </a:r>
           </a:p>
         </p:txBody>
@@ -9349,29 +7291,29 @@
         </p:nvSpPr>
         <p:spPr>
           <a:xfrm>
-            <a:off x="292608" y="2522220"/>
-            <a:ext cx="4562856" cy="537972"/>
-          </a:xfrm>
-          <a:prstGeom prst="rect">
-            <a:avLst/>
-          </a:prstGeom>
-          <a:noFill/>
-        </p:spPr>
-        <p:txBody>
-          <a:bodyPr wrap="square">
-            <a:spAutoFit/>
-          </a:bodyPr>
-          <a:lstStyle/>
-          <a:p>
-            <a:pPr algn="l"/>
-            <a:r>
-              <a:rPr sz="900" b="0" i="0">
+            <a:off x="292608" y="2310003"/>
+            <a:ext cx="4562856" cy="431863"/>
+          </a:xfrm>
+          <a:prstGeom prst="rect">
+            <a:avLst/>
+          </a:prstGeom>
+          <a:noFill/>
+        </p:spPr>
+        <p:txBody>
+          <a:bodyPr wrap="square">
+            <a:spAutoFit/>
+          </a:bodyPr>
+          <a:lstStyle/>
+          <a:p>
+            <a:pPr algn="l"/>
+            <a:r>
+              <a:rPr sz="800" b="0" i="0">
                 <a:solidFill>
                   <a:srgbClr val="595959"/>
                 </a:solidFill>
                 <a:latin typeface="Helvetica Neue"/>
               </a:rPr>
-              <a:t>100% of 16 planned store deployments activated on time across North America (11) and Europe (5).</a:t>
+              <a:t>100% completion of Planning and Delivery Framework artifacts for prioritized projects greater than USD $250k.</a:t>
             </a:r>
           </a:p>
         </p:txBody>
@@ -9384,8 +7326,8 @@
         </p:nvSpPr>
         <p:spPr>
           <a:xfrm>
-            <a:off x="4956048" y="2321052"/>
-            <a:ext cx="2221992" cy="739140"/>
+            <a:off x="4956048" y="2108835"/>
+            <a:ext cx="2221992" cy="633031"/>
           </a:xfrm>
           <a:prstGeom prst="rect">
             <a:avLst/>
@@ -9427,7 +7369,7 @@
         </p:nvSpPr>
         <p:spPr>
           <a:xfrm>
-            <a:off x="5029200" y="2357628"/>
+            <a:off x="5029200" y="2145411"/>
             <a:ext cx="2221992" cy="137160"/>
           </a:xfrm>
           <a:prstGeom prst="rect">
@@ -9462,29 +7404,29 @@
         </p:nvSpPr>
         <p:spPr>
           <a:xfrm>
-            <a:off x="5029200" y="2522220"/>
-            <a:ext cx="2148840" cy="510540"/>
-          </a:xfrm>
-          <a:prstGeom prst="rect">
-            <a:avLst/>
-          </a:prstGeom>
-          <a:noFill/>
-        </p:spPr>
-        <p:txBody>
-          <a:bodyPr wrap="square">
-            <a:spAutoFit/>
-          </a:bodyPr>
-          <a:lstStyle/>
-          <a:p>
-            <a:pPr algn="l"/>
-            <a:r>
-              <a:rPr sz="900" b="0" i="0">
+            <a:off x="5029200" y="2310003"/>
+            <a:ext cx="2148840" cy="404431"/>
+          </a:xfrm>
+          <a:prstGeom prst="rect">
+            <a:avLst/>
+          </a:prstGeom>
+          <a:noFill/>
+        </p:spPr>
+        <p:txBody>
+          <a:bodyPr wrap="square">
+            <a:spAutoFit/>
+          </a:bodyPr>
+          <a:lstStyle/>
+          <a:p>
+            <a:pPr algn="l"/>
+            <a:r>
+              <a:rPr sz="800" b="0" i="0">
                 <a:solidFill>
                   <a:srgbClr val="000000"/>
                 </a:solidFill>
                 <a:latin typeface="Helvetica Neue"/>
               </a:rPr>
-              <a:t>100% of planned location deployments activated on time.</a:t>
+              <a:t>100% of prioritized projects (&gt;$250k) have Planning &amp; Delivery Framework artifacts completed on time.</a:t>
             </a:r>
           </a:p>
         </p:txBody>
@@ -9497,8 +7439,8 @@
         </p:nvSpPr>
         <p:spPr>
           <a:xfrm>
-            <a:off x="7287768" y="2321052"/>
-            <a:ext cx="2221992" cy="739140"/>
+            <a:off x="7287768" y="2108835"/>
+            <a:ext cx="2221992" cy="633031"/>
           </a:xfrm>
           <a:prstGeom prst="rect">
             <a:avLst/>
@@ -9540,7 +7482,7 @@
         </p:nvSpPr>
         <p:spPr>
           <a:xfrm>
-            <a:off x="7360920" y="2357628"/>
+            <a:off x="7360920" y="2145411"/>
             <a:ext cx="2221992" cy="137160"/>
           </a:xfrm>
           <a:prstGeom prst="rect">
@@ -9575,29 +7517,29 @@
         </p:nvSpPr>
         <p:spPr>
           <a:xfrm>
-            <a:off x="7360920" y="2522220"/>
-            <a:ext cx="2148840" cy="510540"/>
-          </a:xfrm>
-          <a:prstGeom prst="rect">
-            <a:avLst/>
-          </a:prstGeom>
-          <a:noFill/>
-        </p:spPr>
-        <p:txBody>
-          <a:bodyPr wrap="square">
-            <a:spAutoFit/>
-          </a:bodyPr>
-          <a:lstStyle/>
-          <a:p>
-            <a:pPr algn="l"/>
-            <a:r>
-              <a:rPr sz="900" b="0" i="0">
+            <a:off x="7360920" y="2310003"/>
+            <a:ext cx="2148840" cy="404431"/>
+          </a:xfrm>
+          <a:prstGeom prst="rect">
+            <a:avLst/>
+          </a:prstGeom>
+          <a:noFill/>
+        </p:spPr>
+        <p:txBody>
+          <a:bodyPr wrap="square">
+            <a:spAutoFit/>
+          </a:bodyPr>
+          <a:lstStyle/>
+          <a:p>
+            <a:pPr algn="l"/>
+            <a:r>
+              <a:rPr sz="800" b="0" i="0">
                 <a:solidFill>
                   <a:srgbClr val="000000"/>
                 </a:solidFill>
                 <a:latin typeface="Helvetica Neue"/>
               </a:rPr>
-              <a:t>Solid + all deployments completed with zero critical post-go-live incidents within the first 30 days.</a:t>
+              <a:t>Solid + artifacts completed ahead of schedule and signed off by stakeholders before project kick-off.</a:t>
             </a:r>
           </a:p>
         </p:txBody>
@@ -9610,8 +7552,8 @@
         </p:nvSpPr>
         <p:spPr>
           <a:xfrm>
-            <a:off x="9619488" y="2321052"/>
-            <a:ext cx="2221992" cy="739140"/>
+            <a:off x="9619488" y="2108835"/>
+            <a:ext cx="2221992" cy="633031"/>
           </a:xfrm>
           <a:prstGeom prst="rect">
             <a:avLst/>
@@ -9653,7 +7595,7 @@
         </p:nvSpPr>
         <p:spPr>
           <a:xfrm>
-            <a:off x="9692640" y="2357628"/>
+            <a:off x="9692640" y="2145411"/>
             <a:ext cx="2221992" cy="137160"/>
           </a:xfrm>
           <a:prstGeom prst="rect">
@@ -9688,29 +7630,29 @@
         </p:nvSpPr>
         <p:spPr>
           <a:xfrm>
-            <a:off x="9692640" y="2522220"/>
-            <a:ext cx="2148840" cy="510540"/>
-          </a:xfrm>
-          <a:prstGeom prst="rect">
-            <a:avLst/>
-          </a:prstGeom>
-          <a:noFill/>
-        </p:spPr>
-        <p:txBody>
-          <a:bodyPr wrap="square">
-            <a:spAutoFit/>
-          </a:bodyPr>
-          <a:lstStyle/>
-          <a:p>
-            <a:pPr algn="l"/>
-            <a:r>
-              <a:rPr sz="900" b="0" i="0">
+            <a:off x="9692640" y="2310003"/>
+            <a:ext cx="2148840" cy="404431"/>
+          </a:xfrm>
+          <a:prstGeom prst="rect">
+            <a:avLst/>
+          </a:prstGeom>
+          <a:noFill/>
+        </p:spPr>
+        <p:txBody>
+          <a:bodyPr wrap="square">
+            <a:spAutoFit/>
+          </a:bodyPr>
+          <a:lstStyle/>
+          <a:p>
+            <a:pPr algn="l"/>
+            <a:r>
+              <a:rPr sz="800" b="0" i="0">
                 <a:solidFill>
                   <a:srgbClr val="000000"/>
                 </a:solidFill>
                 <a:latin typeface="Helvetica Neue"/>
               </a:rPr>
-              <a:t>Impressive + deployment playbook refined and reused, reducing average deployment cycle time by ≥20% vs. baseline.</a:t>
+              <a:t>Impressive + framework adoption extends beyond the $250k threshold, with smaller initiatives voluntarily adopting artifacts — indicating cultural embedding across the team.</a:t>
             </a:r>
           </a:p>
         </p:txBody>
@@ -9723,7 +7665,7 @@
         </p:nvSpPr>
         <p:spPr>
           <a:xfrm>
-            <a:off x="0" y="3108706"/>
+            <a:off x="0" y="2790380"/>
             <a:ext cx="12188952" cy="6350"/>
           </a:xfrm>
           <a:prstGeom prst="rect">
@@ -9766,8 +7708,8 @@
         </p:nvSpPr>
         <p:spPr>
           <a:xfrm>
-            <a:off x="0" y="3115056"/>
-            <a:ext cx="12188952" cy="848868"/>
+            <a:off x="0" y="2796730"/>
+            <a:ext cx="12188952" cy="742759"/>
           </a:xfrm>
           <a:prstGeom prst="rect">
             <a:avLst/>
@@ -9809,7 +7751,7 @@
         </p:nvSpPr>
         <p:spPr>
           <a:xfrm>
-            <a:off x="292608" y="3169920"/>
+            <a:off x="292608" y="2851594"/>
             <a:ext cx="4562856" cy="164592"/>
           </a:xfrm>
           <a:prstGeom prst="rect">
@@ -9831,7 +7773,7 @@
                 </a:solidFill>
                 <a:latin typeface="Helvetica Neue"/>
               </a:rPr>
-              <a:t>Product Dashboard</a:t>
+              <a:t>Succession Readiness</a:t>
             </a:r>
           </a:p>
         </p:txBody>
@@ -9844,29 +7786,29 @@
         </p:nvSpPr>
         <p:spPr>
           <a:xfrm>
-            <a:off x="292608" y="3371088"/>
-            <a:ext cx="4562856" cy="537972"/>
-          </a:xfrm>
-          <a:prstGeom prst="rect">
-            <a:avLst/>
-          </a:prstGeom>
-          <a:noFill/>
-        </p:spPr>
-        <p:txBody>
-          <a:bodyPr wrap="square">
-            <a:spAutoFit/>
-          </a:bodyPr>
-          <a:lstStyle/>
-          <a:p>
-            <a:pPr algn="l"/>
-            <a:r>
-              <a:rPr sz="900" b="0" i="0">
+            <a:off x="292608" y="3052762"/>
+            <a:ext cx="4562856" cy="431863"/>
+          </a:xfrm>
+          <a:prstGeom prst="rect">
+            <a:avLst/>
+          </a:prstGeom>
+          <a:noFill/>
+        </p:spPr>
+        <p:txBody>
+          <a:bodyPr wrap="square">
+            <a:spAutoFit/>
+          </a:bodyPr>
+          <a:lstStyle/>
+          <a:p>
+            <a:pPr algn="l"/>
+            <a:r>
+              <a:rPr sz="800" b="0" i="0">
                 <a:solidFill>
                   <a:srgbClr val="595959"/>
                 </a:solidFill>
                 <a:latin typeface="Helvetica Neue"/>
               </a:rPr>
-              <a:t>Build and embed a product dashboard that gives the Retail &amp; Wholesale Technology team visibility into capability performance, enabling data-driven prioritisation and investment decisions.</a:t>
+              <a:t>Ensure every critical role within the Retail &amp; Wholesale Technology team has an identified and documented successor, with a development plan in place to close readiness gaps.</a:t>
             </a:r>
           </a:p>
         </p:txBody>
@@ -9879,8 +7821,8 @@
         </p:nvSpPr>
         <p:spPr>
           <a:xfrm>
-            <a:off x="4956048" y="3169920"/>
-            <a:ext cx="2221992" cy="739140"/>
+            <a:off x="4956048" y="2851594"/>
+            <a:ext cx="2221992" cy="633031"/>
           </a:xfrm>
           <a:prstGeom prst="rect">
             <a:avLst/>
@@ -9922,7 +7864,7 @@
         </p:nvSpPr>
         <p:spPr>
           <a:xfrm>
-            <a:off x="5029200" y="3206496"/>
+            <a:off x="5029200" y="2888170"/>
             <a:ext cx="2221992" cy="137160"/>
           </a:xfrm>
           <a:prstGeom prst="rect">
@@ -9957,29 +7899,29 @@
         </p:nvSpPr>
         <p:spPr>
           <a:xfrm>
-            <a:off x="5029200" y="3371088"/>
-            <a:ext cx="2148840" cy="510540"/>
-          </a:xfrm>
-          <a:prstGeom prst="rect">
-            <a:avLst/>
-          </a:prstGeom>
-          <a:noFill/>
-        </p:spPr>
-        <p:txBody>
-          <a:bodyPr wrap="square">
-            <a:spAutoFit/>
-          </a:bodyPr>
-          <a:lstStyle/>
-          <a:p>
-            <a:pPr algn="l"/>
-            <a:r>
-              <a:rPr sz="900" b="0" i="0">
+            <a:off x="5029200" y="3052762"/>
+            <a:ext cx="2148840" cy="404431"/>
+          </a:xfrm>
+          <a:prstGeom prst="rect">
+            <a:avLst/>
+          </a:prstGeom>
+          <a:noFill/>
+        </p:spPr>
+        <p:txBody>
+          <a:bodyPr wrap="square">
+            <a:spAutoFit/>
+          </a:bodyPr>
+          <a:lstStyle/>
+          <a:p>
+            <a:pPr algn="l"/>
+            <a:r>
+              <a:rPr sz="800" b="0" i="0">
                 <a:solidFill>
                   <a:srgbClr val="000000"/>
                 </a:solidFill>
                 <a:latin typeface="Helvetica Neue"/>
               </a:rPr>
-              <a:t>Product dashboard live with core metrics defined and accessible to the team by Q2 2026.</a:t>
+              <a:t>100% of critical roles have a named successor documented with an initial readiness assessment completed.</a:t>
             </a:r>
           </a:p>
         </p:txBody>
@@ -9992,8 +7934,8 @@
         </p:nvSpPr>
         <p:spPr>
           <a:xfrm>
-            <a:off x="7287768" y="3169920"/>
-            <a:ext cx="2221992" cy="739140"/>
+            <a:off x="7287768" y="2851594"/>
+            <a:ext cx="2221992" cy="633031"/>
           </a:xfrm>
           <a:prstGeom prst="rect">
             <a:avLst/>
@@ -10035,7 +7977,7 @@
         </p:nvSpPr>
         <p:spPr>
           <a:xfrm>
-            <a:off x="7360920" y="3206496"/>
+            <a:off x="7360920" y="2888170"/>
             <a:ext cx="2221992" cy="137160"/>
           </a:xfrm>
           <a:prstGeom prst="rect">
@@ -10070,29 +8012,29 @@
         </p:nvSpPr>
         <p:spPr>
           <a:xfrm>
-            <a:off x="7360920" y="3371088"/>
-            <a:ext cx="2148840" cy="510540"/>
-          </a:xfrm>
-          <a:prstGeom prst="rect">
-            <a:avLst/>
-          </a:prstGeom>
-          <a:noFill/>
-        </p:spPr>
-        <p:txBody>
-          <a:bodyPr wrap="square">
-            <a:spAutoFit/>
-          </a:bodyPr>
-          <a:lstStyle/>
-          <a:p>
-            <a:pPr algn="l"/>
-            <a:r>
-              <a:rPr sz="900" b="0" i="0">
+            <a:off x="7360920" y="3052762"/>
+            <a:ext cx="2148840" cy="404431"/>
+          </a:xfrm>
+          <a:prstGeom prst="rect">
+            <a:avLst/>
+          </a:prstGeom>
+          <a:noFill/>
+        </p:spPr>
+        <p:txBody>
+          <a:bodyPr wrap="square">
+            <a:spAutoFit/>
+          </a:bodyPr>
+          <a:lstStyle/>
+          <a:p>
+            <a:pPr algn="l"/>
+            <a:r>
+              <a:rPr sz="800" b="0" i="0">
                 <a:solidFill>
                   <a:srgbClr val="000000"/>
                 </a:solidFill>
                 <a:latin typeface="Helvetica Neue"/>
               </a:rPr>
-              <a:t>Solid + dashboard actively referenced in quarterly business reviews with at least one documented decision influenced by the data.</a:t>
+              <a:t>Solid + each successor has an active development plan targeting their specific readiness gaps, reviewed with the individual.</a:t>
             </a:r>
           </a:p>
         </p:txBody>
@@ -10105,8 +8047,8 @@
         </p:nvSpPr>
         <p:spPr>
           <a:xfrm>
-            <a:off x="9619488" y="3169920"/>
-            <a:ext cx="2221992" cy="739140"/>
+            <a:off x="9619488" y="2851594"/>
+            <a:ext cx="2221992" cy="633031"/>
           </a:xfrm>
           <a:prstGeom prst="rect">
             <a:avLst/>
@@ -10148,7 +8090,7 @@
         </p:nvSpPr>
         <p:spPr>
           <a:xfrm>
-            <a:off x="9692640" y="3206496"/>
+            <a:off x="9692640" y="2888170"/>
             <a:ext cx="2221992" cy="137160"/>
           </a:xfrm>
           <a:prstGeom prst="rect">
@@ -10183,29 +8125,29 @@
         </p:nvSpPr>
         <p:spPr>
           <a:xfrm>
-            <a:off x="9692640" y="3371088"/>
-            <a:ext cx="2148840" cy="510540"/>
-          </a:xfrm>
-          <a:prstGeom prst="rect">
-            <a:avLst/>
-          </a:prstGeom>
-          <a:noFill/>
-        </p:spPr>
-        <p:txBody>
-          <a:bodyPr wrap="square">
-            <a:spAutoFit/>
-          </a:bodyPr>
-          <a:lstStyle/>
-          <a:p>
-            <a:pPr algn="l"/>
-            <a:r>
-              <a:rPr sz="900" b="0" i="0">
+            <a:off x="9692640" y="3052762"/>
+            <a:ext cx="2148840" cy="404431"/>
+          </a:xfrm>
+          <a:prstGeom prst="rect">
+            <a:avLst/>
+          </a:prstGeom>
+          <a:noFill/>
+        </p:spPr>
+        <p:txBody>
+          <a:bodyPr wrap="square">
+            <a:spAutoFit/>
+          </a:bodyPr>
+          <a:lstStyle/>
+          <a:p>
+            <a:pPr algn="l"/>
+            <a:r>
+              <a:rPr sz="800" b="0" i="0">
                 <a:solidFill>
                   <a:srgbClr val="000000"/>
                 </a:solidFill>
                 <a:latin typeface="Helvetica Neue"/>
               </a:rPr>
-              <a:t>Impressive + dashboard expanded to include predictive or trending metrics, and adopted as the primary tool for roadmap prioritisation discussions.</a:t>
+              <a:t>Impressive + at least one successor per critical role has been given a visible stretch assignment or acting opportunity to validate readiness in practice.</a:t>
             </a:r>
           </a:p>
         </p:txBody>
@@ -10218,7 +8160,7 @@
         </p:nvSpPr>
         <p:spPr>
           <a:xfrm>
-            <a:off x="0" y="3957574"/>
+            <a:off x="0" y="3533140"/>
             <a:ext cx="12188952" cy="6350"/>
           </a:xfrm>
           <a:prstGeom prst="rect">
@@ -10261,7 +8203,7 @@
         </p:nvSpPr>
         <p:spPr>
           <a:xfrm>
-            <a:off x="0" y="4018788"/>
+            <a:off x="0" y="3594354"/>
             <a:ext cx="12188952" cy="237744"/>
           </a:xfrm>
           <a:prstGeom prst="rect">
@@ -10304,7 +8246,7 @@
         </p:nvSpPr>
         <p:spPr>
           <a:xfrm>
-            <a:off x="292608" y="4055364"/>
+            <a:off x="292608" y="3630930"/>
             <a:ext cx="4608576" cy="201168"/>
           </a:xfrm>
           <a:prstGeom prst="rect">
@@ -10326,7 +8268,7 @@
                 </a:solidFill>
                 <a:latin typeface="Helvetica Neue"/>
               </a:rPr>
-              <a:t>ALC — ARC'TERYX LEADERSHIP CODE</a:t>
+              <a:t>GSD</a:t>
             </a:r>
           </a:p>
         </p:txBody>
@@ -10339,8 +8281,8 @@
         </p:nvSpPr>
         <p:spPr>
           <a:xfrm>
-            <a:off x="0" y="4256532"/>
-            <a:ext cx="12188952" cy="848868"/>
+            <a:off x="0" y="3832098"/>
+            <a:ext cx="12188952" cy="742759"/>
           </a:xfrm>
           <a:prstGeom prst="rect">
             <a:avLst/>
@@ -10382,7 +8324,7 @@
         </p:nvSpPr>
         <p:spPr>
           <a:xfrm>
-            <a:off x="292608" y="4311396"/>
+            <a:off x="292608" y="3886962"/>
             <a:ext cx="4562856" cy="164592"/>
           </a:xfrm>
           <a:prstGeom prst="rect">
@@ -10404,7 +8346,7 @@
                 </a:solidFill>
                 <a:latin typeface="Helvetica Neue"/>
               </a:rPr>
-              <a:t>Innovation</a:t>
+              <a:t>Scheduling &amp; Forecasting Capabilities</a:t>
             </a:r>
           </a:p>
         </p:txBody>
@@ -10417,29 +8359,29 @@
         </p:nvSpPr>
         <p:spPr>
           <a:xfrm>
-            <a:off x="292608" y="4512564"/>
-            <a:ext cx="4562856" cy="537972"/>
-          </a:xfrm>
-          <a:prstGeom prst="rect">
-            <a:avLst/>
-          </a:prstGeom>
-          <a:noFill/>
-        </p:spPr>
-        <p:txBody>
-          <a:bodyPr wrap="square">
-            <a:spAutoFit/>
-          </a:bodyPr>
-          <a:lstStyle/>
-          <a:p>
-            <a:pPr algn="l"/>
-            <a:r>
-              <a:rPr sz="900" b="0" i="0">
+            <a:off x="292608" y="4088130"/>
+            <a:ext cx="4562856" cy="431863"/>
+          </a:xfrm>
+          <a:prstGeom prst="rect">
+            <a:avLst/>
+          </a:prstGeom>
+          <a:noFill/>
+        </p:spPr>
+        <p:txBody>
+          <a:bodyPr wrap="square">
+            <a:spAutoFit/>
+          </a:bodyPr>
+          <a:lstStyle/>
+          <a:p>
+            <a:pPr algn="l"/>
+            <a:r>
+              <a:rPr sz="800" b="0" i="0">
                 <a:solidFill>
                   <a:srgbClr val="595959"/>
                 </a:solidFill>
                 <a:latin typeface="Helvetica Neue"/>
               </a:rPr>
-              <a:t>Foster a culture of innovation within Retail &amp; Wholesale Technology by creating space for new ideas, experimentation, and calculated risk-taking.</a:t>
+              <a:t>Deliver scheduling and key forecasting capabilities that are fully deployed, adopted, and operational across target locations by October 2026.</a:t>
             </a:r>
           </a:p>
         </p:txBody>
@@ -10452,8 +8394,8 @@
         </p:nvSpPr>
         <p:spPr>
           <a:xfrm>
-            <a:off x="4956048" y="4311396"/>
-            <a:ext cx="2221992" cy="739140"/>
+            <a:off x="4956048" y="3886962"/>
+            <a:ext cx="2221992" cy="633031"/>
           </a:xfrm>
           <a:prstGeom prst="rect">
             <a:avLst/>
@@ -10495,7 +8437,7 @@
         </p:nvSpPr>
         <p:spPr>
           <a:xfrm>
-            <a:off x="5029200" y="4347972"/>
+            <a:off x="5029200" y="3923538"/>
             <a:ext cx="2221992" cy="137160"/>
           </a:xfrm>
           <a:prstGeom prst="rect">
@@ -10530,29 +8472,29 @@
         </p:nvSpPr>
         <p:spPr>
           <a:xfrm>
-            <a:off x="5029200" y="4512564"/>
-            <a:ext cx="2148840" cy="510540"/>
-          </a:xfrm>
-          <a:prstGeom prst="rect">
-            <a:avLst/>
-          </a:prstGeom>
-          <a:noFill/>
-        </p:spPr>
-        <p:txBody>
-          <a:bodyPr wrap="square">
-            <a:spAutoFit/>
-          </a:bodyPr>
-          <a:lstStyle/>
-          <a:p>
-            <a:pPr algn="l"/>
-            <a:r>
-              <a:rPr sz="900" b="0" i="0">
+            <a:off x="5029200" y="4088130"/>
+            <a:ext cx="2148840" cy="404431"/>
+          </a:xfrm>
+          <a:prstGeom prst="rect">
+            <a:avLst/>
+          </a:prstGeom>
+          <a:noFill/>
+        </p:spPr>
+        <p:txBody>
+          <a:bodyPr wrap="square">
+            <a:spAutoFit/>
+          </a:bodyPr>
+          <a:lstStyle/>
+          <a:p>
+            <a:pPr algn="l"/>
+            <a:r>
+              <a:rPr sz="800" b="0" i="0">
                 <a:solidFill>
                   <a:srgbClr val="000000"/>
                 </a:solidFill>
                 <a:latin typeface="Helvetica Neue"/>
               </a:rPr>
-              <a:t>At least one structured innovation initiative (e.g. hackathon, spike, or experimentation sprint) run within the year, with outcomes shared across the team.</a:t>
+              <a:t>Capabilities are deployment-ready and validated in a staging environment by October 2026.</a:t>
             </a:r>
           </a:p>
         </p:txBody>
@@ -10565,8 +8507,8 @@
         </p:nvSpPr>
         <p:spPr>
           <a:xfrm>
-            <a:off x="7287768" y="4311396"/>
-            <a:ext cx="2221992" cy="739140"/>
+            <a:off x="7287768" y="3886962"/>
+            <a:ext cx="2221992" cy="633031"/>
           </a:xfrm>
           <a:prstGeom prst="rect">
             <a:avLst/>
@@ -10608,7 +8550,7 @@
         </p:nvSpPr>
         <p:spPr>
           <a:xfrm>
-            <a:off x="7360920" y="4347972"/>
+            <a:off x="7360920" y="3923538"/>
             <a:ext cx="2221992" cy="137160"/>
           </a:xfrm>
           <a:prstGeom prst="rect">
@@ -10643,29 +8585,29 @@
         </p:nvSpPr>
         <p:spPr>
           <a:xfrm>
-            <a:off x="7360920" y="4512564"/>
-            <a:ext cx="2148840" cy="510540"/>
-          </a:xfrm>
-          <a:prstGeom prst="rect">
-            <a:avLst/>
-          </a:prstGeom>
-          <a:noFill/>
-        </p:spPr>
-        <p:txBody>
-          <a:bodyPr wrap="square">
-            <a:spAutoFit/>
-          </a:bodyPr>
-          <a:lstStyle/>
-          <a:p>
-            <a:pPr algn="l"/>
-            <a:r>
-              <a:rPr sz="900" b="0" i="0">
+            <a:off x="7360920" y="4088130"/>
+            <a:ext cx="2148840" cy="404431"/>
+          </a:xfrm>
+          <a:prstGeom prst="rect">
+            <a:avLst/>
+          </a:prstGeom>
+          <a:noFill/>
+        </p:spPr>
+        <p:txBody>
+          <a:bodyPr wrap="square">
+            <a:spAutoFit/>
+          </a:bodyPr>
+          <a:lstStyle/>
+          <a:p>
+            <a:pPr algn="l"/>
+            <a:r>
+              <a:rPr sz="800" b="0" i="0">
                 <a:solidFill>
                   <a:srgbClr val="000000"/>
                 </a:solidFill>
                 <a:latin typeface="Helvetica Neue"/>
               </a:rPr>
-              <a:t>Solid + at least one idea originating from the team moves into the roadmap or is adopted as a practice change.</a:t>
+              <a:t>Solid + deployed and live in all target locations by October 2026, with initial user adoption confirmed.</a:t>
             </a:r>
           </a:p>
         </p:txBody>
@@ -10678,8 +8620,8 @@
         </p:nvSpPr>
         <p:spPr>
           <a:xfrm>
-            <a:off x="9619488" y="4311396"/>
-            <a:ext cx="2221992" cy="739140"/>
+            <a:off x="9619488" y="3886962"/>
+            <a:ext cx="2221992" cy="633031"/>
           </a:xfrm>
           <a:prstGeom prst="rect">
             <a:avLst/>
@@ -10721,7 +8663,7 @@
         </p:nvSpPr>
         <p:spPr>
           <a:xfrm>
-            <a:off x="9692640" y="4347972"/>
+            <a:off x="9692640" y="3923538"/>
             <a:ext cx="2221992" cy="137160"/>
           </a:xfrm>
           <a:prstGeom prst="rect">
@@ -10756,29 +8698,29 @@
         </p:nvSpPr>
         <p:spPr>
           <a:xfrm>
-            <a:off x="9692640" y="4512564"/>
-            <a:ext cx="2148840" cy="510540"/>
-          </a:xfrm>
-          <a:prstGeom prst="rect">
-            <a:avLst/>
-          </a:prstGeom>
-          <a:noFill/>
-        </p:spPr>
-        <p:txBody>
-          <a:bodyPr wrap="square">
-            <a:spAutoFit/>
-          </a:bodyPr>
-          <a:lstStyle/>
-          <a:p>
-            <a:pPr algn="l"/>
-            <a:r>
-              <a:rPr sz="900" b="0" i="0">
+            <a:off x="9692640" y="4088130"/>
+            <a:ext cx="2148840" cy="404431"/>
+          </a:xfrm>
+          <a:prstGeom prst="rect">
+            <a:avLst/>
+          </a:prstGeom>
+          <a:noFill/>
+        </p:spPr>
+        <p:txBody>
+          <a:bodyPr wrap="square">
+            <a:spAutoFit/>
+          </a:bodyPr>
+          <a:lstStyle/>
+          <a:p>
+            <a:pPr algn="l"/>
+            <a:r>
+              <a:rPr sz="800" b="0" i="0">
                 <a:solidFill>
                   <a:srgbClr val="000000"/>
                 </a:solidFill>
                 <a:latin typeface="Helvetica Neue"/>
               </a:rPr>
-              <a:t>Impressive + innovation contributions recognised at a leadership level; team members proactively bring forward ideas without prompting.</a:t>
+              <a:t>Impressive + measurable operational impact demonstrated (e.g. reduction in manual scheduling effort or improvement in forecast accuracy) within the year.</a:t>
             </a:r>
           </a:p>
         </p:txBody>
@@ -10791,7 +8733,7 @@
         </p:nvSpPr>
         <p:spPr>
           <a:xfrm>
-            <a:off x="0" y="5099050"/>
+            <a:off x="0" y="4568507"/>
             <a:ext cx="12188952" cy="6350"/>
           </a:xfrm>
           <a:prstGeom prst="rect">
@@ -10834,8 +8776,8 @@
         </p:nvSpPr>
         <p:spPr>
           <a:xfrm>
-            <a:off x="0" y="5105400"/>
-            <a:ext cx="12188952" cy="848868"/>
+            <a:off x="0" y="4574857"/>
+            <a:ext cx="12188952" cy="742759"/>
           </a:xfrm>
           <a:prstGeom prst="rect">
             <a:avLst/>
@@ -10877,7 +8819,7 @@
         </p:nvSpPr>
         <p:spPr>
           <a:xfrm>
-            <a:off x="292608" y="5160264"/>
+            <a:off x="292608" y="4629721"/>
             <a:ext cx="4562856" cy="164592"/>
           </a:xfrm>
           <a:prstGeom prst="rect">
@@ -10899,7 +8841,7 @@
                 </a:solidFill>
                 <a:latin typeface="Helvetica Neue"/>
               </a:rPr>
-              <a:t>Communication</a:t>
+              <a:t>Quarterly Roadmap Delivery</a:t>
             </a:r>
           </a:p>
         </p:txBody>
@@ -10912,29 +8854,29 @@
         </p:nvSpPr>
         <p:spPr>
           <a:xfrm>
-            <a:off x="292608" y="5361432"/>
-            <a:ext cx="4562856" cy="537972"/>
-          </a:xfrm>
-          <a:prstGeom prst="rect">
-            <a:avLst/>
-          </a:prstGeom>
-          <a:noFill/>
-        </p:spPr>
-        <p:txBody>
-          <a:bodyPr wrap="square">
-            <a:spAutoFit/>
-          </a:bodyPr>
-          <a:lstStyle/>
-          <a:p>
-            <a:pPr algn="l"/>
-            <a:r>
-              <a:rPr sz="900" b="0" i="0">
+            <a:off x="292608" y="4830889"/>
+            <a:ext cx="4562856" cy="431863"/>
+          </a:xfrm>
+          <a:prstGeom prst="rect">
+            <a:avLst/>
+          </a:prstGeom>
+          <a:noFill/>
+        </p:spPr>
+        <p:txBody>
+          <a:bodyPr wrap="square">
+            <a:spAutoFit/>
+          </a:bodyPr>
+          <a:lstStyle/>
+          <a:p>
+            <a:pPr algn="l"/>
+            <a:r>
+              <a:rPr sz="800" b="0" i="0">
                 <a:solidFill>
                   <a:srgbClr val="595959"/>
                 </a:solidFill>
                 <a:latin typeface="Helvetica Neue"/>
               </a:rPr>
-              <a:t>Maintain clear, consistent, and transparent communication across the team and with senior stakeholders — ensuring alignment on priorities, progress, and decisions.</a:t>
+              <a:t>≥90% of committed quarterly roadmap initiatives delivered within approved scope and timeline.</a:t>
             </a:r>
           </a:p>
         </p:txBody>
@@ -10947,8 +8889,8 @@
         </p:nvSpPr>
         <p:spPr>
           <a:xfrm>
-            <a:off x="4956048" y="5160264"/>
-            <a:ext cx="2221992" cy="739140"/>
+            <a:off x="4956048" y="4629721"/>
+            <a:ext cx="2221992" cy="633031"/>
           </a:xfrm>
           <a:prstGeom prst="rect">
             <a:avLst/>
@@ -10990,7 +8932,7 @@
         </p:nvSpPr>
         <p:spPr>
           <a:xfrm>
-            <a:off x="5029200" y="5196840"/>
+            <a:off x="5029200" y="4666297"/>
             <a:ext cx="2221992" cy="137160"/>
           </a:xfrm>
           <a:prstGeom prst="rect">
@@ -11025,29 +8967,29 @@
         </p:nvSpPr>
         <p:spPr>
           <a:xfrm>
-            <a:off x="5029200" y="5361432"/>
-            <a:ext cx="2148840" cy="510540"/>
-          </a:xfrm>
-          <a:prstGeom prst="rect">
-            <a:avLst/>
-          </a:prstGeom>
-          <a:noFill/>
-        </p:spPr>
-        <p:txBody>
-          <a:bodyPr wrap="square">
-            <a:spAutoFit/>
-          </a:bodyPr>
-          <a:lstStyle/>
-          <a:p>
-            <a:pPr algn="l"/>
-            <a:r>
-              <a:rPr sz="900" b="0" i="0">
+            <a:off x="5029200" y="4830889"/>
+            <a:ext cx="2148840" cy="404431"/>
+          </a:xfrm>
+          <a:prstGeom prst="rect">
+            <a:avLst/>
+          </a:prstGeom>
+          <a:noFill/>
+        </p:spPr>
+        <p:txBody>
+          <a:bodyPr wrap="square">
+            <a:spAutoFit/>
+          </a:bodyPr>
+          <a:lstStyle/>
+          <a:p>
+            <a:pPr algn="l"/>
+            <a:r>
+              <a:rPr sz="800" b="0" i="0">
                 <a:solidFill>
                   <a:srgbClr val="000000"/>
                 </a:solidFill>
                 <a:latin typeface="Helvetica Neue"/>
               </a:rPr>
-              <a:t>Regular cadence of team and stakeholder communications maintained (e.g. team updates, leadership reporting) with no significant alignment gaps.</a:t>
+              <a:t>≥90% of committed quarterly roadmap initiatives delivered within approved scope and timeline.</a:t>
             </a:r>
           </a:p>
         </p:txBody>
@@ -11060,8 +9002,8 @@
         </p:nvSpPr>
         <p:spPr>
           <a:xfrm>
-            <a:off x="7287768" y="5160264"/>
-            <a:ext cx="2221992" cy="739140"/>
+            <a:off x="7287768" y="4629721"/>
+            <a:ext cx="2221992" cy="633031"/>
           </a:xfrm>
           <a:prstGeom prst="rect">
             <a:avLst/>
@@ -11103,7 +9045,7 @@
         </p:nvSpPr>
         <p:spPr>
           <a:xfrm>
-            <a:off x="7360920" y="5196840"/>
+            <a:off x="7360920" y="4666297"/>
             <a:ext cx="2221992" cy="137160"/>
           </a:xfrm>
           <a:prstGeom prst="rect">
@@ -11138,29 +9080,29 @@
         </p:nvSpPr>
         <p:spPr>
           <a:xfrm>
-            <a:off x="7360920" y="5361432"/>
-            <a:ext cx="2148840" cy="510540"/>
-          </a:xfrm>
-          <a:prstGeom prst="rect">
-            <a:avLst/>
-          </a:prstGeom>
-          <a:noFill/>
-        </p:spPr>
-        <p:txBody>
-          <a:bodyPr wrap="square">
-            <a:spAutoFit/>
-          </a:bodyPr>
-          <a:lstStyle/>
-          <a:p>
-            <a:pPr algn="l"/>
-            <a:r>
-              <a:rPr sz="900" b="0" i="0">
+            <a:off x="7360920" y="4830889"/>
+            <a:ext cx="2148840" cy="404431"/>
+          </a:xfrm>
+          <a:prstGeom prst="rect">
+            <a:avLst/>
+          </a:prstGeom>
+          <a:noFill/>
+        </p:spPr>
+        <p:txBody>
+          <a:bodyPr wrap="square">
+            <a:spAutoFit/>
+          </a:bodyPr>
+          <a:lstStyle/>
+          <a:p>
+            <a:pPr algn="l"/>
+            <a:r>
+              <a:rPr sz="800" b="0" i="0">
                 <a:solidFill>
                   <a:srgbClr val="000000"/>
                 </a:solidFill>
                 <a:latin typeface="Helvetica Neue"/>
               </a:rPr>
-              <a:t>Solid + feedback from team and stakeholders reflects high clarity and confidence in direction; no surprises at key milestones.</a:t>
+              <a:t>≥95% delivered on scope and timeline, with no scope reductions accepted post-commitment.</a:t>
             </a:r>
           </a:p>
         </p:txBody>
@@ -11173,8 +9115,8 @@
         </p:nvSpPr>
         <p:spPr>
           <a:xfrm>
-            <a:off x="9619488" y="5160264"/>
-            <a:ext cx="2221992" cy="739140"/>
+            <a:off x="9619488" y="4629721"/>
+            <a:ext cx="2221992" cy="633031"/>
           </a:xfrm>
           <a:prstGeom prst="rect">
             <a:avLst/>
@@ -11216,7 +9158,7 @@
         </p:nvSpPr>
         <p:spPr>
           <a:xfrm>
-            <a:off x="9692640" y="5196840"/>
+            <a:off x="9692640" y="4666297"/>
             <a:ext cx="2221992" cy="137160"/>
           </a:xfrm>
           <a:prstGeom prst="rect">
@@ -11251,29 +9193,29 @@
         </p:nvSpPr>
         <p:spPr>
           <a:xfrm>
-            <a:off x="9692640" y="5361432"/>
-            <a:ext cx="2148840" cy="510540"/>
-          </a:xfrm>
-          <a:prstGeom prst="rect">
-            <a:avLst/>
-          </a:prstGeom>
-          <a:noFill/>
-        </p:spPr>
-        <p:txBody>
-          <a:bodyPr wrap="square">
-            <a:spAutoFit/>
-          </a:bodyPr>
-          <a:lstStyle/>
-          <a:p>
-            <a:pPr algn="l"/>
-            <a:r>
-              <a:rPr sz="900" b="0" i="0">
+            <a:off x="9692640" y="4830889"/>
+            <a:ext cx="2148840" cy="404431"/>
+          </a:xfrm>
+          <a:prstGeom prst="rect">
+            <a:avLst/>
+          </a:prstGeom>
+          <a:noFill/>
+        </p:spPr>
+        <p:txBody>
+          <a:bodyPr wrap="square">
+            <a:spAutoFit/>
+          </a:bodyPr>
+          <a:lstStyle/>
+          <a:p>
+            <a:pPr algn="l"/>
+            <a:r>
+              <a:rPr sz="800" b="0" i="0">
                 <a:solidFill>
                   <a:srgbClr val="000000"/>
                 </a:solidFill>
                 <a:latin typeface="Helvetica Neue"/>
               </a:rPr>
-              <a:t>Impressive + communication style recognised as a model within the broader leadership group; proactively shapes narratives rather than responding to them.</a:t>
+              <a:t>100% delivered on scope and timeline; retrospective evidence showing improved estimation accuracy quarter-over-quarter.</a:t>
             </a:r>
           </a:p>
         </p:txBody>
@@ -11286,7 +9228,7 @@
         </p:nvSpPr>
         <p:spPr>
           <a:xfrm>
-            <a:off x="0" y="5947918"/>
+            <a:off x="0" y="5311267"/>
             <a:ext cx="12188952" cy="6350"/>
           </a:xfrm>
           <a:prstGeom prst="rect">
@@ -11329,8 +9271,8 @@
         </p:nvSpPr>
         <p:spPr>
           <a:xfrm>
-            <a:off x="0" y="5954268"/>
-            <a:ext cx="12188952" cy="848868"/>
+            <a:off x="0" y="5317617"/>
+            <a:ext cx="12188952" cy="742759"/>
           </a:xfrm>
           <a:prstGeom prst="rect">
             <a:avLst/>
@@ -11372,7 +9314,7 @@
         </p:nvSpPr>
         <p:spPr>
           <a:xfrm>
-            <a:off x="292608" y="6009132"/>
+            <a:off x="292608" y="5372481"/>
             <a:ext cx="4562856" cy="164592"/>
           </a:xfrm>
           <a:prstGeom prst="rect">
@@ -11394,7 +9336,7 @@
                 </a:solidFill>
                 <a:latin typeface="Helvetica Neue"/>
               </a:rPr>
-              <a:t>Vision &amp; Strategy</a:t>
+              <a:t>Location Deployments</a:t>
             </a:r>
           </a:p>
         </p:txBody>
@@ -11407,29 +9349,29 @@
         </p:nvSpPr>
         <p:spPr>
           <a:xfrm>
-            <a:off x="292608" y="6210300"/>
-            <a:ext cx="4562856" cy="537972"/>
-          </a:xfrm>
-          <a:prstGeom prst="rect">
-            <a:avLst/>
-          </a:prstGeom>
-          <a:noFill/>
-        </p:spPr>
-        <p:txBody>
-          <a:bodyPr wrap="square">
-            <a:spAutoFit/>
-          </a:bodyPr>
-          <a:lstStyle/>
-          <a:p>
-            <a:pPr algn="l"/>
-            <a:r>
-              <a:rPr sz="900" b="0" i="0">
+            <a:off x="292608" y="5573649"/>
+            <a:ext cx="4562856" cy="431863"/>
+          </a:xfrm>
+          <a:prstGeom prst="rect">
+            <a:avLst/>
+          </a:prstGeom>
+          <a:noFill/>
+        </p:spPr>
+        <p:txBody>
+          <a:bodyPr wrap="square">
+            <a:spAutoFit/>
+          </a:bodyPr>
+          <a:lstStyle/>
+          <a:p>
+            <a:pPr algn="l"/>
+            <a:r>
+              <a:rPr sz="800" b="0" i="0">
                 <a:solidFill>
                   <a:srgbClr val="595959"/>
                 </a:solidFill>
                 <a:latin typeface="Helvetica Neue"/>
               </a:rPr>
-              <a:t>Articulate and sustain a clear multi-year technology vision for Retail &amp; Wholesale that connects team work to Arc'teryx's broader strategic direction.</a:t>
+              <a:t>100% of 16 planned store deployments activated on time across North America (11) and Europe (5).</a:t>
             </a:r>
           </a:p>
         </p:txBody>
@@ -11442,8 +9384,8 @@
         </p:nvSpPr>
         <p:spPr>
           <a:xfrm>
-            <a:off x="4956048" y="6009132"/>
-            <a:ext cx="2221992" cy="739140"/>
+            <a:off x="4956048" y="5372481"/>
+            <a:ext cx="2221992" cy="633031"/>
           </a:xfrm>
           <a:prstGeom prst="rect">
             <a:avLst/>
@@ -11485,7 +9427,7 @@
         </p:nvSpPr>
         <p:spPr>
           <a:xfrm>
-            <a:off x="5029200" y="6045708"/>
+            <a:off x="5029200" y="5409057"/>
             <a:ext cx="2221992" cy="137160"/>
           </a:xfrm>
           <a:prstGeom prst="rect">
@@ -11520,29 +9462,29 @@
         </p:nvSpPr>
         <p:spPr>
           <a:xfrm>
-            <a:off x="5029200" y="6210300"/>
-            <a:ext cx="2148840" cy="510540"/>
-          </a:xfrm>
-          <a:prstGeom prst="rect">
-            <a:avLst/>
-          </a:prstGeom>
-          <a:noFill/>
-        </p:spPr>
-        <p:txBody>
-          <a:bodyPr wrap="square">
-            <a:spAutoFit/>
-          </a:bodyPr>
-          <a:lstStyle/>
-          <a:p>
-            <a:pPr algn="l"/>
-            <a:r>
-              <a:rPr sz="900" b="0" i="0">
+            <a:off x="5029200" y="5573649"/>
+            <a:ext cx="2148840" cy="404431"/>
+          </a:xfrm>
+          <a:prstGeom prst="rect">
+            <a:avLst/>
+          </a:prstGeom>
+          <a:noFill/>
+        </p:spPr>
+        <p:txBody>
+          <a:bodyPr wrap="square">
+            <a:spAutoFit/>
+          </a:bodyPr>
+          <a:lstStyle/>
+          <a:p>
+            <a:pPr algn="l"/>
+            <a:r>
+              <a:rPr sz="800" b="0" i="0">
                 <a:solidFill>
                   <a:srgbClr val="000000"/>
                 </a:solidFill>
                 <a:latin typeface="Helvetica Neue"/>
               </a:rPr>
-              <a:t>A documented Retail &amp; Wholesale Technology vision and 2026 strategy communicated to the team and referenced in planning.</a:t>
+              <a:t>100% of planned location deployments activated on time.</a:t>
             </a:r>
           </a:p>
         </p:txBody>
@@ -11555,8 +9497,8 @@
         </p:nvSpPr>
         <p:spPr>
           <a:xfrm>
-            <a:off x="7287768" y="6009132"/>
-            <a:ext cx="2221992" cy="739140"/>
+            <a:off x="7287768" y="5372481"/>
+            <a:ext cx="2221992" cy="633031"/>
           </a:xfrm>
           <a:prstGeom prst="rect">
             <a:avLst/>
@@ -11598,7 +9540,7 @@
         </p:nvSpPr>
         <p:spPr>
           <a:xfrm>
-            <a:off x="7360920" y="6045708"/>
+            <a:off x="7360920" y="5409057"/>
             <a:ext cx="2221992" cy="137160"/>
           </a:xfrm>
           <a:prstGeom prst="rect">
@@ -11633,29 +9575,29 @@
         </p:nvSpPr>
         <p:spPr>
           <a:xfrm>
-            <a:off x="7360920" y="6210300"/>
-            <a:ext cx="2148840" cy="510540"/>
-          </a:xfrm>
-          <a:prstGeom prst="rect">
-            <a:avLst/>
-          </a:prstGeom>
-          <a:noFill/>
-        </p:spPr>
-        <p:txBody>
-          <a:bodyPr wrap="square">
-            <a:spAutoFit/>
-          </a:bodyPr>
-          <a:lstStyle/>
-          <a:p>
-            <a:pPr algn="l"/>
-            <a:r>
-              <a:rPr sz="900" b="0" i="0">
+            <a:off x="7360920" y="5573649"/>
+            <a:ext cx="2148840" cy="404431"/>
+          </a:xfrm>
+          <a:prstGeom prst="rect">
+            <a:avLst/>
+          </a:prstGeom>
+          <a:noFill/>
+        </p:spPr>
+        <p:txBody>
+          <a:bodyPr wrap="square">
+            <a:spAutoFit/>
+          </a:bodyPr>
+          <a:lstStyle/>
+          <a:p>
+            <a:pPr algn="l"/>
+            <a:r>
+              <a:rPr sz="800" b="0" i="0">
                 <a:solidFill>
                   <a:srgbClr val="000000"/>
                 </a:solidFill>
                 <a:latin typeface="Helvetica Neue"/>
               </a:rPr>
-              <a:t>Solid + vision actively used to prioritise and deprioritise work; team can articulate how their work connects to the broader strategy.</a:t>
+              <a:t>Solid + all deployments completed with zero critical post-go-live incidents within the first 30 days.</a:t>
             </a:r>
           </a:p>
         </p:txBody>
@@ -11668,8 +9610,8 @@
         </p:nvSpPr>
         <p:spPr>
           <a:xfrm>
-            <a:off x="9619488" y="6009132"/>
-            <a:ext cx="2221992" cy="739140"/>
+            <a:off x="9619488" y="5372481"/>
+            <a:ext cx="2221992" cy="633031"/>
           </a:xfrm>
           <a:prstGeom prst="rect">
             <a:avLst/>
@@ -11711,7 +9653,7 @@
         </p:nvSpPr>
         <p:spPr>
           <a:xfrm>
-            <a:off x="9692640" y="6045708"/>
+            <a:off x="9692640" y="5409057"/>
             <a:ext cx="2221992" cy="137160"/>
           </a:xfrm>
           <a:prstGeom prst="rect">
@@ -11746,29 +9688,29 @@
         </p:nvSpPr>
         <p:spPr>
           <a:xfrm>
-            <a:off x="9692640" y="6210300"/>
-            <a:ext cx="2148840" cy="510540"/>
-          </a:xfrm>
-          <a:prstGeom prst="rect">
-            <a:avLst/>
-          </a:prstGeom>
-          <a:noFill/>
-        </p:spPr>
-        <p:txBody>
-          <a:bodyPr wrap="square">
-            <a:spAutoFit/>
-          </a:bodyPr>
-          <a:lstStyle/>
-          <a:p>
-            <a:pPr algn="l"/>
-            <a:r>
-              <a:rPr sz="900" b="0" i="0">
+            <a:off x="9692640" y="5573649"/>
+            <a:ext cx="2148840" cy="404431"/>
+          </a:xfrm>
+          <a:prstGeom prst="rect">
+            <a:avLst/>
+          </a:prstGeom>
+          <a:noFill/>
+        </p:spPr>
+        <p:txBody>
+          <a:bodyPr wrap="square">
+            <a:spAutoFit/>
+          </a:bodyPr>
+          <a:lstStyle/>
+          <a:p>
+            <a:pPr algn="l"/>
+            <a:r>
+              <a:rPr sz="800" b="0" i="0">
                 <a:solidFill>
                   <a:srgbClr val="000000"/>
                 </a:solidFill>
                 <a:latin typeface="Helvetica Neue"/>
               </a:rPr>
-              <a:t>Impressive + vision recognised and cited by senior leadership as a benchmark for strategic clarity within the technology organisation.</a:t>
+              <a:t>Impressive + deployment playbook refined and reused, reducing average deployment cycle time by ≥20% vs. baseline.</a:t>
             </a:r>
           </a:p>
         </p:txBody>
@@ -11776,6 +9718,501 @@
       <p:sp>
         <p:nvSpPr>
           <p:cNvPr id="101" name="Rectangle 100"/>
+          <p:cNvSpPr/>
+          <p:nvPr/>
+        </p:nvSpPr>
+        <p:spPr>
+          <a:xfrm>
+            <a:off x="0" y="6054026"/>
+            <a:ext cx="12188952" cy="6350"/>
+          </a:xfrm>
+          <a:prstGeom prst="rect">
+            <a:avLst/>
+          </a:prstGeom>
+          <a:solidFill>
+            <a:srgbClr val="CCCCCC"/>
+          </a:solidFill>
+          <a:ln>
+            <a:noFill/>
+          </a:ln>
+        </p:spPr>
+        <p:style>
+          <a:lnRef idx="1">
+            <a:schemeClr val="accent1"/>
+          </a:lnRef>
+          <a:fillRef idx="3">
+            <a:schemeClr val="accent1"/>
+          </a:fillRef>
+          <a:effectRef idx="2">
+            <a:schemeClr val="accent1"/>
+          </a:effectRef>
+          <a:fontRef idx="minor">
+            <a:schemeClr val="lt1"/>
+          </a:fontRef>
+        </p:style>
+        <p:txBody>
+          <a:bodyPr rtlCol="0" anchor="ctr"/>
+          <a:lstStyle/>
+          <a:p>
+            <a:pPr algn="ctr"/>
+          </a:p>
+        </p:txBody>
+      </p:sp>
+      <p:sp>
+        <p:nvSpPr>
+          <p:cNvPr id="102" name="Rectangle 101"/>
+          <p:cNvSpPr/>
+          <p:nvPr/>
+        </p:nvSpPr>
+        <p:spPr>
+          <a:xfrm>
+            <a:off x="0" y="6060376"/>
+            <a:ext cx="12188952" cy="742759"/>
+          </a:xfrm>
+          <a:prstGeom prst="rect">
+            <a:avLst/>
+          </a:prstGeom>
+          <a:solidFill>
+            <a:srgbClr val="F9F9F6"/>
+          </a:solidFill>
+          <a:ln>
+            <a:noFill/>
+          </a:ln>
+        </p:spPr>
+        <p:style>
+          <a:lnRef idx="1">
+            <a:schemeClr val="accent1"/>
+          </a:lnRef>
+          <a:fillRef idx="3">
+            <a:schemeClr val="accent1"/>
+          </a:fillRef>
+          <a:effectRef idx="2">
+            <a:schemeClr val="accent1"/>
+          </a:effectRef>
+          <a:fontRef idx="minor">
+            <a:schemeClr val="lt1"/>
+          </a:fontRef>
+        </p:style>
+        <p:txBody>
+          <a:bodyPr rtlCol="0" anchor="ctr"/>
+          <a:lstStyle/>
+          <a:p>
+            <a:pPr algn="ctr"/>
+          </a:p>
+        </p:txBody>
+      </p:sp>
+      <p:sp>
+        <p:nvSpPr>
+          <p:cNvPr id="103" name="TextBox 102"/>
+          <p:cNvSpPr txBox="1"/>
+          <p:nvPr/>
+        </p:nvSpPr>
+        <p:spPr>
+          <a:xfrm>
+            <a:off x="292608" y="6115240"/>
+            <a:ext cx="4562856" cy="164592"/>
+          </a:xfrm>
+          <a:prstGeom prst="rect">
+            <a:avLst/>
+          </a:prstGeom>
+          <a:noFill/>
+        </p:spPr>
+        <p:txBody>
+          <a:bodyPr wrap="square">
+            <a:spAutoFit/>
+          </a:bodyPr>
+          <a:lstStyle/>
+          <a:p>
+            <a:pPr algn="l"/>
+            <a:r>
+              <a:rPr sz="800" b="1" i="0">
+                <a:solidFill>
+                  <a:srgbClr val="000000"/>
+                </a:solidFill>
+                <a:latin typeface="Helvetica Neue"/>
+              </a:rPr>
+              <a:t>Product Dashboard</a:t>
+            </a:r>
+          </a:p>
+        </p:txBody>
+      </p:sp>
+      <p:sp>
+        <p:nvSpPr>
+          <p:cNvPr id="104" name="TextBox 103"/>
+          <p:cNvSpPr txBox="1"/>
+          <p:nvPr/>
+        </p:nvSpPr>
+        <p:spPr>
+          <a:xfrm>
+            <a:off x="292608" y="6316408"/>
+            <a:ext cx="4562856" cy="431863"/>
+          </a:xfrm>
+          <a:prstGeom prst="rect">
+            <a:avLst/>
+          </a:prstGeom>
+          <a:noFill/>
+        </p:spPr>
+        <p:txBody>
+          <a:bodyPr wrap="square">
+            <a:spAutoFit/>
+          </a:bodyPr>
+          <a:lstStyle/>
+          <a:p>
+            <a:pPr algn="l"/>
+            <a:r>
+              <a:rPr sz="800" b="0" i="0">
+                <a:solidFill>
+                  <a:srgbClr val="595959"/>
+                </a:solidFill>
+                <a:latin typeface="Helvetica Neue"/>
+              </a:rPr>
+              <a:t>Build and embed a product dashboard that gives the Retail &amp; Wholesale Technology team visibility into capability performance, enabling data-driven prioritisation and investment decisions.</a:t>
+            </a:r>
+          </a:p>
+        </p:txBody>
+      </p:sp>
+      <p:sp>
+        <p:nvSpPr>
+          <p:cNvPr id="105" name="Rectangle 104"/>
+          <p:cNvSpPr/>
+          <p:nvPr/>
+        </p:nvSpPr>
+        <p:spPr>
+          <a:xfrm>
+            <a:off x="4956048" y="6115240"/>
+            <a:ext cx="2221992" cy="633031"/>
+          </a:xfrm>
+          <a:prstGeom prst="rect">
+            <a:avLst/>
+          </a:prstGeom>
+          <a:solidFill>
+            <a:srgbClr val="F9F9F6"/>
+          </a:solidFill>
+          <a:ln>
+            <a:noFill/>
+          </a:ln>
+        </p:spPr>
+        <p:style>
+          <a:lnRef idx="1">
+            <a:schemeClr val="accent1"/>
+          </a:lnRef>
+          <a:fillRef idx="3">
+            <a:schemeClr val="accent1"/>
+          </a:fillRef>
+          <a:effectRef idx="2">
+            <a:schemeClr val="accent1"/>
+          </a:effectRef>
+          <a:fontRef idx="minor">
+            <a:schemeClr val="lt1"/>
+          </a:fontRef>
+        </p:style>
+        <p:txBody>
+          <a:bodyPr rtlCol="0" anchor="ctr"/>
+          <a:lstStyle/>
+          <a:p>
+            <a:pPr algn="ctr"/>
+          </a:p>
+        </p:txBody>
+      </p:sp>
+      <p:sp>
+        <p:nvSpPr>
+          <p:cNvPr id="106" name="TextBox 105"/>
+          <p:cNvSpPr txBox="1"/>
+          <p:nvPr/>
+        </p:nvSpPr>
+        <p:spPr>
+          <a:xfrm>
+            <a:off x="5029200" y="6151816"/>
+            <a:ext cx="2221992" cy="137160"/>
+          </a:xfrm>
+          <a:prstGeom prst="rect">
+            <a:avLst/>
+          </a:prstGeom>
+          <a:noFill/>
+        </p:spPr>
+        <p:txBody>
+          <a:bodyPr wrap="square">
+            <a:spAutoFit/>
+          </a:bodyPr>
+          <a:lstStyle/>
+          <a:p>
+            <a:pPr algn="l"/>
+            <a:r>
+              <a:rPr sz="700" b="1" i="0">
+                <a:solidFill>
+                  <a:srgbClr val="595959"/>
+                </a:solidFill>
+                <a:latin typeface="Helvetica Neue"/>
+              </a:rPr>
+              <a:t>SOLID</a:t>
+            </a:r>
+          </a:p>
+        </p:txBody>
+      </p:sp>
+      <p:sp>
+        <p:nvSpPr>
+          <p:cNvPr id="107" name="TextBox 106"/>
+          <p:cNvSpPr txBox="1"/>
+          <p:nvPr/>
+        </p:nvSpPr>
+        <p:spPr>
+          <a:xfrm>
+            <a:off x="5029200" y="6316408"/>
+            <a:ext cx="2148840" cy="404431"/>
+          </a:xfrm>
+          <a:prstGeom prst="rect">
+            <a:avLst/>
+          </a:prstGeom>
+          <a:noFill/>
+        </p:spPr>
+        <p:txBody>
+          <a:bodyPr wrap="square">
+            <a:spAutoFit/>
+          </a:bodyPr>
+          <a:lstStyle/>
+          <a:p>
+            <a:pPr algn="l"/>
+            <a:r>
+              <a:rPr sz="800" b="0" i="0">
+                <a:solidFill>
+                  <a:srgbClr val="000000"/>
+                </a:solidFill>
+                <a:latin typeface="Helvetica Neue"/>
+              </a:rPr>
+              <a:t>Product dashboard live with core metrics defined and accessible to the team by Q2 2026.</a:t>
+            </a:r>
+          </a:p>
+        </p:txBody>
+      </p:sp>
+      <p:sp>
+        <p:nvSpPr>
+          <p:cNvPr id="108" name="Rectangle 107"/>
+          <p:cNvSpPr/>
+          <p:nvPr/>
+        </p:nvSpPr>
+        <p:spPr>
+          <a:xfrm>
+            <a:off x="7287768" y="6115240"/>
+            <a:ext cx="2221992" cy="633031"/>
+          </a:xfrm>
+          <a:prstGeom prst="rect">
+            <a:avLst/>
+          </a:prstGeom>
+          <a:solidFill>
+            <a:srgbClr val="EBEBEB"/>
+          </a:solidFill>
+          <a:ln>
+            <a:noFill/>
+          </a:ln>
+        </p:spPr>
+        <p:style>
+          <a:lnRef idx="1">
+            <a:schemeClr val="accent1"/>
+          </a:lnRef>
+          <a:fillRef idx="3">
+            <a:schemeClr val="accent1"/>
+          </a:fillRef>
+          <a:effectRef idx="2">
+            <a:schemeClr val="accent1"/>
+          </a:effectRef>
+          <a:fontRef idx="minor">
+            <a:schemeClr val="lt1"/>
+          </a:fontRef>
+        </p:style>
+        <p:txBody>
+          <a:bodyPr rtlCol="0" anchor="ctr"/>
+          <a:lstStyle/>
+          <a:p>
+            <a:pPr algn="ctr"/>
+          </a:p>
+        </p:txBody>
+      </p:sp>
+      <p:sp>
+        <p:nvSpPr>
+          <p:cNvPr id="109" name="TextBox 108"/>
+          <p:cNvSpPr txBox="1"/>
+          <p:nvPr/>
+        </p:nvSpPr>
+        <p:spPr>
+          <a:xfrm>
+            <a:off x="7360920" y="6151816"/>
+            <a:ext cx="2221992" cy="137160"/>
+          </a:xfrm>
+          <a:prstGeom prst="rect">
+            <a:avLst/>
+          </a:prstGeom>
+          <a:noFill/>
+        </p:spPr>
+        <p:txBody>
+          <a:bodyPr wrap="square">
+            <a:spAutoFit/>
+          </a:bodyPr>
+          <a:lstStyle/>
+          <a:p>
+            <a:pPr algn="l"/>
+            <a:r>
+              <a:rPr sz="700" b="1" i="0">
+                <a:solidFill>
+                  <a:srgbClr val="595959"/>
+                </a:solidFill>
+                <a:latin typeface="Helvetica Neue"/>
+              </a:rPr>
+              <a:t>IMPRESSIVE</a:t>
+            </a:r>
+          </a:p>
+        </p:txBody>
+      </p:sp>
+      <p:sp>
+        <p:nvSpPr>
+          <p:cNvPr id="110" name="TextBox 109"/>
+          <p:cNvSpPr txBox="1"/>
+          <p:nvPr/>
+        </p:nvSpPr>
+        <p:spPr>
+          <a:xfrm>
+            <a:off x="7360920" y="6316408"/>
+            <a:ext cx="2148840" cy="404431"/>
+          </a:xfrm>
+          <a:prstGeom prst="rect">
+            <a:avLst/>
+          </a:prstGeom>
+          <a:noFill/>
+        </p:spPr>
+        <p:txBody>
+          <a:bodyPr wrap="square">
+            <a:spAutoFit/>
+          </a:bodyPr>
+          <a:lstStyle/>
+          <a:p>
+            <a:pPr algn="l"/>
+            <a:r>
+              <a:rPr sz="800" b="0" i="0">
+                <a:solidFill>
+                  <a:srgbClr val="000000"/>
+                </a:solidFill>
+                <a:latin typeface="Helvetica Neue"/>
+              </a:rPr>
+              <a:t>Solid + dashboard actively referenced in quarterly business reviews with at least one documented decision influenced by the data.</a:t>
+            </a:r>
+          </a:p>
+        </p:txBody>
+      </p:sp>
+      <p:sp>
+        <p:nvSpPr>
+          <p:cNvPr id="111" name="Rectangle 110"/>
+          <p:cNvSpPr/>
+          <p:nvPr/>
+        </p:nvSpPr>
+        <p:spPr>
+          <a:xfrm>
+            <a:off x="9619488" y="6115240"/>
+            <a:ext cx="2221992" cy="633031"/>
+          </a:xfrm>
+          <a:prstGeom prst="rect">
+            <a:avLst/>
+          </a:prstGeom>
+          <a:solidFill>
+            <a:srgbClr val="EEF2EB"/>
+          </a:solidFill>
+          <a:ln>
+            <a:noFill/>
+          </a:ln>
+        </p:spPr>
+        <p:style>
+          <a:lnRef idx="1">
+            <a:schemeClr val="accent1"/>
+          </a:lnRef>
+          <a:fillRef idx="3">
+            <a:schemeClr val="accent1"/>
+          </a:fillRef>
+          <a:effectRef idx="2">
+            <a:schemeClr val="accent1"/>
+          </a:effectRef>
+          <a:fontRef idx="minor">
+            <a:schemeClr val="lt1"/>
+          </a:fontRef>
+        </p:style>
+        <p:txBody>
+          <a:bodyPr rtlCol="0" anchor="ctr"/>
+          <a:lstStyle/>
+          <a:p>
+            <a:pPr algn="ctr"/>
+          </a:p>
+        </p:txBody>
+      </p:sp>
+      <p:sp>
+        <p:nvSpPr>
+          <p:cNvPr id="112" name="TextBox 111"/>
+          <p:cNvSpPr txBox="1"/>
+          <p:nvPr/>
+        </p:nvSpPr>
+        <p:spPr>
+          <a:xfrm>
+            <a:off x="9692640" y="6151816"/>
+            <a:ext cx="2221992" cy="137160"/>
+          </a:xfrm>
+          <a:prstGeom prst="rect">
+            <a:avLst/>
+          </a:prstGeom>
+          <a:noFill/>
+        </p:spPr>
+        <p:txBody>
+          <a:bodyPr wrap="square">
+            <a:spAutoFit/>
+          </a:bodyPr>
+          <a:lstStyle/>
+          <a:p>
+            <a:pPr algn="l"/>
+            <a:r>
+              <a:rPr sz="700" b="1" i="0">
+                <a:solidFill>
+                  <a:srgbClr val="5E6B52"/>
+                </a:solidFill>
+                <a:latin typeface="Helvetica Neue"/>
+              </a:rPr>
+              <a:t>EXCELLENT</a:t>
+            </a:r>
+          </a:p>
+        </p:txBody>
+      </p:sp>
+      <p:sp>
+        <p:nvSpPr>
+          <p:cNvPr id="113" name="TextBox 112"/>
+          <p:cNvSpPr txBox="1"/>
+          <p:nvPr/>
+        </p:nvSpPr>
+        <p:spPr>
+          <a:xfrm>
+            <a:off x="9692640" y="6316408"/>
+            <a:ext cx="2148840" cy="404431"/>
+          </a:xfrm>
+          <a:prstGeom prst="rect">
+            <a:avLst/>
+          </a:prstGeom>
+          <a:noFill/>
+        </p:spPr>
+        <p:txBody>
+          <a:bodyPr wrap="square">
+            <a:spAutoFit/>
+          </a:bodyPr>
+          <a:lstStyle/>
+          <a:p>
+            <a:pPr algn="l"/>
+            <a:r>
+              <a:rPr sz="800" b="0" i="0">
+                <a:solidFill>
+                  <a:srgbClr val="000000"/>
+                </a:solidFill>
+                <a:latin typeface="Helvetica Neue"/>
+              </a:rPr>
+              <a:t>Impressive + dashboard expanded to include predictive or trending metrics, and adopted as the primary tool for roadmap prioritisation discussions.</a:t>
+            </a:r>
+          </a:p>
+        </p:txBody>
+      </p:sp>
+      <p:sp>
+        <p:nvSpPr>
+          <p:cNvPr id="114" name="Rectangle 113"/>
           <p:cNvSpPr/>
           <p:nvPr/>
         </p:nvSpPr>
@@ -12106,7 +10543,7 @@
                 </a:solidFill>
                 <a:latin typeface="Helvetica Neue"/>
               </a:rPr>
-              <a:t>LIVEIT</a:t>
+              <a:t>ALC — ARC'TERYX LEADERSHIP CODE</a:t>
             </a:r>
           </a:p>
         </p:txBody>
@@ -12120,7 +10557,7 @@
         <p:spPr>
           <a:xfrm>
             <a:off x="0" y="568452"/>
-            <a:ext cx="12188952" cy="1463040"/>
+            <a:ext cx="12188952" cy="1188415"/>
           </a:xfrm>
           <a:prstGeom prst="rect">
             <a:avLst/>
@@ -12184,7 +10621,7 @@
                 </a:solidFill>
                 <a:latin typeface="Helvetica Neue"/>
               </a:rPr>
-              <a:t>Simon learns to swim</a:t>
+              <a:t>Innovation</a:t>
             </a:r>
           </a:p>
         </p:txBody>
@@ -12198,7 +10635,7 @@
         <p:spPr>
           <a:xfrm>
             <a:off x="292608" y="824484"/>
-            <a:ext cx="4562856" cy="1152144"/>
+            <a:ext cx="4562856" cy="877519"/>
           </a:xfrm>
           <a:prstGeom prst="rect">
             <a:avLst/>
@@ -12219,7 +10656,7 @@
                 </a:solidFill>
                 <a:latin typeface="Helvetica Neue"/>
               </a:rPr>
-              <a:t>Complete a structured swim program and build enough technique and endurance to swim continuously and confidently.</a:t>
+              <a:t>Foster a culture of innovation within Retail &amp; Wholesale Technology by creating space for new ideas, experimentation, and calculated risk-taking.</a:t>
             </a:r>
           </a:p>
         </p:txBody>
@@ -12233,7 +10670,7 @@
         <p:spPr>
           <a:xfrm>
             <a:off x="4956048" y="623316"/>
-            <a:ext cx="2221992" cy="1353312"/>
+            <a:ext cx="2221992" cy="1078687"/>
           </a:xfrm>
           <a:prstGeom prst="rect">
             <a:avLst/>
@@ -12311,7 +10748,7 @@
         <p:spPr>
           <a:xfrm>
             <a:off x="5029200" y="824484"/>
-            <a:ext cx="2148840" cy="1124712"/>
+            <a:ext cx="2148840" cy="850087"/>
           </a:xfrm>
           <a:prstGeom prst="rect">
             <a:avLst/>
@@ -12332,7 +10769,7 @@
                 </a:solidFill>
                 <a:latin typeface="Helvetica Neue"/>
               </a:rPr>
-              <a:t>Completes a structured beginner swim program and can swim 25m unassisted.</a:t>
+              <a:t>At least one structured innovation initiative (e.g. hackathon, spike, or experimentation sprint) run within the year, with outcomes shared across the team.</a:t>
             </a:r>
           </a:p>
         </p:txBody>
@@ -12346,7 +10783,7 @@
         <p:spPr>
           <a:xfrm>
             <a:off x="7287768" y="623316"/>
-            <a:ext cx="2221992" cy="1353312"/>
+            <a:ext cx="2221992" cy="1078687"/>
           </a:xfrm>
           <a:prstGeom prst="rect">
             <a:avLst/>
@@ -12424,7 +10861,7 @@
         <p:spPr>
           <a:xfrm>
             <a:off x="7360920" y="824484"/>
-            <a:ext cx="2148840" cy="1124712"/>
+            <a:ext cx="2148840" cy="850087"/>
           </a:xfrm>
           <a:prstGeom prst="rect">
             <a:avLst/>
@@ -12445,7 +10882,7 @@
                 </a:solidFill>
                 <a:latin typeface="Helvetica Neue"/>
               </a:rPr>
-              <a:t>Swims 50m continuously with controlled breathing and consistent technique.</a:t>
+              <a:t>Solid + at least one idea originating from the team moves into the roadmap or is adopted as a practice change.</a:t>
             </a:r>
           </a:p>
         </p:txBody>
@@ -12459,7 +10896,7 @@
         <p:spPr>
           <a:xfrm>
             <a:off x="9619488" y="623316"/>
-            <a:ext cx="2221992" cy="1353312"/>
+            <a:ext cx="2221992" cy="1078687"/>
           </a:xfrm>
           <a:prstGeom prst="rect">
             <a:avLst/>
@@ -12537,7 +10974,7 @@
         <p:spPr>
           <a:xfrm>
             <a:off x="9692640" y="824484"/>
-            <a:ext cx="2148840" cy="1124712"/>
+            <a:ext cx="2148840" cy="850087"/>
           </a:xfrm>
           <a:prstGeom prst="rect">
             <a:avLst/>
@@ -12558,7 +10995,7 @@
                 </a:solidFill>
                 <a:latin typeface="Helvetica Neue"/>
               </a:rPr>
-              <a:t>Completes a 200m continuous swim — enough to never be the liability on a group water activity.</a:t>
+              <a:t>Impressive + innovation contributions recognised at a leadership level; team members proactively bring forward ideas without prompting.</a:t>
             </a:r>
           </a:p>
         </p:txBody>
@@ -12571,7 +11008,7 @@
         </p:nvSpPr>
         <p:spPr>
           <a:xfrm>
-            <a:off x="0" y="2025142"/>
+            <a:off x="0" y="1750517"/>
             <a:ext cx="12188952" cy="6350"/>
           </a:xfrm>
           <a:prstGeom prst="rect">
@@ -12614,8 +11051,8 @@
         </p:nvSpPr>
         <p:spPr>
           <a:xfrm>
-            <a:off x="0" y="2031492"/>
-            <a:ext cx="12188952" cy="1463040"/>
+            <a:off x="0" y="1756867"/>
+            <a:ext cx="12188952" cy="1188415"/>
           </a:xfrm>
           <a:prstGeom prst="rect">
             <a:avLst/>
@@ -12657,7 +11094,7 @@
         </p:nvSpPr>
         <p:spPr>
           <a:xfrm>
-            <a:off x="292608" y="2086356"/>
+            <a:off x="292608" y="1811731"/>
             <a:ext cx="4562856" cy="164592"/>
           </a:xfrm>
           <a:prstGeom prst="rect">
@@ -12679,7 +11116,7 @@
                 </a:solidFill>
                 <a:latin typeface="Helvetica Neue"/>
               </a:rPr>
-              <a:t>Claire leads me on a mountain biking event and I lose nothing important to my body</a:t>
+              <a:t>Communication</a:t>
             </a:r>
           </a:p>
         </p:txBody>
@@ -12692,8 +11129,8 @@
         </p:nvSpPr>
         <p:spPr>
           <a:xfrm>
-            <a:off x="292608" y="2287524"/>
-            <a:ext cx="4562856" cy="1152144"/>
+            <a:off x="292608" y="2012899"/>
+            <a:ext cx="4562856" cy="877519"/>
           </a:xfrm>
           <a:prstGeom prst="rect">
             <a:avLst/>
@@ -12714,7 +11151,7 @@
                 </a:solidFill>
                 <a:latin typeface="Helvetica Neue"/>
               </a:rPr>
-              <a:t>Participate in a mountain biking event led by Claire and emerge intact, dignified, and possibly enthusiastic.</a:t>
+              <a:t>Maintain clear, consistent, and transparent communication across the team and with senior stakeholders — ensuring alignment on priorities, progress, and decisions.</a:t>
             </a:r>
           </a:p>
         </p:txBody>
@@ -12727,8 +11164,8 @@
         </p:nvSpPr>
         <p:spPr>
           <a:xfrm>
-            <a:off x="4956048" y="2086356"/>
-            <a:ext cx="2221992" cy="1353312"/>
+            <a:off x="4956048" y="1811731"/>
+            <a:ext cx="2221992" cy="1078687"/>
           </a:xfrm>
           <a:prstGeom prst="rect">
             <a:avLst/>
@@ -12770,7 +11207,7 @@
         </p:nvSpPr>
         <p:spPr>
           <a:xfrm>
-            <a:off x="5029200" y="2122932"/>
+            <a:off x="5029200" y="1848307"/>
             <a:ext cx="2221992" cy="137160"/>
           </a:xfrm>
           <a:prstGeom prst="rect">
@@ -12805,8 +11242,8 @@
         </p:nvSpPr>
         <p:spPr>
           <a:xfrm>
-            <a:off x="5029200" y="2287524"/>
-            <a:ext cx="2148840" cy="1124712"/>
+            <a:off x="5029200" y="2012899"/>
+            <a:ext cx="2148840" cy="850087"/>
           </a:xfrm>
           <a:prstGeom prst="rect">
             <a:avLst/>
@@ -12827,7 +11264,7 @@
                 </a:solidFill>
                 <a:latin typeface="Helvetica Neue"/>
               </a:rPr>
-              <a:t>Completes the ride. All limbs accounted for.</a:t>
+              <a:t>Regular cadence of team and stakeholder communications maintained (e.g. team updates, leadership reporting) with no significant alignment gaps.</a:t>
             </a:r>
           </a:p>
         </p:txBody>
@@ -12840,8 +11277,8 @@
         </p:nvSpPr>
         <p:spPr>
           <a:xfrm>
-            <a:off x="7287768" y="2086356"/>
-            <a:ext cx="2221992" cy="1353312"/>
+            <a:off x="7287768" y="1811731"/>
+            <a:ext cx="2221992" cy="1078687"/>
           </a:xfrm>
           <a:prstGeom prst="rect">
             <a:avLst/>
@@ -12883,7 +11320,7 @@
         </p:nvSpPr>
         <p:spPr>
           <a:xfrm>
-            <a:off x="7360920" y="2122932"/>
+            <a:off x="7360920" y="1848307"/>
             <a:ext cx="2221992" cy="137160"/>
           </a:xfrm>
           <a:prstGeom prst="rect">
@@ -12918,8 +11355,8 @@
         </p:nvSpPr>
         <p:spPr>
           <a:xfrm>
-            <a:off x="7360920" y="2287524"/>
-            <a:ext cx="2148840" cy="1124712"/>
+            <a:off x="7360920" y="2012899"/>
+            <a:ext cx="2148840" cy="850087"/>
           </a:xfrm>
           <a:prstGeom prst="rect">
             <a:avLst/>
@@ -12940,7 +11377,7 @@
                 </a:solidFill>
                 <a:latin typeface="Helvetica Neue"/>
               </a:rPr>
-              <a:t>Solid + keeps up with Claire for at least 50% of the trail without stopping to "appreciate the scenery."</a:t>
+              <a:t>Solid + feedback from team and stakeholders reflects high clarity and confidence in direction; no surprises at key milestones.</a:t>
             </a:r>
           </a:p>
         </p:txBody>
@@ -12953,8 +11390,8 @@
         </p:nvSpPr>
         <p:spPr>
           <a:xfrm>
-            <a:off x="9619488" y="2086356"/>
-            <a:ext cx="2221992" cy="1353312"/>
+            <a:off x="9619488" y="1811731"/>
+            <a:ext cx="2221992" cy="1078687"/>
           </a:xfrm>
           <a:prstGeom prst="rect">
             <a:avLst/>
@@ -12996,7 +11433,7 @@
         </p:nvSpPr>
         <p:spPr>
           <a:xfrm>
-            <a:off x="9692640" y="2122932"/>
+            <a:off x="9692640" y="1848307"/>
             <a:ext cx="2221992" cy="137160"/>
           </a:xfrm>
           <a:prstGeom prst="rect">
@@ -13031,8 +11468,8 @@
         </p:nvSpPr>
         <p:spPr>
           <a:xfrm>
-            <a:off x="9692640" y="2287524"/>
-            <a:ext cx="2148840" cy="1124712"/>
+            <a:off x="9692640" y="2012899"/>
+            <a:ext cx="2148840" cy="850087"/>
           </a:xfrm>
           <a:prstGeom prst="rect">
             <a:avLst/>
@@ -13053,7 +11490,7 @@
                 </a:solidFill>
                 <a:latin typeface="Helvetica Neue"/>
               </a:rPr>
-              <a:t>Impressive + finishes with enough dignity to suggest doing it again.</a:t>
+              <a:t>Impressive + communication style recognised as a model within the broader leadership group; proactively shapes narratives rather than responding to them.</a:t>
             </a:r>
           </a:p>
         </p:txBody>
@@ -13066,7 +11503,1570 @@
         </p:nvSpPr>
         <p:spPr>
           <a:xfrm>
-            <a:off x="0" y="3488182"/>
+            <a:off x="0" y="2938932"/>
+            <a:ext cx="12188952" cy="6350"/>
+          </a:xfrm>
+          <a:prstGeom prst="rect">
+            <a:avLst/>
+          </a:prstGeom>
+          <a:solidFill>
+            <a:srgbClr val="CCCCCC"/>
+          </a:solidFill>
+          <a:ln>
+            <a:noFill/>
+          </a:ln>
+        </p:spPr>
+        <p:style>
+          <a:lnRef idx="1">
+            <a:schemeClr val="accent1"/>
+          </a:lnRef>
+          <a:fillRef idx="3">
+            <a:schemeClr val="accent1"/>
+          </a:fillRef>
+          <a:effectRef idx="2">
+            <a:schemeClr val="accent1"/>
+          </a:effectRef>
+          <a:fontRef idx="minor">
+            <a:schemeClr val="lt1"/>
+          </a:fontRef>
+        </p:style>
+        <p:txBody>
+          <a:bodyPr rtlCol="0" anchor="ctr"/>
+          <a:lstStyle/>
+          <a:p>
+            <a:pPr algn="ctr"/>
+          </a:p>
+        </p:txBody>
+      </p:sp>
+      <p:sp>
+        <p:nvSpPr>
+          <p:cNvPr id="35" name="Rectangle 34"/>
+          <p:cNvSpPr/>
+          <p:nvPr/>
+        </p:nvSpPr>
+        <p:spPr>
+          <a:xfrm>
+            <a:off x="0" y="2945282"/>
+            <a:ext cx="12188952" cy="1188415"/>
+          </a:xfrm>
+          <a:prstGeom prst="rect">
+            <a:avLst/>
+          </a:prstGeom>
+          <a:solidFill>
+            <a:srgbClr val="FFFFFF"/>
+          </a:solidFill>
+          <a:ln>
+            <a:noFill/>
+          </a:ln>
+        </p:spPr>
+        <p:style>
+          <a:lnRef idx="1">
+            <a:schemeClr val="accent1"/>
+          </a:lnRef>
+          <a:fillRef idx="3">
+            <a:schemeClr val="accent1"/>
+          </a:fillRef>
+          <a:effectRef idx="2">
+            <a:schemeClr val="accent1"/>
+          </a:effectRef>
+          <a:fontRef idx="minor">
+            <a:schemeClr val="lt1"/>
+          </a:fontRef>
+        </p:style>
+        <p:txBody>
+          <a:bodyPr rtlCol="0" anchor="ctr"/>
+          <a:lstStyle/>
+          <a:p>
+            <a:pPr algn="ctr"/>
+          </a:p>
+        </p:txBody>
+      </p:sp>
+      <p:sp>
+        <p:nvSpPr>
+          <p:cNvPr id="36" name="TextBox 35"/>
+          <p:cNvSpPr txBox="1"/>
+          <p:nvPr/>
+        </p:nvSpPr>
+        <p:spPr>
+          <a:xfrm>
+            <a:off x="292608" y="3000146"/>
+            <a:ext cx="4562856" cy="164592"/>
+          </a:xfrm>
+          <a:prstGeom prst="rect">
+            <a:avLst/>
+          </a:prstGeom>
+          <a:noFill/>
+        </p:spPr>
+        <p:txBody>
+          <a:bodyPr wrap="square">
+            <a:spAutoFit/>
+          </a:bodyPr>
+          <a:lstStyle/>
+          <a:p>
+            <a:pPr algn="l"/>
+            <a:r>
+              <a:rPr sz="800" b="1" i="0">
+                <a:solidFill>
+                  <a:srgbClr val="000000"/>
+                </a:solidFill>
+                <a:latin typeface="Helvetica Neue"/>
+              </a:rPr>
+              <a:t>Vision &amp; Strategy</a:t>
+            </a:r>
+          </a:p>
+        </p:txBody>
+      </p:sp>
+      <p:sp>
+        <p:nvSpPr>
+          <p:cNvPr id="37" name="TextBox 36"/>
+          <p:cNvSpPr txBox="1"/>
+          <p:nvPr/>
+        </p:nvSpPr>
+        <p:spPr>
+          <a:xfrm>
+            <a:off x="292608" y="3201314"/>
+            <a:ext cx="4562856" cy="877519"/>
+          </a:xfrm>
+          <a:prstGeom prst="rect">
+            <a:avLst/>
+          </a:prstGeom>
+          <a:noFill/>
+        </p:spPr>
+        <p:txBody>
+          <a:bodyPr wrap="square">
+            <a:spAutoFit/>
+          </a:bodyPr>
+          <a:lstStyle/>
+          <a:p>
+            <a:pPr algn="l"/>
+            <a:r>
+              <a:rPr sz="1000" b="0" i="0">
+                <a:solidFill>
+                  <a:srgbClr val="595959"/>
+                </a:solidFill>
+                <a:latin typeface="Helvetica Neue"/>
+              </a:rPr>
+              <a:t>Articulate and sustain a clear multi-year technology vision for Retail &amp; Wholesale that connects team work to Arc'teryx's broader strategic direction.</a:t>
+            </a:r>
+          </a:p>
+        </p:txBody>
+      </p:sp>
+      <p:sp>
+        <p:nvSpPr>
+          <p:cNvPr id="38" name="Rectangle 37"/>
+          <p:cNvSpPr/>
+          <p:nvPr/>
+        </p:nvSpPr>
+        <p:spPr>
+          <a:xfrm>
+            <a:off x="4956048" y="3000146"/>
+            <a:ext cx="2221992" cy="1078687"/>
+          </a:xfrm>
+          <a:prstGeom prst="rect">
+            <a:avLst/>
+          </a:prstGeom>
+          <a:solidFill>
+            <a:srgbClr val="F9F9F6"/>
+          </a:solidFill>
+          <a:ln>
+            <a:noFill/>
+          </a:ln>
+        </p:spPr>
+        <p:style>
+          <a:lnRef idx="1">
+            <a:schemeClr val="accent1"/>
+          </a:lnRef>
+          <a:fillRef idx="3">
+            <a:schemeClr val="accent1"/>
+          </a:fillRef>
+          <a:effectRef idx="2">
+            <a:schemeClr val="accent1"/>
+          </a:effectRef>
+          <a:fontRef idx="minor">
+            <a:schemeClr val="lt1"/>
+          </a:fontRef>
+        </p:style>
+        <p:txBody>
+          <a:bodyPr rtlCol="0" anchor="ctr"/>
+          <a:lstStyle/>
+          <a:p>
+            <a:pPr algn="ctr"/>
+          </a:p>
+        </p:txBody>
+      </p:sp>
+      <p:sp>
+        <p:nvSpPr>
+          <p:cNvPr id="39" name="TextBox 38"/>
+          <p:cNvSpPr txBox="1"/>
+          <p:nvPr/>
+        </p:nvSpPr>
+        <p:spPr>
+          <a:xfrm>
+            <a:off x="5029200" y="3036722"/>
+            <a:ext cx="2221992" cy="137160"/>
+          </a:xfrm>
+          <a:prstGeom prst="rect">
+            <a:avLst/>
+          </a:prstGeom>
+          <a:noFill/>
+        </p:spPr>
+        <p:txBody>
+          <a:bodyPr wrap="square">
+            <a:spAutoFit/>
+          </a:bodyPr>
+          <a:lstStyle/>
+          <a:p>
+            <a:pPr algn="l"/>
+            <a:r>
+              <a:rPr sz="700" b="1" i="0">
+                <a:solidFill>
+                  <a:srgbClr val="595959"/>
+                </a:solidFill>
+                <a:latin typeface="Helvetica Neue"/>
+              </a:rPr>
+              <a:t>SOLID</a:t>
+            </a:r>
+          </a:p>
+        </p:txBody>
+      </p:sp>
+      <p:sp>
+        <p:nvSpPr>
+          <p:cNvPr id="40" name="TextBox 39"/>
+          <p:cNvSpPr txBox="1"/>
+          <p:nvPr/>
+        </p:nvSpPr>
+        <p:spPr>
+          <a:xfrm>
+            <a:off x="5029200" y="3201314"/>
+            <a:ext cx="2148840" cy="850087"/>
+          </a:xfrm>
+          <a:prstGeom prst="rect">
+            <a:avLst/>
+          </a:prstGeom>
+          <a:noFill/>
+        </p:spPr>
+        <p:txBody>
+          <a:bodyPr wrap="square">
+            <a:spAutoFit/>
+          </a:bodyPr>
+          <a:lstStyle/>
+          <a:p>
+            <a:pPr algn="l"/>
+            <a:r>
+              <a:rPr sz="1000" b="0" i="0">
+                <a:solidFill>
+                  <a:srgbClr val="000000"/>
+                </a:solidFill>
+                <a:latin typeface="Helvetica Neue"/>
+              </a:rPr>
+              <a:t>A documented Retail &amp; Wholesale Technology vision and 2026 strategy communicated to the team and referenced in planning.</a:t>
+            </a:r>
+          </a:p>
+        </p:txBody>
+      </p:sp>
+      <p:sp>
+        <p:nvSpPr>
+          <p:cNvPr id="41" name="Rectangle 40"/>
+          <p:cNvSpPr/>
+          <p:nvPr/>
+        </p:nvSpPr>
+        <p:spPr>
+          <a:xfrm>
+            <a:off x="7287768" y="3000146"/>
+            <a:ext cx="2221992" cy="1078687"/>
+          </a:xfrm>
+          <a:prstGeom prst="rect">
+            <a:avLst/>
+          </a:prstGeom>
+          <a:solidFill>
+            <a:srgbClr val="EBEBEB"/>
+          </a:solidFill>
+          <a:ln>
+            <a:noFill/>
+          </a:ln>
+        </p:spPr>
+        <p:style>
+          <a:lnRef idx="1">
+            <a:schemeClr val="accent1"/>
+          </a:lnRef>
+          <a:fillRef idx="3">
+            <a:schemeClr val="accent1"/>
+          </a:fillRef>
+          <a:effectRef idx="2">
+            <a:schemeClr val="accent1"/>
+          </a:effectRef>
+          <a:fontRef idx="minor">
+            <a:schemeClr val="lt1"/>
+          </a:fontRef>
+        </p:style>
+        <p:txBody>
+          <a:bodyPr rtlCol="0" anchor="ctr"/>
+          <a:lstStyle/>
+          <a:p>
+            <a:pPr algn="ctr"/>
+          </a:p>
+        </p:txBody>
+      </p:sp>
+      <p:sp>
+        <p:nvSpPr>
+          <p:cNvPr id="42" name="TextBox 41"/>
+          <p:cNvSpPr txBox="1"/>
+          <p:nvPr/>
+        </p:nvSpPr>
+        <p:spPr>
+          <a:xfrm>
+            <a:off x="7360920" y="3036722"/>
+            <a:ext cx="2221992" cy="137160"/>
+          </a:xfrm>
+          <a:prstGeom prst="rect">
+            <a:avLst/>
+          </a:prstGeom>
+          <a:noFill/>
+        </p:spPr>
+        <p:txBody>
+          <a:bodyPr wrap="square">
+            <a:spAutoFit/>
+          </a:bodyPr>
+          <a:lstStyle/>
+          <a:p>
+            <a:pPr algn="l"/>
+            <a:r>
+              <a:rPr sz="700" b="1" i="0">
+                <a:solidFill>
+                  <a:srgbClr val="595959"/>
+                </a:solidFill>
+                <a:latin typeface="Helvetica Neue"/>
+              </a:rPr>
+              <a:t>IMPRESSIVE</a:t>
+            </a:r>
+          </a:p>
+        </p:txBody>
+      </p:sp>
+      <p:sp>
+        <p:nvSpPr>
+          <p:cNvPr id="43" name="TextBox 42"/>
+          <p:cNvSpPr txBox="1"/>
+          <p:nvPr/>
+        </p:nvSpPr>
+        <p:spPr>
+          <a:xfrm>
+            <a:off x="7360920" y="3201314"/>
+            <a:ext cx="2148840" cy="850087"/>
+          </a:xfrm>
+          <a:prstGeom prst="rect">
+            <a:avLst/>
+          </a:prstGeom>
+          <a:noFill/>
+        </p:spPr>
+        <p:txBody>
+          <a:bodyPr wrap="square">
+            <a:spAutoFit/>
+          </a:bodyPr>
+          <a:lstStyle/>
+          <a:p>
+            <a:pPr algn="l"/>
+            <a:r>
+              <a:rPr sz="1000" b="0" i="0">
+                <a:solidFill>
+                  <a:srgbClr val="000000"/>
+                </a:solidFill>
+                <a:latin typeface="Helvetica Neue"/>
+              </a:rPr>
+              <a:t>Solid + vision actively used to prioritise and deprioritise work; team can articulate how their work connects to the broader strategy.</a:t>
+            </a:r>
+          </a:p>
+        </p:txBody>
+      </p:sp>
+      <p:sp>
+        <p:nvSpPr>
+          <p:cNvPr id="44" name="Rectangle 43"/>
+          <p:cNvSpPr/>
+          <p:nvPr/>
+        </p:nvSpPr>
+        <p:spPr>
+          <a:xfrm>
+            <a:off x="9619488" y="3000146"/>
+            <a:ext cx="2221992" cy="1078687"/>
+          </a:xfrm>
+          <a:prstGeom prst="rect">
+            <a:avLst/>
+          </a:prstGeom>
+          <a:solidFill>
+            <a:srgbClr val="EEF2EB"/>
+          </a:solidFill>
+          <a:ln>
+            <a:noFill/>
+          </a:ln>
+        </p:spPr>
+        <p:style>
+          <a:lnRef idx="1">
+            <a:schemeClr val="accent1"/>
+          </a:lnRef>
+          <a:fillRef idx="3">
+            <a:schemeClr val="accent1"/>
+          </a:fillRef>
+          <a:effectRef idx="2">
+            <a:schemeClr val="accent1"/>
+          </a:effectRef>
+          <a:fontRef idx="minor">
+            <a:schemeClr val="lt1"/>
+          </a:fontRef>
+        </p:style>
+        <p:txBody>
+          <a:bodyPr rtlCol="0" anchor="ctr"/>
+          <a:lstStyle/>
+          <a:p>
+            <a:pPr algn="ctr"/>
+          </a:p>
+        </p:txBody>
+      </p:sp>
+      <p:sp>
+        <p:nvSpPr>
+          <p:cNvPr id="45" name="TextBox 44"/>
+          <p:cNvSpPr txBox="1"/>
+          <p:nvPr/>
+        </p:nvSpPr>
+        <p:spPr>
+          <a:xfrm>
+            <a:off x="9692640" y="3036722"/>
+            <a:ext cx="2221992" cy="137160"/>
+          </a:xfrm>
+          <a:prstGeom prst="rect">
+            <a:avLst/>
+          </a:prstGeom>
+          <a:noFill/>
+        </p:spPr>
+        <p:txBody>
+          <a:bodyPr wrap="square">
+            <a:spAutoFit/>
+          </a:bodyPr>
+          <a:lstStyle/>
+          <a:p>
+            <a:pPr algn="l"/>
+            <a:r>
+              <a:rPr sz="700" b="1" i="0">
+                <a:solidFill>
+                  <a:srgbClr val="5E6B52"/>
+                </a:solidFill>
+                <a:latin typeface="Helvetica Neue"/>
+              </a:rPr>
+              <a:t>EXCELLENT</a:t>
+            </a:r>
+          </a:p>
+        </p:txBody>
+      </p:sp>
+      <p:sp>
+        <p:nvSpPr>
+          <p:cNvPr id="46" name="TextBox 45"/>
+          <p:cNvSpPr txBox="1"/>
+          <p:nvPr/>
+        </p:nvSpPr>
+        <p:spPr>
+          <a:xfrm>
+            <a:off x="9692640" y="3201314"/>
+            <a:ext cx="2148840" cy="850087"/>
+          </a:xfrm>
+          <a:prstGeom prst="rect">
+            <a:avLst/>
+          </a:prstGeom>
+          <a:noFill/>
+        </p:spPr>
+        <p:txBody>
+          <a:bodyPr wrap="square">
+            <a:spAutoFit/>
+          </a:bodyPr>
+          <a:lstStyle/>
+          <a:p>
+            <a:pPr algn="l"/>
+            <a:r>
+              <a:rPr sz="1000" b="0" i="0">
+                <a:solidFill>
+                  <a:srgbClr val="000000"/>
+                </a:solidFill>
+                <a:latin typeface="Helvetica Neue"/>
+              </a:rPr>
+              <a:t>Impressive + vision recognised and cited by senior leadership as a benchmark for strategic clarity within the technology organisation.</a:t>
+            </a:r>
+          </a:p>
+        </p:txBody>
+      </p:sp>
+      <p:sp>
+        <p:nvSpPr>
+          <p:cNvPr id="47" name="Rectangle 46"/>
+          <p:cNvSpPr/>
+          <p:nvPr/>
+        </p:nvSpPr>
+        <p:spPr>
+          <a:xfrm>
+            <a:off x="0" y="4127347"/>
+            <a:ext cx="12188952" cy="6350"/>
+          </a:xfrm>
+          <a:prstGeom prst="rect">
+            <a:avLst/>
+          </a:prstGeom>
+          <a:solidFill>
+            <a:srgbClr val="CCCCCC"/>
+          </a:solidFill>
+          <a:ln>
+            <a:noFill/>
+          </a:ln>
+        </p:spPr>
+        <p:style>
+          <a:lnRef idx="1">
+            <a:schemeClr val="accent1"/>
+          </a:lnRef>
+          <a:fillRef idx="3">
+            <a:schemeClr val="accent1"/>
+          </a:fillRef>
+          <a:effectRef idx="2">
+            <a:schemeClr val="accent1"/>
+          </a:effectRef>
+          <a:fontRef idx="minor">
+            <a:schemeClr val="lt1"/>
+          </a:fontRef>
+        </p:style>
+        <p:txBody>
+          <a:bodyPr rtlCol="0" anchor="ctr"/>
+          <a:lstStyle/>
+          <a:p>
+            <a:pPr algn="ctr"/>
+          </a:p>
+        </p:txBody>
+      </p:sp>
+      <p:sp>
+        <p:nvSpPr>
+          <p:cNvPr id="48" name="Rectangle 47"/>
+          <p:cNvSpPr/>
+          <p:nvPr/>
+        </p:nvSpPr>
+        <p:spPr>
+          <a:xfrm>
+            <a:off x="0" y="4188561"/>
+            <a:ext cx="12188952" cy="237744"/>
+          </a:xfrm>
+          <a:prstGeom prst="rect">
+            <a:avLst/>
+          </a:prstGeom>
+          <a:solidFill>
+            <a:srgbClr val="000000"/>
+          </a:solidFill>
+          <a:ln>
+            <a:noFill/>
+          </a:ln>
+        </p:spPr>
+        <p:style>
+          <a:lnRef idx="1">
+            <a:schemeClr val="accent1"/>
+          </a:lnRef>
+          <a:fillRef idx="3">
+            <a:schemeClr val="accent1"/>
+          </a:fillRef>
+          <a:effectRef idx="2">
+            <a:schemeClr val="accent1"/>
+          </a:effectRef>
+          <a:fontRef idx="minor">
+            <a:schemeClr val="lt1"/>
+          </a:fontRef>
+        </p:style>
+        <p:txBody>
+          <a:bodyPr rtlCol="0" anchor="ctr"/>
+          <a:lstStyle/>
+          <a:p>
+            <a:pPr algn="ctr"/>
+          </a:p>
+        </p:txBody>
+      </p:sp>
+      <p:sp>
+        <p:nvSpPr>
+          <p:cNvPr id="49" name="TextBox 48"/>
+          <p:cNvSpPr txBox="1"/>
+          <p:nvPr/>
+        </p:nvSpPr>
+        <p:spPr>
+          <a:xfrm>
+            <a:off x="292608" y="4225137"/>
+            <a:ext cx="4608576" cy="201168"/>
+          </a:xfrm>
+          <a:prstGeom prst="rect">
+            <a:avLst/>
+          </a:prstGeom>
+          <a:noFill/>
+        </p:spPr>
+        <p:txBody>
+          <a:bodyPr wrap="square">
+            <a:spAutoFit/>
+          </a:bodyPr>
+          <a:lstStyle/>
+          <a:p>
+            <a:pPr algn="l"/>
+            <a:r>
+              <a:rPr sz="900" b="1" i="0">
+                <a:solidFill>
+                  <a:srgbClr val="FFFFFF"/>
+                </a:solidFill>
+                <a:latin typeface="Helvetica Neue"/>
+              </a:rPr>
+              <a:t>LIVEIT</a:t>
+            </a:r>
+          </a:p>
+        </p:txBody>
+      </p:sp>
+      <p:sp>
+        <p:nvSpPr>
+          <p:cNvPr id="50" name="Rectangle 49"/>
+          <p:cNvSpPr/>
+          <p:nvPr/>
+        </p:nvSpPr>
+        <p:spPr>
+          <a:xfrm>
+            <a:off x="0" y="4426305"/>
+            <a:ext cx="12188952" cy="1188415"/>
+          </a:xfrm>
+          <a:prstGeom prst="rect">
+            <a:avLst/>
+          </a:prstGeom>
+          <a:solidFill>
+            <a:srgbClr val="FFFFFF"/>
+          </a:solidFill>
+          <a:ln>
+            <a:noFill/>
+          </a:ln>
+        </p:spPr>
+        <p:style>
+          <a:lnRef idx="1">
+            <a:schemeClr val="accent1"/>
+          </a:lnRef>
+          <a:fillRef idx="3">
+            <a:schemeClr val="accent1"/>
+          </a:fillRef>
+          <a:effectRef idx="2">
+            <a:schemeClr val="accent1"/>
+          </a:effectRef>
+          <a:fontRef idx="minor">
+            <a:schemeClr val="lt1"/>
+          </a:fontRef>
+        </p:style>
+        <p:txBody>
+          <a:bodyPr rtlCol="0" anchor="ctr"/>
+          <a:lstStyle/>
+          <a:p>
+            <a:pPr algn="ctr"/>
+          </a:p>
+        </p:txBody>
+      </p:sp>
+      <p:sp>
+        <p:nvSpPr>
+          <p:cNvPr id="51" name="TextBox 50"/>
+          <p:cNvSpPr txBox="1"/>
+          <p:nvPr/>
+        </p:nvSpPr>
+        <p:spPr>
+          <a:xfrm>
+            <a:off x="292608" y="4481169"/>
+            <a:ext cx="4562856" cy="164592"/>
+          </a:xfrm>
+          <a:prstGeom prst="rect">
+            <a:avLst/>
+          </a:prstGeom>
+          <a:noFill/>
+        </p:spPr>
+        <p:txBody>
+          <a:bodyPr wrap="square">
+            <a:spAutoFit/>
+          </a:bodyPr>
+          <a:lstStyle/>
+          <a:p>
+            <a:pPr algn="l"/>
+            <a:r>
+              <a:rPr sz="800" b="1" i="0">
+                <a:solidFill>
+                  <a:srgbClr val="000000"/>
+                </a:solidFill>
+                <a:latin typeface="Helvetica Neue"/>
+              </a:rPr>
+              <a:t>Simon learns to swim</a:t>
+            </a:r>
+          </a:p>
+        </p:txBody>
+      </p:sp>
+      <p:sp>
+        <p:nvSpPr>
+          <p:cNvPr id="52" name="TextBox 51"/>
+          <p:cNvSpPr txBox="1"/>
+          <p:nvPr/>
+        </p:nvSpPr>
+        <p:spPr>
+          <a:xfrm>
+            <a:off x="292608" y="4682337"/>
+            <a:ext cx="4562856" cy="877519"/>
+          </a:xfrm>
+          <a:prstGeom prst="rect">
+            <a:avLst/>
+          </a:prstGeom>
+          <a:noFill/>
+        </p:spPr>
+        <p:txBody>
+          <a:bodyPr wrap="square">
+            <a:spAutoFit/>
+          </a:bodyPr>
+          <a:lstStyle/>
+          <a:p>
+            <a:pPr algn="l"/>
+            <a:r>
+              <a:rPr sz="1000" b="0" i="0">
+                <a:solidFill>
+                  <a:srgbClr val="595959"/>
+                </a:solidFill>
+                <a:latin typeface="Helvetica Neue"/>
+              </a:rPr>
+              <a:t>Complete a structured swim program and build enough technique and endurance to swim continuously and confidently.</a:t>
+            </a:r>
+          </a:p>
+        </p:txBody>
+      </p:sp>
+      <p:sp>
+        <p:nvSpPr>
+          <p:cNvPr id="53" name="Rectangle 52"/>
+          <p:cNvSpPr/>
+          <p:nvPr/>
+        </p:nvSpPr>
+        <p:spPr>
+          <a:xfrm>
+            <a:off x="4956048" y="4481169"/>
+            <a:ext cx="2221992" cy="1078687"/>
+          </a:xfrm>
+          <a:prstGeom prst="rect">
+            <a:avLst/>
+          </a:prstGeom>
+          <a:solidFill>
+            <a:srgbClr val="F9F9F6"/>
+          </a:solidFill>
+          <a:ln>
+            <a:noFill/>
+          </a:ln>
+        </p:spPr>
+        <p:style>
+          <a:lnRef idx="1">
+            <a:schemeClr val="accent1"/>
+          </a:lnRef>
+          <a:fillRef idx="3">
+            <a:schemeClr val="accent1"/>
+          </a:fillRef>
+          <a:effectRef idx="2">
+            <a:schemeClr val="accent1"/>
+          </a:effectRef>
+          <a:fontRef idx="minor">
+            <a:schemeClr val="lt1"/>
+          </a:fontRef>
+        </p:style>
+        <p:txBody>
+          <a:bodyPr rtlCol="0" anchor="ctr"/>
+          <a:lstStyle/>
+          <a:p>
+            <a:pPr algn="ctr"/>
+          </a:p>
+        </p:txBody>
+      </p:sp>
+      <p:sp>
+        <p:nvSpPr>
+          <p:cNvPr id="54" name="TextBox 53"/>
+          <p:cNvSpPr txBox="1"/>
+          <p:nvPr/>
+        </p:nvSpPr>
+        <p:spPr>
+          <a:xfrm>
+            <a:off x="5029200" y="4517745"/>
+            <a:ext cx="2221992" cy="137160"/>
+          </a:xfrm>
+          <a:prstGeom prst="rect">
+            <a:avLst/>
+          </a:prstGeom>
+          <a:noFill/>
+        </p:spPr>
+        <p:txBody>
+          <a:bodyPr wrap="square">
+            <a:spAutoFit/>
+          </a:bodyPr>
+          <a:lstStyle/>
+          <a:p>
+            <a:pPr algn="l"/>
+            <a:r>
+              <a:rPr sz="700" b="1" i="0">
+                <a:solidFill>
+                  <a:srgbClr val="595959"/>
+                </a:solidFill>
+                <a:latin typeface="Helvetica Neue"/>
+              </a:rPr>
+              <a:t>SOLID</a:t>
+            </a:r>
+          </a:p>
+        </p:txBody>
+      </p:sp>
+      <p:sp>
+        <p:nvSpPr>
+          <p:cNvPr id="55" name="TextBox 54"/>
+          <p:cNvSpPr txBox="1"/>
+          <p:nvPr/>
+        </p:nvSpPr>
+        <p:spPr>
+          <a:xfrm>
+            <a:off x="5029200" y="4682337"/>
+            <a:ext cx="2148840" cy="850087"/>
+          </a:xfrm>
+          <a:prstGeom prst="rect">
+            <a:avLst/>
+          </a:prstGeom>
+          <a:noFill/>
+        </p:spPr>
+        <p:txBody>
+          <a:bodyPr wrap="square">
+            <a:spAutoFit/>
+          </a:bodyPr>
+          <a:lstStyle/>
+          <a:p>
+            <a:pPr algn="l"/>
+            <a:r>
+              <a:rPr sz="1000" b="0" i="0">
+                <a:solidFill>
+                  <a:srgbClr val="000000"/>
+                </a:solidFill>
+                <a:latin typeface="Helvetica Neue"/>
+              </a:rPr>
+              <a:t>Completes a structured beginner swim program and can swim 25m unassisted.</a:t>
+            </a:r>
+          </a:p>
+        </p:txBody>
+      </p:sp>
+      <p:sp>
+        <p:nvSpPr>
+          <p:cNvPr id="56" name="Rectangle 55"/>
+          <p:cNvSpPr/>
+          <p:nvPr/>
+        </p:nvSpPr>
+        <p:spPr>
+          <a:xfrm>
+            <a:off x="7287768" y="4481169"/>
+            <a:ext cx="2221992" cy="1078687"/>
+          </a:xfrm>
+          <a:prstGeom prst="rect">
+            <a:avLst/>
+          </a:prstGeom>
+          <a:solidFill>
+            <a:srgbClr val="EBEBEB"/>
+          </a:solidFill>
+          <a:ln>
+            <a:noFill/>
+          </a:ln>
+        </p:spPr>
+        <p:style>
+          <a:lnRef idx="1">
+            <a:schemeClr val="accent1"/>
+          </a:lnRef>
+          <a:fillRef idx="3">
+            <a:schemeClr val="accent1"/>
+          </a:fillRef>
+          <a:effectRef idx="2">
+            <a:schemeClr val="accent1"/>
+          </a:effectRef>
+          <a:fontRef idx="minor">
+            <a:schemeClr val="lt1"/>
+          </a:fontRef>
+        </p:style>
+        <p:txBody>
+          <a:bodyPr rtlCol="0" anchor="ctr"/>
+          <a:lstStyle/>
+          <a:p>
+            <a:pPr algn="ctr"/>
+          </a:p>
+        </p:txBody>
+      </p:sp>
+      <p:sp>
+        <p:nvSpPr>
+          <p:cNvPr id="57" name="TextBox 56"/>
+          <p:cNvSpPr txBox="1"/>
+          <p:nvPr/>
+        </p:nvSpPr>
+        <p:spPr>
+          <a:xfrm>
+            <a:off x="7360920" y="4517745"/>
+            <a:ext cx="2221992" cy="137160"/>
+          </a:xfrm>
+          <a:prstGeom prst="rect">
+            <a:avLst/>
+          </a:prstGeom>
+          <a:noFill/>
+        </p:spPr>
+        <p:txBody>
+          <a:bodyPr wrap="square">
+            <a:spAutoFit/>
+          </a:bodyPr>
+          <a:lstStyle/>
+          <a:p>
+            <a:pPr algn="l"/>
+            <a:r>
+              <a:rPr sz="700" b="1" i="0">
+                <a:solidFill>
+                  <a:srgbClr val="595959"/>
+                </a:solidFill>
+                <a:latin typeface="Helvetica Neue"/>
+              </a:rPr>
+              <a:t>IMPRESSIVE</a:t>
+            </a:r>
+          </a:p>
+        </p:txBody>
+      </p:sp>
+      <p:sp>
+        <p:nvSpPr>
+          <p:cNvPr id="58" name="TextBox 57"/>
+          <p:cNvSpPr txBox="1"/>
+          <p:nvPr/>
+        </p:nvSpPr>
+        <p:spPr>
+          <a:xfrm>
+            <a:off x="7360920" y="4682337"/>
+            <a:ext cx="2148840" cy="850087"/>
+          </a:xfrm>
+          <a:prstGeom prst="rect">
+            <a:avLst/>
+          </a:prstGeom>
+          <a:noFill/>
+        </p:spPr>
+        <p:txBody>
+          <a:bodyPr wrap="square">
+            <a:spAutoFit/>
+          </a:bodyPr>
+          <a:lstStyle/>
+          <a:p>
+            <a:pPr algn="l"/>
+            <a:r>
+              <a:rPr sz="1000" b="0" i="0">
+                <a:solidFill>
+                  <a:srgbClr val="000000"/>
+                </a:solidFill>
+                <a:latin typeface="Helvetica Neue"/>
+              </a:rPr>
+              <a:t>Swims 50m continuously with controlled breathing and consistent technique.</a:t>
+            </a:r>
+          </a:p>
+        </p:txBody>
+      </p:sp>
+      <p:sp>
+        <p:nvSpPr>
+          <p:cNvPr id="59" name="Rectangle 58"/>
+          <p:cNvSpPr/>
+          <p:nvPr/>
+        </p:nvSpPr>
+        <p:spPr>
+          <a:xfrm>
+            <a:off x="9619488" y="4481169"/>
+            <a:ext cx="2221992" cy="1078687"/>
+          </a:xfrm>
+          <a:prstGeom prst="rect">
+            <a:avLst/>
+          </a:prstGeom>
+          <a:solidFill>
+            <a:srgbClr val="EEF2EB"/>
+          </a:solidFill>
+          <a:ln>
+            <a:noFill/>
+          </a:ln>
+        </p:spPr>
+        <p:style>
+          <a:lnRef idx="1">
+            <a:schemeClr val="accent1"/>
+          </a:lnRef>
+          <a:fillRef idx="3">
+            <a:schemeClr val="accent1"/>
+          </a:fillRef>
+          <a:effectRef idx="2">
+            <a:schemeClr val="accent1"/>
+          </a:effectRef>
+          <a:fontRef idx="minor">
+            <a:schemeClr val="lt1"/>
+          </a:fontRef>
+        </p:style>
+        <p:txBody>
+          <a:bodyPr rtlCol="0" anchor="ctr"/>
+          <a:lstStyle/>
+          <a:p>
+            <a:pPr algn="ctr"/>
+          </a:p>
+        </p:txBody>
+      </p:sp>
+      <p:sp>
+        <p:nvSpPr>
+          <p:cNvPr id="60" name="TextBox 59"/>
+          <p:cNvSpPr txBox="1"/>
+          <p:nvPr/>
+        </p:nvSpPr>
+        <p:spPr>
+          <a:xfrm>
+            <a:off x="9692640" y="4517745"/>
+            <a:ext cx="2221992" cy="137160"/>
+          </a:xfrm>
+          <a:prstGeom prst="rect">
+            <a:avLst/>
+          </a:prstGeom>
+          <a:noFill/>
+        </p:spPr>
+        <p:txBody>
+          <a:bodyPr wrap="square">
+            <a:spAutoFit/>
+          </a:bodyPr>
+          <a:lstStyle/>
+          <a:p>
+            <a:pPr algn="l"/>
+            <a:r>
+              <a:rPr sz="700" b="1" i="0">
+                <a:solidFill>
+                  <a:srgbClr val="5E6B52"/>
+                </a:solidFill>
+                <a:latin typeface="Helvetica Neue"/>
+              </a:rPr>
+              <a:t>EXCELLENT</a:t>
+            </a:r>
+          </a:p>
+        </p:txBody>
+      </p:sp>
+      <p:sp>
+        <p:nvSpPr>
+          <p:cNvPr id="61" name="TextBox 60"/>
+          <p:cNvSpPr txBox="1"/>
+          <p:nvPr/>
+        </p:nvSpPr>
+        <p:spPr>
+          <a:xfrm>
+            <a:off x="9692640" y="4682337"/>
+            <a:ext cx="2148840" cy="850087"/>
+          </a:xfrm>
+          <a:prstGeom prst="rect">
+            <a:avLst/>
+          </a:prstGeom>
+          <a:noFill/>
+        </p:spPr>
+        <p:txBody>
+          <a:bodyPr wrap="square">
+            <a:spAutoFit/>
+          </a:bodyPr>
+          <a:lstStyle/>
+          <a:p>
+            <a:pPr algn="l"/>
+            <a:r>
+              <a:rPr sz="1000" b="0" i="0">
+                <a:solidFill>
+                  <a:srgbClr val="000000"/>
+                </a:solidFill>
+                <a:latin typeface="Helvetica Neue"/>
+              </a:rPr>
+              <a:t>Completes a 200m continuous swim — enough to never be the liability on a group water activity.</a:t>
+            </a:r>
+          </a:p>
+        </p:txBody>
+      </p:sp>
+      <p:sp>
+        <p:nvSpPr>
+          <p:cNvPr id="62" name="Rectangle 61"/>
+          <p:cNvSpPr/>
+          <p:nvPr/>
+        </p:nvSpPr>
+        <p:spPr>
+          <a:xfrm>
+            <a:off x="0" y="5608370"/>
+            <a:ext cx="12188952" cy="6350"/>
+          </a:xfrm>
+          <a:prstGeom prst="rect">
+            <a:avLst/>
+          </a:prstGeom>
+          <a:solidFill>
+            <a:srgbClr val="CCCCCC"/>
+          </a:solidFill>
+          <a:ln>
+            <a:noFill/>
+          </a:ln>
+        </p:spPr>
+        <p:style>
+          <a:lnRef idx="1">
+            <a:schemeClr val="accent1"/>
+          </a:lnRef>
+          <a:fillRef idx="3">
+            <a:schemeClr val="accent1"/>
+          </a:fillRef>
+          <a:effectRef idx="2">
+            <a:schemeClr val="accent1"/>
+          </a:effectRef>
+          <a:fontRef idx="minor">
+            <a:schemeClr val="lt1"/>
+          </a:fontRef>
+        </p:style>
+        <p:txBody>
+          <a:bodyPr rtlCol="0" anchor="ctr"/>
+          <a:lstStyle/>
+          <a:p>
+            <a:pPr algn="ctr"/>
+          </a:p>
+        </p:txBody>
+      </p:sp>
+      <p:sp>
+        <p:nvSpPr>
+          <p:cNvPr id="63" name="Rectangle 62"/>
+          <p:cNvSpPr/>
+          <p:nvPr/>
+        </p:nvSpPr>
+        <p:spPr>
+          <a:xfrm>
+            <a:off x="0" y="5614720"/>
+            <a:ext cx="12188952" cy="1188415"/>
+          </a:xfrm>
+          <a:prstGeom prst="rect">
+            <a:avLst/>
+          </a:prstGeom>
+          <a:solidFill>
+            <a:srgbClr val="F9F9F6"/>
+          </a:solidFill>
+          <a:ln>
+            <a:noFill/>
+          </a:ln>
+        </p:spPr>
+        <p:style>
+          <a:lnRef idx="1">
+            <a:schemeClr val="accent1"/>
+          </a:lnRef>
+          <a:fillRef idx="3">
+            <a:schemeClr val="accent1"/>
+          </a:fillRef>
+          <a:effectRef idx="2">
+            <a:schemeClr val="accent1"/>
+          </a:effectRef>
+          <a:fontRef idx="minor">
+            <a:schemeClr val="lt1"/>
+          </a:fontRef>
+        </p:style>
+        <p:txBody>
+          <a:bodyPr rtlCol="0" anchor="ctr"/>
+          <a:lstStyle/>
+          <a:p>
+            <a:pPr algn="ctr"/>
+          </a:p>
+        </p:txBody>
+      </p:sp>
+      <p:sp>
+        <p:nvSpPr>
+          <p:cNvPr id="64" name="TextBox 63"/>
+          <p:cNvSpPr txBox="1"/>
+          <p:nvPr/>
+        </p:nvSpPr>
+        <p:spPr>
+          <a:xfrm>
+            <a:off x="292608" y="5669584"/>
+            <a:ext cx="4562856" cy="164592"/>
+          </a:xfrm>
+          <a:prstGeom prst="rect">
+            <a:avLst/>
+          </a:prstGeom>
+          <a:noFill/>
+        </p:spPr>
+        <p:txBody>
+          <a:bodyPr wrap="square">
+            <a:spAutoFit/>
+          </a:bodyPr>
+          <a:lstStyle/>
+          <a:p>
+            <a:pPr algn="l"/>
+            <a:r>
+              <a:rPr sz="800" b="1" i="0">
+                <a:solidFill>
+                  <a:srgbClr val="000000"/>
+                </a:solidFill>
+                <a:latin typeface="Helvetica Neue"/>
+              </a:rPr>
+              <a:t>Claire leads me on a mountain biking event and I lose nothing important to my body</a:t>
+            </a:r>
+          </a:p>
+        </p:txBody>
+      </p:sp>
+      <p:sp>
+        <p:nvSpPr>
+          <p:cNvPr id="65" name="TextBox 64"/>
+          <p:cNvSpPr txBox="1"/>
+          <p:nvPr/>
+        </p:nvSpPr>
+        <p:spPr>
+          <a:xfrm>
+            <a:off x="292608" y="5870752"/>
+            <a:ext cx="4562856" cy="877519"/>
+          </a:xfrm>
+          <a:prstGeom prst="rect">
+            <a:avLst/>
+          </a:prstGeom>
+          <a:noFill/>
+        </p:spPr>
+        <p:txBody>
+          <a:bodyPr wrap="square">
+            <a:spAutoFit/>
+          </a:bodyPr>
+          <a:lstStyle/>
+          <a:p>
+            <a:pPr algn="l"/>
+            <a:r>
+              <a:rPr sz="1000" b="0" i="0">
+                <a:solidFill>
+                  <a:srgbClr val="595959"/>
+                </a:solidFill>
+                <a:latin typeface="Helvetica Neue"/>
+              </a:rPr>
+              <a:t>Participate in a mountain biking event led by Claire and emerge intact, dignified, and possibly enthusiastic.</a:t>
+            </a:r>
+          </a:p>
+        </p:txBody>
+      </p:sp>
+      <p:sp>
+        <p:nvSpPr>
+          <p:cNvPr id="66" name="Rectangle 65"/>
+          <p:cNvSpPr/>
+          <p:nvPr/>
+        </p:nvSpPr>
+        <p:spPr>
+          <a:xfrm>
+            <a:off x="4956048" y="5669584"/>
+            <a:ext cx="2221992" cy="1078687"/>
+          </a:xfrm>
+          <a:prstGeom prst="rect">
+            <a:avLst/>
+          </a:prstGeom>
+          <a:solidFill>
+            <a:srgbClr val="F9F9F6"/>
+          </a:solidFill>
+          <a:ln>
+            <a:noFill/>
+          </a:ln>
+        </p:spPr>
+        <p:style>
+          <a:lnRef idx="1">
+            <a:schemeClr val="accent1"/>
+          </a:lnRef>
+          <a:fillRef idx="3">
+            <a:schemeClr val="accent1"/>
+          </a:fillRef>
+          <a:effectRef idx="2">
+            <a:schemeClr val="accent1"/>
+          </a:effectRef>
+          <a:fontRef idx="minor">
+            <a:schemeClr val="lt1"/>
+          </a:fontRef>
+        </p:style>
+        <p:txBody>
+          <a:bodyPr rtlCol="0" anchor="ctr"/>
+          <a:lstStyle/>
+          <a:p>
+            <a:pPr algn="ctr"/>
+          </a:p>
+        </p:txBody>
+      </p:sp>
+      <p:sp>
+        <p:nvSpPr>
+          <p:cNvPr id="67" name="TextBox 66"/>
+          <p:cNvSpPr txBox="1"/>
+          <p:nvPr/>
+        </p:nvSpPr>
+        <p:spPr>
+          <a:xfrm>
+            <a:off x="5029200" y="5706160"/>
+            <a:ext cx="2221992" cy="137160"/>
+          </a:xfrm>
+          <a:prstGeom prst="rect">
+            <a:avLst/>
+          </a:prstGeom>
+          <a:noFill/>
+        </p:spPr>
+        <p:txBody>
+          <a:bodyPr wrap="square">
+            <a:spAutoFit/>
+          </a:bodyPr>
+          <a:lstStyle/>
+          <a:p>
+            <a:pPr algn="l"/>
+            <a:r>
+              <a:rPr sz="700" b="1" i="0">
+                <a:solidFill>
+                  <a:srgbClr val="595959"/>
+                </a:solidFill>
+                <a:latin typeface="Helvetica Neue"/>
+              </a:rPr>
+              <a:t>SOLID</a:t>
+            </a:r>
+          </a:p>
+        </p:txBody>
+      </p:sp>
+      <p:sp>
+        <p:nvSpPr>
+          <p:cNvPr id="68" name="TextBox 67"/>
+          <p:cNvSpPr txBox="1"/>
+          <p:nvPr/>
+        </p:nvSpPr>
+        <p:spPr>
+          <a:xfrm>
+            <a:off x="5029200" y="5870752"/>
+            <a:ext cx="2148840" cy="850087"/>
+          </a:xfrm>
+          <a:prstGeom prst="rect">
+            <a:avLst/>
+          </a:prstGeom>
+          <a:noFill/>
+        </p:spPr>
+        <p:txBody>
+          <a:bodyPr wrap="square">
+            <a:spAutoFit/>
+          </a:bodyPr>
+          <a:lstStyle/>
+          <a:p>
+            <a:pPr algn="l"/>
+            <a:r>
+              <a:rPr sz="1000" b="0" i="0">
+                <a:solidFill>
+                  <a:srgbClr val="000000"/>
+                </a:solidFill>
+                <a:latin typeface="Helvetica Neue"/>
+              </a:rPr>
+              <a:t>Completes the ride. All limbs accounted for.</a:t>
+            </a:r>
+          </a:p>
+        </p:txBody>
+      </p:sp>
+      <p:sp>
+        <p:nvSpPr>
+          <p:cNvPr id="69" name="Rectangle 68"/>
+          <p:cNvSpPr/>
+          <p:nvPr/>
+        </p:nvSpPr>
+        <p:spPr>
+          <a:xfrm>
+            <a:off x="7287768" y="5669584"/>
+            <a:ext cx="2221992" cy="1078687"/>
+          </a:xfrm>
+          <a:prstGeom prst="rect">
+            <a:avLst/>
+          </a:prstGeom>
+          <a:solidFill>
+            <a:srgbClr val="EBEBEB"/>
+          </a:solidFill>
+          <a:ln>
+            <a:noFill/>
+          </a:ln>
+        </p:spPr>
+        <p:style>
+          <a:lnRef idx="1">
+            <a:schemeClr val="accent1"/>
+          </a:lnRef>
+          <a:fillRef idx="3">
+            <a:schemeClr val="accent1"/>
+          </a:fillRef>
+          <a:effectRef idx="2">
+            <a:schemeClr val="accent1"/>
+          </a:effectRef>
+          <a:fontRef idx="minor">
+            <a:schemeClr val="lt1"/>
+          </a:fontRef>
+        </p:style>
+        <p:txBody>
+          <a:bodyPr rtlCol="0" anchor="ctr"/>
+          <a:lstStyle/>
+          <a:p>
+            <a:pPr algn="ctr"/>
+          </a:p>
+        </p:txBody>
+      </p:sp>
+      <p:sp>
+        <p:nvSpPr>
+          <p:cNvPr id="70" name="TextBox 69"/>
+          <p:cNvSpPr txBox="1"/>
+          <p:nvPr/>
+        </p:nvSpPr>
+        <p:spPr>
+          <a:xfrm>
+            <a:off x="7360920" y="5706160"/>
+            <a:ext cx="2221992" cy="137160"/>
+          </a:xfrm>
+          <a:prstGeom prst="rect">
+            <a:avLst/>
+          </a:prstGeom>
+          <a:noFill/>
+        </p:spPr>
+        <p:txBody>
+          <a:bodyPr wrap="square">
+            <a:spAutoFit/>
+          </a:bodyPr>
+          <a:lstStyle/>
+          <a:p>
+            <a:pPr algn="l"/>
+            <a:r>
+              <a:rPr sz="700" b="1" i="0">
+                <a:solidFill>
+                  <a:srgbClr val="595959"/>
+                </a:solidFill>
+                <a:latin typeface="Helvetica Neue"/>
+              </a:rPr>
+              <a:t>IMPRESSIVE</a:t>
+            </a:r>
+          </a:p>
+        </p:txBody>
+      </p:sp>
+      <p:sp>
+        <p:nvSpPr>
+          <p:cNvPr id="71" name="TextBox 70"/>
+          <p:cNvSpPr txBox="1"/>
+          <p:nvPr/>
+        </p:nvSpPr>
+        <p:spPr>
+          <a:xfrm>
+            <a:off x="7360920" y="5870752"/>
+            <a:ext cx="2148840" cy="850087"/>
+          </a:xfrm>
+          <a:prstGeom prst="rect">
+            <a:avLst/>
+          </a:prstGeom>
+          <a:noFill/>
+        </p:spPr>
+        <p:txBody>
+          <a:bodyPr wrap="square">
+            <a:spAutoFit/>
+          </a:bodyPr>
+          <a:lstStyle/>
+          <a:p>
+            <a:pPr algn="l"/>
+            <a:r>
+              <a:rPr sz="1000" b="0" i="0">
+                <a:solidFill>
+                  <a:srgbClr val="000000"/>
+                </a:solidFill>
+                <a:latin typeface="Helvetica Neue"/>
+              </a:rPr>
+              <a:t>Solid + keeps up with Claire for at least 50% of the trail without stopping to "appreciate the scenery."</a:t>
+            </a:r>
+          </a:p>
+        </p:txBody>
+      </p:sp>
+      <p:sp>
+        <p:nvSpPr>
+          <p:cNvPr id="72" name="Rectangle 71"/>
+          <p:cNvSpPr/>
+          <p:nvPr/>
+        </p:nvSpPr>
+        <p:spPr>
+          <a:xfrm>
+            <a:off x="9619488" y="5669584"/>
+            <a:ext cx="2221992" cy="1078687"/>
+          </a:xfrm>
+          <a:prstGeom prst="rect">
+            <a:avLst/>
+          </a:prstGeom>
+          <a:solidFill>
+            <a:srgbClr val="EEF2EB"/>
+          </a:solidFill>
+          <a:ln>
+            <a:noFill/>
+          </a:ln>
+        </p:spPr>
+        <p:style>
+          <a:lnRef idx="1">
+            <a:schemeClr val="accent1"/>
+          </a:lnRef>
+          <a:fillRef idx="3">
+            <a:schemeClr val="accent1"/>
+          </a:fillRef>
+          <a:effectRef idx="2">
+            <a:schemeClr val="accent1"/>
+          </a:effectRef>
+          <a:fontRef idx="minor">
+            <a:schemeClr val="lt1"/>
+          </a:fontRef>
+        </p:style>
+        <p:txBody>
+          <a:bodyPr rtlCol="0" anchor="ctr"/>
+          <a:lstStyle/>
+          <a:p>
+            <a:pPr algn="ctr"/>
+          </a:p>
+        </p:txBody>
+      </p:sp>
+      <p:sp>
+        <p:nvSpPr>
+          <p:cNvPr id="73" name="TextBox 72"/>
+          <p:cNvSpPr txBox="1"/>
+          <p:nvPr/>
+        </p:nvSpPr>
+        <p:spPr>
+          <a:xfrm>
+            <a:off x="9692640" y="5706160"/>
+            <a:ext cx="2221992" cy="137160"/>
+          </a:xfrm>
+          <a:prstGeom prst="rect">
+            <a:avLst/>
+          </a:prstGeom>
+          <a:noFill/>
+        </p:spPr>
+        <p:txBody>
+          <a:bodyPr wrap="square">
+            <a:spAutoFit/>
+          </a:bodyPr>
+          <a:lstStyle/>
+          <a:p>
+            <a:pPr algn="l"/>
+            <a:r>
+              <a:rPr sz="700" b="1" i="0">
+                <a:solidFill>
+                  <a:srgbClr val="5E6B52"/>
+                </a:solidFill>
+                <a:latin typeface="Helvetica Neue"/>
+              </a:rPr>
+              <a:t>EXCELLENT</a:t>
+            </a:r>
+          </a:p>
+        </p:txBody>
+      </p:sp>
+      <p:sp>
+        <p:nvSpPr>
+          <p:cNvPr id="74" name="TextBox 73"/>
+          <p:cNvSpPr txBox="1"/>
+          <p:nvPr/>
+        </p:nvSpPr>
+        <p:spPr>
+          <a:xfrm>
+            <a:off x="9692640" y="5870752"/>
+            <a:ext cx="2148840" cy="850087"/>
+          </a:xfrm>
+          <a:prstGeom prst="rect">
+            <a:avLst/>
+          </a:prstGeom>
+          <a:noFill/>
+        </p:spPr>
+        <p:txBody>
+          <a:bodyPr wrap="square">
+            <a:spAutoFit/>
+          </a:bodyPr>
+          <a:lstStyle/>
+          <a:p>
+            <a:pPr algn="l"/>
+            <a:r>
+              <a:rPr sz="1000" b="0" i="0">
+                <a:solidFill>
+                  <a:srgbClr val="000000"/>
+                </a:solidFill>
+                <a:latin typeface="Helvetica Neue"/>
+              </a:rPr>
+              <a:t>Impressive + finishes with enough dignity to suggest doing it again.</a:t>
+            </a:r>
+          </a:p>
+        </p:txBody>
+      </p:sp>
+      <p:sp>
+        <p:nvSpPr>
+          <p:cNvPr id="75" name="Rectangle 74"/>
+          <p:cNvSpPr/>
+          <p:nvPr/>
+        </p:nvSpPr>
+        <p:spPr>
+          <a:xfrm>
+            <a:off x="0" y="6796786"/>
             <a:ext cx="12188952" cy="6350"/>
           </a:xfrm>
           <a:prstGeom prst="rect">
